--- a/tmp/presentations/deepaudit-report/output/output.pptx
+++ b/tmp/presentations/deepaudit-report/output/output.pptx
@@ -2,24 +2,24 @@
 <file path=ppt/presentation.xml><?xml version="1.0" encoding="utf-8"?>
 <p:presentation xmlns:p="http://schemas.openxmlformats.org/presentationml/2006/main">
   <p:sldMasterIdLst>
-    <p:sldMasterId xmlns:r="http://schemas.openxmlformats.org/officeDocument/2006/relationships" id="2147483648" r:id="R81d319d8aef444f7"/>
+    <p:sldMasterId xmlns:r="http://schemas.openxmlformats.org/officeDocument/2006/relationships" id="2147483648" r:id="R573adc0ec65c4ea5"/>
   </p:sldMasterIdLst>
   <p:notesMasterIdLst>
-    <p:notesMasterId xmlns:r="http://schemas.openxmlformats.org/officeDocument/2006/relationships" r:id="R46ab4a1aa68f4bd0"/>
+    <p:notesMasterId xmlns:r="http://schemas.openxmlformats.org/officeDocument/2006/relationships" r:id="Rdd60807093fd4fde"/>
   </p:notesMasterIdLst>
   <p:sldIdLst>
-    <p:sldId xmlns:r="http://schemas.openxmlformats.org/officeDocument/2006/relationships" id="256" r:id="R1996023c833f47bc"/>
-    <p:sldId xmlns:r="http://schemas.openxmlformats.org/officeDocument/2006/relationships" id="257" r:id="R09c95bc88d6343fe"/>
-    <p:sldId xmlns:r="http://schemas.openxmlformats.org/officeDocument/2006/relationships" id="258" r:id="R41a2bbe117fc4929"/>
-    <p:sldId xmlns:r="http://schemas.openxmlformats.org/officeDocument/2006/relationships" id="259" r:id="Rc23bf8d3397948df"/>
-    <p:sldId xmlns:r="http://schemas.openxmlformats.org/officeDocument/2006/relationships" id="260" r:id="Rf23ef77592844eea"/>
-    <p:sldId xmlns:r="http://schemas.openxmlformats.org/officeDocument/2006/relationships" id="261" r:id="Ra6bedd960218494e"/>
-    <p:sldId xmlns:r="http://schemas.openxmlformats.org/officeDocument/2006/relationships" id="262" r:id="R3e89a45b7ec644dd"/>
-    <p:sldId xmlns:r="http://schemas.openxmlformats.org/officeDocument/2006/relationships" id="263" r:id="Rab7ce24db44a487d"/>
-    <p:sldId xmlns:r="http://schemas.openxmlformats.org/officeDocument/2006/relationships" id="264" r:id="Rff32bfedad92467a"/>
-    <p:sldId xmlns:r="http://schemas.openxmlformats.org/officeDocument/2006/relationships" id="265" r:id="R4fdbb76a25c144ce"/>
-    <p:sldId xmlns:r="http://schemas.openxmlformats.org/officeDocument/2006/relationships" id="266" r:id="R63bfda5112084c09"/>
-    <p:sldId xmlns:r="http://schemas.openxmlformats.org/officeDocument/2006/relationships" id="267" r:id="R79bb7c89e4d4411d"/>
+    <p:sldId xmlns:r="http://schemas.openxmlformats.org/officeDocument/2006/relationships" id="256" r:id="R226d2194b6fb4d97"/>
+    <p:sldId xmlns:r="http://schemas.openxmlformats.org/officeDocument/2006/relationships" id="257" r:id="Rfe9c97a6d9f24e07"/>
+    <p:sldId xmlns:r="http://schemas.openxmlformats.org/officeDocument/2006/relationships" id="258" r:id="R4844436c945d4ba8"/>
+    <p:sldId xmlns:r="http://schemas.openxmlformats.org/officeDocument/2006/relationships" id="259" r:id="Rc64755a9ee0e4414"/>
+    <p:sldId xmlns:r="http://schemas.openxmlformats.org/officeDocument/2006/relationships" id="260" r:id="Rec34629fc9e4414a"/>
+    <p:sldId xmlns:r="http://schemas.openxmlformats.org/officeDocument/2006/relationships" id="261" r:id="Re85faee80e1e41ac"/>
+    <p:sldId xmlns:r="http://schemas.openxmlformats.org/officeDocument/2006/relationships" id="262" r:id="R1caac9e1890a49d5"/>
+    <p:sldId xmlns:r="http://schemas.openxmlformats.org/officeDocument/2006/relationships" id="263" r:id="R8290dc069ec14de9"/>
+    <p:sldId xmlns:r="http://schemas.openxmlformats.org/officeDocument/2006/relationships" id="264" r:id="Rd42ec99468e64c82"/>
+    <p:sldId xmlns:r="http://schemas.openxmlformats.org/officeDocument/2006/relationships" id="265" r:id="R665712657a994119"/>
+    <p:sldId xmlns:r="http://schemas.openxmlformats.org/officeDocument/2006/relationships" id="266" r:id="Ra330c668e6e74d86"/>
+    <p:sldId xmlns:r="http://schemas.openxmlformats.org/officeDocument/2006/relationships" id="267" r:id="Reee2b4fa469a43ac"/>
   </p:sldIdLst>
   <p:sldSz cx="12192000" cy="6858000"/>
   <p:notesSz cx="6858000" cy="9144000"/>
@@ -502,7 +502,17 @@
           <a:lstStyle xmlns:a="http://schemas.openxmlformats.org/drawingml/2006/main"/>
           <a:p xmlns:a="http://schemas.openxmlformats.org/drawingml/2006/main">
             <a:r>
-              <a:t>今天我汇报 DeepAudit 智能审计平台。先给结论：它已经不是单点扫描，而是从项目接入、分析、验证到报告的完整闭环。后面我按价值、架构、实现和演示四部分展开。</a:t>
+              <a:t>今天我汇报的是 DeepAudit 智能审计平台。先给一个结论：它已经不是单点扫描工具，而是一套把“项目接入、分析、验证、报告交付”串成闭环的审计平台。</a:t>
+            </a:r>
+          </a:p>
+          <a:p xmlns:a="http://schemas.openxmlformats.org/drawingml/2006/main">
+            <a:r>
+              <a:t/>
+            </a:r>
+          </a:p>
+          <a:p xmlns:a="http://schemas.openxmlformats.org/drawingml/2006/main">
+            <a:r>
+              <a:t>今天我会从四个部分展开：为什么要做、现在已经做成了什么、背后的架构和实现方法，以及现场怎么演示。整场汇报我会尽量少讲概念，多讲结果和能力，也会把现场演示和技术实现对应起来，方便大家更直观地看到 DeepAudit 已经具备的完整链路。</a:t>
             </a:r>
           </a:p>
         </p:txBody>
@@ -572,7 +582,27 @@
           <a:lstStyle xmlns:a="http://schemas.openxmlformats.org/drawingml/2006/main"/>
           <a:p xmlns:a="http://schemas.openxmlformats.org/drawingml/2006/main">
             <a:r>
-              <a:t>这一页讲阶段成果和下一步。当前闭环已经跑通，接下来要把知识库、规则覆盖、部署监控和运营指标补齐。</a:t>
+              <a:t>这一页我想传达两个信息。第一，DeepAudit 的主线闭环已经成型，项目接入、智能分析、实时回传和报告交付都已经跑通；第二，现在已经不是“有没有”的问题，而是“怎么持续运营、怎么沉淀价值”的问题。</a:t>
+            </a:r>
+          </a:p>
+          <a:p xmlns:a="http://schemas.openxmlformats.org/drawingml/2006/main">
+            <a:r>
+              <a:t/>
+            </a:r>
+          </a:p>
+          <a:p xmlns:a="http://schemas.openxmlformats.org/drawingml/2006/main">
+            <a:r>
+              <a:t>所以接下来我们的重点会放在四件事上：一是继续补充知识库，把更多真实场景、误报边界和修复建议沉淀进去；二是扩展规则覆盖，让更多语言、框架和项目类型都能更稳定地支持；三是完善部署监控，把 ASGI、Redis、Nginx 和日志告警这些基础设施补齐；四是补真实运营指标。</a:t>
+            </a:r>
+          </a:p>
+          <a:p xmlns:a="http://schemas.openxmlformats.org/drawingml/2006/main">
+            <a:r>
+              <a:t/>
+            </a:r>
+          </a:p>
+          <a:p xmlns:a="http://schemas.openxmlformats.org/drawingml/2006/main">
+            <a:r>
+              <a:t>这页里预留的几个指标位，比如审计任务数、有效发现数、报告导出数、知识库条目数，建议现场前再补真实数据，避免在 PPT 里硬编数字。所以这一页的结论很简单：平台已经跑通，下一步是把能力沉淀成可持续运营的能力。</a:t>
             </a:r>
           </a:p>
         </p:txBody>
@@ -642,7 +672,37 @@
           <a:lstStyle xmlns:a="http://schemas.openxmlformats.org/drawingml/2006/main"/>
           <a:p xmlns:a="http://schemas.openxmlformats.org/drawingml/2006/main">
             <a:r>
-              <a:t>这一页是技术备份，用来回答页面和接口怎么对应，重点看前端路由、后端分域和实时链路文件。</a:t>
+              <a:t>这页主要是给领导和现场问答做技术备份，方便快速对上“页面怎么进、接口怎么挂”。</a:t>
+            </a:r>
+          </a:p>
+          <a:p xmlns:a="http://schemas.openxmlformats.org/drawingml/2006/main">
+            <a:r>
+              <a:t/>
+            </a:r>
+          </a:p>
+          <a:p xmlns:a="http://schemas.openxmlformats.org/drawingml/2006/main">
+            <a:r>
+              <a:t>前端这边，/ 是 Agent 审计工作台，/dashboard 是仪表盘，/projects 是项目管理，/instant-analysis 是即时分析，/audit-tasks 是传统任务，/audit-rules、/prompts、/admin、/recycle-bin 则对应策略治理和回收站。这样做的好处是，页面和业务域是一一对应的，不会混在一起。</a:t>
+            </a:r>
+          </a:p>
+          <a:p xmlns:a="http://schemas.openxmlformats.org/drawingml/2006/main">
+            <a:r>
+              <a:t/>
+            </a:r>
+          </a:p>
+          <a:p xmlns:a="http://schemas.openxmlformats.org/drawingml/2006/main">
+            <a:r>
+              <a:t>后端这边，接口按业务域拆分：项目、成员、扫描、Agent 任务、规则、提示词、配置、RAG、数据工具、看板和报告都各有入口，不是单一大接口。前端实时链路则由 agentStream.ts、useResilientStream.ts 和相关适配层一起支撑，整体通过 SSE 和 WebSocket 回传。</a:t>
+            </a:r>
+          </a:p>
+          <a:p xmlns:a="http://schemas.openxmlformats.org/drawingml/2006/main">
+            <a:r>
+              <a:t/>
+            </a:r>
+          </a:p>
+          <a:p xmlns:a="http://schemas.openxmlformats.org/drawingml/2006/main">
+            <a:r>
+              <a:t>如果现场有人问“为什么要这么拆”，你可以直接回答：因为这样更利于维护、更利于扩展，也更利于把一个大平台拆成清晰的业务边界。</a:t>
             </a:r>
           </a:p>
         </p:txBody>
@@ -712,7 +772,37 @@
           <a:lstStyle xmlns:a="http://schemas.openxmlformats.org/drawingml/2006/main"/>
           <a:p xmlns:a="http://schemas.openxmlformats.org/drawingml/2006/main">
             <a:r>
-              <a:t>这一页是兜底说明，尤其是当实时流不稳定时，如何保住演示主线，以及部署前要先确认哪些基础依赖。</a:t>
+              <a:t>这页是现场兜底说明，主要解决两个问题：如果实时流不稳怎么办，以及正式演示前要先确认哪些基础依赖。</a:t>
+            </a:r>
+          </a:p>
+          <a:p xmlns:a="http://schemas.openxmlformats.org/drawingml/2006/main">
+            <a:r>
+              <a:t/>
+            </a:r>
+          </a:p>
+          <a:p xmlns:a="http://schemas.openxmlformats.org/drawingml/2006/main">
+            <a:r>
+              <a:t>第一，演示时如果 SSE 或 WebSocket 不稳定，我们就先保主线，再切截图兜底。只要“项目接入 + 分析 + 报告”能跑通，主线就成立，实时流是加分项，不是唯一证明方式。第二，部署前要先确认 ASGI、Celery、Redis、Channels、Nginx 这些基础依赖都正常，特别是流式输出不要被代理缓冲。</a:t>
+            </a:r>
+          </a:p>
+          <a:p xmlns:a="http://schemas.openxmlformats.org/drawingml/2006/main">
+            <a:r>
+              <a:t/>
+            </a:r>
+          </a:p>
+          <a:p xmlns:a="http://schemas.openxmlformats.org/drawingml/2006/main">
+            <a:r>
+              <a:t>常见故障可以这么排查：如果页面能打开但不刷新，优先查 SSE、WebSocket、buffering 和 Nginx 配置；如果接口返回 401 或 404，先看 token、baseURL 和 /basic-api/api 是否对齐；如果日志里有任务但 UI 没事件，通常是 Redis、Channels 或 worker 没起来。</a:t>
+            </a:r>
+          </a:p>
+          <a:p xmlns:a="http://schemas.openxmlformats.org/drawingml/2006/main">
+            <a:r>
+              <a:t/>
+            </a:r>
+          </a:p>
+          <a:p xmlns:a="http://schemas.openxmlformats.org/drawingml/2006/main">
+            <a:r>
+              <a:t>所以现场演示的原则很简单：先保主线，再看细节；先看结果，再解释过程。最后就可以进入 Q&amp;A。</a:t>
             </a:r>
           </a:p>
         </p:txBody>
@@ -782,7 +872,17 @@
           <a:lstStyle xmlns:a="http://schemas.openxmlformats.org/drawingml/2006/main"/>
           <a:p xmlns:a="http://schemas.openxmlformats.org/drawingml/2006/main">
             <a:r>
-              <a:t>这一页先讲为什么要做。传统扫描能发现问题，但解释、验证和交付都偏弱，所以我们把目标放在审计工作台，而不是另一个扫描器。</a:t>
+              <a:t>我们之所以做 DeepAudit，核心原因是传统扫描工具虽然能发现问题，但普遍存在三个短板：第一，结果解释弱，很多时候只能告诉你“有问题”，但不能很好地说明“为什么是问题”；第二，验证弱，很多发现停留在静态扫描层面，缺少动态验证和上下文判断；第三，交付弱，结果往往碎片化，难以直接形成标准化报告，也不利于复盘和沉淀。</a:t>
+            </a:r>
+          </a:p>
+          <a:p xmlns:a="http://schemas.openxmlformats.org/drawingml/2006/main">
+            <a:r>
+              <a:t/>
+            </a:r>
+          </a:p>
+          <a:p xmlns:a="http://schemas.openxmlformats.org/drawingml/2006/main">
+            <a:r>
+              <a:t>所以 DeepAudit 的定位不是“再做一个扫描器”，而是把审计升级成一个可运行、可追踪、可复用的工作台。它要解决的不是单次发现，而是把项目接入之后的分析、验证和报告形成一个完整闭环，让审计结果真正能用于汇报、留档和后续治理。换句话说，DeepAudit 的价值不是多扫几个漏洞，而是把安全审计从“工具输出”变成“流程化交付”。</a:t>
             </a:r>
           </a:p>
         </p:txBody>
@@ -852,7 +952,27 @@
           <a:lstStyle xmlns:a="http://schemas.openxmlformats.org/drawingml/2006/main"/>
           <a:p xmlns:a="http://schemas.openxmlformats.org/drawingml/2006/main">
             <a:r>
-              <a:t>这一页汇总现有能力。重点不是页面多少，而是已经把项目接入、审计能力、策略治理和结果交付串成了一条完整链路。</a:t>
+              <a:t>这一页我想重点说明，DeepAudit 现在已经不是一些零散功能点，而是形成了“接入—分析—治理—交付”的完整链路。</a:t>
+            </a:r>
+          </a:p>
+          <a:p xmlns:a="http://schemas.openxmlformats.org/drawingml/2006/main">
+            <a:r>
+              <a:t/>
+            </a:r>
+          </a:p>
+          <a:p xmlns:a="http://schemas.openxmlformats.org/drawingml/2006/main">
+            <a:r>
+              <a:t>在项目接入层面，我们支持仓库、ZIP、分支、成员、回收站等对象，项目的权限和上下文都已经可以统一管理；在审计能力层面，既支持传统扫描，也支持 Agent 审计和即时分析；在策略治理层面，规则集、提示词模板、RAG 知识库和系统配置都已经对象化管理；在结果交付层面，Dashboard、任务详情、PDF 和 JSON 报告也已经串通。</a:t>
+            </a:r>
+          </a:p>
+          <a:p xmlns:a="http://schemas.openxmlformats.org/drawingml/2006/main">
+            <a:r>
+              <a:t/>
+            </a:r>
+          </a:p>
+          <a:p xmlns:a="http://schemas.openxmlformats.org/drawingml/2006/main">
+            <a:r>
+              <a:t>如果把它抽象成对象模型，可以理解为以 AuditProject 作为上下文根对象，下面挂着 AuditTask、AgentTask、AgentFinding、AuditArtifact、Report 这些核心对象。这样做的好处是，项目、任务、策略、知识和报告都围绕同一个主链来组织，既便于追踪，也便于回放和复用。</a:t>
             </a:r>
           </a:p>
         </p:txBody>
@@ -922,7 +1042,27 @@
           <a:lstStyle xmlns:a="http://schemas.openxmlformats.org/drawingml/2006/main"/>
           <a:p xmlns:a="http://schemas.openxmlformats.org/drawingml/2006/main">
             <a:r>
-              <a:t>这一页讲架构。我会重点强调前后端分离、业务域拆分，以及 SSE / WebSocket 为什么必须和 ASGI、Redis、Nginx 一起看。</a:t>
+              <a:t>架构上，DeepAudit 采用的是独立前端加后端聚合服务的方式。前端是单独的 /deepaudit-app/，主要负责交互、展示和实时渲染；后端统一挂在 /api/deepaudit/*，按业务域拆分，不是一个大接口包打天下；长任务则交给 Celery 和 AgentRunner 去执行，实时结果再通过 SSE 和 WebSocket 回传到前端。</a:t>
+            </a:r>
+          </a:p>
+          <a:p xmlns:a="http://schemas.openxmlformats.org/drawingml/2006/main">
+            <a:r>
+              <a:t/>
+            </a:r>
+          </a:p>
+          <a:p xmlns:a="http://schemas.openxmlformats.org/drawingml/2006/main">
+            <a:r>
+              <a:t>这里最关键的不是“接口多不多”，而是“执行”和“回传”被拆开了。这样长任务就不会把页面卡死，前端也能持续看到过程，而不是只能等一个最终结果。整条链路里，ASGI、Redis、Channels 和 Nginx 都不是背景板，而是整个实时链路成立的基础。</a:t>
+            </a:r>
+          </a:p>
+          <a:p xmlns:a="http://schemas.openxmlformats.org/drawingml/2006/main">
+            <a:r>
+              <a:t/>
+            </a:r>
+          </a:p>
+          <a:p xmlns:a="http://schemas.openxmlformats.org/drawingml/2006/main">
+            <a:r>
+              <a:t>从运行方式上看，我们其实是把 DeepAudit 做成了一个可观测的异步系统：用户看到的是界面，系统内部跑的是任务编排、状态传递和事件流推送。这样既能支撑现场演示，也能支撑后续正式部署。</a:t>
             </a:r>
           </a:p>
         </p:txBody>
@@ -992,7 +1132,37 @@
           <a:lstStyle xmlns:a="http://schemas.openxmlformats.org/drawingml/2006/main"/>
           <a:p xmlns:a="http://schemas.openxmlformats.org/drawingml/2006/main">
             <a:r>
-              <a:t>这里详细介绍多智能体架构。核心是 Orchestrator 通过 ReAct 循环进行决策。Recon、Analysis、Verification 各司其职。</a:t>
+              <a:t>这一页讲的是多智能体编排架构。DeepAudit 不是让一个大模型一把梭，而是让 Orchestrator 先做规划，再把任务拆给不同角色的 Agent 去执行。</a:t>
+            </a:r>
+          </a:p>
+          <a:p xmlns:a="http://schemas.openxmlformats.org/drawingml/2006/main">
+            <a:r>
+              <a:t/>
+            </a:r>
+          </a:p>
+          <a:p xmlns:a="http://schemas.openxmlformats.org/drawingml/2006/main">
+            <a:r>
+              <a:t>Orchestrator 的职责是判断当前审计阶段应该先做什么，再决定是走侦察、分析还是验证。它采用的不是静态流程图，而是基于 ReAct 的循环决策：先思考，再调用工具或派发子任务，再根据观察结果继续收敛。这样做的好处是，面对不同项目、不同代码结构、不同风险类型时，系统可以动态调整策略，而不是被固定规则限制住。</a:t>
+            </a:r>
+          </a:p>
+          <a:p xmlns:a="http://schemas.openxmlformats.org/drawingml/2006/main">
+            <a:r>
+              <a:t/>
+            </a:r>
+          </a:p>
+          <a:p xmlns:a="http://schemas.openxmlformats.org/drawingml/2006/main">
+            <a:r>
+              <a:t>下面这三个子 Agent 的分工也很清晰：Recon 负责识别项目结构、技术栈和高危入口；Analysis 负责结合工具和上下文做深层漏洞挖掘；Verification 负责减少误报，并在必要时做更进一步的验证。它们之间不是并列摆设，而是通过 TaskHandoff 协议传递上下文、证据和高优先级区域。</a:t>
+            </a:r>
+          </a:p>
+          <a:p xmlns:a="http://schemas.openxmlformats.org/drawingml/2006/main">
+            <a:r>
+              <a:t/>
+            </a:r>
+          </a:p>
+          <a:p xmlns:a="http://schemas.openxmlformats.org/drawingml/2006/main">
+            <a:r>
+              <a:t>所以这一页的核心信息是：DeepAudit 的智能不是“一个模型说了算”，而是“编排、分工、交接、验证”共同形成的。</a:t>
             </a:r>
           </a:p>
         </p:txBody>
@@ -1062,7 +1232,37 @@
           <a:lstStyle xmlns:a="http://schemas.openxmlformats.org/drawingml/2006/main"/>
           <a:p xmlns:a="http://schemas.openxmlformats.org/drawingml/2006/main">
             <a:r>
-              <a:t>这一页讲实现方法。核心思路是工具先行、模型编排、检查点恢复、事件流回传，说明 DeepAudit 不是只给一个最终结论。</a:t>
+              <a:t>实现方法上，DeepAudit 的核心思路可以概括成一句话：先工具、再推理；先收敛、再验证；先回传、再报告。</a:t>
+            </a:r>
+          </a:p>
+          <a:p xmlns:a="http://schemas.openxmlformats.org/drawingml/2006/main">
+            <a:r>
+              <a:t/>
+            </a:r>
+          </a:p>
+          <a:p xmlns:a="http://schemas.openxmlformats.org/drawingml/2006/main">
+            <a:r>
+              <a:t>在任务入口层，我们把项目任务、传统扫描任务和 Agent 审计任务分成不同的服务域来处理，避免一套逻辑覆盖所有场景。工作区准备阶段会统一处理 workspace、git worktree、ZIP、SSH 和目录清理，这样不管是仓库、压缩包还是远程访问，都能进入同一条分析链。</a:t>
+            </a:r>
+          </a:p>
+          <a:p xmlns:a="http://schemas.openxmlformats.org/drawingml/2006/main">
+            <a:r>
+              <a:t/>
+            </a:r>
+          </a:p>
+          <a:p xmlns:a="http://schemas.openxmlformats.org/drawingml/2006/main">
+            <a:r>
+              <a:t>在编排层，Orchestrator 负责先决定审计范围，再调度 recon、analysis、verification、reporting 这些阶段。这里不是一上来就让模型直接下结论，而是先让工具跑起来，再让模型做语义收敛和解释。像 Semgrep、Bandit、Gitleaks、OSV-Scanner 这些外部工具，会先帮我们把事实面的问题筛出来；随后模型再结合上下文做归因、解释和建议。</a:t>
+            </a:r>
+          </a:p>
+          <a:p xmlns:a="http://schemas.openxmlformats.org/drawingml/2006/main">
+            <a:r>
+              <a:t/>
+            </a:r>
+          </a:p>
+          <a:p xmlns:a="http://schemas.openxmlformats.org/drawingml/2006/main">
+            <a:r>
+              <a:t>在实时层，我们把 thinking、tool_call、finding、checkpoint 这些中间状态都持续回传出来，前端也支持断点续传和重连。这样一来，DeepAudit 展示给领导的不是一个静态终稿，而是一个过程可见、结果可复核、任务可恢复的审计系统。</a:t>
             </a:r>
           </a:p>
         </p:txBody>
@@ -1132,7 +1332,37 @@
           <a:lstStyle xmlns:a="http://schemas.openxmlformats.org/drawingml/2006/main"/>
           <a:p xmlns:a="http://schemas.openxmlformats.org/drawingml/2006/main">
             <a:r>
-              <a:t>这一页补充工具链和沙箱。AST 提供精准的上下文，外部工具提供覆盖面，而沙箱让我们能运行 PoC 确认漏洞，这是区别于传统 SAST 的关键。</a:t>
+              <a:t>这一页继续讲工具链和沙箱验证。DeepAudit 的思路不是只依赖模型，而是先把专业工具链接进来，用工具负责事实面的覆盖，再由模型负责解释和收敛。</a:t>
+            </a:r>
+          </a:p>
+          <a:p xmlns:a="http://schemas.openxmlformats.org/drawingml/2006/main">
+            <a:r>
+              <a:t/>
+            </a:r>
+          </a:p>
+          <a:p xmlns:a="http://schemas.openxmlformats.org/drawingml/2006/main">
+            <a:r>
+              <a:t>工具层里，像 Semgrep、Bandit、Gitleaks、OSV-Scanner 这些外部工具先承担广覆盖扫描；同时我们也保留 AST 和代码语义能力，帮助模型更准确地理解函数、类、调用链和数据流。这样做的好处是，模型不会只看到文本片段，而是能拿到更完整的上下文。</a:t>
+            </a:r>
+          </a:p>
+          <a:p xmlns:a="http://schemas.openxmlformats.org/drawingml/2006/main">
+            <a:r>
+              <a:t/>
+            </a:r>
+          </a:p>
+          <a:p xmlns:a="http://schemas.openxmlformats.org/drawingml/2006/main">
+            <a:r>
+              <a:t>更关键的是验证层。对于有条件进一步确认的漏洞，DeepAudit 会把上下文交给沙箱环境，自动生成 PoC 或验证逻辑，再在隔离环境中执行。这样就能把“疑似问题”往“可利用问题”推进，减少传统静态扫描里最常见的误报和歧义。</a:t>
+            </a:r>
+          </a:p>
+          <a:p xmlns:a="http://schemas.openxmlformats.org/drawingml/2006/main">
+            <a:r>
+              <a:t/>
+            </a:r>
+          </a:p>
+          <a:p xmlns:a="http://schemas.openxmlformats.org/drawingml/2006/main">
+            <a:r>
+              <a:t>所以这一页想强调的是：DeepAudit 不是只会发现问题，而是尽量把问题确认到可解释、可验证的程度。</a:t>
             </a:r>
           </a:p>
         </p:txBody>
@@ -1202,7 +1432,37 @@
           <a:lstStyle xmlns:a="http://schemas.openxmlformats.org/drawingml/2006/main"/>
           <a:p xmlns:a="http://schemas.openxmlformats.org/drawingml/2006/main">
             <a:r>
-              <a:t>这一页讲知识库和模型配置。重点是把通用知识、项目知识和用户级模型配置拆开，确保经验能沉淀、模型能管控。</a:t>
+              <a:t>这一页的重点是：我们把“经验”和“事实”分开管理了。</a:t>
+            </a:r>
+          </a:p>
+          <a:p xmlns:a="http://schemas.openxmlformats.org/drawingml/2006/main">
+            <a:r>
+              <a:t/>
+            </a:r>
+          </a:p>
+          <a:p xmlns:a="http://schemas.openxmlformats.org/drawingml/2006/main">
+            <a:r>
+              <a:t>通用漏洞知识、项目专项知识和项目代码 RAG 三层分别承担不同职责。共享基线知识负责通用漏洞模式和长期稳定规则；项目专项知识负责团队经验、误报边界和内部规范；项目 RAG 则负责把当前仓库里的事实找出来，也就是“这个项目现在到底有什么”。这样设计之后，DeepAudit 就不会把知识、规则和项目上下文混在一起，减少经验散落和重复维护。</a:t>
+            </a:r>
+          </a:p>
+          <a:p xmlns:a="http://schemas.openxmlformats.org/drawingml/2006/main">
+            <a:r>
+              <a:t/>
+            </a:r>
+          </a:p>
+          <a:p xmlns:a="http://schemas.openxmlformats.org/drawingml/2006/main">
+            <a:r>
+              <a:t>在配置上，LLM 和 Embedding 都可以通过内网网关访问，LLM_BASE_URL 和 EMBEDDING_BASE_URL 都可以指向受控地址，避免生产流量直接出网；首 token 超时和流式超时也都有独立控制；tiktoken 还能走本地缓存，保证离线或内网环境也能稳定运行。同时，用户级配置还能覆盖系统默认值，这样不同团队、不同模型策略都能按自己的方式接入。</a:t>
+            </a:r>
+          </a:p>
+          <a:p xmlns:a="http://schemas.openxmlformats.org/drawingml/2006/main">
+            <a:r>
+              <a:t/>
+            </a:r>
+          </a:p>
+          <a:p xmlns:a="http://schemas.openxmlformats.org/drawingml/2006/main">
+            <a:r>
+              <a:t>所以这部分的本质是：知识库负责经验，RAG 负责事实，模型配置负责边界。三者一起，DeepAudit 才能稳定地做出可解释、可控的审计结果。</a:t>
             </a:r>
           </a:p>
         </p:txBody>
@@ -1272,7 +1532,27 @@
           <a:lstStyle xmlns:a="http://schemas.openxmlformats.org/drawingml/2006/main"/>
           <a:p xmlns:a="http://schemas.openxmlformats.org/drawingml/2006/main">
             <a:r>
-              <a:t>这一页是现场演示节奏说明。按 Dashboard、项目、Agent、报告页的顺序走，让领导先看到闭环，再看过程。</a:t>
+              <a:t>这一页我建议按固定顺序演示，这样领导能先看到结果，再看到过程。</a:t>
+            </a:r>
+          </a:p>
+          <a:p xmlns:a="http://schemas.openxmlformats.org/drawingml/2006/main">
+            <a:r>
+              <a:t/>
+            </a:r>
+          </a:p>
+          <a:p xmlns:a="http://schemas.openxmlformats.org/drawingml/2006/main">
+            <a:r>
+              <a:t>第一步先看 Dashboard，让大家先建立整体印象：总览、最近项目、任务数量、规则和模板统计都能一眼看到。第二步进入项目管理，看看仓库、ZIP、分支、成员和项目详情，确认项目接入本身是完整的。第三步打开一个 Agent 审计任务，重点看实时事件流、任务树、Finding 和 Checkpoint，让大家看到它不是一次性出结果，而是边分析边回传。第四步打开报告页，展示问题定位、修复建议，以及 PDF / JSON 的导出。</a:t>
+            </a:r>
+          </a:p>
+          <a:p xmlns:a="http://schemas.openxmlformats.org/drawingml/2006/main">
+            <a:r>
+              <a:t/>
+            </a:r>
+          </a:p>
+          <a:p xmlns:a="http://schemas.openxmlformats.org/drawingml/2006/main">
+            <a:r>
+              <a:t>如果现场实时流比较稳定，就尽量让大家看到完整过程；如果实时流临时不稳定，也不要硬撑，直接切到报告页或截图兜底，因为今天要证明的不是某个按钮，而是“项目接入 + 分析 + 报告”这条主线已经跑通。演示时我会特别强调：DeepAudit 的价值不是把页面点一遍，而是把一个项目从接入到交付的闭环完整跑出来。</a:t>
             </a:r>
           </a:p>
         </p:txBody>
@@ -1340,7 +1620,7 @@
   </p:cSld>
   <p:clrMap bg1="lt1" tx1="dk1" bg2="lt2" tx2="dk2" accent1="accent1" accent2="accent2" accent3="accent3" accent4="accent4" accent5="accent5" accent6="accent6" hlink="hlink" folHlink="folHlink"/>
   <p:sldLayoutIdLst>
-    <p:sldLayoutId xmlns:r="http://schemas.openxmlformats.org/officeDocument/2006/relationships" id="2147483649" r:id="R9d67b42edaf3453b"/>
+    <p:sldLayoutId xmlns:r="http://schemas.openxmlformats.org/officeDocument/2006/relationships" id="2147483649" r:id="R6fe9f90ee4514faa"/>
   </p:sldLayoutIdLst>
   <p:txStyles>
     <p:titleStyle>
@@ -1650,7 +1930,7 @@
           <p:nvPr/>
         </p:nvPicPr>
         <p:blipFill>
-          <a:blip xmlns:r="http://schemas.openxmlformats.org/officeDocument/2006/relationships" xmlns:a="http://schemas.openxmlformats.org/drawingml/2006/main" r:embed="Raefba41cdec7499c"/>
+          <a:blip xmlns:r="http://schemas.openxmlformats.org/officeDocument/2006/relationships" xmlns:a="http://schemas.openxmlformats.org/drawingml/2006/main" r:embed="R544ed94cc238454d"/>
           <a:srcRect xmlns:a="http://schemas.openxmlformats.org/drawingml/2006/main" l="1914" t="0" r="1914" b="0"/>
           <a:stretch xmlns:a="http://schemas.openxmlformats.org/drawingml/2006/main">
             <a:fillRect l="0" t="0" r="0" b="0"/>
@@ -1671,7 +1951,7 @@
           <p:cNvPr id="2" name="cover-scrim">
             <a:extLst xmlns:a="http://schemas.openxmlformats.org/drawingml/2006/main">
               <a:ext uri="{FF2B5EF4-FFF2-40B4-BE49-F238E27FC236}">
-                <a16:creationId xmlns:a16="http://schemas.microsoft.com/office/drawing/2014/main" id="{2CB3E024-6FD0-457F-A04D-F1ACF30044E7}"/>
+                <a16:creationId xmlns:a16="http://schemas.microsoft.com/office/drawing/2014/main" id="{14E1E787-F814-44D9-9B60-1117098BC075}"/>
               </a:ext>
             </a:extLst>
           </p:cNvPr>
@@ -1704,7 +1984,7 @@
           <p:cNvPr id="3" name="cover-glow">
             <a:extLst xmlns:a="http://schemas.openxmlformats.org/drawingml/2006/main">
               <a:ext uri="{FF2B5EF4-FFF2-40B4-BE49-F238E27FC236}">
-                <a16:creationId xmlns:a16="http://schemas.microsoft.com/office/drawing/2014/main" id="{785894AA-708A-4F8B-B341-3075C2DD04AA}"/>
+                <a16:creationId xmlns:a16="http://schemas.microsoft.com/office/drawing/2014/main" id="{7C9D567D-38A9-4557-858B-DCAAFF456BB9}"/>
               </a:ext>
             </a:extLst>
           </p:cNvPr>
@@ -1737,7 +2017,7 @@
           <p:cNvPr id="4" name="cover-lead">
             <a:extLst xmlns:a="http://schemas.openxmlformats.org/drawingml/2006/main">
               <a:ext uri="{FF2B5EF4-FFF2-40B4-BE49-F238E27FC236}">
-                <a16:creationId xmlns:a16="http://schemas.microsoft.com/office/drawing/2014/main" id="{101F00DB-8F0F-48E4-837A-C42D10CFD252}"/>
+                <a16:creationId xmlns:a16="http://schemas.microsoft.com/office/drawing/2014/main" id="{3A16523F-FC06-4E79-AE9F-83FDC9C3092F}"/>
               </a:ext>
             </a:extLst>
           </p:cNvPr>
@@ -1749,7 +2029,7 @@
         <p:spPr>
           <a:xfrm xmlns:a="http://schemas.openxmlformats.org/drawingml/2006/main">
             <a:off x="0" y="0"/>
-            <a:ext cx="1464850" cy="182880"/>
+            <a:ext cx="1483900" cy="182880"/>
           </a:xfrm>
           <a:prstGeom xmlns:a="http://schemas.openxmlformats.org/drawingml/2006/main" prst="rect">
             <a:avLst/>
@@ -1788,7 +2068,7 @@
           <p:cNvPr id="5" name="cover-title-a">
             <a:extLst xmlns:a="http://schemas.openxmlformats.org/drawingml/2006/main">
               <a:ext uri="{FF2B5EF4-FFF2-40B4-BE49-F238E27FC236}">
-                <a16:creationId xmlns:a16="http://schemas.microsoft.com/office/drawing/2014/main" id="{8758D3A1-853E-4B3B-8548-7D883A07258A}"/>
+                <a16:creationId xmlns:a16="http://schemas.microsoft.com/office/drawing/2014/main" id="{4A9F8521-5999-45B3-BAEB-D788D2F1D68C}"/>
               </a:ext>
             </a:extLst>
           </p:cNvPr>
@@ -1839,7 +2119,7 @@
           <p:cNvPr id="6" name="cover-title-b">
             <a:extLst xmlns:a="http://schemas.openxmlformats.org/drawingml/2006/main">
               <a:ext uri="{FF2B5EF4-FFF2-40B4-BE49-F238E27FC236}">
-                <a16:creationId xmlns:a16="http://schemas.microsoft.com/office/drawing/2014/main" id="{76D45976-915B-48AE-BA39-EA5C6D7D830C}"/>
+                <a16:creationId xmlns:a16="http://schemas.microsoft.com/office/drawing/2014/main" id="{2BF74EF2-21AF-4998-959F-607B3961DE19}"/>
               </a:ext>
             </a:extLst>
           </p:cNvPr>
@@ -1851,7 +2131,7 @@
         <p:spPr>
           <a:xfrm xmlns:a="http://schemas.openxmlformats.org/drawingml/2006/main">
             <a:off x="0" y="1280160"/>
-            <a:ext cx="3086100" cy="617220"/>
+            <a:ext cx="3150679" cy="617220"/>
           </a:xfrm>
           <a:prstGeom xmlns:a="http://schemas.openxmlformats.org/drawingml/2006/main" prst="rect">
             <a:avLst/>
@@ -1890,7 +2170,7 @@
           <p:cNvPr id="7" name="cover-subtitle">
             <a:extLst xmlns:a="http://schemas.openxmlformats.org/drawingml/2006/main">
               <a:ext uri="{FF2B5EF4-FFF2-40B4-BE49-F238E27FC236}">
-                <a16:creationId xmlns:a16="http://schemas.microsoft.com/office/drawing/2014/main" id="{FCE72D9E-F7B5-4F91-ADD6-6690D633B1CD}"/>
+                <a16:creationId xmlns:a16="http://schemas.microsoft.com/office/drawing/2014/main" id="{56B99EA0-4931-411C-AE26-AC98BEF9013A}"/>
               </a:ext>
             </a:extLst>
           </p:cNvPr>
@@ -1941,7 +2221,7 @@
           <p:cNvPr id="8" name="heading-underline">
             <a:extLst xmlns:a="http://schemas.openxmlformats.org/drawingml/2006/main">
               <a:ext uri="{FF2B5EF4-FFF2-40B4-BE49-F238E27FC236}">
-                <a16:creationId xmlns:a16="http://schemas.microsoft.com/office/drawing/2014/main" id="{C598E643-9DA0-43AC-9363-CAD2ABC7D8E5}"/>
+                <a16:creationId xmlns:a16="http://schemas.microsoft.com/office/drawing/2014/main" id="{34A34F95-1D11-489C-BF34-4517BD37EA56}"/>
               </a:ext>
             </a:extLst>
           </p:cNvPr>
@@ -1978,7 +2258,7 @@
           <p:cNvPr id="9" name="chip-项目演示">
             <a:extLst xmlns:a="http://schemas.openxmlformats.org/drawingml/2006/main">
               <a:ext uri="{FF2B5EF4-FFF2-40B4-BE49-F238E27FC236}">
-                <a16:creationId xmlns:a16="http://schemas.microsoft.com/office/drawing/2014/main" id="{233A6541-1A52-4307-8B5E-BEA4D6160A2D}"/>
+                <a16:creationId xmlns:a16="http://schemas.microsoft.com/office/drawing/2014/main" id="{DC4E52A6-38F1-498B-839C-60CA5D3CC02B}"/>
               </a:ext>
             </a:extLst>
           </p:cNvPr>
@@ -2015,19 +2295,19 @@
           <p:cNvPr id="10" name="chip-text-项目演示">
             <a:extLst xmlns:a="http://schemas.openxmlformats.org/drawingml/2006/main">
               <a:ext uri="{FF2B5EF4-FFF2-40B4-BE49-F238E27FC236}">
-                <a16:creationId xmlns:a16="http://schemas.microsoft.com/office/drawing/2014/main" id="{D5C93C12-6A8A-4A73-BD11-4E568D2AA829}"/>
-              </a:ext>
-            </a:extLst>
-          </p:cNvPr>
-          <p:cNvSpPr>
-            <a:spLocks xmlns:a="http://schemas.openxmlformats.org/drawingml/2006/main" noGrp="1"/>
-          </p:cNvSpPr>
-          <p:nvPr/>
-        </p:nvSpPr>
-        <p:spPr>
-          <a:xfrm xmlns:a="http://schemas.openxmlformats.org/drawingml/2006/main">
-            <a:off x="431800" y="2933700"/>
-            <a:ext cx="533400" cy="160020"/>
+                <a16:creationId xmlns:a16="http://schemas.microsoft.com/office/drawing/2014/main" id="{82F3D6BF-76B3-4961-9264-298F0615BD80}"/>
+              </a:ext>
+            </a:extLst>
+          </p:cNvPr>
+          <p:cNvSpPr>
+            <a:spLocks xmlns:a="http://schemas.openxmlformats.org/drawingml/2006/main" noGrp="1"/>
+          </p:cNvSpPr>
+          <p:nvPr/>
+        </p:nvSpPr>
+        <p:spPr>
+          <a:xfrm xmlns:a="http://schemas.openxmlformats.org/drawingml/2006/main">
+            <a:off x="426133" y="2933700"/>
+            <a:ext cx="544735" cy="160020"/>
           </a:xfrm>
           <a:prstGeom xmlns:a="http://schemas.openxmlformats.org/drawingml/2006/main" prst="rect">
             <a:avLst/>
@@ -2066,7 +2346,7 @@
           <p:cNvPr id="11" name="chip-架构设计">
             <a:extLst xmlns:a="http://schemas.openxmlformats.org/drawingml/2006/main">
               <a:ext uri="{FF2B5EF4-FFF2-40B4-BE49-F238E27FC236}">
-                <a16:creationId xmlns:a16="http://schemas.microsoft.com/office/drawing/2014/main" id="{94B7CA1D-9813-41DD-9AA2-E27D8CCBE609}"/>
+                <a16:creationId xmlns:a16="http://schemas.microsoft.com/office/drawing/2014/main" id="{13E0D8B6-DF65-401B-8FBC-99CDBB5D97E8}"/>
               </a:ext>
             </a:extLst>
           </p:cNvPr>
@@ -2103,19 +2383,19 @@
           <p:cNvPr id="12" name="chip-text-架构设计">
             <a:extLst xmlns:a="http://schemas.openxmlformats.org/drawingml/2006/main">
               <a:ext uri="{FF2B5EF4-FFF2-40B4-BE49-F238E27FC236}">
-                <a16:creationId xmlns:a16="http://schemas.microsoft.com/office/drawing/2014/main" id="{6BFF4716-2CED-4AE5-ABBE-EEE36E28D4C2}"/>
-              </a:ext>
-            </a:extLst>
-          </p:cNvPr>
-          <p:cNvSpPr>
-            <a:spLocks xmlns:a="http://schemas.openxmlformats.org/drawingml/2006/main" noGrp="1"/>
-          </p:cNvSpPr>
-          <p:nvPr/>
-        </p:nvSpPr>
-        <p:spPr>
-          <a:xfrm xmlns:a="http://schemas.openxmlformats.org/drawingml/2006/main">
-            <a:off x="1924050" y="2933700"/>
-            <a:ext cx="533400" cy="160020"/>
+                <a16:creationId xmlns:a16="http://schemas.microsoft.com/office/drawing/2014/main" id="{84E5142F-41A1-4510-AB2F-9654176237FA}"/>
+              </a:ext>
+            </a:extLst>
+          </p:cNvPr>
+          <p:cNvSpPr>
+            <a:spLocks xmlns:a="http://schemas.openxmlformats.org/drawingml/2006/main" noGrp="1"/>
+          </p:cNvSpPr>
+          <p:nvPr/>
+        </p:nvSpPr>
+        <p:spPr>
+          <a:xfrm xmlns:a="http://schemas.openxmlformats.org/drawingml/2006/main">
+            <a:off x="1918383" y="2933700"/>
+            <a:ext cx="544735" cy="160020"/>
           </a:xfrm>
           <a:prstGeom xmlns:a="http://schemas.openxmlformats.org/drawingml/2006/main" prst="rect">
             <a:avLst/>
@@ -2154,7 +2434,7 @@
           <p:cNvPr id="13" name="chip-实现方法">
             <a:extLst xmlns:a="http://schemas.openxmlformats.org/drawingml/2006/main">
               <a:ext uri="{FF2B5EF4-FFF2-40B4-BE49-F238E27FC236}">
-                <a16:creationId xmlns:a16="http://schemas.microsoft.com/office/drawing/2014/main" id="{7AF53F9E-71F5-4E5A-9FC3-E73EB53027D4}"/>
+                <a16:creationId xmlns:a16="http://schemas.microsoft.com/office/drawing/2014/main" id="{BDEDF770-2ACF-40E8-BB42-AAB96E356454}"/>
               </a:ext>
             </a:extLst>
           </p:cNvPr>
@@ -2191,19 +2471,19 @@
           <p:cNvPr id="14" name="chip-text-实现方法">
             <a:extLst xmlns:a="http://schemas.openxmlformats.org/drawingml/2006/main">
               <a:ext uri="{FF2B5EF4-FFF2-40B4-BE49-F238E27FC236}">
-                <a16:creationId xmlns:a16="http://schemas.microsoft.com/office/drawing/2014/main" id="{16AF11A0-213A-4A2D-87ED-4710011A1071}"/>
-              </a:ext>
-            </a:extLst>
-          </p:cNvPr>
-          <p:cNvSpPr>
-            <a:spLocks xmlns:a="http://schemas.openxmlformats.org/drawingml/2006/main" noGrp="1"/>
-          </p:cNvSpPr>
-          <p:nvPr/>
-        </p:nvSpPr>
-        <p:spPr>
-          <a:xfrm xmlns:a="http://schemas.openxmlformats.org/drawingml/2006/main">
-            <a:off x="3416300" y="2933700"/>
-            <a:ext cx="533400" cy="160020"/>
+                <a16:creationId xmlns:a16="http://schemas.microsoft.com/office/drawing/2014/main" id="{EBD45FED-DB95-4D47-88A7-680B4FA29268}"/>
+              </a:ext>
+            </a:extLst>
+          </p:cNvPr>
+          <p:cNvSpPr>
+            <a:spLocks xmlns:a="http://schemas.openxmlformats.org/drawingml/2006/main" noGrp="1"/>
+          </p:cNvSpPr>
+          <p:nvPr/>
+        </p:nvSpPr>
+        <p:spPr>
+          <a:xfrm xmlns:a="http://schemas.openxmlformats.org/drawingml/2006/main">
+            <a:off x="3410633" y="2933700"/>
+            <a:ext cx="544735" cy="160020"/>
           </a:xfrm>
           <a:prstGeom xmlns:a="http://schemas.openxmlformats.org/drawingml/2006/main" prst="rect">
             <a:avLst/>
@@ -2242,7 +2522,7 @@
           <p:cNvPr id="15" name="cover-meta">
             <a:extLst xmlns:a="http://schemas.openxmlformats.org/drawingml/2006/main">
               <a:ext uri="{FF2B5EF4-FFF2-40B4-BE49-F238E27FC236}">
-                <a16:creationId xmlns:a16="http://schemas.microsoft.com/office/drawing/2014/main" id="{8D64D074-E4E3-4D84-B168-8A2FC7DFB463}"/>
+                <a16:creationId xmlns:a16="http://schemas.microsoft.com/office/drawing/2014/main" id="{34BD525D-6446-4E61-90E2-BF5778048B32}"/>
               </a:ext>
             </a:extLst>
           </p:cNvPr>
@@ -2254,7 +2534,7 @@
         <p:spPr>
           <a:xfrm xmlns:a="http://schemas.openxmlformats.org/drawingml/2006/main">
             <a:off x="0" y="3265170"/>
-            <a:ext cx="2373439" cy="171450"/>
+            <a:ext cx="2411920" cy="171450"/>
           </a:xfrm>
           <a:prstGeom xmlns:a="http://schemas.openxmlformats.org/drawingml/2006/main" prst="rect">
             <a:avLst/>
@@ -2291,7 +2571,7 @@
     </p:spTree>
     <p:extLst>
       <p:ext uri="{BB962C8B-B14F-4D97-AF65-F5344CB8AC3E}">
-        <p14:creationId xmlns:p14="http://schemas.microsoft.com/office/powerpoint/2010/main" val="913426548"/>
+        <p14:creationId xmlns:p14="http://schemas.microsoft.com/office/powerpoint/2010/main" val="702764017"/>
       </p:ext>
     </p:extLst>
   </p:cSld>
@@ -2322,7 +2602,7 @@
           <p:cNvPr id="1" name="header-kicker-阶段成果与下一步">
             <a:extLst xmlns:a="http://schemas.openxmlformats.org/drawingml/2006/main">
               <a:ext uri="{FF2B5EF4-FFF2-40B4-BE49-F238E27FC236}">
-                <a16:creationId xmlns:a16="http://schemas.microsoft.com/office/drawing/2014/main" id="{1FB75862-54F8-4831-B70E-13503A574DED}"/>
+                <a16:creationId xmlns:a16="http://schemas.microsoft.com/office/drawing/2014/main" id="{CF2BB652-D3FB-4EC9-938F-1F90A742BE42}"/>
               </a:ext>
             </a:extLst>
           </p:cNvPr>
@@ -2373,7 +2653,7 @@
           <p:cNvPr id="2" name="header-title-阶段成果与下一步">
             <a:extLst xmlns:a="http://schemas.openxmlformats.org/drawingml/2006/main">
               <a:ext uri="{FF2B5EF4-FFF2-40B4-BE49-F238E27FC236}">
-                <a16:creationId xmlns:a16="http://schemas.microsoft.com/office/drawing/2014/main" id="{A736519E-1F08-4931-99FE-8EAFDD0A21D2}"/>
+                <a16:creationId xmlns:a16="http://schemas.microsoft.com/office/drawing/2014/main" id="{774F2561-E31F-4070-8BF9-DEDD528CD64C}"/>
               </a:ext>
             </a:extLst>
           </p:cNvPr>
@@ -2424,7 +2704,7 @@
           <p:cNvPr id="3" name="header-subtitle-阶段成果与下一步">
             <a:extLst xmlns:a="http://schemas.openxmlformats.org/drawingml/2006/main">
               <a:ext uri="{FF2B5EF4-FFF2-40B4-BE49-F238E27FC236}">
-                <a16:creationId xmlns:a16="http://schemas.microsoft.com/office/drawing/2014/main" id="{00788504-84CA-4058-BC1A-212E583B06F9}"/>
+                <a16:creationId xmlns:a16="http://schemas.microsoft.com/office/drawing/2014/main" id="{01C67E65-C1B3-4404-A3D2-C8B7ABE0DD2A}"/>
               </a:ext>
             </a:extLst>
           </p:cNvPr>
@@ -2475,7 +2755,7 @@
           <p:cNvPr id="4" name="heading-underline">
             <a:extLst xmlns:a="http://schemas.openxmlformats.org/drawingml/2006/main">
               <a:ext uri="{FF2B5EF4-FFF2-40B4-BE49-F238E27FC236}">
-                <a16:creationId xmlns:a16="http://schemas.microsoft.com/office/drawing/2014/main" id="{14B085CC-4A3E-46A4-8E30-FFD6AFE2E01D}"/>
+                <a16:creationId xmlns:a16="http://schemas.microsoft.com/office/drawing/2014/main" id="{B5D9E0E7-FA3B-405A-9B27-14D1866673C6}"/>
               </a:ext>
             </a:extLst>
           </p:cNvPr>
@@ -2512,7 +2792,7 @@
           <p:cNvPr id="5" name="results-left-kicker">
             <a:extLst xmlns:a="http://schemas.openxmlformats.org/drawingml/2006/main">
               <a:ext uri="{FF2B5EF4-FFF2-40B4-BE49-F238E27FC236}">
-                <a16:creationId xmlns:a16="http://schemas.microsoft.com/office/drawing/2014/main" id="{BD1A0116-B234-4897-82F3-7F7418EBDE91}"/>
+                <a16:creationId xmlns:a16="http://schemas.microsoft.com/office/drawing/2014/main" id="{155FA458-8E07-4C4C-B87A-73A07049CA54}"/>
               </a:ext>
             </a:extLst>
           </p:cNvPr>
@@ -2524,7 +2804,7 @@
         <p:spPr>
           <a:xfrm xmlns:a="http://schemas.openxmlformats.org/drawingml/2006/main">
             <a:off x="533400" y="2000250"/>
-            <a:ext cx="533400" cy="160020"/>
+            <a:ext cx="544735" cy="160020"/>
           </a:xfrm>
           <a:prstGeom xmlns:a="http://schemas.openxmlformats.org/drawingml/2006/main" prst="rect">
             <a:avLst/>
@@ -2563,7 +2843,7 @@
           <p:cNvPr id="6" name="results-left-title">
             <a:extLst xmlns:a="http://schemas.openxmlformats.org/drawingml/2006/main">
               <a:ext uri="{FF2B5EF4-FFF2-40B4-BE49-F238E27FC236}">
-                <a16:creationId xmlns:a16="http://schemas.microsoft.com/office/drawing/2014/main" id="{FE811CAF-97F1-4ABC-95BC-8ECA86D88016}"/>
+                <a16:creationId xmlns:a16="http://schemas.microsoft.com/office/drawing/2014/main" id="{05C90CA3-38EC-4C3D-99D8-367559ECBBAD}"/>
               </a:ext>
             </a:extLst>
           </p:cNvPr>
@@ -2614,7 +2894,7 @@
           <p:cNvPr id="7" name="bullet-dot-项目接入">
             <a:extLst xmlns:a="http://schemas.openxmlformats.org/drawingml/2006/main">
               <a:ext uri="{FF2B5EF4-FFF2-40B4-BE49-F238E27FC236}">
-                <a16:creationId xmlns:a16="http://schemas.microsoft.com/office/drawing/2014/main" id="{A4AF0A58-790B-4468-B9A1-3CCACD5C4176}"/>
+                <a16:creationId xmlns:a16="http://schemas.microsoft.com/office/drawing/2014/main" id="{F5AA1E70-9D15-4E1D-A550-F7DF3BE66C66}"/>
               </a:ext>
             </a:extLst>
           </p:cNvPr>
@@ -2645,7 +2925,7 @@
           <p:cNvPr id="8" name="bullet-title-项目接入">
             <a:extLst xmlns:a="http://schemas.openxmlformats.org/drawingml/2006/main">
               <a:ext uri="{FF2B5EF4-FFF2-40B4-BE49-F238E27FC236}">
-                <a16:creationId xmlns:a16="http://schemas.microsoft.com/office/drawing/2014/main" id="{C1789263-6F16-4BB0-99D8-02D2A84B6661}"/>
+                <a16:creationId xmlns:a16="http://schemas.microsoft.com/office/drawing/2014/main" id="{FB734A1A-9DB4-4510-ABD7-E43C512FB039}"/>
               </a:ext>
             </a:extLst>
           </p:cNvPr>
@@ -2696,7 +2976,7 @@
           <p:cNvPr id="9" name="bullet-detail-项目接入">
             <a:extLst xmlns:a="http://schemas.openxmlformats.org/drawingml/2006/main">
               <a:ext uri="{FF2B5EF4-FFF2-40B4-BE49-F238E27FC236}">
-                <a16:creationId xmlns:a16="http://schemas.microsoft.com/office/drawing/2014/main" id="{5085D9F2-DC35-452B-ACAC-0E6B4A382C04}"/>
+                <a16:creationId xmlns:a16="http://schemas.microsoft.com/office/drawing/2014/main" id="{64BC0DFC-7734-45CD-A67D-BEEBD5D4329C}"/>
               </a:ext>
             </a:extLst>
           </p:cNvPr>
@@ -2747,7 +3027,7 @@
           <p:cNvPr id="10" name="bullet-dot-智能分析">
             <a:extLst xmlns:a="http://schemas.openxmlformats.org/drawingml/2006/main">
               <a:ext uri="{FF2B5EF4-FFF2-40B4-BE49-F238E27FC236}">
-                <a16:creationId xmlns:a16="http://schemas.microsoft.com/office/drawing/2014/main" id="{7686E170-9687-4130-9EDD-906656FAEBAF}"/>
+                <a16:creationId xmlns:a16="http://schemas.microsoft.com/office/drawing/2014/main" id="{6C378CEF-EE8E-4AAA-BF21-3B815C640ACE}"/>
               </a:ext>
             </a:extLst>
           </p:cNvPr>
@@ -2778,7 +3058,7 @@
           <p:cNvPr id="11" name="bullet-title-智能分析">
             <a:extLst xmlns:a="http://schemas.openxmlformats.org/drawingml/2006/main">
               <a:ext uri="{FF2B5EF4-FFF2-40B4-BE49-F238E27FC236}">
-                <a16:creationId xmlns:a16="http://schemas.microsoft.com/office/drawing/2014/main" id="{1D1B5CFB-35E4-4D38-AA7B-F7C4EC7BFFFD}"/>
+                <a16:creationId xmlns:a16="http://schemas.microsoft.com/office/drawing/2014/main" id="{D89043B3-2353-4FC5-A3C6-E490BF4888B0}"/>
               </a:ext>
             </a:extLst>
           </p:cNvPr>
@@ -2829,7 +3109,7 @@
           <p:cNvPr id="12" name="bullet-detail-智能分析">
             <a:extLst xmlns:a="http://schemas.openxmlformats.org/drawingml/2006/main">
               <a:ext uri="{FF2B5EF4-FFF2-40B4-BE49-F238E27FC236}">
-                <a16:creationId xmlns:a16="http://schemas.microsoft.com/office/drawing/2014/main" id="{912C63D6-368D-4E24-A238-90C8DFE076C9}"/>
+                <a16:creationId xmlns:a16="http://schemas.microsoft.com/office/drawing/2014/main" id="{D1730A78-3CFC-4759-A396-25D7ECBD121F}"/>
               </a:ext>
             </a:extLst>
           </p:cNvPr>
@@ -2880,7 +3160,7 @@
           <p:cNvPr id="13" name="bullet-dot-实时回传">
             <a:extLst xmlns:a="http://schemas.openxmlformats.org/drawingml/2006/main">
               <a:ext uri="{FF2B5EF4-FFF2-40B4-BE49-F238E27FC236}">
-                <a16:creationId xmlns:a16="http://schemas.microsoft.com/office/drawing/2014/main" id="{475010CB-3BD4-4A5A-8CE5-8723AC24A1EF}"/>
+                <a16:creationId xmlns:a16="http://schemas.microsoft.com/office/drawing/2014/main" id="{2BB8E72D-4E08-4121-BDFF-F6F4FF4F12C8}"/>
               </a:ext>
             </a:extLst>
           </p:cNvPr>
@@ -2911,7 +3191,7 @@
           <p:cNvPr id="14" name="bullet-title-实时回传">
             <a:extLst xmlns:a="http://schemas.openxmlformats.org/drawingml/2006/main">
               <a:ext uri="{FF2B5EF4-FFF2-40B4-BE49-F238E27FC236}">
-                <a16:creationId xmlns:a16="http://schemas.microsoft.com/office/drawing/2014/main" id="{507508AC-1F0E-4E50-96F0-3304E38095BF}"/>
+                <a16:creationId xmlns:a16="http://schemas.microsoft.com/office/drawing/2014/main" id="{B4C2C3D4-E5F5-4335-BCC7-FAB18E32C261}"/>
               </a:ext>
             </a:extLst>
           </p:cNvPr>
@@ -2962,7 +3242,7 @@
           <p:cNvPr id="15" name="bullet-detail-实时回传">
             <a:extLst xmlns:a="http://schemas.openxmlformats.org/drawingml/2006/main">
               <a:ext uri="{FF2B5EF4-FFF2-40B4-BE49-F238E27FC236}">
-                <a16:creationId xmlns:a16="http://schemas.microsoft.com/office/drawing/2014/main" id="{F0B98468-FECC-4481-B83B-00ECF66D63A3}"/>
+                <a16:creationId xmlns:a16="http://schemas.microsoft.com/office/drawing/2014/main" id="{7B9093C1-A344-45E9-B553-BF32E1702614}"/>
               </a:ext>
             </a:extLst>
           </p:cNvPr>
@@ -3013,7 +3293,7 @@
           <p:cNvPr id="16" name="bullet-dot-报告交付">
             <a:extLst xmlns:a="http://schemas.openxmlformats.org/drawingml/2006/main">
               <a:ext uri="{FF2B5EF4-FFF2-40B4-BE49-F238E27FC236}">
-                <a16:creationId xmlns:a16="http://schemas.microsoft.com/office/drawing/2014/main" id="{74BF04CE-8742-43F3-9982-18755165BC83}"/>
+                <a16:creationId xmlns:a16="http://schemas.microsoft.com/office/drawing/2014/main" id="{D355CC57-B0AD-4611-8FDA-67DE14044DF0}"/>
               </a:ext>
             </a:extLst>
           </p:cNvPr>
@@ -3044,7 +3324,7 @@
           <p:cNvPr id="17" name="bullet-title-报告交付">
             <a:extLst xmlns:a="http://schemas.openxmlformats.org/drawingml/2006/main">
               <a:ext uri="{FF2B5EF4-FFF2-40B4-BE49-F238E27FC236}">
-                <a16:creationId xmlns:a16="http://schemas.microsoft.com/office/drawing/2014/main" id="{E853956E-0B2E-4DC4-8D38-1622C1B4D0A8}"/>
+                <a16:creationId xmlns:a16="http://schemas.microsoft.com/office/drawing/2014/main" id="{2E5B2D99-A863-4370-92DA-89013326C49D}"/>
               </a:ext>
             </a:extLst>
           </p:cNvPr>
@@ -3095,7 +3375,7 @@
           <p:cNvPr id="18" name="bullet-detail-报告交付">
             <a:extLst xmlns:a="http://schemas.openxmlformats.org/drawingml/2006/main">
               <a:ext uri="{FF2B5EF4-FFF2-40B4-BE49-F238E27FC236}">
-                <a16:creationId xmlns:a16="http://schemas.microsoft.com/office/drawing/2014/main" id="{BD25C095-A1AF-4035-B7E7-3420CFCAC55E}"/>
+                <a16:creationId xmlns:a16="http://schemas.microsoft.com/office/drawing/2014/main" id="{F7A30D7E-C9CB-486F-A931-1888F28CBF1F}"/>
               </a:ext>
             </a:extLst>
           </p:cNvPr>
@@ -3146,7 +3426,7 @@
           <p:cNvPr id="19" name="results-right-kicker">
             <a:extLst xmlns:a="http://schemas.openxmlformats.org/drawingml/2006/main">
               <a:ext uri="{FF2B5EF4-FFF2-40B4-BE49-F238E27FC236}">
-                <a16:creationId xmlns:a16="http://schemas.microsoft.com/office/drawing/2014/main" id="{C042341A-04BE-411B-BC6A-362B4D1AADAF}"/>
+                <a16:creationId xmlns:a16="http://schemas.microsoft.com/office/drawing/2014/main" id="{8F7647F6-D0F3-4CA2-AAE9-225B0BAD0375}"/>
               </a:ext>
             </a:extLst>
           </p:cNvPr>
@@ -3158,7 +3438,7 @@
         <p:spPr>
           <a:xfrm xmlns:a="http://schemas.openxmlformats.org/drawingml/2006/main">
             <a:off x="4095750" y="2000250"/>
-            <a:ext cx="400050" cy="160020"/>
+            <a:ext cx="408527" cy="160020"/>
           </a:xfrm>
           <a:prstGeom xmlns:a="http://schemas.openxmlformats.org/drawingml/2006/main" prst="rect">
             <a:avLst/>
@@ -3197,7 +3477,7 @@
           <p:cNvPr id="20" name="results-right-title">
             <a:extLst xmlns:a="http://schemas.openxmlformats.org/drawingml/2006/main">
               <a:ext uri="{FF2B5EF4-FFF2-40B4-BE49-F238E27FC236}">
-                <a16:creationId xmlns:a16="http://schemas.microsoft.com/office/drawing/2014/main" id="{C7992159-0EE8-494E-84F9-C40B680B6AE3}"/>
+                <a16:creationId xmlns:a16="http://schemas.microsoft.com/office/drawing/2014/main" id="{304E41A1-7DFB-49E6-A88B-E0F50024D4CA}"/>
               </a:ext>
             </a:extLst>
           </p:cNvPr>
@@ -3248,7 +3528,7 @@
           <p:cNvPr id="21" name="bullet-dot-知识库">
             <a:extLst xmlns:a="http://schemas.openxmlformats.org/drawingml/2006/main">
               <a:ext uri="{FF2B5EF4-FFF2-40B4-BE49-F238E27FC236}">
-                <a16:creationId xmlns:a16="http://schemas.microsoft.com/office/drawing/2014/main" id="{5FCF0778-037F-487F-A7B6-7D72F557EFED}"/>
+                <a16:creationId xmlns:a16="http://schemas.microsoft.com/office/drawing/2014/main" id="{CB0F0944-04AF-4BBF-B114-798FF5C07A31}"/>
               </a:ext>
             </a:extLst>
           </p:cNvPr>
@@ -3279,7 +3559,7 @@
           <p:cNvPr id="22" name="bullet-title-知识库">
             <a:extLst xmlns:a="http://schemas.openxmlformats.org/drawingml/2006/main">
               <a:ext uri="{FF2B5EF4-FFF2-40B4-BE49-F238E27FC236}">
-                <a16:creationId xmlns:a16="http://schemas.microsoft.com/office/drawing/2014/main" id="{FCC97940-4DE4-4A74-8ADC-85196068BA04}"/>
+                <a16:creationId xmlns:a16="http://schemas.microsoft.com/office/drawing/2014/main" id="{89D19565-E2BA-4BA4-A891-EF4107B364FF}"/>
               </a:ext>
             </a:extLst>
           </p:cNvPr>
@@ -3330,7 +3610,7 @@
           <p:cNvPr id="23" name="bullet-detail-知识库">
             <a:extLst xmlns:a="http://schemas.openxmlformats.org/drawingml/2006/main">
               <a:ext uri="{FF2B5EF4-FFF2-40B4-BE49-F238E27FC236}">
-                <a16:creationId xmlns:a16="http://schemas.microsoft.com/office/drawing/2014/main" id="{59D0BCEA-6DCD-4CB0-8C34-4D5ADD2AD508}"/>
+                <a16:creationId xmlns:a16="http://schemas.microsoft.com/office/drawing/2014/main" id="{0B988B4F-833A-4059-A2BC-63F96526B270}"/>
               </a:ext>
             </a:extLst>
           </p:cNvPr>
@@ -3381,7 +3661,7 @@
           <p:cNvPr id="24" name="bullet-dot-规则覆盖">
             <a:extLst xmlns:a="http://schemas.openxmlformats.org/drawingml/2006/main">
               <a:ext uri="{FF2B5EF4-FFF2-40B4-BE49-F238E27FC236}">
-                <a16:creationId xmlns:a16="http://schemas.microsoft.com/office/drawing/2014/main" id="{F226BFC0-56D6-4618-92D8-6702BD324849}"/>
+                <a16:creationId xmlns:a16="http://schemas.microsoft.com/office/drawing/2014/main" id="{765BE18B-1616-4A1C-AB9A-C9F74784F593}"/>
               </a:ext>
             </a:extLst>
           </p:cNvPr>
@@ -3412,7 +3692,7 @@
           <p:cNvPr id="25" name="bullet-title-规则覆盖">
             <a:extLst xmlns:a="http://schemas.openxmlformats.org/drawingml/2006/main">
               <a:ext uri="{FF2B5EF4-FFF2-40B4-BE49-F238E27FC236}">
-                <a16:creationId xmlns:a16="http://schemas.microsoft.com/office/drawing/2014/main" id="{A443A76B-0B1F-4B82-8CB2-55205E6F5EF6}"/>
+                <a16:creationId xmlns:a16="http://schemas.microsoft.com/office/drawing/2014/main" id="{C944D944-E303-4770-AFF8-8EBD585CE1D4}"/>
               </a:ext>
             </a:extLst>
           </p:cNvPr>
@@ -3463,7 +3743,7 @@
           <p:cNvPr id="26" name="bullet-detail-规则覆盖">
             <a:extLst xmlns:a="http://schemas.openxmlformats.org/drawingml/2006/main">
               <a:ext uri="{FF2B5EF4-FFF2-40B4-BE49-F238E27FC236}">
-                <a16:creationId xmlns:a16="http://schemas.microsoft.com/office/drawing/2014/main" id="{FFD9B3FF-AE5E-46CF-AC1A-75A8DBB42C52}"/>
+                <a16:creationId xmlns:a16="http://schemas.microsoft.com/office/drawing/2014/main" id="{0B4CE506-C797-40F2-B294-4D4C2EC67A98}"/>
               </a:ext>
             </a:extLst>
           </p:cNvPr>
@@ -3514,7 +3794,7 @@
           <p:cNvPr id="27" name="bullet-dot-部署与监控">
             <a:extLst xmlns:a="http://schemas.openxmlformats.org/drawingml/2006/main">
               <a:ext uri="{FF2B5EF4-FFF2-40B4-BE49-F238E27FC236}">
-                <a16:creationId xmlns:a16="http://schemas.microsoft.com/office/drawing/2014/main" id="{E269DAC2-0C57-4DC3-85CF-3411B07E0B59}"/>
+                <a16:creationId xmlns:a16="http://schemas.microsoft.com/office/drawing/2014/main" id="{661A9435-CD89-4737-9771-1E92CCB1138E}"/>
               </a:ext>
             </a:extLst>
           </p:cNvPr>
@@ -3545,7 +3825,7 @@
           <p:cNvPr id="28" name="bullet-title-部署与监控">
             <a:extLst xmlns:a="http://schemas.openxmlformats.org/drawingml/2006/main">
               <a:ext uri="{FF2B5EF4-FFF2-40B4-BE49-F238E27FC236}">
-                <a16:creationId xmlns:a16="http://schemas.microsoft.com/office/drawing/2014/main" id="{87724278-4644-4B57-8F26-8561F26B1EFC}"/>
+                <a16:creationId xmlns:a16="http://schemas.microsoft.com/office/drawing/2014/main" id="{C1269BAA-BDE9-42B3-ACF0-6F95DF112FC0}"/>
               </a:ext>
             </a:extLst>
           </p:cNvPr>
@@ -3596,7 +3876,7 @@
           <p:cNvPr id="29" name="bullet-detail-部署与监控">
             <a:extLst xmlns:a="http://schemas.openxmlformats.org/drawingml/2006/main">
               <a:ext uri="{FF2B5EF4-FFF2-40B4-BE49-F238E27FC236}">
-                <a16:creationId xmlns:a16="http://schemas.microsoft.com/office/drawing/2014/main" id="{E826D3E2-B10D-43D9-BE0F-2D9C2EAFCC6A}"/>
+                <a16:creationId xmlns:a16="http://schemas.microsoft.com/office/drawing/2014/main" id="{B9AFBB08-C805-4C7F-B9A3-D8C25D2D8ADD}"/>
               </a:ext>
             </a:extLst>
           </p:cNvPr>
@@ -3647,7 +3927,7 @@
           <p:cNvPr id="30" name="bullet-dot-真实指标">
             <a:extLst xmlns:a="http://schemas.openxmlformats.org/drawingml/2006/main">
               <a:ext uri="{FF2B5EF4-FFF2-40B4-BE49-F238E27FC236}">
-                <a16:creationId xmlns:a16="http://schemas.microsoft.com/office/drawing/2014/main" id="{F152AE04-0C38-48B7-BBFE-4185CE20CB0A}"/>
+                <a16:creationId xmlns:a16="http://schemas.microsoft.com/office/drawing/2014/main" id="{D0A8D309-5B10-4AB5-8E63-2D1A6047639C}"/>
               </a:ext>
             </a:extLst>
           </p:cNvPr>
@@ -3678,7 +3958,7 @@
           <p:cNvPr id="31" name="bullet-title-真实指标">
             <a:extLst xmlns:a="http://schemas.openxmlformats.org/drawingml/2006/main">
               <a:ext uri="{FF2B5EF4-FFF2-40B4-BE49-F238E27FC236}">
-                <a16:creationId xmlns:a16="http://schemas.microsoft.com/office/drawing/2014/main" id="{A5DDC589-ADAF-420C-9E1E-0A4C8A692127}"/>
+                <a16:creationId xmlns:a16="http://schemas.microsoft.com/office/drawing/2014/main" id="{AFB82C13-40DA-4667-BB77-EEE0ADEBD6C6}"/>
               </a:ext>
             </a:extLst>
           </p:cNvPr>
@@ -3729,7 +4009,7 @@
           <p:cNvPr id="32" name="bullet-detail-真实指标">
             <a:extLst xmlns:a="http://schemas.openxmlformats.org/drawingml/2006/main">
               <a:ext uri="{FF2B5EF4-FFF2-40B4-BE49-F238E27FC236}">
-                <a16:creationId xmlns:a16="http://schemas.microsoft.com/office/drawing/2014/main" id="{579A1C84-EDFC-4336-BB39-E5089F7F465C}"/>
+                <a16:creationId xmlns:a16="http://schemas.microsoft.com/office/drawing/2014/main" id="{9A0A9E2E-BFCC-4CC6-8526-EB5B9439E3D4}"/>
               </a:ext>
             </a:extLst>
           </p:cNvPr>
@@ -3780,7 +4060,7 @@
           <p:cNvPr id="33" name="results-metrics-kicker">
             <a:extLst xmlns:a="http://schemas.openxmlformats.org/drawingml/2006/main">
               <a:ext uri="{FF2B5EF4-FFF2-40B4-BE49-F238E27FC236}">
-                <a16:creationId xmlns:a16="http://schemas.microsoft.com/office/drawing/2014/main" id="{CBA93437-42B7-423D-9F68-12D00CC20E9D}"/>
+                <a16:creationId xmlns:a16="http://schemas.microsoft.com/office/drawing/2014/main" id="{63511F3A-1A07-471F-B3F7-1A9FA2D85F57}"/>
               </a:ext>
             </a:extLst>
           </p:cNvPr>
@@ -3792,7 +4072,7 @@
         <p:spPr>
           <a:xfrm xmlns:a="http://schemas.openxmlformats.org/drawingml/2006/main">
             <a:off x="7658100" y="2000250"/>
-            <a:ext cx="666750" cy="160020"/>
+            <a:ext cx="680942" cy="160020"/>
           </a:xfrm>
           <a:prstGeom xmlns:a="http://schemas.openxmlformats.org/drawingml/2006/main" prst="rect">
             <a:avLst/>
@@ -3831,7 +4111,7 @@
           <p:cNvPr id="34" name="metric-value-审计任务数">
             <a:extLst xmlns:a="http://schemas.openxmlformats.org/drawingml/2006/main">
               <a:ext uri="{FF2B5EF4-FFF2-40B4-BE49-F238E27FC236}">
-                <a16:creationId xmlns:a16="http://schemas.microsoft.com/office/drawing/2014/main" id="{E446CABC-E30F-404C-BB98-69A31CCA5BB6}"/>
+                <a16:creationId xmlns:a16="http://schemas.microsoft.com/office/drawing/2014/main" id="{D93738D3-7E1A-4252-94EB-9514C1A1F0B8}"/>
               </a:ext>
             </a:extLst>
           </p:cNvPr>
@@ -3882,7 +4162,7 @@
           <p:cNvPr id="35" name="metric-label-审计任务数">
             <a:extLst xmlns:a="http://schemas.openxmlformats.org/drawingml/2006/main">
               <a:ext uri="{FF2B5EF4-FFF2-40B4-BE49-F238E27FC236}">
-                <a16:creationId xmlns:a16="http://schemas.microsoft.com/office/drawing/2014/main" id="{675250D5-FAC3-44D1-9D01-ABE44D587BB2}"/>
+                <a16:creationId xmlns:a16="http://schemas.microsoft.com/office/drawing/2014/main" id="{2817BB12-F4CC-4781-9125-FA2DDDA01565}"/>
               </a:ext>
             </a:extLst>
           </p:cNvPr>
@@ -3894,7 +4174,7 @@
         <p:spPr>
           <a:xfrm xmlns:a="http://schemas.openxmlformats.org/drawingml/2006/main">
             <a:off x="7658100" y="2827020"/>
-            <a:ext cx="762000" cy="182880"/>
+            <a:ext cx="777811" cy="365760"/>
           </a:xfrm>
           <a:prstGeom xmlns:a="http://schemas.openxmlformats.org/drawingml/2006/main" prst="rect">
             <a:avLst/>
@@ -3933,19 +4213,19 @@
           <p:cNvPr id="36" name="metric-note-审计任务数">
             <a:extLst xmlns:a="http://schemas.openxmlformats.org/drawingml/2006/main">
               <a:ext uri="{FF2B5EF4-FFF2-40B4-BE49-F238E27FC236}">
-                <a16:creationId xmlns:a16="http://schemas.microsoft.com/office/drawing/2014/main" id="{42FAA81A-706A-4CF8-BC3B-045111338CFC}"/>
-              </a:ext>
-            </a:extLst>
-          </p:cNvPr>
-          <p:cNvSpPr>
-            <a:spLocks xmlns:a="http://schemas.openxmlformats.org/drawingml/2006/main" noGrp="1"/>
-          </p:cNvSpPr>
-          <p:nvPr/>
-        </p:nvSpPr>
-        <p:spPr>
-          <a:xfrm xmlns:a="http://schemas.openxmlformats.org/drawingml/2006/main">
-            <a:off x="7658100" y="3086100"/>
-            <a:ext cx="619125" cy="148590"/>
+                <a16:creationId xmlns:a16="http://schemas.microsoft.com/office/drawing/2014/main" id="{883AF266-BC6E-4397-946A-756F2A7FB396}"/>
+              </a:ext>
+            </a:extLst>
+          </p:cNvPr>
+          <p:cNvSpPr>
+            <a:spLocks xmlns:a="http://schemas.openxmlformats.org/drawingml/2006/main" noGrp="1"/>
+          </p:cNvSpPr>
+          <p:nvPr/>
+        </p:nvSpPr>
+        <p:spPr>
+          <a:xfrm xmlns:a="http://schemas.openxmlformats.org/drawingml/2006/main">
+            <a:off x="7658100" y="3268980"/>
+            <a:ext cx="631984" cy="148590"/>
           </a:xfrm>
           <a:prstGeom xmlns:a="http://schemas.openxmlformats.org/drawingml/2006/main" prst="rect">
             <a:avLst/>
@@ -3984,7 +4264,7 @@
           <p:cNvPr id="37" name="metric-value-有效发现数">
             <a:extLst xmlns:a="http://schemas.openxmlformats.org/drawingml/2006/main">
               <a:ext uri="{FF2B5EF4-FFF2-40B4-BE49-F238E27FC236}">
-                <a16:creationId xmlns:a16="http://schemas.microsoft.com/office/drawing/2014/main" id="{D648D33A-1A79-46C6-94AC-70E2363EB43C}"/>
+                <a16:creationId xmlns:a16="http://schemas.microsoft.com/office/drawing/2014/main" id="{E4446739-DB77-4F2C-86FE-3079B9767B62}"/>
               </a:ext>
             </a:extLst>
           </p:cNvPr>
@@ -4035,7 +4315,7 @@
           <p:cNvPr id="38" name="metric-label-有效发现数">
             <a:extLst xmlns:a="http://schemas.openxmlformats.org/drawingml/2006/main">
               <a:ext uri="{FF2B5EF4-FFF2-40B4-BE49-F238E27FC236}">
-                <a16:creationId xmlns:a16="http://schemas.microsoft.com/office/drawing/2014/main" id="{D37459F4-A9EC-47EA-BD81-2679164B30EE}"/>
+                <a16:creationId xmlns:a16="http://schemas.microsoft.com/office/drawing/2014/main" id="{3E1E2692-A469-49B8-9EEA-1041BD4AAE11}"/>
               </a:ext>
             </a:extLst>
           </p:cNvPr>
@@ -4047,7 +4327,7 @@
         <p:spPr>
           <a:xfrm xmlns:a="http://schemas.openxmlformats.org/drawingml/2006/main">
             <a:off x="9334500" y="2827020"/>
-            <a:ext cx="762000" cy="182880"/>
+            <a:ext cx="777811" cy="365760"/>
           </a:xfrm>
           <a:prstGeom xmlns:a="http://schemas.openxmlformats.org/drawingml/2006/main" prst="rect">
             <a:avLst/>
@@ -4086,19 +4366,19 @@
           <p:cNvPr id="39" name="metric-note-有效发现数">
             <a:extLst xmlns:a="http://schemas.openxmlformats.org/drawingml/2006/main">
               <a:ext uri="{FF2B5EF4-FFF2-40B4-BE49-F238E27FC236}">
-                <a16:creationId xmlns:a16="http://schemas.microsoft.com/office/drawing/2014/main" id="{D235C5CF-19C4-4039-8B4B-2692FC9EDA53}"/>
-              </a:ext>
-            </a:extLst>
-          </p:cNvPr>
-          <p:cNvSpPr>
-            <a:spLocks xmlns:a="http://schemas.openxmlformats.org/drawingml/2006/main" noGrp="1"/>
-          </p:cNvSpPr>
-          <p:nvPr/>
-        </p:nvSpPr>
-        <p:spPr>
-          <a:xfrm xmlns:a="http://schemas.openxmlformats.org/drawingml/2006/main">
-            <a:off x="9334500" y="3086100"/>
-            <a:ext cx="619125" cy="148590"/>
+                <a16:creationId xmlns:a16="http://schemas.microsoft.com/office/drawing/2014/main" id="{0979D293-0125-4F57-AE4B-1AF2A60F6CED}"/>
+              </a:ext>
+            </a:extLst>
+          </p:cNvPr>
+          <p:cNvSpPr>
+            <a:spLocks xmlns:a="http://schemas.openxmlformats.org/drawingml/2006/main" noGrp="1"/>
+          </p:cNvSpPr>
+          <p:nvPr/>
+        </p:nvSpPr>
+        <p:spPr>
+          <a:xfrm xmlns:a="http://schemas.openxmlformats.org/drawingml/2006/main">
+            <a:off x="9334500" y="3268980"/>
+            <a:ext cx="631984" cy="148590"/>
           </a:xfrm>
           <a:prstGeom xmlns:a="http://schemas.openxmlformats.org/drawingml/2006/main" prst="rect">
             <a:avLst/>
@@ -4137,18 +4417,18 @@
           <p:cNvPr id="40" name="metric-value-报告导出数">
             <a:extLst xmlns:a="http://schemas.openxmlformats.org/drawingml/2006/main">
               <a:ext uri="{FF2B5EF4-FFF2-40B4-BE49-F238E27FC236}">
-                <a16:creationId xmlns:a16="http://schemas.microsoft.com/office/drawing/2014/main" id="{38BF0C4C-81F8-4EC2-9EE0-C70B6D88224B}"/>
-              </a:ext>
-            </a:extLst>
-          </p:cNvPr>
-          <p:cNvSpPr>
-            <a:spLocks xmlns:a="http://schemas.openxmlformats.org/drawingml/2006/main" noGrp="1"/>
-          </p:cNvSpPr>
-          <p:nvPr/>
-        </p:nvSpPr>
-        <p:spPr>
-          <a:xfrm xmlns:a="http://schemas.openxmlformats.org/drawingml/2006/main">
-            <a:off x="7658100" y="3348990"/>
+                <a16:creationId xmlns:a16="http://schemas.microsoft.com/office/drawing/2014/main" id="{669E1F15-E762-40E5-B713-F2AFAD6AB18F}"/>
+              </a:ext>
+            </a:extLst>
+          </p:cNvPr>
+          <p:cNvSpPr>
+            <a:spLocks xmlns:a="http://schemas.openxmlformats.org/drawingml/2006/main" noGrp="1"/>
+          </p:cNvSpPr>
+          <p:nvPr/>
+        </p:nvSpPr>
+        <p:spPr>
+          <a:xfrm xmlns:a="http://schemas.openxmlformats.org/drawingml/2006/main">
+            <a:off x="7658100" y="3531870"/>
             <a:ext cx="229362" cy="457200"/>
           </a:xfrm>
           <a:prstGeom xmlns:a="http://schemas.openxmlformats.org/drawingml/2006/main" prst="rect">
@@ -4188,19 +4468,19 @@
           <p:cNvPr id="41" name="metric-label-报告导出数">
             <a:extLst xmlns:a="http://schemas.openxmlformats.org/drawingml/2006/main">
               <a:ext uri="{FF2B5EF4-FFF2-40B4-BE49-F238E27FC236}">
-                <a16:creationId xmlns:a16="http://schemas.microsoft.com/office/drawing/2014/main" id="{B0F0363E-8182-414F-901C-9E12485C9A38}"/>
-              </a:ext>
-            </a:extLst>
-          </p:cNvPr>
-          <p:cNvSpPr>
-            <a:spLocks xmlns:a="http://schemas.openxmlformats.org/drawingml/2006/main" noGrp="1"/>
-          </p:cNvSpPr>
-          <p:nvPr/>
-        </p:nvSpPr>
-        <p:spPr>
-          <a:xfrm xmlns:a="http://schemas.openxmlformats.org/drawingml/2006/main">
-            <a:off x="7658100" y="3882390"/>
-            <a:ext cx="762000" cy="182880"/>
+                <a16:creationId xmlns:a16="http://schemas.microsoft.com/office/drawing/2014/main" id="{4BF34441-587A-42B4-8DF7-66FD2D1503B8}"/>
+              </a:ext>
+            </a:extLst>
+          </p:cNvPr>
+          <p:cNvSpPr>
+            <a:spLocks xmlns:a="http://schemas.openxmlformats.org/drawingml/2006/main" noGrp="1"/>
+          </p:cNvSpPr>
+          <p:nvPr/>
+        </p:nvSpPr>
+        <p:spPr>
+          <a:xfrm xmlns:a="http://schemas.openxmlformats.org/drawingml/2006/main">
+            <a:off x="7658100" y="4065270"/>
+            <a:ext cx="777811" cy="365760"/>
           </a:xfrm>
           <a:prstGeom xmlns:a="http://schemas.openxmlformats.org/drawingml/2006/main" prst="rect">
             <a:avLst/>
@@ -4239,19 +4519,19 @@
           <p:cNvPr id="42" name="metric-note-报告导出数">
             <a:extLst xmlns:a="http://schemas.openxmlformats.org/drawingml/2006/main">
               <a:ext uri="{FF2B5EF4-FFF2-40B4-BE49-F238E27FC236}">
-                <a16:creationId xmlns:a16="http://schemas.microsoft.com/office/drawing/2014/main" id="{D351FC34-99FF-4755-8593-AEE74BB58471}"/>
-              </a:ext>
-            </a:extLst>
-          </p:cNvPr>
-          <p:cNvSpPr>
-            <a:spLocks xmlns:a="http://schemas.openxmlformats.org/drawingml/2006/main" noGrp="1"/>
-          </p:cNvSpPr>
-          <p:nvPr/>
-        </p:nvSpPr>
-        <p:spPr>
-          <a:xfrm xmlns:a="http://schemas.openxmlformats.org/drawingml/2006/main">
-            <a:off x="7658100" y="4141470"/>
-            <a:ext cx="619125" cy="148590"/>
+                <a16:creationId xmlns:a16="http://schemas.microsoft.com/office/drawing/2014/main" id="{BD95F569-722A-47B5-A089-7EE635E21BB1}"/>
+              </a:ext>
+            </a:extLst>
+          </p:cNvPr>
+          <p:cNvSpPr>
+            <a:spLocks xmlns:a="http://schemas.openxmlformats.org/drawingml/2006/main" noGrp="1"/>
+          </p:cNvSpPr>
+          <p:nvPr/>
+        </p:nvSpPr>
+        <p:spPr>
+          <a:xfrm xmlns:a="http://schemas.openxmlformats.org/drawingml/2006/main">
+            <a:off x="7658100" y="4507230"/>
+            <a:ext cx="631984" cy="148590"/>
           </a:xfrm>
           <a:prstGeom xmlns:a="http://schemas.openxmlformats.org/drawingml/2006/main" prst="rect">
             <a:avLst/>
@@ -4290,18 +4570,18 @@
           <p:cNvPr id="43" name="metric-value-知识库条目数">
             <a:extLst xmlns:a="http://schemas.openxmlformats.org/drawingml/2006/main">
               <a:ext uri="{FF2B5EF4-FFF2-40B4-BE49-F238E27FC236}">
-                <a16:creationId xmlns:a16="http://schemas.microsoft.com/office/drawing/2014/main" id="{6CC166C8-664F-422F-92AF-7485550AFEA6}"/>
-              </a:ext>
-            </a:extLst>
-          </p:cNvPr>
-          <p:cNvSpPr>
-            <a:spLocks xmlns:a="http://schemas.openxmlformats.org/drawingml/2006/main" noGrp="1"/>
-          </p:cNvSpPr>
-          <p:nvPr/>
-        </p:nvSpPr>
-        <p:spPr>
-          <a:xfrm xmlns:a="http://schemas.openxmlformats.org/drawingml/2006/main">
-            <a:off x="9334500" y="3348990"/>
+                <a16:creationId xmlns:a16="http://schemas.microsoft.com/office/drawing/2014/main" id="{3BD7C1FB-0504-411B-827F-6F70D932B17A}"/>
+              </a:ext>
+            </a:extLst>
+          </p:cNvPr>
+          <p:cNvSpPr>
+            <a:spLocks xmlns:a="http://schemas.openxmlformats.org/drawingml/2006/main" noGrp="1"/>
+          </p:cNvSpPr>
+          <p:nvPr/>
+        </p:nvSpPr>
+        <p:spPr>
+          <a:xfrm xmlns:a="http://schemas.openxmlformats.org/drawingml/2006/main">
+            <a:off x="9334500" y="3531870"/>
             <a:ext cx="229362" cy="457200"/>
           </a:xfrm>
           <a:prstGeom xmlns:a="http://schemas.openxmlformats.org/drawingml/2006/main" prst="rect">
@@ -4341,19 +4621,19 @@
           <p:cNvPr id="44" name="metric-label-知识库条目数">
             <a:extLst xmlns:a="http://schemas.openxmlformats.org/drawingml/2006/main">
               <a:ext uri="{FF2B5EF4-FFF2-40B4-BE49-F238E27FC236}">
-                <a16:creationId xmlns:a16="http://schemas.microsoft.com/office/drawing/2014/main" id="{BDCB80FE-CFFB-468F-8C20-01E9093488A0}"/>
-              </a:ext>
-            </a:extLst>
-          </p:cNvPr>
-          <p:cNvSpPr>
-            <a:spLocks xmlns:a="http://schemas.openxmlformats.org/drawingml/2006/main" noGrp="1"/>
-          </p:cNvSpPr>
-          <p:nvPr/>
-        </p:nvSpPr>
-        <p:spPr>
-          <a:xfrm xmlns:a="http://schemas.openxmlformats.org/drawingml/2006/main">
-            <a:off x="9334500" y="3882390"/>
-            <a:ext cx="914400" cy="182880"/>
+                <a16:creationId xmlns:a16="http://schemas.microsoft.com/office/drawing/2014/main" id="{23613F11-3DED-4001-BA46-9421A09D8B68}"/>
+              </a:ext>
+            </a:extLst>
+          </p:cNvPr>
+          <p:cNvSpPr>
+            <a:spLocks xmlns:a="http://schemas.openxmlformats.org/drawingml/2006/main" noGrp="1"/>
+          </p:cNvSpPr>
+          <p:nvPr/>
+        </p:nvSpPr>
+        <p:spPr>
+          <a:xfrm xmlns:a="http://schemas.openxmlformats.org/drawingml/2006/main">
+            <a:off x="9334500" y="4065270"/>
+            <a:ext cx="933355" cy="182880"/>
           </a:xfrm>
           <a:prstGeom xmlns:a="http://schemas.openxmlformats.org/drawingml/2006/main" prst="rect">
             <a:avLst/>
@@ -4392,19 +4672,19 @@
           <p:cNvPr id="45" name="metric-note-知识库条目数">
             <a:extLst xmlns:a="http://schemas.openxmlformats.org/drawingml/2006/main">
               <a:ext uri="{FF2B5EF4-FFF2-40B4-BE49-F238E27FC236}">
-                <a16:creationId xmlns:a16="http://schemas.microsoft.com/office/drawing/2014/main" id="{B96E207F-279C-46B3-A1F9-A89074829552}"/>
-              </a:ext>
-            </a:extLst>
-          </p:cNvPr>
-          <p:cNvSpPr>
-            <a:spLocks xmlns:a="http://schemas.openxmlformats.org/drawingml/2006/main" noGrp="1"/>
-          </p:cNvSpPr>
-          <p:nvPr/>
-        </p:nvSpPr>
-        <p:spPr>
-          <a:xfrm xmlns:a="http://schemas.openxmlformats.org/drawingml/2006/main">
-            <a:off x="9334500" y="4141470"/>
-            <a:ext cx="619125" cy="148590"/>
+                <a16:creationId xmlns:a16="http://schemas.microsoft.com/office/drawing/2014/main" id="{EE466CCB-D336-4695-BA23-B188229123EA}"/>
+              </a:ext>
+            </a:extLst>
+          </p:cNvPr>
+          <p:cNvSpPr>
+            <a:spLocks xmlns:a="http://schemas.openxmlformats.org/drawingml/2006/main" noGrp="1"/>
+          </p:cNvSpPr>
+          <p:nvPr/>
+        </p:nvSpPr>
+        <p:spPr>
+          <a:xfrm xmlns:a="http://schemas.openxmlformats.org/drawingml/2006/main">
+            <a:off x="9334500" y="4324350"/>
+            <a:ext cx="631984" cy="148590"/>
           </a:xfrm>
           <a:prstGeom xmlns:a="http://schemas.openxmlformats.org/drawingml/2006/main" prst="rect">
             <a:avLst/>
@@ -4443,18 +4723,18 @@
           <p:cNvPr id="46" name="results-metrics-note">
             <a:extLst xmlns:a="http://schemas.openxmlformats.org/drawingml/2006/main">
               <a:ext uri="{FF2B5EF4-FFF2-40B4-BE49-F238E27FC236}">
-                <a16:creationId xmlns:a16="http://schemas.microsoft.com/office/drawing/2014/main" id="{83D53588-DE55-4108-A45B-D889E4963077}"/>
-              </a:ext>
-            </a:extLst>
-          </p:cNvPr>
-          <p:cNvSpPr>
-            <a:spLocks xmlns:a="http://schemas.openxmlformats.org/drawingml/2006/main" noGrp="1"/>
-          </p:cNvSpPr>
-          <p:nvPr/>
-        </p:nvSpPr>
-        <p:spPr>
-          <a:xfrm xmlns:a="http://schemas.openxmlformats.org/drawingml/2006/main">
-            <a:off x="7658100" y="4423410"/>
+                <a16:creationId xmlns:a16="http://schemas.microsoft.com/office/drawing/2014/main" id="{13A8015B-BF87-4C05-A1B2-F85E00B1F946}"/>
+              </a:ext>
+            </a:extLst>
+          </p:cNvPr>
+          <p:cNvSpPr>
+            <a:spLocks xmlns:a="http://schemas.openxmlformats.org/drawingml/2006/main" noGrp="1"/>
+          </p:cNvSpPr>
+          <p:nvPr/>
+        </p:nvSpPr>
+        <p:spPr>
+          <a:xfrm xmlns:a="http://schemas.openxmlformats.org/drawingml/2006/main">
+            <a:off x="7658100" y="4789170"/>
             <a:ext cx="4381500" cy="171450"/>
           </a:xfrm>
           <a:prstGeom xmlns:a="http://schemas.openxmlformats.org/drawingml/2006/main" prst="rect">
@@ -4494,19 +4774,19 @@
           <p:cNvPr id="47" name="results-roadmap-kicker">
             <a:extLst xmlns:a="http://schemas.openxmlformats.org/drawingml/2006/main">
               <a:ext uri="{FF2B5EF4-FFF2-40B4-BE49-F238E27FC236}">
-                <a16:creationId xmlns:a16="http://schemas.microsoft.com/office/drawing/2014/main" id="{1B058BE2-55A4-4740-81D3-BDCC205D5CB0}"/>
-              </a:ext>
-            </a:extLst>
-          </p:cNvPr>
-          <p:cNvSpPr>
-            <a:spLocks xmlns:a="http://schemas.openxmlformats.org/drawingml/2006/main" noGrp="1"/>
-          </p:cNvSpPr>
-          <p:nvPr/>
-        </p:nvSpPr>
-        <p:spPr>
-          <a:xfrm xmlns:a="http://schemas.openxmlformats.org/drawingml/2006/main">
-            <a:off x="7658100" y="4728210"/>
-            <a:ext cx="933450" cy="160020"/>
+                <a16:creationId xmlns:a16="http://schemas.microsoft.com/office/drawing/2014/main" id="{85BDF0DF-92F0-4F02-BDE7-E068C5A062AD}"/>
+              </a:ext>
+            </a:extLst>
+          </p:cNvPr>
+          <p:cNvSpPr>
+            <a:spLocks xmlns:a="http://schemas.openxmlformats.org/drawingml/2006/main" noGrp="1"/>
+          </p:cNvSpPr>
+          <p:nvPr/>
+        </p:nvSpPr>
+        <p:spPr>
+          <a:xfrm xmlns:a="http://schemas.openxmlformats.org/drawingml/2006/main">
+            <a:off x="7658100" y="5093970"/>
+            <a:ext cx="953357" cy="160020"/>
           </a:xfrm>
           <a:prstGeom xmlns:a="http://schemas.openxmlformats.org/drawingml/2006/main" prst="rect">
             <a:avLst/>
@@ -4545,18 +4825,18 @@
           <p:cNvPr id="48" name="chip-知识库沉淀">
             <a:extLst xmlns:a="http://schemas.openxmlformats.org/drawingml/2006/main">
               <a:ext uri="{FF2B5EF4-FFF2-40B4-BE49-F238E27FC236}">
-                <a16:creationId xmlns:a16="http://schemas.microsoft.com/office/drawing/2014/main" id="{4713C5E2-BEB0-4CC0-902C-69469A352680}"/>
-              </a:ext>
-            </a:extLst>
-          </p:cNvPr>
-          <p:cNvSpPr>
-            <a:spLocks xmlns:a="http://schemas.openxmlformats.org/drawingml/2006/main" noGrp="1"/>
-          </p:cNvSpPr>
-          <p:nvPr/>
-        </p:nvSpPr>
-        <p:spPr>
-          <a:xfrm xmlns:a="http://schemas.openxmlformats.org/drawingml/2006/main">
-            <a:off x="7658100" y="5021580"/>
+                <a16:creationId xmlns:a16="http://schemas.microsoft.com/office/drawing/2014/main" id="{A67DB4BE-AC98-4BB1-9862-5DB6DF5DC3AA}"/>
+              </a:ext>
+            </a:extLst>
+          </p:cNvPr>
+          <p:cNvSpPr>
+            <a:spLocks xmlns:a="http://schemas.openxmlformats.org/drawingml/2006/main" noGrp="1"/>
+          </p:cNvSpPr>
+          <p:nvPr/>
+        </p:nvSpPr>
+        <p:spPr>
+          <a:xfrm xmlns:a="http://schemas.openxmlformats.org/drawingml/2006/main">
+            <a:off x="7658100" y="5387340"/>
             <a:ext cx="1962150" cy="160020"/>
           </a:xfrm>
           <a:prstGeom xmlns:a="http://schemas.openxmlformats.org/drawingml/2006/main" prst="rect">
@@ -4582,19 +4862,19 @@
           <p:cNvPr id="49" name="chip-text-知识库沉淀">
             <a:extLst xmlns:a="http://schemas.openxmlformats.org/drawingml/2006/main">
               <a:ext uri="{FF2B5EF4-FFF2-40B4-BE49-F238E27FC236}">
-                <a16:creationId xmlns:a16="http://schemas.microsoft.com/office/drawing/2014/main" id="{93F6024B-A4FB-4F77-B275-902E91F1269D}"/>
-              </a:ext>
-            </a:extLst>
-          </p:cNvPr>
-          <p:cNvSpPr>
-            <a:spLocks xmlns:a="http://schemas.openxmlformats.org/drawingml/2006/main" noGrp="1"/>
-          </p:cNvSpPr>
-          <p:nvPr/>
-        </p:nvSpPr>
-        <p:spPr>
-          <a:xfrm xmlns:a="http://schemas.openxmlformats.org/drawingml/2006/main">
-            <a:off x="8305800" y="5021580"/>
-            <a:ext cx="666750" cy="160020"/>
+                <a16:creationId xmlns:a16="http://schemas.microsoft.com/office/drawing/2014/main" id="{1BE93062-B438-4230-A0B8-E53326500061}"/>
+              </a:ext>
+            </a:extLst>
+          </p:cNvPr>
+          <p:cNvSpPr>
+            <a:spLocks xmlns:a="http://schemas.openxmlformats.org/drawingml/2006/main" noGrp="1"/>
+          </p:cNvSpPr>
+          <p:nvPr/>
+        </p:nvSpPr>
+        <p:spPr>
+          <a:xfrm xmlns:a="http://schemas.openxmlformats.org/drawingml/2006/main">
+            <a:off x="8298704" y="5387340"/>
+            <a:ext cx="680942" cy="160020"/>
           </a:xfrm>
           <a:prstGeom xmlns:a="http://schemas.openxmlformats.org/drawingml/2006/main" prst="rect">
             <a:avLst/>
@@ -4633,18 +4913,18 @@
           <p:cNvPr id="50" name="chip-规则覆盖">
             <a:extLst xmlns:a="http://schemas.openxmlformats.org/drawingml/2006/main">
               <a:ext uri="{FF2B5EF4-FFF2-40B4-BE49-F238E27FC236}">
-                <a16:creationId xmlns:a16="http://schemas.microsoft.com/office/drawing/2014/main" id="{5862CE4A-FF8E-48CC-B259-5B1D776B8FCA}"/>
-              </a:ext>
-            </a:extLst>
-          </p:cNvPr>
-          <p:cNvSpPr>
-            <a:spLocks xmlns:a="http://schemas.openxmlformats.org/drawingml/2006/main" noGrp="1"/>
-          </p:cNvSpPr>
-          <p:nvPr/>
-        </p:nvSpPr>
-        <p:spPr>
-          <a:xfrm xmlns:a="http://schemas.openxmlformats.org/drawingml/2006/main">
-            <a:off x="9696450" y="5021580"/>
+                <a16:creationId xmlns:a16="http://schemas.microsoft.com/office/drawing/2014/main" id="{229B0FC5-A52D-4687-BEA5-CA36D3E593E1}"/>
+              </a:ext>
+            </a:extLst>
+          </p:cNvPr>
+          <p:cNvSpPr>
+            <a:spLocks xmlns:a="http://schemas.openxmlformats.org/drawingml/2006/main" noGrp="1"/>
+          </p:cNvSpPr>
+          <p:nvPr/>
+        </p:nvSpPr>
+        <p:spPr>
+          <a:xfrm xmlns:a="http://schemas.openxmlformats.org/drawingml/2006/main">
+            <a:off x="9696450" y="5387340"/>
             <a:ext cx="1962150" cy="160020"/>
           </a:xfrm>
           <a:prstGeom xmlns:a="http://schemas.openxmlformats.org/drawingml/2006/main" prst="rect">
@@ -4670,19 +4950,19 @@
           <p:cNvPr id="51" name="chip-text-规则覆盖">
             <a:extLst xmlns:a="http://schemas.openxmlformats.org/drawingml/2006/main">
               <a:ext uri="{FF2B5EF4-FFF2-40B4-BE49-F238E27FC236}">
-                <a16:creationId xmlns:a16="http://schemas.microsoft.com/office/drawing/2014/main" id="{E2182311-8707-4816-AE03-B7D8C9CA1540}"/>
-              </a:ext>
-            </a:extLst>
-          </p:cNvPr>
-          <p:cNvSpPr>
-            <a:spLocks xmlns:a="http://schemas.openxmlformats.org/drawingml/2006/main" noGrp="1"/>
-          </p:cNvSpPr>
-          <p:nvPr/>
-        </p:nvSpPr>
-        <p:spPr>
-          <a:xfrm xmlns:a="http://schemas.openxmlformats.org/drawingml/2006/main">
-            <a:off x="10410825" y="5021580"/>
-            <a:ext cx="533400" cy="160020"/>
+                <a16:creationId xmlns:a16="http://schemas.microsoft.com/office/drawing/2014/main" id="{EDB3ECB7-06F4-46FD-B7E8-C4834E1303D1}"/>
+              </a:ext>
+            </a:extLst>
+          </p:cNvPr>
+          <p:cNvSpPr>
+            <a:spLocks xmlns:a="http://schemas.openxmlformats.org/drawingml/2006/main" noGrp="1"/>
+          </p:cNvSpPr>
+          <p:nvPr/>
+        </p:nvSpPr>
+        <p:spPr>
+          <a:xfrm xmlns:a="http://schemas.openxmlformats.org/drawingml/2006/main">
+            <a:off x="10405158" y="5387340"/>
+            <a:ext cx="544735" cy="160020"/>
           </a:xfrm>
           <a:prstGeom xmlns:a="http://schemas.openxmlformats.org/drawingml/2006/main" prst="rect">
             <a:avLst/>
@@ -4721,18 +5001,18 @@
           <p:cNvPr id="52" name="chip-部署监控">
             <a:extLst xmlns:a="http://schemas.openxmlformats.org/drawingml/2006/main">
               <a:ext uri="{FF2B5EF4-FFF2-40B4-BE49-F238E27FC236}">
-                <a16:creationId xmlns:a16="http://schemas.microsoft.com/office/drawing/2014/main" id="{2605F94A-B6A9-4818-937B-DF764E1859DE}"/>
-              </a:ext>
-            </a:extLst>
-          </p:cNvPr>
-          <p:cNvSpPr>
-            <a:spLocks xmlns:a="http://schemas.openxmlformats.org/drawingml/2006/main" noGrp="1"/>
-          </p:cNvSpPr>
-          <p:nvPr/>
-        </p:nvSpPr>
-        <p:spPr>
-          <a:xfrm xmlns:a="http://schemas.openxmlformats.org/drawingml/2006/main">
-            <a:off x="7658100" y="5257800"/>
+                <a16:creationId xmlns:a16="http://schemas.microsoft.com/office/drawing/2014/main" id="{CEEF167F-55C5-41BA-800C-169920A2A35F}"/>
+              </a:ext>
+            </a:extLst>
+          </p:cNvPr>
+          <p:cNvSpPr>
+            <a:spLocks xmlns:a="http://schemas.openxmlformats.org/drawingml/2006/main" noGrp="1"/>
+          </p:cNvSpPr>
+          <p:nvPr/>
+        </p:nvSpPr>
+        <p:spPr>
+          <a:xfrm xmlns:a="http://schemas.openxmlformats.org/drawingml/2006/main">
+            <a:off x="7658100" y="5623560"/>
             <a:ext cx="1962150" cy="160020"/>
           </a:xfrm>
           <a:prstGeom xmlns:a="http://schemas.openxmlformats.org/drawingml/2006/main" prst="rect">
@@ -4758,19 +5038,19 @@
           <p:cNvPr id="53" name="chip-text-部署监控">
             <a:extLst xmlns:a="http://schemas.openxmlformats.org/drawingml/2006/main">
               <a:ext uri="{FF2B5EF4-FFF2-40B4-BE49-F238E27FC236}">
-                <a16:creationId xmlns:a16="http://schemas.microsoft.com/office/drawing/2014/main" id="{C218B7DF-F8A0-4771-BC76-9B0A6058B1BC}"/>
-              </a:ext>
-            </a:extLst>
-          </p:cNvPr>
-          <p:cNvSpPr>
-            <a:spLocks xmlns:a="http://schemas.openxmlformats.org/drawingml/2006/main" noGrp="1"/>
-          </p:cNvSpPr>
-          <p:nvPr/>
-        </p:nvSpPr>
-        <p:spPr>
-          <a:xfrm xmlns:a="http://schemas.openxmlformats.org/drawingml/2006/main">
-            <a:off x="8372475" y="5257800"/>
-            <a:ext cx="533400" cy="160020"/>
+                <a16:creationId xmlns:a16="http://schemas.microsoft.com/office/drawing/2014/main" id="{6EEAA068-F2AB-4A3D-B725-F5A45FB574A6}"/>
+              </a:ext>
+            </a:extLst>
+          </p:cNvPr>
+          <p:cNvSpPr>
+            <a:spLocks xmlns:a="http://schemas.openxmlformats.org/drawingml/2006/main" noGrp="1"/>
+          </p:cNvSpPr>
+          <p:nvPr/>
+        </p:nvSpPr>
+        <p:spPr>
+          <a:xfrm xmlns:a="http://schemas.openxmlformats.org/drawingml/2006/main">
+            <a:off x="8366808" y="5623560"/>
+            <a:ext cx="544735" cy="160020"/>
           </a:xfrm>
           <a:prstGeom xmlns:a="http://schemas.openxmlformats.org/drawingml/2006/main" prst="rect">
             <a:avLst/>
@@ -4809,18 +5089,18 @@
           <p:cNvPr id="54" name="chip-指标运营">
             <a:extLst xmlns:a="http://schemas.openxmlformats.org/drawingml/2006/main">
               <a:ext uri="{FF2B5EF4-FFF2-40B4-BE49-F238E27FC236}">
-                <a16:creationId xmlns:a16="http://schemas.microsoft.com/office/drawing/2014/main" id="{BBB5B9FF-F7E8-4E31-88D0-B763132DA2D3}"/>
-              </a:ext>
-            </a:extLst>
-          </p:cNvPr>
-          <p:cNvSpPr>
-            <a:spLocks xmlns:a="http://schemas.openxmlformats.org/drawingml/2006/main" noGrp="1"/>
-          </p:cNvSpPr>
-          <p:nvPr/>
-        </p:nvSpPr>
-        <p:spPr>
-          <a:xfrm xmlns:a="http://schemas.openxmlformats.org/drawingml/2006/main">
-            <a:off x="9696450" y="5257800"/>
+                <a16:creationId xmlns:a16="http://schemas.microsoft.com/office/drawing/2014/main" id="{5296C25C-D292-4F6A-A108-16A91ADCC0D9}"/>
+              </a:ext>
+            </a:extLst>
+          </p:cNvPr>
+          <p:cNvSpPr>
+            <a:spLocks xmlns:a="http://schemas.openxmlformats.org/drawingml/2006/main" noGrp="1"/>
+          </p:cNvSpPr>
+          <p:nvPr/>
+        </p:nvSpPr>
+        <p:spPr>
+          <a:xfrm xmlns:a="http://schemas.openxmlformats.org/drawingml/2006/main">
+            <a:off x="9696450" y="5623560"/>
             <a:ext cx="1962150" cy="160020"/>
           </a:xfrm>
           <a:prstGeom xmlns:a="http://schemas.openxmlformats.org/drawingml/2006/main" prst="rect">
@@ -4846,19 +5126,19 @@
           <p:cNvPr id="55" name="chip-text-指标运营">
             <a:extLst xmlns:a="http://schemas.openxmlformats.org/drawingml/2006/main">
               <a:ext uri="{FF2B5EF4-FFF2-40B4-BE49-F238E27FC236}">
-                <a16:creationId xmlns:a16="http://schemas.microsoft.com/office/drawing/2014/main" id="{CAB8FE3A-6E1C-4218-BC43-6F4891B083F4}"/>
-              </a:ext>
-            </a:extLst>
-          </p:cNvPr>
-          <p:cNvSpPr>
-            <a:spLocks xmlns:a="http://schemas.openxmlformats.org/drawingml/2006/main" noGrp="1"/>
-          </p:cNvSpPr>
-          <p:nvPr/>
-        </p:nvSpPr>
-        <p:spPr>
-          <a:xfrm xmlns:a="http://schemas.openxmlformats.org/drawingml/2006/main">
-            <a:off x="10410825" y="5257800"/>
-            <a:ext cx="533400" cy="160020"/>
+                <a16:creationId xmlns:a16="http://schemas.microsoft.com/office/drawing/2014/main" id="{8D3D77F5-87C5-4A17-8643-973C96ED5772}"/>
+              </a:ext>
+            </a:extLst>
+          </p:cNvPr>
+          <p:cNvSpPr>
+            <a:spLocks xmlns:a="http://schemas.openxmlformats.org/drawingml/2006/main" noGrp="1"/>
+          </p:cNvSpPr>
+          <p:nvPr/>
+        </p:nvSpPr>
+        <p:spPr>
+          <a:xfrm xmlns:a="http://schemas.openxmlformats.org/drawingml/2006/main">
+            <a:off x="10405158" y="5623560"/>
+            <a:ext cx="544735" cy="160020"/>
           </a:xfrm>
           <a:prstGeom xmlns:a="http://schemas.openxmlformats.org/drawingml/2006/main" prst="rect">
             <a:avLst/>
@@ -4895,7 +5175,7 @@
     </p:spTree>
     <p:extLst>
       <p:ext uri="{BB962C8B-B14F-4D97-AF65-F5344CB8AC3E}">
-        <p14:creationId xmlns:p14="http://schemas.microsoft.com/office/powerpoint/2010/main" val="1277890537"/>
+        <p14:creationId xmlns:p14="http://schemas.microsoft.com/office/powerpoint/2010/main" val="1769223588"/>
       </p:ext>
     </p:extLst>
   </p:cSld>
@@ -4926,7 +5206,7 @@
           <p:cNvPr id="1" name="header-kicker-核心-api-与页面映射">
             <a:extLst xmlns:a="http://schemas.openxmlformats.org/drawingml/2006/main">
               <a:ext uri="{FF2B5EF4-FFF2-40B4-BE49-F238E27FC236}">
-                <a16:creationId xmlns:a16="http://schemas.microsoft.com/office/drawing/2014/main" id="{F6961DA9-7E9D-4200-A728-C47D8F2C9F5B}"/>
+                <a16:creationId xmlns:a16="http://schemas.microsoft.com/office/drawing/2014/main" id="{9C76905C-5684-4462-B657-7ACD2F6238EE}"/>
               </a:ext>
             </a:extLst>
           </p:cNvPr>
@@ -4977,7 +5257,7 @@
           <p:cNvPr id="2" name="header-title-核心-api-与页面映射">
             <a:extLst xmlns:a="http://schemas.openxmlformats.org/drawingml/2006/main">
               <a:ext uri="{FF2B5EF4-FFF2-40B4-BE49-F238E27FC236}">
-                <a16:creationId xmlns:a16="http://schemas.microsoft.com/office/drawing/2014/main" id="{07AE6F23-1A3E-45C5-BFE8-830C37226A07}"/>
+                <a16:creationId xmlns:a16="http://schemas.microsoft.com/office/drawing/2014/main" id="{407319E9-377A-4DA3-989C-EFF6386269D5}"/>
               </a:ext>
             </a:extLst>
           </p:cNvPr>
@@ -5028,7 +5308,7 @@
           <p:cNvPr id="3" name="header-subtitle-核心-api-与页面映射">
             <a:extLst xmlns:a="http://schemas.openxmlformats.org/drawingml/2006/main">
               <a:ext uri="{FF2B5EF4-FFF2-40B4-BE49-F238E27FC236}">
-                <a16:creationId xmlns:a16="http://schemas.microsoft.com/office/drawing/2014/main" id="{01489D32-3538-43CB-A4A6-C6F876734D08}"/>
+                <a16:creationId xmlns:a16="http://schemas.microsoft.com/office/drawing/2014/main" id="{8E6165DC-5A53-4AFF-A839-3CF4EA6A3B8C}"/>
               </a:ext>
             </a:extLst>
           </p:cNvPr>
@@ -5079,7 +5359,7 @@
           <p:cNvPr id="4" name="heading-underline">
             <a:extLst xmlns:a="http://schemas.openxmlformats.org/drawingml/2006/main">
               <a:ext uri="{FF2B5EF4-FFF2-40B4-BE49-F238E27FC236}">
-                <a16:creationId xmlns:a16="http://schemas.microsoft.com/office/drawing/2014/main" id="{59D58657-6AD7-4488-B7F7-D3CEFC936053}"/>
+                <a16:creationId xmlns:a16="http://schemas.microsoft.com/office/drawing/2014/main" id="{E84E90A2-83B5-4D4D-BD21-9EF87047374A}"/>
               </a:ext>
             </a:extLst>
           </p:cNvPr>
@@ -5116,7 +5396,7 @@
           <p:cNvPr id="5" name="appendix-pages-kicker">
             <a:extLst xmlns:a="http://schemas.openxmlformats.org/drawingml/2006/main">
               <a:ext uri="{FF2B5EF4-FFF2-40B4-BE49-F238E27FC236}">
-                <a16:creationId xmlns:a16="http://schemas.microsoft.com/office/drawing/2014/main" id="{2F843623-88F8-4B59-9929-B8A8FEAA49FC}"/>
+                <a16:creationId xmlns:a16="http://schemas.microsoft.com/office/drawing/2014/main" id="{28A637E7-F283-4C48-922A-18EAABCDD1FA}"/>
               </a:ext>
             </a:extLst>
           </p:cNvPr>
@@ -5128,7 +5408,7 @@
         <p:spPr>
           <a:xfrm xmlns:a="http://schemas.openxmlformats.org/drawingml/2006/main">
             <a:off x="533400" y="2000250"/>
-            <a:ext cx="533400" cy="160020"/>
+            <a:ext cx="544735" cy="160020"/>
           </a:xfrm>
           <a:prstGeom xmlns:a="http://schemas.openxmlformats.org/drawingml/2006/main" prst="rect">
             <a:avLst/>
@@ -5167,7 +5447,7 @@
           <p:cNvPr id="6" name="appendix-pages-title">
             <a:extLst xmlns:a="http://schemas.openxmlformats.org/drawingml/2006/main">
               <a:ext uri="{FF2B5EF4-FFF2-40B4-BE49-F238E27FC236}">
-                <a16:creationId xmlns:a16="http://schemas.microsoft.com/office/drawing/2014/main" id="{4F3E8A93-BABC-4C26-8257-0048A9414EC8}"/>
+                <a16:creationId xmlns:a16="http://schemas.microsoft.com/office/drawing/2014/main" id="{C7F9EF84-4C99-4D69-AC8C-052BF2B14D86}"/>
               </a:ext>
             </a:extLst>
           </p:cNvPr>
@@ -5179,7 +5459,7 @@
         <p:spPr>
           <a:xfrm xmlns:a="http://schemas.openxmlformats.org/drawingml/2006/main">
             <a:off x="533400" y="2274570"/>
-            <a:ext cx="2171700" cy="434340"/>
+            <a:ext cx="2217420" cy="434340"/>
           </a:xfrm>
           <a:prstGeom xmlns:a="http://schemas.openxmlformats.org/drawingml/2006/main" prst="rect">
             <a:avLst/>
@@ -5218,7 +5498,7 @@
           <p:cNvPr id="7" name="route-path-agent审计">
             <a:extLst xmlns:a="http://schemas.openxmlformats.org/drawingml/2006/main">
               <a:ext uri="{FF2B5EF4-FFF2-40B4-BE49-F238E27FC236}">
-                <a16:creationId xmlns:a16="http://schemas.microsoft.com/office/drawing/2014/main" id="{6CC1E17D-D7AE-4E95-B680-76A2E3A08F15}"/>
+                <a16:creationId xmlns:a16="http://schemas.microsoft.com/office/drawing/2014/main" id="{2CB3DFD4-C415-4790-8BF6-3A1872B1D358}"/>
               </a:ext>
             </a:extLst>
           </p:cNvPr>
@@ -5230,7 +5510,7 @@
         <p:spPr>
           <a:xfrm xmlns:a="http://schemas.openxmlformats.org/drawingml/2006/main">
             <a:off x="533400" y="2823210"/>
-            <a:ext cx="1059847" cy="171450"/>
+            <a:ext cx="1065847" cy="171450"/>
           </a:xfrm>
           <a:prstGeom xmlns:a="http://schemas.openxmlformats.org/drawingml/2006/main" prst="rect">
             <a:avLst/>
@@ -5269,7 +5549,7 @@
           <p:cNvPr id="8" name="route-desc-agent审计">
             <a:extLst xmlns:a="http://schemas.openxmlformats.org/drawingml/2006/main">
               <a:ext uri="{FF2B5EF4-FFF2-40B4-BE49-F238E27FC236}">
-                <a16:creationId xmlns:a16="http://schemas.microsoft.com/office/drawing/2014/main" id="{669A1B3C-F089-48C0-A275-B90935D2FAA1}"/>
+                <a16:creationId xmlns:a16="http://schemas.microsoft.com/office/drawing/2014/main" id="{5D7DE9F1-0C69-4828-8232-E176408824B2}"/>
               </a:ext>
             </a:extLst>
           </p:cNvPr>
@@ -5281,7 +5561,7 @@
         <p:spPr>
           <a:xfrm xmlns:a="http://schemas.openxmlformats.org/drawingml/2006/main">
             <a:off x="533400" y="3032760"/>
-            <a:ext cx="2318004" cy="320040"/>
+            <a:ext cx="2377631" cy="160020"/>
           </a:xfrm>
           <a:prstGeom xmlns:a="http://schemas.openxmlformats.org/drawingml/2006/main" prst="rect">
             <a:avLst/>
@@ -5320,19 +5600,19 @@
           <p:cNvPr id="9" name="route-path-dashboard-仪表盘">
             <a:extLst xmlns:a="http://schemas.openxmlformats.org/drawingml/2006/main">
               <a:ext uri="{FF2B5EF4-FFF2-40B4-BE49-F238E27FC236}">
-                <a16:creationId xmlns:a16="http://schemas.microsoft.com/office/drawing/2014/main" id="{BAE4BA5A-3E81-4BB6-A308-2C5D0142D9B3}"/>
-              </a:ext>
-            </a:extLst>
-          </p:cNvPr>
-          <p:cNvSpPr>
-            <a:spLocks xmlns:a="http://schemas.openxmlformats.org/drawingml/2006/main" noGrp="1"/>
-          </p:cNvSpPr>
-          <p:nvPr/>
-        </p:nvSpPr>
-        <p:spPr>
-          <a:xfrm xmlns:a="http://schemas.openxmlformats.org/drawingml/2006/main">
-            <a:off x="533400" y="3467100"/>
-            <a:ext cx="1546765" cy="171450"/>
+                <a16:creationId xmlns:a16="http://schemas.microsoft.com/office/drawing/2014/main" id="{F5531DC3-B79F-4B17-98CF-58FF87BFE3E2}"/>
+              </a:ext>
+            </a:extLst>
+          </p:cNvPr>
+          <p:cNvSpPr>
+            <a:spLocks xmlns:a="http://schemas.openxmlformats.org/drawingml/2006/main" noGrp="1"/>
+          </p:cNvSpPr>
+          <p:nvPr/>
+        </p:nvSpPr>
+        <p:spPr>
+          <a:xfrm xmlns:a="http://schemas.openxmlformats.org/drawingml/2006/main">
+            <a:off x="533400" y="3307080"/>
+            <a:ext cx="1555718" cy="171450"/>
           </a:xfrm>
           <a:prstGeom xmlns:a="http://schemas.openxmlformats.org/drawingml/2006/main" prst="rect">
             <a:avLst/>
@@ -5371,19 +5651,19 @@
           <p:cNvPr id="10" name="route-desc-dashboard-仪表盘">
             <a:extLst xmlns:a="http://schemas.openxmlformats.org/drawingml/2006/main">
               <a:ext uri="{FF2B5EF4-FFF2-40B4-BE49-F238E27FC236}">
-                <a16:creationId xmlns:a16="http://schemas.microsoft.com/office/drawing/2014/main" id="{D23F59BB-E1BE-46E2-BE72-5E3326B16CFE}"/>
-              </a:ext>
-            </a:extLst>
-          </p:cNvPr>
-          <p:cNvSpPr>
-            <a:spLocks xmlns:a="http://schemas.openxmlformats.org/drawingml/2006/main" noGrp="1"/>
-          </p:cNvSpPr>
-          <p:nvPr/>
-        </p:nvSpPr>
-        <p:spPr>
-          <a:xfrm xmlns:a="http://schemas.openxmlformats.org/drawingml/2006/main">
-            <a:off x="533400" y="3676650"/>
-            <a:ext cx="1866900" cy="160020"/>
+                <a16:creationId xmlns:a16="http://schemas.microsoft.com/office/drawing/2014/main" id="{D0F28C75-B4BC-4034-88FE-61676157FD55}"/>
+              </a:ext>
+            </a:extLst>
+          </p:cNvPr>
+          <p:cNvSpPr>
+            <a:spLocks xmlns:a="http://schemas.openxmlformats.org/drawingml/2006/main" noGrp="1"/>
+          </p:cNvSpPr>
+          <p:nvPr/>
+        </p:nvSpPr>
+        <p:spPr>
+          <a:xfrm xmlns:a="http://schemas.openxmlformats.org/drawingml/2006/main">
+            <a:off x="533400" y="3516630"/>
+            <a:ext cx="1906810" cy="160020"/>
           </a:xfrm>
           <a:prstGeom xmlns:a="http://schemas.openxmlformats.org/drawingml/2006/main" prst="rect">
             <a:avLst/>
@@ -5422,19 +5702,19 @@
           <p:cNvPr id="11" name="route-path-projects-项目管理">
             <a:extLst xmlns:a="http://schemas.openxmlformats.org/drawingml/2006/main">
               <a:ext uri="{FF2B5EF4-FFF2-40B4-BE49-F238E27FC236}">
-                <a16:creationId xmlns:a16="http://schemas.microsoft.com/office/drawing/2014/main" id="{E86E722C-3FC7-425E-A083-85BD53C4C93F}"/>
-              </a:ext>
-            </a:extLst>
-          </p:cNvPr>
-          <p:cNvSpPr>
-            <a:spLocks xmlns:a="http://schemas.openxmlformats.org/drawingml/2006/main" noGrp="1"/>
-          </p:cNvSpPr>
-          <p:nvPr/>
-        </p:nvSpPr>
-        <p:spPr>
-          <a:xfrm xmlns:a="http://schemas.openxmlformats.org/drawingml/2006/main">
-            <a:off x="533400" y="3950970"/>
-            <a:ext cx="1603629" cy="171450"/>
+                <a16:creationId xmlns:a16="http://schemas.microsoft.com/office/drawing/2014/main" id="{6393BAC6-D5A1-4853-A410-8A4B8DA5F1C8}"/>
+              </a:ext>
+            </a:extLst>
+          </p:cNvPr>
+          <p:cNvSpPr>
+            <a:spLocks xmlns:a="http://schemas.openxmlformats.org/drawingml/2006/main" noGrp="1"/>
+          </p:cNvSpPr>
+          <p:nvPr/>
+        </p:nvSpPr>
+        <p:spPr>
+          <a:xfrm xmlns:a="http://schemas.openxmlformats.org/drawingml/2006/main">
+            <a:off x="533400" y="3790950"/>
+            <a:ext cx="1615535" cy="171450"/>
           </a:xfrm>
           <a:prstGeom xmlns:a="http://schemas.openxmlformats.org/drawingml/2006/main" prst="rect">
             <a:avLst/>
@@ -5473,19 +5753,19 @@
           <p:cNvPr id="12" name="route-desc-projects-项目管理">
             <a:extLst xmlns:a="http://schemas.openxmlformats.org/drawingml/2006/main">
               <a:ext uri="{FF2B5EF4-FFF2-40B4-BE49-F238E27FC236}">
-                <a16:creationId xmlns:a16="http://schemas.microsoft.com/office/drawing/2014/main" id="{12CBBCA2-B2B9-48A7-9320-9B74DFB90B50}"/>
-              </a:ext>
-            </a:extLst>
-          </p:cNvPr>
-          <p:cNvSpPr>
-            <a:spLocks xmlns:a="http://schemas.openxmlformats.org/drawingml/2006/main" noGrp="1"/>
-          </p:cNvSpPr>
-          <p:nvPr/>
-        </p:nvSpPr>
-        <p:spPr>
-          <a:xfrm xmlns:a="http://schemas.openxmlformats.org/drawingml/2006/main">
-            <a:off x="533400" y="4160520"/>
-            <a:ext cx="1822799" cy="320040"/>
+                <a16:creationId xmlns:a16="http://schemas.microsoft.com/office/drawing/2014/main" id="{AFCC0897-6FE4-44A1-B0D2-3004BFDB9F6B}"/>
+              </a:ext>
+            </a:extLst>
+          </p:cNvPr>
+          <p:cNvSpPr>
+            <a:spLocks xmlns:a="http://schemas.openxmlformats.org/drawingml/2006/main" noGrp="1"/>
+          </p:cNvSpPr>
+          <p:nvPr/>
+        </p:nvSpPr>
+        <p:spPr>
+          <a:xfrm xmlns:a="http://schemas.openxmlformats.org/drawingml/2006/main">
+            <a:off x="533400" y="4000500"/>
+            <a:ext cx="1868805" cy="160020"/>
           </a:xfrm>
           <a:prstGeom xmlns:a="http://schemas.openxmlformats.org/drawingml/2006/main" prst="rect">
             <a:avLst/>
@@ -5524,19 +5804,19 @@
           <p:cNvPr id="13" name="route-path-instant-analysis-即时分析">
             <a:extLst xmlns:a="http://schemas.openxmlformats.org/drawingml/2006/main">
               <a:ext uri="{FF2B5EF4-FFF2-40B4-BE49-F238E27FC236}">
-                <a16:creationId xmlns:a16="http://schemas.microsoft.com/office/drawing/2014/main" id="{AD94CF7B-C848-445E-93CC-44D3FA33EB81}"/>
-              </a:ext>
-            </a:extLst>
-          </p:cNvPr>
-          <p:cNvSpPr>
-            <a:spLocks xmlns:a="http://schemas.openxmlformats.org/drawingml/2006/main" noGrp="1"/>
-          </p:cNvSpPr>
-          <p:nvPr/>
-        </p:nvSpPr>
-        <p:spPr>
-          <a:xfrm xmlns:a="http://schemas.openxmlformats.org/drawingml/2006/main">
-            <a:off x="533400" y="4594860"/>
-            <a:ext cx="2291715" cy="171450"/>
+                <a16:creationId xmlns:a16="http://schemas.microsoft.com/office/drawing/2014/main" id="{43A845A1-7D47-4512-9394-D83E2D72752E}"/>
+              </a:ext>
+            </a:extLst>
+          </p:cNvPr>
+          <p:cNvSpPr>
+            <a:spLocks xmlns:a="http://schemas.openxmlformats.org/drawingml/2006/main" noGrp="1"/>
+          </p:cNvSpPr>
+          <p:nvPr/>
+        </p:nvSpPr>
+        <p:spPr>
+          <a:xfrm xmlns:a="http://schemas.openxmlformats.org/drawingml/2006/main">
+            <a:off x="533400" y="4274820"/>
+            <a:ext cx="2303621" cy="171450"/>
           </a:xfrm>
           <a:prstGeom xmlns:a="http://schemas.openxmlformats.org/drawingml/2006/main" prst="rect">
             <a:avLst/>
@@ -5575,19 +5855,19 @@
           <p:cNvPr id="14" name="route-desc-instant-analysis-即时分析">
             <a:extLst xmlns:a="http://schemas.openxmlformats.org/drawingml/2006/main">
               <a:ext uri="{FF2B5EF4-FFF2-40B4-BE49-F238E27FC236}">
-                <a16:creationId xmlns:a16="http://schemas.microsoft.com/office/drawing/2014/main" id="{BF953033-92B6-4A62-B4EE-D95E89F5FBA4}"/>
-              </a:ext>
-            </a:extLst>
-          </p:cNvPr>
-          <p:cNvSpPr>
-            <a:spLocks xmlns:a="http://schemas.openxmlformats.org/drawingml/2006/main" noGrp="1"/>
-          </p:cNvSpPr>
-          <p:nvPr/>
-        </p:nvSpPr>
-        <p:spPr>
-          <a:xfrm xmlns:a="http://schemas.openxmlformats.org/drawingml/2006/main">
-            <a:off x="533400" y="4804410"/>
-            <a:ext cx="1733550" cy="160020"/>
+                <a16:creationId xmlns:a16="http://schemas.microsoft.com/office/drawing/2014/main" id="{DC73A135-E223-488D-B401-AC7B51FC67C6}"/>
+              </a:ext>
+            </a:extLst>
+          </p:cNvPr>
+          <p:cNvSpPr>
+            <a:spLocks xmlns:a="http://schemas.openxmlformats.org/drawingml/2006/main" noGrp="1"/>
+          </p:cNvSpPr>
+          <p:nvPr/>
+        </p:nvSpPr>
+        <p:spPr>
+          <a:xfrm xmlns:a="http://schemas.openxmlformats.org/drawingml/2006/main">
+            <a:off x="533400" y="4484370"/>
+            <a:ext cx="1770602" cy="320040"/>
           </a:xfrm>
           <a:prstGeom xmlns:a="http://schemas.openxmlformats.org/drawingml/2006/main" prst="rect">
             <a:avLst/>
@@ -5626,19 +5906,19 @@
           <p:cNvPr id="15" name="route-path-audit-tasks-传统任务">
             <a:extLst xmlns:a="http://schemas.openxmlformats.org/drawingml/2006/main">
               <a:ext uri="{FF2B5EF4-FFF2-40B4-BE49-F238E27FC236}">
-                <a16:creationId xmlns:a16="http://schemas.microsoft.com/office/drawing/2014/main" id="{E3622E45-0D9C-4DC7-A96C-BB0EABBF5501}"/>
-              </a:ext>
-            </a:extLst>
-          </p:cNvPr>
-          <p:cNvSpPr>
-            <a:spLocks xmlns:a="http://schemas.openxmlformats.org/drawingml/2006/main" noGrp="1"/>
-          </p:cNvSpPr>
-          <p:nvPr/>
-        </p:nvSpPr>
-        <p:spPr>
-          <a:xfrm xmlns:a="http://schemas.openxmlformats.org/drawingml/2006/main">
-            <a:off x="533400" y="5078730"/>
-            <a:ext cx="1861661" cy="171450"/>
+                <a16:creationId xmlns:a16="http://schemas.microsoft.com/office/drawing/2014/main" id="{48F7DE37-CE7B-4118-915D-5AC758B3380D}"/>
+              </a:ext>
+            </a:extLst>
+          </p:cNvPr>
+          <p:cNvSpPr>
+            <a:spLocks xmlns:a="http://schemas.openxmlformats.org/drawingml/2006/main" noGrp="1"/>
+          </p:cNvSpPr>
+          <p:nvPr/>
+        </p:nvSpPr>
+        <p:spPr>
+          <a:xfrm xmlns:a="http://schemas.openxmlformats.org/drawingml/2006/main">
+            <a:off x="533400" y="4918710"/>
+            <a:ext cx="1873568" cy="171450"/>
           </a:xfrm>
           <a:prstGeom xmlns:a="http://schemas.openxmlformats.org/drawingml/2006/main" prst="rect">
             <a:avLst/>
@@ -5677,19 +5957,19 @@
           <p:cNvPr id="16" name="route-desc-audit-tasks-传统任务">
             <a:extLst xmlns:a="http://schemas.openxmlformats.org/drawingml/2006/main">
               <a:ext uri="{FF2B5EF4-FFF2-40B4-BE49-F238E27FC236}">
-                <a16:creationId xmlns:a16="http://schemas.microsoft.com/office/drawing/2014/main" id="{F05CDFB0-F4A9-4B44-97AD-2EF0368C89CF}"/>
-              </a:ext>
-            </a:extLst>
-          </p:cNvPr>
-          <p:cNvSpPr>
-            <a:spLocks xmlns:a="http://schemas.openxmlformats.org/drawingml/2006/main" noGrp="1"/>
-          </p:cNvSpPr>
-          <p:nvPr/>
-        </p:nvSpPr>
-        <p:spPr>
-          <a:xfrm xmlns:a="http://schemas.openxmlformats.org/drawingml/2006/main">
-            <a:off x="533400" y="5288280"/>
-            <a:ext cx="1978438" cy="160020"/>
+                <a16:creationId xmlns:a16="http://schemas.microsoft.com/office/drawing/2014/main" id="{326B0A37-9620-494F-B2FF-9D1FE41CE804}"/>
+              </a:ext>
+            </a:extLst>
+          </p:cNvPr>
+          <p:cNvSpPr>
+            <a:spLocks xmlns:a="http://schemas.openxmlformats.org/drawingml/2006/main" noGrp="1"/>
+          </p:cNvSpPr>
+          <p:nvPr/>
+        </p:nvSpPr>
+        <p:spPr>
+          <a:xfrm xmlns:a="http://schemas.openxmlformats.org/drawingml/2006/main">
+            <a:off x="533400" y="5128260"/>
+            <a:ext cx="2026729" cy="320040"/>
           </a:xfrm>
           <a:prstGeom xmlns:a="http://schemas.openxmlformats.org/drawingml/2006/main" prst="rect">
             <a:avLst/>
@@ -5728,7 +6008,7 @@
           <p:cNvPr id="17" name="route-path-audit-rules-prompts-admin-recycle-bin">
             <a:extLst xmlns:a="http://schemas.openxmlformats.org/drawingml/2006/main">
               <a:ext uri="{FF2B5EF4-FFF2-40B4-BE49-F238E27FC236}">
-                <a16:creationId xmlns:a16="http://schemas.microsoft.com/office/drawing/2014/main" id="{FE278F34-A6EA-4106-9C2C-9F90435CFF73}"/>
+                <a16:creationId xmlns:a16="http://schemas.microsoft.com/office/drawing/2014/main" id="{A257B89D-A78D-4A3E-974B-1063792D9F08}"/>
               </a:ext>
             </a:extLst>
           </p:cNvPr>
@@ -5779,7 +6059,7 @@
           <p:cNvPr id="18" name="route-desc-audit-rules-prompts-admin-recycle-bin">
             <a:extLst xmlns:a="http://schemas.openxmlformats.org/drawingml/2006/main">
               <a:ext uri="{FF2B5EF4-FFF2-40B4-BE49-F238E27FC236}">
-                <a16:creationId xmlns:a16="http://schemas.microsoft.com/office/drawing/2014/main" id="{A3946B93-0554-4C4E-8AE9-2EF0EBF60CF6}"/>
+                <a16:creationId xmlns:a16="http://schemas.microsoft.com/office/drawing/2014/main" id="{0B87E0E6-432B-443F-8055-0E352FC8048D}"/>
               </a:ext>
             </a:extLst>
           </p:cNvPr>
@@ -5791,7 +6071,7 @@
         <p:spPr>
           <a:xfrm xmlns:a="http://schemas.openxmlformats.org/drawingml/2006/main">
             <a:off x="533400" y="5772150"/>
-            <a:ext cx="1200150" cy="160020"/>
+            <a:ext cx="1225772" cy="320040"/>
           </a:xfrm>
           <a:prstGeom xmlns:a="http://schemas.openxmlformats.org/drawingml/2006/main" prst="rect">
             <a:avLst/>
@@ -5830,7 +6110,7 @@
           <p:cNvPr id="19" name="appendix-apis-kicker">
             <a:extLst xmlns:a="http://schemas.openxmlformats.org/drawingml/2006/main">
               <a:ext uri="{FF2B5EF4-FFF2-40B4-BE49-F238E27FC236}">
-                <a16:creationId xmlns:a16="http://schemas.microsoft.com/office/drawing/2014/main" id="{19BD93B7-F1E1-4484-9C7D-4BDA3AE89D03}"/>
+                <a16:creationId xmlns:a16="http://schemas.microsoft.com/office/drawing/2014/main" id="{5A6A3A54-54CF-4784-886D-92D6DEF4E5DA}"/>
               </a:ext>
             </a:extLst>
           </p:cNvPr>
@@ -5842,7 +6122,7 @@
         <p:spPr>
           <a:xfrm xmlns:a="http://schemas.openxmlformats.org/drawingml/2006/main">
             <a:off x="4514850" y="2000250"/>
-            <a:ext cx="533400" cy="160020"/>
+            <a:ext cx="544735" cy="160020"/>
           </a:xfrm>
           <a:prstGeom xmlns:a="http://schemas.openxmlformats.org/drawingml/2006/main" prst="rect">
             <a:avLst/>
@@ -5881,7 +6161,7 @@
           <p:cNvPr id="20" name="appendix-apis-title">
             <a:extLst xmlns:a="http://schemas.openxmlformats.org/drawingml/2006/main">
               <a:ext uri="{FF2B5EF4-FFF2-40B4-BE49-F238E27FC236}">
-                <a16:creationId xmlns:a16="http://schemas.microsoft.com/office/drawing/2014/main" id="{2FECF439-5789-4A30-BE44-9EC660956AAB}"/>
+                <a16:creationId xmlns:a16="http://schemas.microsoft.com/office/drawing/2014/main" id="{19FA0E76-B933-4C1E-A819-172DC3F7D89F}"/>
               </a:ext>
             </a:extLst>
           </p:cNvPr>
@@ -5893,7 +6173,7 @@
         <p:spPr>
           <a:xfrm xmlns:a="http://schemas.openxmlformats.org/drawingml/2006/main">
             <a:off x="4514850" y="2274570"/>
-            <a:ext cx="5429250" cy="434340"/>
+            <a:ext cx="5543550" cy="434340"/>
           </a:xfrm>
           <a:prstGeom xmlns:a="http://schemas.openxmlformats.org/drawingml/2006/main" prst="rect">
             <a:avLst/>
@@ -5932,7 +6212,7 @@
           <p:cNvPr id="21" name="api-path-api-deepaudit-projects-members">
             <a:extLst xmlns:a="http://schemas.openxmlformats.org/drawingml/2006/main">
               <a:ext uri="{FF2B5EF4-FFF2-40B4-BE49-F238E27FC236}">
-                <a16:creationId xmlns:a16="http://schemas.microsoft.com/office/drawing/2014/main" id="{D5EED9B2-AF4A-48C2-A5B6-A1757FAC1F26}"/>
+                <a16:creationId xmlns:a16="http://schemas.microsoft.com/office/drawing/2014/main" id="{C4F530CE-C163-4D9F-8405-DDF063A761EA}"/>
               </a:ext>
             </a:extLst>
           </p:cNvPr>
@@ -5983,7 +6263,7 @@
           <p:cNvPr id="22" name="api-desc-api-deepaudit-projects-members">
             <a:extLst xmlns:a="http://schemas.openxmlformats.org/drawingml/2006/main">
               <a:ext uri="{FF2B5EF4-FFF2-40B4-BE49-F238E27FC236}">
-                <a16:creationId xmlns:a16="http://schemas.microsoft.com/office/drawing/2014/main" id="{EA703E3C-4EF4-488F-813B-E1E36D3E52CC}"/>
+                <a16:creationId xmlns:a16="http://schemas.microsoft.com/office/drawing/2014/main" id="{15877B05-6B01-40BE-A775-398A50B69AE4}"/>
               </a:ext>
             </a:extLst>
           </p:cNvPr>
@@ -5995,7 +6275,7 @@
         <p:spPr>
           <a:xfrm xmlns:a="http://schemas.openxmlformats.org/drawingml/2006/main">
             <a:off x="4514850" y="3032760"/>
-            <a:ext cx="1842897" cy="160020"/>
+            <a:ext cx="1888617" cy="160020"/>
           </a:xfrm>
           <a:prstGeom xmlns:a="http://schemas.openxmlformats.org/drawingml/2006/main" prst="rect">
             <a:avLst/>
@@ -6034,7 +6314,7 @@
           <p:cNvPr id="23" name="api-path-api-deepaudit-scan">
             <a:extLst xmlns:a="http://schemas.openxmlformats.org/drawingml/2006/main">
               <a:ext uri="{FF2B5EF4-FFF2-40B4-BE49-F238E27FC236}">
-                <a16:creationId xmlns:a16="http://schemas.microsoft.com/office/drawing/2014/main" id="{92898DE4-20E8-4BD8-A2F0-C4F57D4C3C8A}"/>
+                <a16:creationId xmlns:a16="http://schemas.microsoft.com/office/drawing/2014/main" id="{931A6532-F346-44D5-8789-D2B6BB11DBCB}"/>
               </a:ext>
             </a:extLst>
           </p:cNvPr>
@@ -6085,7 +6365,7 @@
           <p:cNvPr id="24" name="api-desc-api-deepaudit-scan">
             <a:extLst xmlns:a="http://schemas.openxmlformats.org/drawingml/2006/main">
               <a:ext uri="{FF2B5EF4-FFF2-40B4-BE49-F238E27FC236}">
-                <a16:creationId xmlns:a16="http://schemas.microsoft.com/office/drawing/2014/main" id="{17F21C6E-9435-428C-AB35-F9393CF4655A}"/>
+                <a16:creationId xmlns:a16="http://schemas.microsoft.com/office/drawing/2014/main" id="{DC4D9772-6358-4692-8D05-E0B44F4C84CF}"/>
               </a:ext>
             </a:extLst>
           </p:cNvPr>
@@ -6097,7 +6377,7 @@
         <p:spPr>
           <a:xfrm xmlns:a="http://schemas.openxmlformats.org/drawingml/2006/main">
             <a:off x="4514850" y="3516630"/>
-            <a:ext cx="1978438" cy="160020"/>
+            <a:ext cx="2026729" cy="320040"/>
           </a:xfrm>
           <a:prstGeom xmlns:a="http://schemas.openxmlformats.org/drawingml/2006/main" prst="rect">
             <a:avLst/>
@@ -6136,18 +6416,18 @@
           <p:cNvPr id="25" name="api-path-api-deepaudit-agent-tasks">
             <a:extLst xmlns:a="http://schemas.openxmlformats.org/drawingml/2006/main">
               <a:ext uri="{FF2B5EF4-FFF2-40B4-BE49-F238E27FC236}">
-                <a16:creationId xmlns:a16="http://schemas.microsoft.com/office/drawing/2014/main" id="{20DA8624-798C-466B-A951-7A27339CF53F}"/>
-              </a:ext>
-            </a:extLst>
-          </p:cNvPr>
-          <p:cNvSpPr>
-            <a:spLocks xmlns:a="http://schemas.openxmlformats.org/drawingml/2006/main" noGrp="1"/>
-          </p:cNvSpPr>
-          <p:nvPr/>
-        </p:nvSpPr>
-        <p:spPr>
-          <a:xfrm xmlns:a="http://schemas.openxmlformats.org/drawingml/2006/main">
-            <a:off x="4514850" y="3790950"/>
+                <a16:creationId xmlns:a16="http://schemas.microsoft.com/office/drawing/2014/main" id="{A99C5197-5FED-4A5E-A908-0766FA7D38EA}"/>
+              </a:ext>
+            </a:extLst>
+          </p:cNvPr>
+          <p:cNvSpPr>
+            <a:spLocks xmlns:a="http://schemas.openxmlformats.org/drawingml/2006/main" noGrp="1"/>
+          </p:cNvSpPr>
+          <p:nvPr/>
+        </p:nvSpPr>
+        <p:spPr>
+          <a:xfrm xmlns:a="http://schemas.openxmlformats.org/drawingml/2006/main">
+            <a:off x="4514850" y="3950970"/>
             <a:ext cx="2236279" cy="171450"/>
           </a:xfrm>
           <a:prstGeom xmlns:a="http://schemas.openxmlformats.org/drawingml/2006/main" prst="rect">
@@ -6187,19 +6467,19 @@
           <p:cNvPr id="26" name="api-desc-api-deepaudit-agent-tasks">
             <a:extLst xmlns:a="http://schemas.openxmlformats.org/drawingml/2006/main">
               <a:ext uri="{FF2B5EF4-FFF2-40B4-BE49-F238E27FC236}">
-                <a16:creationId xmlns:a16="http://schemas.microsoft.com/office/drawing/2014/main" id="{88C5E1F1-423D-49B4-B177-6EE87D946005}"/>
-              </a:ext>
-            </a:extLst>
-          </p:cNvPr>
-          <p:cNvSpPr>
-            <a:spLocks xmlns:a="http://schemas.openxmlformats.org/drawingml/2006/main" noGrp="1"/>
-          </p:cNvSpPr>
-          <p:nvPr/>
-        </p:nvSpPr>
-        <p:spPr>
-          <a:xfrm xmlns:a="http://schemas.openxmlformats.org/drawingml/2006/main">
-            <a:off x="4514850" y="4000500"/>
-            <a:ext cx="2625947" cy="320040"/>
+                <a16:creationId xmlns:a16="http://schemas.microsoft.com/office/drawing/2014/main" id="{33556F99-ADCB-40FC-921A-C5CBDDBA3AED}"/>
+              </a:ext>
+            </a:extLst>
+          </p:cNvPr>
+          <p:cNvSpPr>
+            <a:spLocks xmlns:a="http://schemas.openxmlformats.org/drawingml/2006/main" noGrp="1"/>
+          </p:cNvSpPr>
+          <p:nvPr/>
+        </p:nvSpPr>
+        <p:spPr>
+          <a:xfrm xmlns:a="http://schemas.openxmlformats.org/drawingml/2006/main">
+            <a:off x="4514850" y="4160520"/>
+            <a:ext cx="2714339" cy="320040"/>
           </a:xfrm>
           <a:prstGeom xmlns:a="http://schemas.openxmlformats.org/drawingml/2006/main" prst="rect">
             <a:avLst/>
@@ -6238,18 +6518,18 @@
           <p:cNvPr id="27" name="api-path-api-deepaudit-rules-prompts-settings-ssh-keys-rag-data-tools">
             <a:extLst xmlns:a="http://schemas.openxmlformats.org/drawingml/2006/main">
               <a:ext uri="{FF2B5EF4-FFF2-40B4-BE49-F238E27FC236}">
-                <a16:creationId xmlns:a16="http://schemas.microsoft.com/office/drawing/2014/main" id="{E663770D-8C43-44ED-8E2A-F2E6B1CD671B}"/>
-              </a:ext>
-            </a:extLst>
-          </p:cNvPr>
-          <p:cNvSpPr>
-            <a:spLocks xmlns:a="http://schemas.openxmlformats.org/drawingml/2006/main" noGrp="1"/>
-          </p:cNvSpPr>
-          <p:nvPr/>
-        </p:nvSpPr>
-        <p:spPr>
-          <a:xfrm xmlns:a="http://schemas.openxmlformats.org/drawingml/2006/main">
-            <a:off x="4514850" y="4434840"/>
+                <a16:creationId xmlns:a16="http://schemas.microsoft.com/office/drawing/2014/main" id="{F2D0A089-8018-45F1-8A03-FB243CC4C26B}"/>
+              </a:ext>
+            </a:extLst>
+          </p:cNvPr>
+          <p:cNvSpPr>
+            <a:spLocks xmlns:a="http://schemas.openxmlformats.org/drawingml/2006/main" noGrp="1"/>
+          </p:cNvSpPr>
+          <p:nvPr/>
+        </p:nvSpPr>
+        <p:spPr>
+          <a:xfrm xmlns:a="http://schemas.openxmlformats.org/drawingml/2006/main">
+            <a:off x="4514850" y="4594860"/>
             <a:ext cx="6106763" cy="171450"/>
           </a:xfrm>
           <a:prstGeom xmlns:a="http://schemas.openxmlformats.org/drawingml/2006/main" prst="rect">
@@ -6289,19 +6569,19 @@
           <p:cNvPr id="28" name="api-desc-api-deepaudit-rules-prompts-settings-ssh-keys-rag-data-tools">
             <a:extLst xmlns:a="http://schemas.openxmlformats.org/drawingml/2006/main">
               <a:ext uri="{FF2B5EF4-FFF2-40B4-BE49-F238E27FC236}">
-                <a16:creationId xmlns:a16="http://schemas.microsoft.com/office/drawing/2014/main" id="{5741787D-0C63-40BB-9D3E-55B597A6C3A7}"/>
-              </a:ext>
-            </a:extLst>
-          </p:cNvPr>
-          <p:cNvSpPr>
-            <a:spLocks xmlns:a="http://schemas.openxmlformats.org/drawingml/2006/main" noGrp="1"/>
-          </p:cNvSpPr>
-          <p:nvPr/>
-        </p:nvSpPr>
-        <p:spPr>
-          <a:xfrm xmlns:a="http://schemas.openxmlformats.org/drawingml/2006/main">
-            <a:off x="4514850" y="4644390"/>
-            <a:ext cx="2667000" cy="160020"/>
+                <a16:creationId xmlns:a16="http://schemas.microsoft.com/office/drawing/2014/main" id="{0883CA7D-5AAC-4580-ACDB-3A78FE330C35}"/>
+              </a:ext>
+            </a:extLst>
+          </p:cNvPr>
+          <p:cNvSpPr>
+            <a:spLocks xmlns:a="http://schemas.openxmlformats.org/drawingml/2006/main" noGrp="1"/>
+          </p:cNvSpPr>
+          <p:nvPr/>
+        </p:nvSpPr>
+        <p:spPr>
+          <a:xfrm xmlns:a="http://schemas.openxmlformats.org/drawingml/2006/main">
+            <a:off x="4514850" y="4804410"/>
+            <a:ext cx="2724055" cy="160020"/>
           </a:xfrm>
           <a:prstGeom xmlns:a="http://schemas.openxmlformats.org/drawingml/2006/main" prst="rect">
             <a:avLst/>
@@ -6340,18 +6620,18 @@
           <p:cNvPr id="29" name="api-path-api-deepaudit-dashboard-reports">
             <a:extLst xmlns:a="http://schemas.openxmlformats.org/drawingml/2006/main">
               <a:ext uri="{FF2B5EF4-FFF2-40B4-BE49-F238E27FC236}">
-                <a16:creationId xmlns:a16="http://schemas.microsoft.com/office/drawing/2014/main" id="{BC5E4759-78F5-4676-AA18-004F3A933593}"/>
-              </a:ext>
-            </a:extLst>
-          </p:cNvPr>
-          <p:cNvSpPr>
-            <a:spLocks xmlns:a="http://schemas.openxmlformats.org/drawingml/2006/main" noGrp="1"/>
-          </p:cNvSpPr>
-          <p:nvPr/>
-        </p:nvSpPr>
-        <p:spPr>
-          <a:xfrm xmlns:a="http://schemas.openxmlformats.org/drawingml/2006/main">
-            <a:off x="4514850" y="4918710"/>
+                <a16:creationId xmlns:a16="http://schemas.microsoft.com/office/drawing/2014/main" id="{A9CADF0A-3350-4E14-BDA6-8603E87B0DAF}"/>
+              </a:ext>
+            </a:extLst>
+          </p:cNvPr>
+          <p:cNvSpPr>
+            <a:spLocks xmlns:a="http://schemas.openxmlformats.org/drawingml/2006/main" noGrp="1"/>
+          </p:cNvSpPr>
+          <p:nvPr/>
+        </p:nvSpPr>
+        <p:spPr>
+          <a:xfrm xmlns:a="http://schemas.openxmlformats.org/drawingml/2006/main">
+            <a:off x="4514850" y="5078730"/>
             <a:ext cx="3096387" cy="171450"/>
           </a:xfrm>
           <a:prstGeom xmlns:a="http://schemas.openxmlformats.org/drawingml/2006/main" prst="rect">
@@ -6391,19 +6671,19 @@
           <p:cNvPr id="30" name="api-desc-api-deepaudit-dashboard-reports">
             <a:extLst xmlns:a="http://schemas.openxmlformats.org/drawingml/2006/main">
               <a:ext uri="{FF2B5EF4-FFF2-40B4-BE49-F238E27FC236}">
-                <a16:creationId xmlns:a16="http://schemas.microsoft.com/office/drawing/2014/main" id="{7E4A5BD9-29AC-4CFE-A350-5A8912DA61EA}"/>
-              </a:ext>
-            </a:extLst>
-          </p:cNvPr>
-          <p:cNvSpPr>
-            <a:spLocks xmlns:a="http://schemas.openxmlformats.org/drawingml/2006/main" noGrp="1"/>
-          </p:cNvSpPr>
-          <p:nvPr/>
-        </p:nvSpPr>
-        <p:spPr>
-          <a:xfrm xmlns:a="http://schemas.openxmlformats.org/drawingml/2006/main">
-            <a:off x="4514850" y="5128260"/>
-            <a:ext cx="1919097" cy="160020"/>
+                <a16:creationId xmlns:a16="http://schemas.microsoft.com/office/drawing/2014/main" id="{5023F5C9-7CE3-4252-AA03-69A2647F73B3}"/>
+              </a:ext>
+            </a:extLst>
+          </p:cNvPr>
+          <p:cNvSpPr>
+            <a:spLocks xmlns:a="http://schemas.openxmlformats.org/drawingml/2006/main" noGrp="1"/>
+          </p:cNvSpPr>
+          <p:nvPr/>
+        </p:nvSpPr>
+        <p:spPr>
+          <a:xfrm xmlns:a="http://schemas.openxmlformats.org/drawingml/2006/main">
+            <a:off x="4514850" y="5288280"/>
+            <a:ext cx="1974056" cy="320040"/>
           </a:xfrm>
           <a:prstGeom xmlns:a="http://schemas.openxmlformats.org/drawingml/2006/main" prst="rect">
             <a:avLst/>
@@ -6442,18 +6722,18 @@
           <p:cNvPr id="31" name="appendix-api-stream-note">
             <a:extLst xmlns:a="http://schemas.openxmlformats.org/drawingml/2006/main">
               <a:ext uri="{FF2B5EF4-FFF2-40B4-BE49-F238E27FC236}">
-                <a16:creationId xmlns:a16="http://schemas.microsoft.com/office/drawing/2014/main" id="{C1ED3A49-0725-47DD-A9D3-60853709D3B8}"/>
-              </a:ext>
-            </a:extLst>
-          </p:cNvPr>
-          <p:cNvSpPr>
-            <a:spLocks xmlns:a="http://schemas.openxmlformats.org/drawingml/2006/main" noGrp="1"/>
-          </p:cNvSpPr>
-          <p:nvPr/>
-        </p:nvSpPr>
-        <p:spPr>
-          <a:xfrm xmlns:a="http://schemas.openxmlformats.org/drawingml/2006/main">
-            <a:off x="4514850" y="5402580"/>
+                <a16:creationId xmlns:a16="http://schemas.microsoft.com/office/drawing/2014/main" id="{68DEED32-455A-4584-A65F-A5685558E7DC}"/>
+              </a:ext>
+            </a:extLst>
+          </p:cNvPr>
+          <p:cNvSpPr>
+            <a:spLocks xmlns:a="http://schemas.openxmlformats.org/drawingml/2006/main" noGrp="1"/>
+          </p:cNvSpPr>
+          <p:nvPr/>
+        </p:nvSpPr>
+        <p:spPr>
+          <a:xfrm xmlns:a="http://schemas.openxmlformats.org/drawingml/2006/main">
+            <a:off x="4514850" y="5722620"/>
             <a:ext cx="7239000" cy="171450"/>
           </a:xfrm>
           <a:prstGeom xmlns:a="http://schemas.openxmlformats.org/drawingml/2006/main" prst="rect">
@@ -6491,7 +6771,7 @@
     </p:spTree>
     <p:extLst>
       <p:ext uri="{BB962C8B-B14F-4D97-AF65-F5344CB8AC3E}">
-        <p14:creationId xmlns:p14="http://schemas.microsoft.com/office/powerpoint/2010/main" val="1546374523"/>
+        <p14:creationId xmlns:p14="http://schemas.microsoft.com/office/powerpoint/2010/main" val="1048980413"/>
       </p:ext>
     </p:extLst>
   </p:cSld>
@@ -6522,7 +6802,7 @@
           <p:cNvPr id="1" name="header-kicker-演示兜底与部署">
             <a:extLst xmlns:a="http://schemas.openxmlformats.org/drawingml/2006/main">
               <a:ext uri="{FF2B5EF4-FFF2-40B4-BE49-F238E27FC236}">
-                <a16:creationId xmlns:a16="http://schemas.microsoft.com/office/drawing/2014/main" id="{DD9D842F-C39B-4924-B322-DDFF9D7B5F43}"/>
+                <a16:creationId xmlns:a16="http://schemas.microsoft.com/office/drawing/2014/main" id="{76DA05FC-348F-49DA-ABEE-3ACDA3B43316}"/>
               </a:ext>
             </a:extLst>
           </p:cNvPr>
@@ -6573,7 +6853,7 @@
           <p:cNvPr id="2" name="header-title-演示兜底与部署">
             <a:extLst xmlns:a="http://schemas.openxmlformats.org/drawingml/2006/main">
               <a:ext uri="{FF2B5EF4-FFF2-40B4-BE49-F238E27FC236}">
-                <a16:creationId xmlns:a16="http://schemas.microsoft.com/office/drawing/2014/main" id="{8E2E0501-D407-467C-9139-7A6F6D2414A8}"/>
+                <a16:creationId xmlns:a16="http://schemas.microsoft.com/office/drawing/2014/main" id="{1D8C56A5-41EE-4CE0-BBFF-27E97D2140B5}"/>
               </a:ext>
             </a:extLst>
           </p:cNvPr>
@@ -6624,7 +6904,7 @@
           <p:cNvPr id="3" name="header-subtitle-演示兜底与部署">
             <a:extLst xmlns:a="http://schemas.openxmlformats.org/drawingml/2006/main">
               <a:ext uri="{FF2B5EF4-FFF2-40B4-BE49-F238E27FC236}">
-                <a16:creationId xmlns:a16="http://schemas.microsoft.com/office/drawing/2014/main" id="{4D2ACE6A-1F5A-4C13-9411-41B6F61D7BE6}"/>
+                <a16:creationId xmlns:a16="http://schemas.microsoft.com/office/drawing/2014/main" id="{2ACE0013-DF64-4B97-A8CB-8D8F4B7ED706}"/>
               </a:ext>
             </a:extLst>
           </p:cNvPr>
@@ -6675,7 +6955,7 @@
           <p:cNvPr id="4" name="heading-underline">
             <a:extLst xmlns:a="http://schemas.openxmlformats.org/drawingml/2006/main">
               <a:ext uri="{FF2B5EF4-FFF2-40B4-BE49-F238E27FC236}">
-                <a16:creationId xmlns:a16="http://schemas.microsoft.com/office/drawing/2014/main" id="{6BCD87DC-38B2-4B2A-9EAB-80F400B16D5B}"/>
+                <a16:creationId xmlns:a16="http://schemas.microsoft.com/office/drawing/2014/main" id="{43B4F772-D7F8-4CF7-9C73-616B2A75B88B}"/>
               </a:ext>
             </a:extLst>
           </p:cNvPr>
@@ -6712,7 +6992,7 @@
           <p:cNvPr id="5" name="ops-left-kicker">
             <a:extLst xmlns:a="http://schemas.openxmlformats.org/drawingml/2006/main">
               <a:ext uri="{FF2B5EF4-FFF2-40B4-BE49-F238E27FC236}">
-                <a16:creationId xmlns:a16="http://schemas.microsoft.com/office/drawing/2014/main" id="{3F0E1664-1437-41AC-95E8-9E5C06D83D33}"/>
+                <a16:creationId xmlns:a16="http://schemas.microsoft.com/office/drawing/2014/main" id="{449919E7-A854-46A1-82D6-C9A32412353F}"/>
               </a:ext>
             </a:extLst>
           </p:cNvPr>
@@ -6724,7 +7004,7 @@
         <p:spPr>
           <a:xfrm xmlns:a="http://schemas.openxmlformats.org/drawingml/2006/main">
             <a:off x="533400" y="2000250"/>
-            <a:ext cx="533400" cy="160020"/>
+            <a:ext cx="544735" cy="160020"/>
           </a:xfrm>
           <a:prstGeom xmlns:a="http://schemas.openxmlformats.org/drawingml/2006/main" prst="rect">
             <a:avLst/>
@@ -6763,7 +7043,7 @@
           <p:cNvPr id="6" name="ops-left-title">
             <a:extLst xmlns:a="http://schemas.openxmlformats.org/drawingml/2006/main">
               <a:ext uri="{FF2B5EF4-FFF2-40B4-BE49-F238E27FC236}">
-                <a16:creationId xmlns:a16="http://schemas.microsoft.com/office/drawing/2014/main" id="{84828532-849F-45D8-AFA1-218AFBD4AE45}"/>
+                <a16:creationId xmlns:a16="http://schemas.microsoft.com/office/drawing/2014/main" id="{99257F99-B38B-4F4C-979D-B9B6ECE6BBED}"/>
               </a:ext>
             </a:extLst>
           </p:cNvPr>
@@ -6814,7 +7094,7 @@
           <p:cNvPr id="7" name="bullet-dot-优先路径">
             <a:extLst xmlns:a="http://schemas.openxmlformats.org/drawingml/2006/main">
               <a:ext uri="{FF2B5EF4-FFF2-40B4-BE49-F238E27FC236}">
-                <a16:creationId xmlns:a16="http://schemas.microsoft.com/office/drawing/2014/main" id="{35EAAF46-6C69-40ED-A341-F8A8D39048AB}"/>
+                <a16:creationId xmlns:a16="http://schemas.microsoft.com/office/drawing/2014/main" id="{609792F0-2044-4605-BB80-CDD3BF4DB56F}"/>
               </a:ext>
             </a:extLst>
           </p:cNvPr>
@@ -6845,7 +7125,7 @@
           <p:cNvPr id="8" name="bullet-title-优先路径">
             <a:extLst xmlns:a="http://schemas.openxmlformats.org/drawingml/2006/main">
               <a:ext uri="{FF2B5EF4-FFF2-40B4-BE49-F238E27FC236}">
-                <a16:creationId xmlns:a16="http://schemas.microsoft.com/office/drawing/2014/main" id="{FF90219B-9910-406B-97AE-DA45A3383889}"/>
+                <a16:creationId xmlns:a16="http://schemas.microsoft.com/office/drawing/2014/main" id="{76E36CDD-8D5C-4BD6-9231-71CFD7333DF7}"/>
               </a:ext>
             </a:extLst>
           </p:cNvPr>
@@ -6896,7 +7176,7 @@
           <p:cNvPr id="9" name="bullet-detail-优先路径">
             <a:extLst xmlns:a="http://schemas.openxmlformats.org/drawingml/2006/main">
               <a:ext uri="{FF2B5EF4-FFF2-40B4-BE49-F238E27FC236}">
-                <a16:creationId xmlns:a16="http://schemas.microsoft.com/office/drawing/2014/main" id="{F5446D65-F47D-4874-8723-3D7057305130}"/>
+                <a16:creationId xmlns:a16="http://schemas.microsoft.com/office/drawing/2014/main" id="{68E3001F-5D8C-4C57-A3B7-0D428BEDCA79}"/>
               </a:ext>
             </a:extLst>
           </p:cNvPr>
@@ -6947,7 +7227,7 @@
           <p:cNvPr id="10" name="bullet-dot-备用素材">
             <a:extLst xmlns:a="http://schemas.openxmlformats.org/drawingml/2006/main">
               <a:ext uri="{FF2B5EF4-FFF2-40B4-BE49-F238E27FC236}">
-                <a16:creationId xmlns:a16="http://schemas.microsoft.com/office/drawing/2014/main" id="{8887A4B4-D945-47F0-B54E-835114389B57}"/>
+                <a16:creationId xmlns:a16="http://schemas.microsoft.com/office/drawing/2014/main" id="{EC7A6835-100F-4A04-9513-1683544C3843}"/>
               </a:ext>
             </a:extLst>
           </p:cNvPr>
@@ -6978,7 +7258,7 @@
           <p:cNvPr id="11" name="bullet-title-备用素材">
             <a:extLst xmlns:a="http://schemas.openxmlformats.org/drawingml/2006/main">
               <a:ext uri="{FF2B5EF4-FFF2-40B4-BE49-F238E27FC236}">
-                <a16:creationId xmlns:a16="http://schemas.microsoft.com/office/drawing/2014/main" id="{763C8574-60DA-424D-8C2C-904D2648A542}"/>
+                <a16:creationId xmlns:a16="http://schemas.microsoft.com/office/drawing/2014/main" id="{A1C3AFF5-AE5A-494C-B86B-68E7A0ED7953}"/>
               </a:ext>
             </a:extLst>
           </p:cNvPr>
@@ -7029,7 +7309,7 @@
           <p:cNvPr id="12" name="bullet-detail-备用素材">
             <a:extLst xmlns:a="http://schemas.openxmlformats.org/drawingml/2006/main">
               <a:ext uri="{FF2B5EF4-FFF2-40B4-BE49-F238E27FC236}">
-                <a16:creationId xmlns:a16="http://schemas.microsoft.com/office/drawing/2014/main" id="{D789A6C6-A51E-4161-83C9-1A9C6E87940E}"/>
+                <a16:creationId xmlns:a16="http://schemas.microsoft.com/office/drawing/2014/main" id="{992DAEC7-752C-4325-93EC-4F80A032F98E}"/>
               </a:ext>
             </a:extLst>
           </p:cNvPr>
@@ -7080,7 +7360,7 @@
           <p:cNvPr id="13" name="bullet-dot-节奏控制">
             <a:extLst xmlns:a="http://schemas.openxmlformats.org/drawingml/2006/main">
               <a:ext uri="{FF2B5EF4-FFF2-40B4-BE49-F238E27FC236}">
-                <a16:creationId xmlns:a16="http://schemas.microsoft.com/office/drawing/2014/main" id="{C6900D57-24D3-4C97-A846-D2A92B361EF0}"/>
+                <a16:creationId xmlns:a16="http://schemas.microsoft.com/office/drawing/2014/main" id="{E1907202-51A4-4660-8E3C-813C65BBB4B9}"/>
               </a:ext>
             </a:extLst>
           </p:cNvPr>
@@ -7111,7 +7391,7 @@
           <p:cNvPr id="14" name="bullet-title-节奏控制">
             <a:extLst xmlns:a="http://schemas.openxmlformats.org/drawingml/2006/main">
               <a:ext uri="{FF2B5EF4-FFF2-40B4-BE49-F238E27FC236}">
-                <a16:creationId xmlns:a16="http://schemas.microsoft.com/office/drawing/2014/main" id="{E16E146D-35AD-4854-BA7F-EDCA94111A1E}"/>
+                <a16:creationId xmlns:a16="http://schemas.microsoft.com/office/drawing/2014/main" id="{0AD800AC-28C7-4400-BFE9-EA41F4F21B12}"/>
               </a:ext>
             </a:extLst>
           </p:cNvPr>
@@ -7162,7 +7442,7 @@
           <p:cNvPr id="15" name="bullet-detail-节奏控制">
             <a:extLst xmlns:a="http://schemas.openxmlformats.org/drawingml/2006/main">
               <a:ext uri="{FF2B5EF4-FFF2-40B4-BE49-F238E27FC236}">
-                <a16:creationId xmlns:a16="http://schemas.microsoft.com/office/drawing/2014/main" id="{7495423C-7CFE-4BD9-A339-D036EE9A91AA}"/>
+                <a16:creationId xmlns:a16="http://schemas.microsoft.com/office/drawing/2014/main" id="{6CC33DD8-33C7-44B0-916C-B7DC9AE7716E}"/>
               </a:ext>
             </a:extLst>
           </p:cNvPr>
@@ -7213,7 +7493,7 @@
           <p:cNvPr id="16" name="ops-callout">
             <a:extLst xmlns:a="http://schemas.openxmlformats.org/drawingml/2006/main">
               <a:ext uri="{FF2B5EF4-FFF2-40B4-BE49-F238E27FC236}">
-                <a16:creationId xmlns:a16="http://schemas.microsoft.com/office/drawing/2014/main" id="{3636EDA4-3C49-4C4E-ABD0-BDBF33E03D2D}"/>
+                <a16:creationId xmlns:a16="http://schemas.microsoft.com/office/drawing/2014/main" id="{A92F0707-D9CC-4D6A-A639-3EBC32CE9B96}"/>
               </a:ext>
             </a:extLst>
           </p:cNvPr>
@@ -7250,7 +7530,7 @@
           <p:cNvPr id="17" name="ops-callout-kicker">
             <a:extLst xmlns:a="http://schemas.openxmlformats.org/drawingml/2006/main">
               <a:ext uri="{FF2B5EF4-FFF2-40B4-BE49-F238E27FC236}">
-                <a16:creationId xmlns:a16="http://schemas.microsoft.com/office/drawing/2014/main" id="{BAE3B676-C12D-4998-BFC8-D274AC48E9B1}"/>
+                <a16:creationId xmlns:a16="http://schemas.microsoft.com/office/drawing/2014/main" id="{2B894BA3-0D75-4B4E-811D-1953DE2C81C4}"/>
               </a:ext>
             </a:extLst>
           </p:cNvPr>
@@ -7262,7 +7542,7 @@
         <p:spPr>
           <a:xfrm xmlns:a="http://schemas.openxmlformats.org/drawingml/2006/main">
             <a:off x="533400" y="4549140"/>
-            <a:ext cx="666750" cy="160020"/>
+            <a:ext cx="680942" cy="160020"/>
           </a:xfrm>
           <a:prstGeom xmlns:a="http://schemas.openxmlformats.org/drawingml/2006/main" prst="rect">
             <a:avLst/>
@@ -7301,7 +7581,7 @@
           <p:cNvPr id="18" name="ops-callout-title">
             <a:extLst xmlns:a="http://schemas.openxmlformats.org/drawingml/2006/main">
               <a:ext uri="{FF2B5EF4-FFF2-40B4-BE49-F238E27FC236}">
-                <a16:creationId xmlns:a16="http://schemas.microsoft.com/office/drawing/2014/main" id="{ADABFFE7-9B47-4C9E-98D9-89C58B7F0625}"/>
+                <a16:creationId xmlns:a16="http://schemas.microsoft.com/office/drawing/2014/main" id="{6CAEBC1B-91E5-4193-BB69-B984BED66A5C}"/>
               </a:ext>
             </a:extLst>
           </p:cNvPr>
@@ -7352,7 +7632,7 @@
           <p:cNvPr id="19" name="ops-callout-subtitle">
             <a:extLst xmlns:a="http://schemas.openxmlformats.org/drawingml/2006/main">
               <a:ext uri="{FF2B5EF4-FFF2-40B4-BE49-F238E27FC236}">
-                <a16:creationId xmlns:a16="http://schemas.microsoft.com/office/drawing/2014/main" id="{B797EBAC-9323-457A-A8A2-9CBADEC1494D}"/>
+                <a16:creationId xmlns:a16="http://schemas.microsoft.com/office/drawing/2014/main" id="{A87BD8D7-7EAC-4A13-92EC-47910EC1BC26}"/>
               </a:ext>
             </a:extLst>
           </p:cNvPr>
@@ -7403,7 +7683,7 @@
           <p:cNvPr id="20" name="ops-middle-kicker">
             <a:extLst xmlns:a="http://schemas.openxmlformats.org/drawingml/2006/main">
               <a:ext uri="{FF2B5EF4-FFF2-40B4-BE49-F238E27FC236}">
-                <a16:creationId xmlns:a16="http://schemas.microsoft.com/office/drawing/2014/main" id="{08387C01-6DA4-43FE-83C6-9B0596F14C28}"/>
+                <a16:creationId xmlns:a16="http://schemas.microsoft.com/office/drawing/2014/main" id="{109668D1-808D-4707-8E54-9F5E06263D86}"/>
               </a:ext>
             </a:extLst>
           </p:cNvPr>
@@ -7415,7 +7695,7 @@
         <p:spPr>
           <a:xfrm xmlns:a="http://schemas.openxmlformats.org/drawingml/2006/main">
             <a:off x="4095750" y="2000250"/>
-            <a:ext cx="533400" cy="160020"/>
+            <a:ext cx="544735" cy="160020"/>
           </a:xfrm>
           <a:prstGeom xmlns:a="http://schemas.openxmlformats.org/drawingml/2006/main" prst="rect">
             <a:avLst/>
@@ -7454,7 +7734,7 @@
           <p:cNvPr id="21" name="ops-middle-title">
             <a:extLst xmlns:a="http://schemas.openxmlformats.org/drawingml/2006/main">
               <a:ext uri="{FF2B5EF4-FFF2-40B4-BE49-F238E27FC236}">
-                <a16:creationId xmlns:a16="http://schemas.microsoft.com/office/drawing/2014/main" id="{B33ECA76-DC5C-4B52-B2DF-6E15DAD0B63E}"/>
+                <a16:creationId xmlns:a16="http://schemas.microsoft.com/office/drawing/2014/main" id="{747279F5-7012-4714-861C-D182732D5EAF}"/>
               </a:ext>
             </a:extLst>
           </p:cNvPr>
@@ -7505,7 +7785,7 @@
           <p:cNvPr id="22" name="bullet-dot-asgi-celery">
             <a:extLst xmlns:a="http://schemas.openxmlformats.org/drawingml/2006/main">
               <a:ext uri="{FF2B5EF4-FFF2-40B4-BE49-F238E27FC236}">
-                <a16:creationId xmlns:a16="http://schemas.microsoft.com/office/drawing/2014/main" id="{39A148D4-8ECA-45B3-A04B-290C8EB62138}"/>
+                <a16:creationId xmlns:a16="http://schemas.microsoft.com/office/drawing/2014/main" id="{F2BA8284-54C0-45C6-BB96-0554452C6C82}"/>
               </a:ext>
             </a:extLst>
           </p:cNvPr>
@@ -7536,7 +7816,7 @@
           <p:cNvPr id="23" name="bullet-title-asgi-celery">
             <a:extLst xmlns:a="http://schemas.openxmlformats.org/drawingml/2006/main">
               <a:ext uri="{FF2B5EF4-FFF2-40B4-BE49-F238E27FC236}">
-                <a16:creationId xmlns:a16="http://schemas.microsoft.com/office/drawing/2014/main" id="{5BFA8CBB-1745-4632-98ED-A538285010C1}"/>
+                <a16:creationId xmlns:a16="http://schemas.microsoft.com/office/drawing/2014/main" id="{29D95444-6425-4F9F-901F-533C53DC0807}"/>
               </a:ext>
             </a:extLst>
           </p:cNvPr>
@@ -7587,7 +7867,7 @@
           <p:cNvPr id="24" name="bullet-detail-asgi-celery">
             <a:extLst xmlns:a="http://schemas.openxmlformats.org/drawingml/2006/main">
               <a:ext uri="{FF2B5EF4-FFF2-40B4-BE49-F238E27FC236}">
-                <a16:creationId xmlns:a16="http://schemas.microsoft.com/office/drawing/2014/main" id="{9DC0A652-FEF2-44DA-BA64-45030603D9E2}"/>
+                <a16:creationId xmlns:a16="http://schemas.microsoft.com/office/drawing/2014/main" id="{14AA9A19-299A-4A0E-B2B6-D7528F0AF303}"/>
               </a:ext>
             </a:extLst>
           </p:cNvPr>
@@ -7638,7 +7918,7 @@
           <p:cNvPr id="25" name="bullet-dot-redis-channels">
             <a:extLst xmlns:a="http://schemas.openxmlformats.org/drawingml/2006/main">
               <a:ext uri="{FF2B5EF4-FFF2-40B4-BE49-F238E27FC236}">
-                <a16:creationId xmlns:a16="http://schemas.microsoft.com/office/drawing/2014/main" id="{2DE7F100-9B41-4898-8502-268B1FF70D0E}"/>
+                <a16:creationId xmlns:a16="http://schemas.microsoft.com/office/drawing/2014/main" id="{3F1BEC60-BE0E-4FE4-87C9-7EDAC57864B6}"/>
               </a:ext>
             </a:extLst>
           </p:cNvPr>
@@ -7669,7 +7949,7 @@
           <p:cNvPr id="26" name="bullet-title-redis-channels">
             <a:extLst xmlns:a="http://schemas.openxmlformats.org/drawingml/2006/main">
               <a:ext uri="{FF2B5EF4-FFF2-40B4-BE49-F238E27FC236}">
-                <a16:creationId xmlns:a16="http://schemas.microsoft.com/office/drawing/2014/main" id="{2D2C009D-863F-49C1-96E8-E5FD4097AEBF}"/>
+                <a16:creationId xmlns:a16="http://schemas.microsoft.com/office/drawing/2014/main" id="{BC5C50C6-4E4A-425C-8969-4B8A9092C1E7}"/>
               </a:ext>
             </a:extLst>
           </p:cNvPr>
@@ -7720,7 +8000,7 @@
           <p:cNvPr id="27" name="bullet-detail-redis-channels">
             <a:extLst xmlns:a="http://schemas.openxmlformats.org/drawingml/2006/main">
               <a:ext uri="{FF2B5EF4-FFF2-40B4-BE49-F238E27FC236}">
-                <a16:creationId xmlns:a16="http://schemas.microsoft.com/office/drawing/2014/main" id="{8FF9FC30-991A-42BF-A6CE-1F1F12417DC5}"/>
+                <a16:creationId xmlns:a16="http://schemas.microsoft.com/office/drawing/2014/main" id="{1CE20B74-0BDC-4F42-B0BC-1408255AC173}"/>
               </a:ext>
             </a:extLst>
           </p:cNvPr>
@@ -7771,7 +8051,7 @@
           <p:cNvPr id="28" name="bullet-dot-nginx-代理">
             <a:extLst xmlns:a="http://schemas.openxmlformats.org/drawingml/2006/main">
               <a:ext uri="{FF2B5EF4-FFF2-40B4-BE49-F238E27FC236}">
-                <a16:creationId xmlns:a16="http://schemas.microsoft.com/office/drawing/2014/main" id="{7BD1C1C9-9430-409A-8CFF-F0F77D885B6C}"/>
+                <a16:creationId xmlns:a16="http://schemas.microsoft.com/office/drawing/2014/main" id="{7CB70AF0-AC4B-4D36-A947-DBE7F74C19EE}"/>
               </a:ext>
             </a:extLst>
           </p:cNvPr>
@@ -7802,7 +8082,7 @@
           <p:cNvPr id="29" name="bullet-title-nginx-代理">
             <a:extLst xmlns:a="http://schemas.openxmlformats.org/drawingml/2006/main">
               <a:ext uri="{FF2B5EF4-FFF2-40B4-BE49-F238E27FC236}">
-                <a16:creationId xmlns:a16="http://schemas.microsoft.com/office/drawing/2014/main" id="{652BB09F-7B99-4CF9-81ED-8253F89341D0}"/>
+                <a16:creationId xmlns:a16="http://schemas.microsoft.com/office/drawing/2014/main" id="{EC5C5406-CD5B-4EDE-9964-2F8D7A8D9DD4}"/>
               </a:ext>
             </a:extLst>
           </p:cNvPr>
@@ -7853,7 +8133,7 @@
           <p:cNvPr id="30" name="bullet-detail-nginx-代理">
             <a:extLst xmlns:a="http://schemas.openxmlformats.org/drawingml/2006/main">
               <a:ext uri="{FF2B5EF4-FFF2-40B4-BE49-F238E27FC236}">
-                <a16:creationId xmlns:a16="http://schemas.microsoft.com/office/drawing/2014/main" id="{B33D8ADE-7884-43D9-A76B-185BACF312F1}"/>
+                <a16:creationId xmlns:a16="http://schemas.microsoft.com/office/drawing/2014/main" id="{35D744B6-6684-45D2-BE93-B9AC21D4BCF9}"/>
               </a:ext>
             </a:extLst>
           </p:cNvPr>
@@ -7904,7 +8184,7 @@
           <p:cNvPr id="31" name="bullet-dot-tiktoken-llm">
             <a:extLst xmlns:a="http://schemas.openxmlformats.org/drawingml/2006/main">
               <a:ext uri="{FF2B5EF4-FFF2-40B4-BE49-F238E27FC236}">
-                <a16:creationId xmlns:a16="http://schemas.microsoft.com/office/drawing/2014/main" id="{8C59FC4B-984A-44B1-98B6-85DE045C3DF7}"/>
+                <a16:creationId xmlns:a16="http://schemas.microsoft.com/office/drawing/2014/main" id="{89AEFEB2-0F89-4C1C-9977-D6856C3DD9C4}"/>
               </a:ext>
             </a:extLst>
           </p:cNvPr>
@@ -7935,7 +8215,7 @@
           <p:cNvPr id="32" name="bullet-title-tiktoken-llm">
             <a:extLst xmlns:a="http://schemas.openxmlformats.org/drawingml/2006/main">
               <a:ext uri="{FF2B5EF4-FFF2-40B4-BE49-F238E27FC236}">
-                <a16:creationId xmlns:a16="http://schemas.microsoft.com/office/drawing/2014/main" id="{BD79E0F2-1BEA-4CDC-A725-FFEE80A2258E}"/>
+                <a16:creationId xmlns:a16="http://schemas.microsoft.com/office/drawing/2014/main" id="{46E64817-443E-4375-8ED8-125B4AC4033B}"/>
               </a:ext>
             </a:extLst>
           </p:cNvPr>
@@ -7986,7 +8266,7 @@
           <p:cNvPr id="33" name="bullet-detail-tiktoken-llm">
             <a:extLst xmlns:a="http://schemas.openxmlformats.org/drawingml/2006/main">
               <a:ext uri="{FF2B5EF4-FFF2-40B4-BE49-F238E27FC236}">
-                <a16:creationId xmlns:a16="http://schemas.microsoft.com/office/drawing/2014/main" id="{12630C7D-2E5E-44D8-916F-24D3070C8125}"/>
+                <a16:creationId xmlns:a16="http://schemas.microsoft.com/office/drawing/2014/main" id="{C2AF000D-0E72-45A0-AD77-75B41E446A0C}"/>
               </a:ext>
             </a:extLst>
           </p:cNvPr>
@@ -8037,7 +8317,7 @@
           <p:cNvPr id="34" name="ops-right-kicker">
             <a:extLst xmlns:a="http://schemas.openxmlformats.org/drawingml/2006/main">
               <a:ext uri="{FF2B5EF4-FFF2-40B4-BE49-F238E27FC236}">
-                <a16:creationId xmlns:a16="http://schemas.microsoft.com/office/drawing/2014/main" id="{B3867FBB-275C-4E46-A1C4-A4D73D3E7F4C}"/>
+                <a16:creationId xmlns:a16="http://schemas.microsoft.com/office/drawing/2014/main" id="{205BADF4-E969-4C51-A43B-5C238C01BED3}"/>
               </a:ext>
             </a:extLst>
           </p:cNvPr>
@@ -8049,7 +8329,7 @@
         <p:spPr>
           <a:xfrm xmlns:a="http://schemas.openxmlformats.org/drawingml/2006/main">
             <a:off x="8134350" y="2000250"/>
-            <a:ext cx="800100" cy="160020"/>
+            <a:ext cx="817150" cy="160020"/>
           </a:xfrm>
           <a:prstGeom xmlns:a="http://schemas.openxmlformats.org/drawingml/2006/main" prst="rect">
             <a:avLst/>
@@ -8088,7 +8368,7 @@
           <p:cNvPr id="35" name="ops-right-title">
             <a:extLst xmlns:a="http://schemas.openxmlformats.org/drawingml/2006/main">
               <a:ext uri="{FF2B5EF4-FFF2-40B4-BE49-F238E27FC236}">
-                <a16:creationId xmlns:a16="http://schemas.microsoft.com/office/drawing/2014/main" id="{913EE53E-D274-4661-8CD8-CCCD08D2B60E}"/>
+                <a16:creationId xmlns:a16="http://schemas.microsoft.com/office/drawing/2014/main" id="{6185C04D-A9A8-4976-97DC-7FD466C4A53C}"/>
               </a:ext>
             </a:extLst>
           </p:cNvPr>
@@ -8139,7 +8419,7 @@
           <p:cNvPr id="36" name="bullet-dot-页面能打开-但流不刷新">
             <a:extLst xmlns:a="http://schemas.openxmlformats.org/drawingml/2006/main">
               <a:ext uri="{FF2B5EF4-FFF2-40B4-BE49-F238E27FC236}">
-                <a16:creationId xmlns:a16="http://schemas.microsoft.com/office/drawing/2014/main" id="{81E84674-AA28-4A5E-B21A-A9760E0B0D3F}"/>
+                <a16:creationId xmlns:a16="http://schemas.microsoft.com/office/drawing/2014/main" id="{D961B40E-5182-44DC-AA0E-E6623054784E}"/>
               </a:ext>
             </a:extLst>
           </p:cNvPr>
@@ -8170,7 +8450,7 @@
           <p:cNvPr id="37" name="bullet-title-页面能打开-但流不刷新">
             <a:extLst xmlns:a="http://schemas.openxmlformats.org/drawingml/2006/main">
               <a:ext uri="{FF2B5EF4-FFF2-40B4-BE49-F238E27FC236}">
-                <a16:creationId xmlns:a16="http://schemas.microsoft.com/office/drawing/2014/main" id="{123CA3D2-9E78-47BB-8956-3C29C228FE76}"/>
+                <a16:creationId xmlns:a16="http://schemas.microsoft.com/office/drawing/2014/main" id="{9D8815BF-920B-4C7D-9CC6-3854DF469799}"/>
               </a:ext>
             </a:extLst>
           </p:cNvPr>
@@ -8221,7 +8501,7 @@
           <p:cNvPr id="38" name="bullet-detail-页面能打开-但流不刷新">
             <a:extLst xmlns:a="http://schemas.openxmlformats.org/drawingml/2006/main">
               <a:ext uri="{FF2B5EF4-FFF2-40B4-BE49-F238E27FC236}">
-                <a16:creationId xmlns:a16="http://schemas.microsoft.com/office/drawing/2014/main" id="{A9663899-B736-4A6B-9F5B-7D882FD41EBA}"/>
+                <a16:creationId xmlns:a16="http://schemas.microsoft.com/office/drawing/2014/main" id="{DFB68115-4039-4E58-A1D5-DA398B6CF85E}"/>
               </a:ext>
             </a:extLst>
           </p:cNvPr>
@@ -8272,7 +8552,7 @@
           <p:cNvPr id="39" name="bullet-dot-接口-401-404">
             <a:extLst xmlns:a="http://schemas.openxmlformats.org/drawingml/2006/main">
               <a:ext uri="{FF2B5EF4-FFF2-40B4-BE49-F238E27FC236}">
-                <a16:creationId xmlns:a16="http://schemas.microsoft.com/office/drawing/2014/main" id="{ACE50252-5C46-4AC2-ADF8-1BA0AD791CF8}"/>
+                <a16:creationId xmlns:a16="http://schemas.microsoft.com/office/drawing/2014/main" id="{C4AAD3EA-5299-4180-9B9B-5D30EEF9FA42}"/>
               </a:ext>
             </a:extLst>
           </p:cNvPr>
@@ -8303,7 +8583,7 @@
           <p:cNvPr id="40" name="bullet-title-接口-401-404">
             <a:extLst xmlns:a="http://schemas.openxmlformats.org/drawingml/2006/main">
               <a:ext uri="{FF2B5EF4-FFF2-40B4-BE49-F238E27FC236}">
-                <a16:creationId xmlns:a16="http://schemas.microsoft.com/office/drawing/2014/main" id="{D42F84C4-E7D9-46C8-B41A-49373C868370}"/>
+                <a16:creationId xmlns:a16="http://schemas.microsoft.com/office/drawing/2014/main" id="{DC1A3510-23D5-4FDF-AE31-446BC20F77D5}"/>
               </a:ext>
             </a:extLst>
           </p:cNvPr>
@@ -8354,7 +8634,7 @@
           <p:cNvPr id="41" name="bullet-detail-接口-401-404">
             <a:extLst xmlns:a="http://schemas.openxmlformats.org/drawingml/2006/main">
               <a:ext uri="{FF2B5EF4-FFF2-40B4-BE49-F238E27FC236}">
-                <a16:creationId xmlns:a16="http://schemas.microsoft.com/office/drawing/2014/main" id="{3DDB1936-A126-4234-BCB1-FAD14B67BFA6}"/>
+                <a16:creationId xmlns:a16="http://schemas.microsoft.com/office/drawing/2014/main" id="{CA76971B-09E7-484A-9494-D9125EB4A858}"/>
               </a:ext>
             </a:extLst>
           </p:cNvPr>
@@ -8366,7 +8646,7 @@
         <p:spPr>
           <a:xfrm xmlns:a="http://schemas.openxmlformats.org/drawingml/2006/main">
             <a:off x="8324850" y="3573780"/>
-            <a:ext cx="3333750" cy="171450"/>
+            <a:ext cx="3333750" cy="342900"/>
           </a:xfrm>
           <a:prstGeom xmlns:a="http://schemas.openxmlformats.org/drawingml/2006/main" prst="rect">
             <a:avLst/>
@@ -8405,18 +8685,18 @@
           <p:cNvPr id="42" name="bullet-dot-日志有任务-ui-没事件">
             <a:extLst xmlns:a="http://schemas.openxmlformats.org/drawingml/2006/main">
               <a:ext uri="{FF2B5EF4-FFF2-40B4-BE49-F238E27FC236}">
-                <a16:creationId xmlns:a16="http://schemas.microsoft.com/office/drawing/2014/main" id="{9C275E0A-1070-42CD-ACBA-13E5641774AF}"/>
-              </a:ext>
-            </a:extLst>
-          </p:cNvPr>
-          <p:cNvSpPr>
-            <a:spLocks xmlns:a="http://schemas.openxmlformats.org/drawingml/2006/main" noGrp="1"/>
-          </p:cNvSpPr>
-          <p:nvPr/>
-        </p:nvSpPr>
-        <p:spPr>
-          <a:xfrm xmlns:a="http://schemas.openxmlformats.org/drawingml/2006/main">
-            <a:off x="8134350" y="3859530"/>
+                <a16:creationId xmlns:a16="http://schemas.microsoft.com/office/drawing/2014/main" id="{F2F58E27-7828-43D7-A741-6B95341E19AB}"/>
+              </a:ext>
+            </a:extLst>
+          </p:cNvPr>
+          <p:cNvSpPr>
+            <a:spLocks xmlns:a="http://schemas.openxmlformats.org/drawingml/2006/main" noGrp="1"/>
+          </p:cNvSpPr>
+          <p:nvPr/>
+        </p:nvSpPr>
+        <p:spPr>
+          <a:xfrm xmlns:a="http://schemas.openxmlformats.org/drawingml/2006/main">
+            <a:off x="8134350" y="4030980"/>
             <a:ext cx="76200" cy="76200"/>
           </a:xfrm>
           <a:prstGeom xmlns:a="http://schemas.openxmlformats.org/drawingml/2006/main" prst="ellipse">
@@ -8436,18 +8716,18 @@
           <p:cNvPr id="43" name="bullet-title-日志有任务-ui-没事件">
             <a:extLst xmlns:a="http://schemas.openxmlformats.org/drawingml/2006/main">
               <a:ext uri="{FF2B5EF4-FFF2-40B4-BE49-F238E27FC236}">
-                <a16:creationId xmlns:a16="http://schemas.microsoft.com/office/drawing/2014/main" id="{030C2A7A-3822-4FC1-8FD3-09202DF50A88}"/>
-              </a:ext>
-            </a:extLst>
-          </p:cNvPr>
-          <p:cNvSpPr>
-            <a:spLocks xmlns:a="http://schemas.openxmlformats.org/drawingml/2006/main" noGrp="1"/>
-          </p:cNvSpPr>
-          <p:nvPr/>
-        </p:nvSpPr>
-        <p:spPr>
-          <a:xfrm xmlns:a="http://schemas.openxmlformats.org/drawingml/2006/main">
-            <a:off x="8324850" y="3859530"/>
+                <a16:creationId xmlns:a16="http://schemas.microsoft.com/office/drawing/2014/main" id="{31BBBD8D-0128-4536-8316-431F71087BD0}"/>
+              </a:ext>
+            </a:extLst>
+          </p:cNvPr>
+          <p:cNvSpPr>
+            <a:spLocks xmlns:a="http://schemas.openxmlformats.org/drawingml/2006/main" noGrp="1"/>
+          </p:cNvSpPr>
+          <p:nvPr/>
+        </p:nvSpPr>
+        <p:spPr>
+          <a:xfrm xmlns:a="http://schemas.openxmlformats.org/drawingml/2006/main">
+            <a:off x="8324850" y="4030980"/>
             <a:ext cx="3333750" cy="194310"/>
           </a:xfrm>
           <a:prstGeom xmlns:a="http://schemas.openxmlformats.org/drawingml/2006/main" prst="rect">
@@ -8487,18 +8767,18 @@
           <p:cNvPr id="44" name="bullet-detail-日志有任务-ui-没事件">
             <a:extLst xmlns:a="http://schemas.openxmlformats.org/drawingml/2006/main">
               <a:ext uri="{FF2B5EF4-FFF2-40B4-BE49-F238E27FC236}">
-                <a16:creationId xmlns:a16="http://schemas.microsoft.com/office/drawing/2014/main" id="{867F4A2D-2DFC-4481-87A4-183AAC77F75B}"/>
-              </a:ext>
-            </a:extLst>
-          </p:cNvPr>
-          <p:cNvSpPr>
-            <a:spLocks xmlns:a="http://schemas.openxmlformats.org/drawingml/2006/main" noGrp="1"/>
-          </p:cNvSpPr>
-          <p:nvPr/>
-        </p:nvSpPr>
-        <p:spPr>
-          <a:xfrm xmlns:a="http://schemas.openxmlformats.org/drawingml/2006/main">
-            <a:off x="8324850" y="4091940"/>
+                <a16:creationId xmlns:a16="http://schemas.microsoft.com/office/drawing/2014/main" id="{3D801F47-3E82-4220-ABA1-6D67E35EC6C9}"/>
+              </a:ext>
+            </a:extLst>
+          </p:cNvPr>
+          <p:cNvSpPr>
+            <a:spLocks xmlns:a="http://schemas.openxmlformats.org/drawingml/2006/main" noGrp="1"/>
+          </p:cNvSpPr>
+          <p:nvPr/>
+        </p:nvSpPr>
+        <p:spPr>
+          <a:xfrm xmlns:a="http://schemas.openxmlformats.org/drawingml/2006/main">
+            <a:off x="8324850" y="4263390"/>
             <a:ext cx="3333750" cy="342900"/>
           </a:xfrm>
           <a:prstGeom xmlns:a="http://schemas.openxmlformats.org/drawingml/2006/main" prst="rect">
@@ -8538,18 +8818,18 @@
           <p:cNvPr id="45" name="chip-enable-scheduler-false">
             <a:extLst xmlns:a="http://schemas.openxmlformats.org/drawingml/2006/main">
               <a:ext uri="{FF2B5EF4-FFF2-40B4-BE49-F238E27FC236}">
-                <a16:creationId xmlns:a16="http://schemas.microsoft.com/office/drawing/2014/main" id="{673C25A7-1CBA-4EF1-8594-5AB6623D4C21}"/>
-              </a:ext>
-            </a:extLst>
-          </p:cNvPr>
-          <p:cNvSpPr>
-            <a:spLocks xmlns:a="http://schemas.openxmlformats.org/drawingml/2006/main" noGrp="1"/>
-          </p:cNvSpPr>
-          <p:nvPr/>
-        </p:nvSpPr>
-        <p:spPr>
-          <a:xfrm xmlns:a="http://schemas.openxmlformats.org/drawingml/2006/main">
-            <a:off x="8134350" y="4549140"/>
+                <a16:creationId xmlns:a16="http://schemas.microsoft.com/office/drawing/2014/main" id="{DEFB7325-6AB6-4712-9693-B6043AB62005}"/>
+              </a:ext>
+            </a:extLst>
+          </p:cNvPr>
+          <p:cNvSpPr>
+            <a:spLocks xmlns:a="http://schemas.openxmlformats.org/drawingml/2006/main" noGrp="1"/>
+          </p:cNvSpPr>
+          <p:nvPr/>
+        </p:nvSpPr>
+        <p:spPr>
+          <a:xfrm xmlns:a="http://schemas.openxmlformats.org/drawingml/2006/main">
+            <a:off x="8134350" y="4720590"/>
             <a:ext cx="1724025" cy="160020"/>
           </a:xfrm>
           <a:prstGeom xmlns:a="http://schemas.openxmlformats.org/drawingml/2006/main" prst="rect">
@@ -8575,18 +8855,18 @@
           <p:cNvPr id="46" name="chip-text-enable-scheduler-false">
             <a:extLst xmlns:a="http://schemas.openxmlformats.org/drawingml/2006/main">
               <a:ext uri="{FF2B5EF4-FFF2-40B4-BE49-F238E27FC236}">
-                <a16:creationId xmlns:a16="http://schemas.microsoft.com/office/drawing/2014/main" id="{ED215104-147B-4FCD-8E98-6C3B006CC931}"/>
-              </a:ext>
-            </a:extLst>
-          </p:cNvPr>
-          <p:cNvSpPr>
-            <a:spLocks xmlns:a="http://schemas.openxmlformats.org/drawingml/2006/main" noGrp="1"/>
-          </p:cNvSpPr>
-          <p:nvPr/>
-        </p:nvSpPr>
-        <p:spPr>
-          <a:xfrm xmlns:a="http://schemas.openxmlformats.org/drawingml/2006/main">
-            <a:off x="8113109" y="4549140"/>
+                <a16:creationId xmlns:a16="http://schemas.microsoft.com/office/drawing/2014/main" id="{A315A41F-62F1-42D9-882B-DD1381443B3C}"/>
+              </a:ext>
+            </a:extLst>
+          </p:cNvPr>
+          <p:cNvSpPr>
+            <a:spLocks xmlns:a="http://schemas.openxmlformats.org/drawingml/2006/main" noGrp="1"/>
+          </p:cNvSpPr>
+          <p:nvPr/>
+        </p:nvSpPr>
+        <p:spPr>
+          <a:xfrm xmlns:a="http://schemas.openxmlformats.org/drawingml/2006/main">
+            <a:off x="8113109" y="4720590"/>
             <a:ext cx="1766507" cy="160020"/>
           </a:xfrm>
           <a:prstGeom xmlns:a="http://schemas.openxmlformats.org/drawingml/2006/main" prst="rect">
@@ -8626,18 +8906,18 @@
           <p:cNvPr id="47" name="chip-redis-db-隔离">
             <a:extLst xmlns:a="http://schemas.openxmlformats.org/drawingml/2006/main">
               <a:ext uri="{FF2B5EF4-FFF2-40B4-BE49-F238E27FC236}">
-                <a16:creationId xmlns:a16="http://schemas.microsoft.com/office/drawing/2014/main" id="{AE0115BC-0CCD-4B93-A648-B76FE8A627A6}"/>
-              </a:ext>
-            </a:extLst>
-          </p:cNvPr>
-          <p:cNvSpPr>
-            <a:spLocks xmlns:a="http://schemas.openxmlformats.org/drawingml/2006/main" noGrp="1"/>
-          </p:cNvSpPr>
-          <p:nvPr/>
-        </p:nvSpPr>
-        <p:spPr>
-          <a:xfrm xmlns:a="http://schemas.openxmlformats.org/drawingml/2006/main">
-            <a:off x="9934575" y="4549140"/>
+                <a16:creationId xmlns:a16="http://schemas.microsoft.com/office/drawing/2014/main" id="{19849A27-76BE-4CD2-8306-30D20F0C0DF8}"/>
+              </a:ext>
+            </a:extLst>
+          </p:cNvPr>
+          <p:cNvSpPr>
+            <a:spLocks xmlns:a="http://schemas.openxmlformats.org/drawingml/2006/main" noGrp="1"/>
+          </p:cNvSpPr>
+          <p:nvPr/>
+        </p:nvSpPr>
+        <p:spPr>
+          <a:xfrm xmlns:a="http://schemas.openxmlformats.org/drawingml/2006/main">
+            <a:off x="9934575" y="4720590"/>
             <a:ext cx="1724025" cy="160020"/>
           </a:xfrm>
           <a:prstGeom xmlns:a="http://schemas.openxmlformats.org/drawingml/2006/main" prst="rect">
@@ -8663,19 +8943,19 @@
           <p:cNvPr id="48" name="chip-text-redis-db-隔离">
             <a:extLst xmlns:a="http://schemas.openxmlformats.org/drawingml/2006/main">
               <a:ext uri="{FF2B5EF4-FFF2-40B4-BE49-F238E27FC236}">
-                <a16:creationId xmlns:a16="http://schemas.microsoft.com/office/drawing/2014/main" id="{C589E560-27F2-42E3-8A93-B5FEE3788B09}"/>
-              </a:ext>
-            </a:extLst>
-          </p:cNvPr>
-          <p:cNvSpPr>
-            <a:spLocks xmlns:a="http://schemas.openxmlformats.org/drawingml/2006/main" noGrp="1"/>
-          </p:cNvSpPr>
-          <p:nvPr/>
-        </p:nvSpPr>
-        <p:spPr>
-          <a:xfrm xmlns:a="http://schemas.openxmlformats.org/drawingml/2006/main">
-            <a:off x="10301907" y="4549140"/>
-            <a:ext cx="989362" cy="160020"/>
+                <a16:creationId xmlns:a16="http://schemas.microsoft.com/office/drawing/2014/main" id="{66E31349-872B-4760-B407-C295C550071C}"/>
+              </a:ext>
+            </a:extLst>
+          </p:cNvPr>
+          <p:cNvSpPr>
+            <a:spLocks xmlns:a="http://schemas.openxmlformats.org/drawingml/2006/main" noGrp="1"/>
+          </p:cNvSpPr>
+          <p:nvPr/>
+        </p:nvSpPr>
+        <p:spPr>
+          <a:xfrm xmlns:a="http://schemas.openxmlformats.org/drawingml/2006/main">
+            <a:off x="10299097" y="4720590"/>
+            <a:ext cx="994982" cy="160020"/>
           </a:xfrm>
           <a:prstGeom xmlns:a="http://schemas.openxmlformats.org/drawingml/2006/main" prst="rect">
             <a:avLst/>
@@ -8714,18 +8994,18 @@
           <p:cNvPr id="49" name="chip-deepaudit-local-sh">
             <a:extLst xmlns:a="http://schemas.openxmlformats.org/drawingml/2006/main">
               <a:ext uri="{FF2B5EF4-FFF2-40B4-BE49-F238E27FC236}">
-                <a16:creationId xmlns:a16="http://schemas.microsoft.com/office/drawing/2014/main" id="{15A87624-AC87-47AE-87BB-4BAC4FCC8ACE}"/>
-              </a:ext>
-            </a:extLst>
-          </p:cNvPr>
-          <p:cNvSpPr>
-            <a:spLocks xmlns:a="http://schemas.openxmlformats.org/drawingml/2006/main" noGrp="1"/>
-          </p:cNvSpPr>
-          <p:nvPr/>
-        </p:nvSpPr>
-        <p:spPr>
-          <a:xfrm xmlns:a="http://schemas.openxmlformats.org/drawingml/2006/main">
-            <a:off x="8134350" y="4785360"/>
+                <a16:creationId xmlns:a16="http://schemas.microsoft.com/office/drawing/2014/main" id="{A6B39403-E6AB-41F8-AB38-5F987C8A5D9D}"/>
+              </a:ext>
+            </a:extLst>
+          </p:cNvPr>
+          <p:cNvSpPr>
+            <a:spLocks xmlns:a="http://schemas.openxmlformats.org/drawingml/2006/main" noGrp="1"/>
+          </p:cNvSpPr>
+          <p:nvPr/>
+        </p:nvSpPr>
+        <p:spPr>
+          <a:xfrm xmlns:a="http://schemas.openxmlformats.org/drawingml/2006/main">
+            <a:off x="8134350" y="4956810"/>
             <a:ext cx="1724025" cy="160020"/>
           </a:xfrm>
           <a:prstGeom xmlns:a="http://schemas.openxmlformats.org/drawingml/2006/main" prst="rect">
@@ -8751,18 +9031,18 @@
           <p:cNvPr id="50" name="chip-text-deepaudit-local-sh">
             <a:extLst xmlns:a="http://schemas.openxmlformats.org/drawingml/2006/main">
               <a:ext uri="{FF2B5EF4-FFF2-40B4-BE49-F238E27FC236}">
-                <a16:creationId xmlns:a16="http://schemas.microsoft.com/office/drawing/2014/main" id="{842B84E8-CAAB-4645-B63A-48D0130B2AAF}"/>
-              </a:ext>
-            </a:extLst>
-          </p:cNvPr>
-          <p:cNvSpPr>
-            <a:spLocks xmlns:a="http://schemas.openxmlformats.org/drawingml/2006/main" noGrp="1"/>
-          </p:cNvSpPr>
-          <p:nvPr/>
-        </p:nvSpPr>
-        <p:spPr>
-          <a:xfrm xmlns:a="http://schemas.openxmlformats.org/drawingml/2006/main">
-            <a:off x="8273701" y="4785360"/>
+                <a16:creationId xmlns:a16="http://schemas.microsoft.com/office/drawing/2014/main" id="{3F80DFDF-08DC-494C-A678-66E0D97717C0}"/>
+              </a:ext>
+            </a:extLst>
+          </p:cNvPr>
+          <p:cNvSpPr>
+            <a:spLocks xmlns:a="http://schemas.openxmlformats.org/drawingml/2006/main" noGrp="1"/>
+          </p:cNvSpPr>
+          <p:nvPr/>
+        </p:nvSpPr>
+        <p:spPr>
+          <a:xfrm xmlns:a="http://schemas.openxmlformats.org/drawingml/2006/main">
+            <a:off x="8273701" y="4956810"/>
             <a:ext cx="1445324" cy="160020"/>
           </a:xfrm>
           <a:prstGeom xmlns:a="http://schemas.openxmlformats.org/drawingml/2006/main" prst="rect">
@@ -8802,18 +9082,18 @@
           <p:cNvPr id="51" name="chip-warm-tiktoken-cache-py">
             <a:extLst xmlns:a="http://schemas.openxmlformats.org/drawingml/2006/main">
               <a:ext uri="{FF2B5EF4-FFF2-40B4-BE49-F238E27FC236}">
-                <a16:creationId xmlns:a16="http://schemas.microsoft.com/office/drawing/2014/main" id="{EC541991-99BE-4F87-B4F8-D36B6D939E03}"/>
-              </a:ext>
-            </a:extLst>
-          </p:cNvPr>
-          <p:cNvSpPr>
-            <a:spLocks xmlns:a="http://schemas.openxmlformats.org/drawingml/2006/main" noGrp="1"/>
-          </p:cNvSpPr>
-          <p:nvPr/>
-        </p:nvSpPr>
-        <p:spPr>
-          <a:xfrm xmlns:a="http://schemas.openxmlformats.org/drawingml/2006/main">
-            <a:off x="9934575" y="4785360"/>
+                <a16:creationId xmlns:a16="http://schemas.microsoft.com/office/drawing/2014/main" id="{D820FA8A-0800-4A8C-A7F3-426A6F33ED0B}"/>
+              </a:ext>
+            </a:extLst>
+          </p:cNvPr>
+          <p:cNvSpPr>
+            <a:spLocks xmlns:a="http://schemas.openxmlformats.org/drawingml/2006/main" noGrp="1"/>
+          </p:cNvSpPr>
+          <p:nvPr/>
+        </p:nvSpPr>
+        <p:spPr>
+          <a:xfrm xmlns:a="http://schemas.openxmlformats.org/drawingml/2006/main">
+            <a:off x="9934575" y="4956810"/>
             <a:ext cx="1724025" cy="160020"/>
           </a:xfrm>
           <a:prstGeom xmlns:a="http://schemas.openxmlformats.org/drawingml/2006/main" prst="rect">
@@ -8839,18 +9119,18 @@
           <p:cNvPr id="52" name="chip-text-warm-tiktoken-cache-py">
             <a:extLst xmlns:a="http://schemas.openxmlformats.org/drawingml/2006/main">
               <a:ext uri="{FF2B5EF4-FFF2-40B4-BE49-F238E27FC236}">
-                <a16:creationId xmlns:a16="http://schemas.microsoft.com/office/drawing/2014/main" id="{A099A7A1-D46B-4976-A563-98F00F0C4BA9}"/>
-              </a:ext>
-            </a:extLst>
-          </p:cNvPr>
-          <p:cNvSpPr>
-            <a:spLocks xmlns:a="http://schemas.openxmlformats.org/drawingml/2006/main" noGrp="1"/>
-          </p:cNvSpPr>
-          <p:nvPr/>
-        </p:nvSpPr>
-        <p:spPr>
-          <a:xfrm xmlns:a="http://schemas.openxmlformats.org/drawingml/2006/main">
-            <a:off x="9913334" y="4785360"/>
+                <a16:creationId xmlns:a16="http://schemas.microsoft.com/office/drawing/2014/main" id="{2B10D893-7963-44A5-87DB-A5E2806CA1E4}"/>
+              </a:ext>
+            </a:extLst>
+          </p:cNvPr>
+          <p:cNvSpPr>
+            <a:spLocks xmlns:a="http://schemas.openxmlformats.org/drawingml/2006/main" noGrp="1"/>
+          </p:cNvSpPr>
+          <p:nvPr/>
+        </p:nvSpPr>
+        <p:spPr>
+          <a:xfrm xmlns:a="http://schemas.openxmlformats.org/drawingml/2006/main">
+            <a:off x="9913334" y="4956810"/>
             <a:ext cx="1766507" cy="160020"/>
           </a:xfrm>
           <a:prstGeom xmlns:a="http://schemas.openxmlformats.org/drawingml/2006/main" prst="rect">
@@ -8888,7 +9168,7 @@
     </p:spTree>
     <p:extLst>
       <p:ext uri="{BB962C8B-B14F-4D97-AF65-F5344CB8AC3E}">
-        <p14:creationId xmlns:p14="http://schemas.microsoft.com/office/powerpoint/2010/main" val="1316270012"/>
+        <p14:creationId xmlns:p14="http://schemas.microsoft.com/office/powerpoint/2010/main" val="738480887"/>
       </p:ext>
     </p:extLst>
   </p:cSld>
@@ -8919,7 +9199,7 @@
           <p:cNvPr id="1" name="header-kicker-为什么要做-deepaudit">
             <a:extLst xmlns:a="http://schemas.openxmlformats.org/drawingml/2006/main">
               <a:ext uri="{FF2B5EF4-FFF2-40B4-BE49-F238E27FC236}">
-                <a16:creationId xmlns:a16="http://schemas.microsoft.com/office/drawing/2014/main" id="{81958323-CD5A-4358-AA14-27294F6B103D}"/>
+                <a16:creationId xmlns:a16="http://schemas.microsoft.com/office/drawing/2014/main" id="{6AC9E101-D7EE-4150-93DE-B522714F8B24}"/>
               </a:ext>
             </a:extLst>
           </p:cNvPr>
@@ -8970,7 +9250,7 @@
           <p:cNvPr id="2" name="header-title-为什么要做-deepaudit">
             <a:extLst xmlns:a="http://schemas.openxmlformats.org/drawingml/2006/main">
               <a:ext uri="{FF2B5EF4-FFF2-40B4-BE49-F238E27FC236}">
-                <a16:creationId xmlns:a16="http://schemas.microsoft.com/office/drawing/2014/main" id="{DBF7E469-ADAB-4D0D-82D3-54C67C3F2487}"/>
+                <a16:creationId xmlns:a16="http://schemas.microsoft.com/office/drawing/2014/main" id="{378BB0A5-FCD2-477B-B1DE-B7E8DAC97C69}"/>
               </a:ext>
             </a:extLst>
           </p:cNvPr>
@@ -9021,7 +9301,7 @@
           <p:cNvPr id="3" name="header-subtitle-为什么要做-deepaudit">
             <a:extLst xmlns:a="http://schemas.openxmlformats.org/drawingml/2006/main">
               <a:ext uri="{FF2B5EF4-FFF2-40B4-BE49-F238E27FC236}">
-                <a16:creationId xmlns:a16="http://schemas.microsoft.com/office/drawing/2014/main" id="{F5B36335-C329-456C-A5D4-AF4BFEB76D7A}"/>
+                <a16:creationId xmlns:a16="http://schemas.microsoft.com/office/drawing/2014/main" id="{DE09D3B6-7F51-4BC0-AC5D-F61A1376BD50}"/>
               </a:ext>
             </a:extLst>
           </p:cNvPr>
@@ -9072,7 +9352,7 @@
           <p:cNvPr id="4" name="heading-underline">
             <a:extLst xmlns:a="http://schemas.openxmlformats.org/drawingml/2006/main">
               <a:ext uri="{FF2B5EF4-FFF2-40B4-BE49-F238E27FC236}">
-                <a16:creationId xmlns:a16="http://schemas.microsoft.com/office/drawing/2014/main" id="{56034946-A685-47A6-B4AD-3604FFD6C464}"/>
+                <a16:creationId xmlns:a16="http://schemas.microsoft.com/office/drawing/2014/main" id="{7215260F-8EDE-4A00-8687-1CED11CD5594}"/>
               </a:ext>
             </a:extLst>
           </p:cNvPr>
@@ -9109,7 +9389,7 @@
           <p:cNvPr id="5" name="why-statement">
             <a:extLst xmlns:a="http://schemas.openxmlformats.org/drawingml/2006/main">
               <a:ext uri="{FF2B5EF4-FFF2-40B4-BE49-F238E27FC236}">
-                <a16:creationId xmlns:a16="http://schemas.microsoft.com/office/drawing/2014/main" id="{93DCA1A7-D56B-45BE-8921-8FE5A1E0F737}"/>
+                <a16:creationId xmlns:a16="http://schemas.microsoft.com/office/drawing/2014/main" id="{44824FD7-8DC4-49C8-A968-61C9AAC9349E}"/>
               </a:ext>
             </a:extLst>
           </p:cNvPr>
@@ -9160,7 +9440,7 @@
           <p:cNvPr id="6" name="why-rule">
             <a:extLst xmlns:a="http://schemas.openxmlformats.org/drawingml/2006/main">
               <a:ext uri="{FF2B5EF4-FFF2-40B4-BE49-F238E27FC236}">
-                <a16:creationId xmlns:a16="http://schemas.microsoft.com/office/drawing/2014/main" id="{F62EDCA1-41FC-4909-A916-DD74BB00BC12}"/>
+                <a16:creationId xmlns:a16="http://schemas.microsoft.com/office/drawing/2014/main" id="{8B5AC37C-CF40-4B5C-924A-2F2FEC7D316B}"/>
               </a:ext>
             </a:extLst>
           </p:cNvPr>
@@ -9197,7 +9477,7 @@
           <p:cNvPr id="7" name="bullet-dot-规则固定">
             <a:extLst xmlns:a="http://schemas.openxmlformats.org/drawingml/2006/main">
               <a:ext uri="{FF2B5EF4-FFF2-40B4-BE49-F238E27FC236}">
-                <a16:creationId xmlns:a16="http://schemas.microsoft.com/office/drawing/2014/main" id="{181F60FC-5B25-4BB1-9016-5A7F2C6A33C2}"/>
+                <a16:creationId xmlns:a16="http://schemas.microsoft.com/office/drawing/2014/main" id="{4DAFF38C-1E15-4B1A-BA61-A18F26B6B100}"/>
               </a:ext>
             </a:extLst>
           </p:cNvPr>
@@ -9228,7 +9508,7 @@
           <p:cNvPr id="8" name="bullet-title-规则固定">
             <a:extLst xmlns:a="http://schemas.openxmlformats.org/drawingml/2006/main">
               <a:ext uri="{FF2B5EF4-FFF2-40B4-BE49-F238E27FC236}">
-                <a16:creationId xmlns:a16="http://schemas.microsoft.com/office/drawing/2014/main" id="{C72B38D7-540B-41BF-AB37-FE068B23670D}"/>
+                <a16:creationId xmlns:a16="http://schemas.microsoft.com/office/drawing/2014/main" id="{8EAEEF1D-5B7C-4091-B8E5-575A1E3D8AB0}"/>
               </a:ext>
             </a:extLst>
           </p:cNvPr>
@@ -9279,7 +9559,7 @@
           <p:cNvPr id="9" name="bullet-detail-规则固定">
             <a:extLst xmlns:a="http://schemas.openxmlformats.org/drawingml/2006/main">
               <a:ext uri="{FF2B5EF4-FFF2-40B4-BE49-F238E27FC236}">
-                <a16:creationId xmlns:a16="http://schemas.microsoft.com/office/drawing/2014/main" id="{5D9641F9-E643-4759-BD6F-1BF4EF782B94}"/>
+                <a16:creationId xmlns:a16="http://schemas.microsoft.com/office/drawing/2014/main" id="{6DD96B77-FA0F-4564-AC19-48C52A4DC11D}"/>
               </a:ext>
             </a:extLst>
           </p:cNvPr>
@@ -9330,7 +9610,7 @@
           <p:cNvPr id="10" name="bullet-dot-解释弱">
             <a:extLst xmlns:a="http://schemas.openxmlformats.org/drawingml/2006/main">
               <a:ext uri="{FF2B5EF4-FFF2-40B4-BE49-F238E27FC236}">
-                <a16:creationId xmlns:a16="http://schemas.microsoft.com/office/drawing/2014/main" id="{4C2257BF-0653-414D-8180-4313740B6A5F}"/>
+                <a16:creationId xmlns:a16="http://schemas.microsoft.com/office/drawing/2014/main" id="{56D577DE-9079-4B7A-A36B-A68BEFA3E2D3}"/>
               </a:ext>
             </a:extLst>
           </p:cNvPr>
@@ -9361,7 +9641,7 @@
           <p:cNvPr id="11" name="bullet-title-解释弱">
             <a:extLst xmlns:a="http://schemas.openxmlformats.org/drawingml/2006/main">
               <a:ext uri="{FF2B5EF4-FFF2-40B4-BE49-F238E27FC236}">
-                <a16:creationId xmlns:a16="http://schemas.microsoft.com/office/drawing/2014/main" id="{55A721E7-A2AD-4096-B558-516F94935084}"/>
+                <a16:creationId xmlns:a16="http://schemas.microsoft.com/office/drawing/2014/main" id="{358D8AED-CB28-465D-BEFF-2856A4CCA7F1}"/>
               </a:ext>
             </a:extLst>
           </p:cNvPr>
@@ -9412,7 +9692,7 @@
           <p:cNvPr id="12" name="bullet-detail-解释弱">
             <a:extLst xmlns:a="http://schemas.openxmlformats.org/drawingml/2006/main">
               <a:ext uri="{FF2B5EF4-FFF2-40B4-BE49-F238E27FC236}">
-                <a16:creationId xmlns:a16="http://schemas.microsoft.com/office/drawing/2014/main" id="{54786C0F-D815-4289-A5E3-9604CA57496B}"/>
+                <a16:creationId xmlns:a16="http://schemas.microsoft.com/office/drawing/2014/main" id="{80B65B6F-1085-48F1-9F58-CB8EC18C38F3}"/>
               </a:ext>
             </a:extLst>
           </p:cNvPr>
@@ -9424,7 +9704,7 @@
         <p:spPr>
           <a:xfrm xmlns:a="http://schemas.openxmlformats.org/drawingml/2006/main">
             <a:off x="723900" y="3691890"/>
-            <a:ext cx="3429000" cy="171450"/>
+            <a:ext cx="3429000" cy="342900"/>
           </a:xfrm>
           <a:prstGeom xmlns:a="http://schemas.openxmlformats.org/drawingml/2006/main" prst="rect">
             <a:avLst/>
@@ -9463,18 +9743,18 @@
           <p:cNvPr id="13" name="bullet-dot-验证弱">
             <a:extLst xmlns:a="http://schemas.openxmlformats.org/drawingml/2006/main">
               <a:ext uri="{FF2B5EF4-FFF2-40B4-BE49-F238E27FC236}">
-                <a16:creationId xmlns:a16="http://schemas.microsoft.com/office/drawing/2014/main" id="{3A3DEAEA-D5D2-4DA2-A4BD-AEBC0807C81C}"/>
-              </a:ext>
-            </a:extLst>
-          </p:cNvPr>
-          <p:cNvSpPr>
-            <a:spLocks xmlns:a="http://schemas.openxmlformats.org/drawingml/2006/main" noGrp="1"/>
-          </p:cNvSpPr>
-          <p:nvPr/>
-        </p:nvSpPr>
-        <p:spPr>
-          <a:xfrm xmlns:a="http://schemas.openxmlformats.org/drawingml/2006/main">
-            <a:off x="533400" y="4034790"/>
+                <a16:creationId xmlns:a16="http://schemas.microsoft.com/office/drawing/2014/main" id="{B2E4EB7E-1A48-41EA-BB1B-C0B79B93D01E}"/>
+              </a:ext>
+            </a:extLst>
+          </p:cNvPr>
+          <p:cNvSpPr>
+            <a:spLocks xmlns:a="http://schemas.openxmlformats.org/drawingml/2006/main" noGrp="1"/>
+          </p:cNvSpPr>
+          <p:nvPr/>
+        </p:nvSpPr>
+        <p:spPr>
+          <a:xfrm xmlns:a="http://schemas.openxmlformats.org/drawingml/2006/main">
+            <a:off x="533400" y="4206240"/>
             <a:ext cx="76200" cy="76200"/>
           </a:xfrm>
           <a:prstGeom xmlns:a="http://schemas.openxmlformats.org/drawingml/2006/main" prst="ellipse">
@@ -9494,18 +9774,18 @@
           <p:cNvPr id="14" name="bullet-title-验证弱">
             <a:extLst xmlns:a="http://schemas.openxmlformats.org/drawingml/2006/main">
               <a:ext uri="{FF2B5EF4-FFF2-40B4-BE49-F238E27FC236}">
-                <a16:creationId xmlns:a16="http://schemas.microsoft.com/office/drawing/2014/main" id="{A773601F-D799-4DEA-8D09-9B78B0BC9188}"/>
-              </a:ext>
-            </a:extLst>
-          </p:cNvPr>
-          <p:cNvSpPr>
-            <a:spLocks xmlns:a="http://schemas.openxmlformats.org/drawingml/2006/main" noGrp="1"/>
-          </p:cNvSpPr>
-          <p:nvPr/>
-        </p:nvSpPr>
-        <p:spPr>
-          <a:xfrm xmlns:a="http://schemas.openxmlformats.org/drawingml/2006/main">
-            <a:off x="723900" y="4034790"/>
+                <a16:creationId xmlns:a16="http://schemas.microsoft.com/office/drawing/2014/main" id="{B878830E-6DB2-4381-88DD-674019FE9D1F}"/>
+              </a:ext>
+            </a:extLst>
+          </p:cNvPr>
+          <p:cNvSpPr>
+            <a:spLocks xmlns:a="http://schemas.openxmlformats.org/drawingml/2006/main" noGrp="1"/>
+          </p:cNvSpPr>
+          <p:nvPr/>
+        </p:nvSpPr>
+        <p:spPr>
+          <a:xfrm xmlns:a="http://schemas.openxmlformats.org/drawingml/2006/main">
+            <a:off x="723900" y="4206240"/>
             <a:ext cx="3429000" cy="194310"/>
           </a:xfrm>
           <a:prstGeom xmlns:a="http://schemas.openxmlformats.org/drawingml/2006/main" prst="rect">
@@ -9545,18 +9825,18 @@
           <p:cNvPr id="15" name="bullet-detail-验证弱">
             <a:extLst xmlns:a="http://schemas.openxmlformats.org/drawingml/2006/main">
               <a:ext uri="{FF2B5EF4-FFF2-40B4-BE49-F238E27FC236}">
-                <a16:creationId xmlns:a16="http://schemas.microsoft.com/office/drawing/2014/main" id="{C7D76351-E4F9-4204-9622-0F6E2B21A6BE}"/>
-              </a:ext>
-            </a:extLst>
-          </p:cNvPr>
-          <p:cNvSpPr>
-            <a:spLocks xmlns:a="http://schemas.openxmlformats.org/drawingml/2006/main" noGrp="1"/>
-          </p:cNvSpPr>
-          <p:nvPr/>
-        </p:nvSpPr>
-        <p:spPr>
-          <a:xfrm xmlns:a="http://schemas.openxmlformats.org/drawingml/2006/main">
-            <a:off x="723900" y="4267200"/>
+                <a16:creationId xmlns:a16="http://schemas.microsoft.com/office/drawing/2014/main" id="{557F716C-60B7-4BC6-8C49-DF8C3DDEE26C}"/>
+              </a:ext>
+            </a:extLst>
+          </p:cNvPr>
+          <p:cNvSpPr>
+            <a:spLocks xmlns:a="http://schemas.openxmlformats.org/drawingml/2006/main" noGrp="1"/>
+          </p:cNvSpPr>
+          <p:nvPr/>
+        </p:nvSpPr>
+        <p:spPr>
+          <a:xfrm xmlns:a="http://schemas.openxmlformats.org/drawingml/2006/main">
+            <a:off x="723900" y="4438650"/>
             <a:ext cx="3429000" cy="342900"/>
           </a:xfrm>
           <a:prstGeom xmlns:a="http://schemas.openxmlformats.org/drawingml/2006/main" prst="rect">
@@ -9596,7 +9876,7 @@
           <p:cNvPr id="16" name="why-target-kicker">
             <a:extLst xmlns:a="http://schemas.openxmlformats.org/drawingml/2006/main">
               <a:ext uri="{FF2B5EF4-FFF2-40B4-BE49-F238E27FC236}">
-                <a16:creationId xmlns:a16="http://schemas.microsoft.com/office/drawing/2014/main" id="{B38FF1BC-5509-4CDC-B540-4821F2B3A29C}"/>
+                <a16:creationId xmlns:a16="http://schemas.microsoft.com/office/drawing/2014/main" id="{5ABABBCB-6D7D-412A-8803-87F418A98958}"/>
               </a:ext>
             </a:extLst>
           </p:cNvPr>
@@ -9608,7 +9888,7 @@
         <p:spPr>
           <a:xfrm xmlns:a="http://schemas.openxmlformats.org/drawingml/2006/main">
             <a:off x="4476750" y="1962150"/>
-            <a:ext cx="1203008" cy="160020"/>
+            <a:ext cx="1211485" cy="160020"/>
           </a:xfrm>
           <a:prstGeom xmlns:a="http://schemas.openxmlformats.org/drawingml/2006/main" prst="rect">
             <a:avLst/>
@@ -9647,7 +9927,7 @@
           <p:cNvPr id="17" name="why-target-title">
             <a:extLst xmlns:a="http://schemas.openxmlformats.org/drawingml/2006/main">
               <a:ext uri="{FF2B5EF4-FFF2-40B4-BE49-F238E27FC236}">
-                <a16:creationId xmlns:a16="http://schemas.microsoft.com/office/drawing/2014/main" id="{EF401CF0-E0CB-458E-948E-BEE41C9CA40E}"/>
+                <a16:creationId xmlns:a16="http://schemas.microsoft.com/office/drawing/2014/main" id="{8F610A9A-B7A7-4E85-9753-9DCEDE4C61DF}"/>
               </a:ext>
             </a:extLst>
           </p:cNvPr>
@@ -9698,7 +9978,7 @@
           <p:cNvPr id="18" name="why-target-subtitle">
             <a:extLst xmlns:a="http://schemas.openxmlformats.org/drawingml/2006/main">
               <a:ext uri="{FF2B5EF4-FFF2-40B4-BE49-F238E27FC236}">
-                <a16:creationId xmlns:a16="http://schemas.microsoft.com/office/drawing/2014/main" id="{4DFB2258-82CC-4D0C-AEDC-0A040B713754}"/>
+                <a16:creationId xmlns:a16="http://schemas.microsoft.com/office/drawing/2014/main" id="{46C31FE2-504E-413F-9173-0E1C8AEB0008}"/>
               </a:ext>
             </a:extLst>
           </p:cNvPr>
@@ -9749,7 +10029,7 @@
           <p:cNvPr id="19" name="why-trad">
             <a:extLst xmlns:a="http://schemas.openxmlformats.org/drawingml/2006/main">
               <a:ext uri="{FF2B5EF4-FFF2-40B4-BE49-F238E27FC236}">
-                <a16:creationId xmlns:a16="http://schemas.microsoft.com/office/drawing/2014/main" id="{C45EB103-A5A8-4222-ADDA-06F4BBA6167B}"/>
+                <a16:creationId xmlns:a16="http://schemas.microsoft.com/office/drawing/2014/main" id="{A18280BB-F5CF-4533-BC41-D6083C46E98D}"/>
               </a:ext>
             </a:extLst>
           </p:cNvPr>
@@ -9761,7 +10041,7 @@
         <p:spPr>
           <a:xfrm xmlns:a="http://schemas.openxmlformats.org/drawingml/2006/main">
             <a:off x="4476750" y="3493770"/>
-            <a:ext cx="571500" cy="171450"/>
+            <a:ext cx="583406" cy="171450"/>
           </a:xfrm>
           <a:prstGeom xmlns:a="http://schemas.openxmlformats.org/drawingml/2006/main" prst="rect">
             <a:avLst/>
@@ -9800,7 +10080,7 @@
           <p:cNvPr id="20" name="bullet-dot-扫描结果多">
             <a:extLst xmlns:a="http://schemas.openxmlformats.org/drawingml/2006/main">
               <a:ext uri="{FF2B5EF4-FFF2-40B4-BE49-F238E27FC236}">
-                <a16:creationId xmlns:a16="http://schemas.microsoft.com/office/drawing/2014/main" id="{D810C68C-4C27-4AE7-BB7E-2384266EED2D}"/>
+                <a16:creationId xmlns:a16="http://schemas.microsoft.com/office/drawing/2014/main" id="{756977C8-E25E-40E4-9DEC-FE36219B22E9}"/>
               </a:ext>
             </a:extLst>
           </p:cNvPr>
@@ -9831,7 +10111,7 @@
           <p:cNvPr id="21" name="bullet-title-扫描结果多">
             <a:extLst xmlns:a="http://schemas.openxmlformats.org/drawingml/2006/main">
               <a:ext uri="{FF2B5EF4-FFF2-40B4-BE49-F238E27FC236}">
-                <a16:creationId xmlns:a16="http://schemas.microsoft.com/office/drawing/2014/main" id="{E3465483-ACF1-4811-B5A4-BEC3CA4C56CB}"/>
+                <a16:creationId xmlns:a16="http://schemas.microsoft.com/office/drawing/2014/main" id="{2898FFFC-15AD-4197-9935-E6DA964D7106}"/>
               </a:ext>
             </a:extLst>
           </p:cNvPr>
@@ -9882,7 +10162,7 @@
           <p:cNvPr id="22" name="bullet-detail-扫描结果多">
             <a:extLst xmlns:a="http://schemas.openxmlformats.org/drawingml/2006/main">
               <a:ext uri="{FF2B5EF4-FFF2-40B4-BE49-F238E27FC236}">
-                <a16:creationId xmlns:a16="http://schemas.microsoft.com/office/drawing/2014/main" id="{08EA1B5C-0885-4824-BFF3-6C94CEEC0738}"/>
+                <a16:creationId xmlns:a16="http://schemas.microsoft.com/office/drawing/2014/main" id="{88EC5464-8763-4607-A111-214388A695B4}"/>
               </a:ext>
             </a:extLst>
           </p:cNvPr>
@@ -9933,7 +10213,7 @@
           <p:cNvPr id="23" name="bullet-dot-问题能发现">
             <a:extLst xmlns:a="http://schemas.openxmlformats.org/drawingml/2006/main">
               <a:ext uri="{FF2B5EF4-FFF2-40B4-BE49-F238E27FC236}">
-                <a16:creationId xmlns:a16="http://schemas.microsoft.com/office/drawing/2014/main" id="{748EAD83-1A59-467C-81BF-8BC84113EAED}"/>
+                <a16:creationId xmlns:a16="http://schemas.microsoft.com/office/drawing/2014/main" id="{1002F6DC-627E-4D41-83EE-EBD7993978D3}"/>
               </a:ext>
             </a:extLst>
           </p:cNvPr>
@@ -9964,7 +10244,7 @@
           <p:cNvPr id="24" name="bullet-title-问题能发现">
             <a:extLst xmlns:a="http://schemas.openxmlformats.org/drawingml/2006/main">
               <a:ext uri="{FF2B5EF4-FFF2-40B4-BE49-F238E27FC236}">
-                <a16:creationId xmlns:a16="http://schemas.microsoft.com/office/drawing/2014/main" id="{202C506E-C6EF-447E-AC9D-807DE76BBC62}"/>
+                <a16:creationId xmlns:a16="http://schemas.microsoft.com/office/drawing/2014/main" id="{18209BE5-6B4F-4C6D-B204-357FC12C4941}"/>
               </a:ext>
             </a:extLst>
           </p:cNvPr>
@@ -10015,7 +10295,7 @@
           <p:cNvPr id="25" name="bullet-detail-问题能发现">
             <a:extLst xmlns:a="http://schemas.openxmlformats.org/drawingml/2006/main">
               <a:ext uri="{FF2B5EF4-FFF2-40B4-BE49-F238E27FC236}">
-                <a16:creationId xmlns:a16="http://schemas.microsoft.com/office/drawing/2014/main" id="{7E4C7618-CA29-457C-9424-36F2A85DBEAA}"/>
+                <a16:creationId xmlns:a16="http://schemas.microsoft.com/office/drawing/2014/main" id="{6059393F-A65B-4195-8351-D10AB2FF19B0}"/>
               </a:ext>
             </a:extLst>
           </p:cNvPr>
@@ -10066,7 +10346,7 @@
           <p:cNvPr id="26" name="bullet-dot-报告能导出">
             <a:extLst xmlns:a="http://schemas.openxmlformats.org/drawingml/2006/main">
               <a:ext uri="{FF2B5EF4-FFF2-40B4-BE49-F238E27FC236}">
-                <a16:creationId xmlns:a16="http://schemas.microsoft.com/office/drawing/2014/main" id="{89D6D481-629D-4430-895B-152D39C7E41E}"/>
+                <a16:creationId xmlns:a16="http://schemas.microsoft.com/office/drawing/2014/main" id="{3F3AA9EA-4B3C-4DF0-8061-ED40F97C0780}"/>
               </a:ext>
             </a:extLst>
           </p:cNvPr>
@@ -10097,7 +10377,7 @@
           <p:cNvPr id="27" name="bullet-title-报告能导出">
             <a:extLst xmlns:a="http://schemas.openxmlformats.org/drawingml/2006/main">
               <a:ext uri="{FF2B5EF4-FFF2-40B4-BE49-F238E27FC236}">
-                <a16:creationId xmlns:a16="http://schemas.microsoft.com/office/drawing/2014/main" id="{9C47CFAD-C86A-41E7-907D-33E289A19A1E}"/>
+                <a16:creationId xmlns:a16="http://schemas.microsoft.com/office/drawing/2014/main" id="{7C87AE11-5D3C-48EB-9D5F-EE9F52823523}"/>
               </a:ext>
             </a:extLst>
           </p:cNvPr>
@@ -10148,7 +10428,7 @@
           <p:cNvPr id="28" name="bullet-detail-报告能导出">
             <a:extLst xmlns:a="http://schemas.openxmlformats.org/drawingml/2006/main">
               <a:ext uri="{FF2B5EF4-FFF2-40B4-BE49-F238E27FC236}">
-                <a16:creationId xmlns:a16="http://schemas.microsoft.com/office/drawing/2014/main" id="{52836E5F-C4ED-4BD5-BDC0-7C096A846615}"/>
+                <a16:creationId xmlns:a16="http://schemas.microsoft.com/office/drawing/2014/main" id="{B50645FD-EBB9-4727-AAB4-71478999703F}"/>
               </a:ext>
             </a:extLst>
           </p:cNvPr>
@@ -10199,7 +10479,7 @@
           <p:cNvPr id="29" name="why-deepaudit">
             <a:extLst xmlns:a="http://schemas.openxmlformats.org/drawingml/2006/main">
               <a:ext uri="{FF2B5EF4-FFF2-40B4-BE49-F238E27FC236}">
-                <a16:creationId xmlns:a16="http://schemas.microsoft.com/office/drawing/2014/main" id="{982A0860-8923-4229-8DB5-8F136C719F2F}"/>
+                <a16:creationId xmlns:a16="http://schemas.microsoft.com/office/drawing/2014/main" id="{B9DADE69-B45C-4AAE-95D5-C35742F08BB3}"/>
               </a:ext>
             </a:extLst>
           </p:cNvPr>
@@ -10250,7 +10530,7 @@
           <p:cNvPr id="30" name="bullet-dot-接入与权限统一">
             <a:extLst xmlns:a="http://schemas.openxmlformats.org/drawingml/2006/main">
               <a:ext uri="{FF2B5EF4-FFF2-40B4-BE49-F238E27FC236}">
-                <a16:creationId xmlns:a16="http://schemas.microsoft.com/office/drawing/2014/main" id="{B31A9370-93E6-4F7F-A9E1-70E9A9D2F048}"/>
+                <a16:creationId xmlns:a16="http://schemas.microsoft.com/office/drawing/2014/main" id="{6674BF9C-0825-4059-BC09-3F2A6CD74A83}"/>
               </a:ext>
             </a:extLst>
           </p:cNvPr>
@@ -10281,7 +10561,7 @@
           <p:cNvPr id="31" name="bullet-title-接入与权限统一">
             <a:extLst xmlns:a="http://schemas.openxmlformats.org/drawingml/2006/main">
               <a:ext uri="{FF2B5EF4-FFF2-40B4-BE49-F238E27FC236}">
-                <a16:creationId xmlns:a16="http://schemas.microsoft.com/office/drawing/2014/main" id="{E984ED3F-AA56-484B-9754-2E8F0417C6B2}"/>
+                <a16:creationId xmlns:a16="http://schemas.microsoft.com/office/drawing/2014/main" id="{D040A6B3-5165-4CF5-B174-CB14F7E65224}"/>
               </a:ext>
             </a:extLst>
           </p:cNvPr>
@@ -10332,7 +10612,7 @@
           <p:cNvPr id="32" name="bullet-detail-接入与权限统一">
             <a:extLst xmlns:a="http://schemas.openxmlformats.org/drawingml/2006/main">
               <a:ext uri="{FF2B5EF4-FFF2-40B4-BE49-F238E27FC236}">
-                <a16:creationId xmlns:a16="http://schemas.microsoft.com/office/drawing/2014/main" id="{8680C8B9-CDAA-48BF-88F0-5295B3C72169}"/>
+                <a16:creationId xmlns:a16="http://schemas.microsoft.com/office/drawing/2014/main" id="{034D53A3-EE71-489B-AAD3-443C4517FDB0}"/>
               </a:ext>
             </a:extLst>
           </p:cNvPr>
@@ -10383,7 +10663,7 @@
           <p:cNvPr id="33" name="bullet-dot-分析过程可观测">
             <a:extLst xmlns:a="http://schemas.openxmlformats.org/drawingml/2006/main">
               <a:ext uri="{FF2B5EF4-FFF2-40B4-BE49-F238E27FC236}">
-                <a16:creationId xmlns:a16="http://schemas.microsoft.com/office/drawing/2014/main" id="{A00321B6-600B-42A8-BC5E-E2B5BE63A7BF}"/>
+                <a16:creationId xmlns:a16="http://schemas.microsoft.com/office/drawing/2014/main" id="{0BD3F52A-DE45-45E7-90B4-B431270F0303}"/>
               </a:ext>
             </a:extLst>
           </p:cNvPr>
@@ -10414,7 +10694,7 @@
           <p:cNvPr id="34" name="bullet-title-分析过程可观测">
             <a:extLst xmlns:a="http://schemas.openxmlformats.org/drawingml/2006/main">
               <a:ext uri="{FF2B5EF4-FFF2-40B4-BE49-F238E27FC236}">
-                <a16:creationId xmlns:a16="http://schemas.microsoft.com/office/drawing/2014/main" id="{11466240-1E46-4FD7-ADD3-102F7173DFD0}"/>
+                <a16:creationId xmlns:a16="http://schemas.microsoft.com/office/drawing/2014/main" id="{85ABA15A-858D-46A5-94E4-643CAF4C4C1A}"/>
               </a:ext>
             </a:extLst>
           </p:cNvPr>
@@ -10465,7 +10745,7 @@
           <p:cNvPr id="35" name="bullet-detail-分析过程可观测">
             <a:extLst xmlns:a="http://schemas.openxmlformats.org/drawingml/2006/main">
               <a:ext uri="{FF2B5EF4-FFF2-40B4-BE49-F238E27FC236}">
-                <a16:creationId xmlns:a16="http://schemas.microsoft.com/office/drawing/2014/main" id="{40D0AEED-EDFF-4FB1-8703-753AEBFD9D9A}"/>
+                <a16:creationId xmlns:a16="http://schemas.microsoft.com/office/drawing/2014/main" id="{73A43BB0-8E30-457C-89EB-00571A1B40EB}"/>
               </a:ext>
             </a:extLst>
           </p:cNvPr>
@@ -10516,7 +10796,7 @@
           <p:cNvPr id="36" name="bullet-dot-动态沙箱验证">
             <a:extLst xmlns:a="http://schemas.openxmlformats.org/drawingml/2006/main">
               <a:ext uri="{FF2B5EF4-FFF2-40B4-BE49-F238E27FC236}">
-                <a16:creationId xmlns:a16="http://schemas.microsoft.com/office/drawing/2014/main" id="{5829422C-861E-4B18-8D82-0A3846B002DC}"/>
+                <a16:creationId xmlns:a16="http://schemas.microsoft.com/office/drawing/2014/main" id="{24D94619-3B7E-4476-A335-023252AD5857}"/>
               </a:ext>
             </a:extLst>
           </p:cNvPr>
@@ -10547,7 +10827,7 @@
           <p:cNvPr id="37" name="bullet-title-动态沙箱验证">
             <a:extLst xmlns:a="http://schemas.openxmlformats.org/drawingml/2006/main">
               <a:ext uri="{FF2B5EF4-FFF2-40B4-BE49-F238E27FC236}">
-                <a16:creationId xmlns:a16="http://schemas.microsoft.com/office/drawing/2014/main" id="{A622A3A0-E150-4A38-8252-64B101B17FA5}"/>
+                <a16:creationId xmlns:a16="http://schemas.microsoft.com/office/drawing/2014/main" id="{F92710A6-8C3E-4B90-B34C-FD7B97292FBA}"/>
               </a:ext>
             </a:extLst>
           </p:cNvPr>
@@ -10598,7 +10878,7 @@
           <p:cNvPr id="38" name="bullet-detail-动态沙箱验证">
             <a:extLst xmlns:a="http://schemas.openxmlformats.org/drawingml/2006/main">
               <a:ext uri="{FF2B5EF4-FFF2-40B4-BE49-F238E27FC236}">
-                <a16:creationId xmlns:a16="http://schemas.microsoft.com/office/drawing/2014/main" id="{D40BE48E-9942-4696-8CB4-3A942F0CBF77}"/>
+                <a16:creationId xmlns:a16="http://schemas.microsoft.com/office/drawing/2014/main" id="{2F04232E-B11E-496F-BF0E-5B3CA1C4BE66}"/>
               </a:ext>
             </a:extLst>
           </p:cNvPr>
@@ -10649,7 +10929,7 @@
           <p:cNvPr id="39" name="bullet-dot-结果可交付">
             <a:extLst xmlns:a="http://schemas.openxmlformats.org/drawingml/2006/main">
               <a:ext uri="{FF2B5EF4-FFF2-40B4-BE49-F238E27FC236}">
-                <a16:creationId xmlns:a16="http://schemas.microsoft.com/office/drawing/2014/main" id="{F8A4D374-D558-4B1F-8CA2-BFEB384465E2}"/>
+                <a16:creationId xmlns:a16="http://schemas.microsoft.com/office/drawing/2014/main" id="{A4649942-EDCB-45D1-93CD-44D40F3C42FA}"/>
               </a:ext>
             </a:extLst>
           </p:cNvPr>
@@ -10680,7 +10960,7 @@
           <p:cNvPr id="40" name="bullet-title-结果可交付">
             <a:extLst xmlns:a="http://schemas.openxmlformats.org/drawingml/2006/main">
               <a:ext uri="{FF2B5EF4-FFF2-40B4-BE49-F238E27FC236}">
-                <a16:creationId xmlns:a16="http://schemas.microsoft.com/office/drawing/2014/main" id="{D5E2E97E-77BE-403D-A685-F81EDC0B5D98}"/>
+                <a16:creationId xmlns:a16="http://schemas.microsoft.com/office/drawing/2014/main" id="{F3ECADB7-61D5-4AEC-819A-8F82AF2E9FAB}"/>
               </a:ext>
             </a:extLst>
           </p:cNvPr>
@@ -10731,7 +11011,7 @@
           <p:cNvPr id="41" name="bullet-detail-结果可交付">
             <a:extLst xmlns:a="http://schemas.openxmlformats.org/drawingml/2006/main">
               <a:ext uri="{FF2B5EF4-FFF2-40B4-BE49-F238E27FC236}">
-                <a16:creationId xmlns:a16="http://schemas.microsoft.com/office/drawing/2014/main" id="{5C2A5BCB-8697-4A07-8E02-B73FADE19B4F}"/>
+                <a16:creationId xmlns:a16="http://schemas.microsoft.com/office/drawing/2014/main" id="{F247DFD4-D7D7-41B5-9524-66916260CA5A}"/>
               </a:ext>
             </a:extLst>
           </p:cNvPr>
@@ -10780,7 +11060,7 @@
     </p:spTree>
     <p:extLst>
       <p:ext uri="{BB962C8B-B14F-4D97-AF65-F5344CB8AC3E}">
-        <p14:creationId xmlns:p14="http://schemas.microsoft.com/office/powerpoint/2010/main" val="99731272"/>
+        <p14:creationId xmlns:p14="http://schemas.microsoft.com/office/powerpoint/2010/main" val="913176680"/>
       </p:ext>
     </p:extLst>
   </p:cSld>
@@ -10811,7 +11091,7 @@
           <p:cNvPr id="1" name="header-kicker-现有功能与对象分工">
             <a:extLst xmlns:a="http://schemas.openxmlformats.org/drawingml/2006/main">
               <a:ext uri="{FF2B5EF4-FFF2-40B4-BE49-F238E27FC236}">
-                <a16:creationId xmlns:a16="http://schemas.microsoft.com/office/drawing/2014/main" id="{82B31EF7-73D6-409F-861A-069B38B86FCF}"/>
+                <a16:creationId xmlns:a16="http://schemas.microsoft.com/office/drawing/2014/main" id="{56DB73F3-C0F6-40C6-85B6-F5B3A339C684}"/>
               </a:ext>
             </a:extLst>
           </p:cNvPr>
@@ -10862,7 +11142,7 @@
           <p:cNvPr id="2" name="header-title-现有功能与对象分工">
             <a:extLst xmlns:a="http://schemas.openxmlformats.org/drawingml/2006/main">
               <a:ext uri="{FF2B5EF4-FFF2-40B4-BE49-F238E27FC236}">
-                <a16:creationId xmlns:a16="http://schemas.microsoft.com/office/drawing/2014/main" id="{FD3DF831-0F56-4D3F-9E26-63D0F662A786}"/>
+                <a16:creationId xmlns:a16="http://schemas.microsoft.com/office/drawing/2014/main" id="{B3E55606-D293-4293-B9E6-BD06532AA672}"/>
               </a:ext>
             </a:extLst>
           </p:cNvPr>
@@ -10913,7 +11193,7 @@
           <p:cNvPr id="3" name="header-subtitle-现有功能与对象分工">
             <a:extLst xmlns:a="http://schemas.openxmlformats.org/drawingml/2006/main">
               <a:ext uri="{FF2B5EF4-FFF2-40B4-BE49-F238E27FC236}">
-                <a16:creationId xmlns:a16="http://schemas.microsoft.com/office/drawing/2014/main" id="{D8F393A1-1878-42CE-9EE8-DA623D6BB3C6}"/>
+                <a16:creationId xmlns:a16="http://schemas.microsoft.com/office/drawing/2014/main" id="{D8AD90A1-ACCD-4F60-AB7C-B7C85D41B05D}"/>
               </a:ext>
             </a:extLst>
           </p:cNvPr>
@@ -10964,7 +11244,7 @@
           <p:cNvPr id="4" name="heading-underline">
             <a:extLst xmlns:a="http://schemas.openxmlformats.org/drawingml/2006/main">
               <a:ext uri="{FF2B5EF4-FFF2-40B4-BE49-F238E27FC236}">
-                <a16:creationId xmlns:a16="http://schemas.microsoft.com/office/drawing/2014/main" id="{1A119324-DD0E-4E29-A1DF-A6DEFC69BDC7}"/>
+                <a16:creationId xmlns:a16="http://schemas.microsoft.com/office/drawing/2014/main" id="{56169DD2-1D09-4656-A116-4081B0BB63FE}"/>
               </a:ext>
             </a:extLst>
           </p:cNvPr>
@@ -11001,7 +11281,7 @@
           <p:cNvPr id="5" name="stage-num-01">
             <a:extLst xmlns:a="http://schemas.openxmlformats.org/drawingml/2006/main">
               <a:ext uri="{FF2B5EF4-FFF2-40B4-BE49-F238E27FC236}">
-                <a16:creationId xmlns:a16="http://schemas.microsoft.com/office/drawing/2014/main" id="{4B2CD71D-B2D8-43BA-8D68-3F20493AD8F9}"/>
+                <a16:creationId xmlns:a16="http://schemas.microsoft.com/office/drawing/2014/main" id="{2BFE4446-D9FC-41DC-AE61-C5A3060F8F24}"/>
               </a:ext>
             </a:extLst>
           </p:cNvPr>
@@ -11052,7 +11332,7 @@
           <p:cNvPr id="6" name="stage-title-项目接入">
             <a:extLst xmlns:a="http://schemas.openxmlformats.org/drawingml/2006/main">
               <a:ext uri="{FF2B5EF4-FFF2-40B4-BE49-F238E27FC236}">
-                <a16:creationId xmlns:a16="http://schemas.microsoft.com/office/drawing/2014/main" id="{36184E24-C297-4D40-BAEB-2A2FEB114B3C}"/>
+                <a16:creationId xmlns:a16="http://schemas.microsoft.com/office/drawing/2014/main" id="{45804F74-5821-4B1D-BB15-4420E0CC39C7}"/>
               </a:ext>
             </a:extLst>
           </p:cNvPr>
@@ -11064,7 +11344,7 @@
         <p:spPr>
           <a:xfrm xmlns:a="http://schemas.openxmlformats.org/drawingml/2006/main">
             <a:off x="533400" y="2461260"/>
-            <a:ext cx="990600" cy="297180"/>
+            <a:ext cx="1011555" cy="297180"/>
           </a:xfrm>
           <a:prstGeom xmlns:a="http://schemas.openxmlformats.org/drawingml/2006/main" prst="rect">
             <a:avLst/>
@@ -11103,7 +11383,7 @@
           <p:cNvPr id="7" name="stage-rule-项目接入">
             <a:extLst xmlns:a="http://schemas.openxmlformats.org/drawingml/2006/main">
               <a:ext uri="{FF2B5EF4-FFF2-40B4-BE49-F238E27FC236}">
-                <a16:creationId xmlns:a16="http://schemas.microsoft.com/office/drawing/2014/main" id="{17901C9F-9D32-4A0E-9A21-3C87E1F4BEB1}"/>
+                <a16:creationId xmlns:a16="http://schemas.microsoft.com/office/drawing/2014/main" id="{0B41D6ED-85C5-4903-A37B-4D067BE52E24}"/>
               </a:ext>
             </a:extLst>
           </p:cNvPr>
@@ -11140,7 +11420,7 @@
           <p:cNvPr id="8" name="bullet-dot-仓库-zip-分支">
             <a:extLst xmlns:a="http://schemas.openxmlformats.org/drawingml/2006/main">
               <a:ext uri="{FF2B5EF4-FFF2-40B4-BE49-F238E27FC236}">
-                <a16:creationId xmlns:a16="http://schemas.microsoft.com/office/drawing/2014/main" id="{CEB4DEB2-9A64-4159-89D5-C092F95761A3}"/>
+                <a16:creationId xmlns:a16="http://schemas.microsoft.com/office/drawing/2014/main" id="{4827BB58-DA27-4D02-9E36-413098E8E04B}"/>
               </a:ext>
             </a:extLst>
           </p:cNvPr>
@@ -11171,7 +11451,7 @@
           <p:cNvPr id="9" name="bullet-title-仓库-zip-分支">
             <a:extLst xmlns:a="http://schemas.openxmlformats.org/drawingml/2006/main">
               <a:ext uri="{FF2B5EF4-FFF2-40B4-BE49-F238E27FC236}">
-                <a16:creationId xmlns:a16="http://schemas.microsoft.com/office/drawing/2014/main" id="{048FC641-657C-4784-AE49-5AFAB9E1B40C}"/>
+                <a16:creationId xmlns:a16="http://schemas.microsoft.com/office/drawing/2014/main" id="{8F9F60C3-5A76-4287-B6A1-3414A9EBCDB7}"/>
               </a:ext>
             </a:extLst>
           </p:cNvPr>
@@ -11222,7 +11502,7 @@
           <p:cNvPr id="10" name="bullet-detail-仓库-zip-分支">
             <a:extLst xmlns:a="http://schemas.openxmlformats.org/drawingml/2006/main">
               <a:ext uri="{FF2B5EF4-FFF2-40B4-BE49-F238E27FC236}">
-                <a16:creationId xmlns:a16="http://schemas.microsoft.com/office/drawing/2014/main" id="{D68B714F-C7FE-40E7-B121-A21D7AEF3BCB}"/>
+                <a16:creationId xmlns:a16="http://schemas.microsoft.com/office/drawing/2014/main" id="{8F2B9046-3C47-4B7A-A3C6-AF2EB6616476}"/>
               </a:ext>
             </a:extLst>
           </p:cNvPr>
@@ -11273,7 +11553,7 @@
           <p:cNvPr id="11" name="bullet-dot-成员-权限">
             <a:extLst xmlns:a="http://schemas.openxmlformats.org/drawingml/2006/main">
               <a:ext uri="{FF2B5EF4-FFF2-40B4-BE49-F238E27FC236}">
-                <a16:creationId xmlns:a16="http://schemas.microsoft.com/office/drawing/2014/main" id="{A4558817-8EC8-4E33-9ECB-B0D12D40522D}"/>
+                <a16:creationId xmlns:a16="http://schemas.microsoft.com/office/drawing/2014/main" id="{87C40054-877E-4DE8-BE88-0F2E50342E24}"/>
               </a:ext>
             </a:extLst>
           </p:cNvPr>
@@ -11304,7 +11584,7 @@
           <p:cNvPr id="12" name="bullet-title-成员-权限">
             <a:extLst xmlns:a="http://schemas.openxmlformats.org/drawingml/2006/main">
               <a:ext uri="{FF2B5EF4-FFF2-40B4-BE49-F238E27FC236}">
-                <a16:creationId xmlns:a16="http://schemas.microsoft.com/office/drawing/2014/main" id="{EAE01489-53F9-4C26-BF45-2886E4C81B09}"/>
+                <a16:creationId xmlns:a16="http://schemas.microsoft.com/office/drawing/2014/main" id="{57DAD847-42D3-4C6B-A436-74F8D16CEFCE}"/>
               </a:ext>
             </a:extLst>
           </p:cNvPr>
@@ -11355,7 +11635,7 @@
           <p:cNvPr id="13" name="bullet-detail-成员-权限">
             <a:extLst xmlns:a="http://schemas.openxmlformats.org/drawingml/2006/main">
               <a:ext uri="{FF2B5EF4-FFF2-40B4-BE49-F238E27FC236}">
-                <a16:creationId xmlns:a16="http://schemas.microsoft.com/office/drawing/2014/main" id="{B4B39AF0-EE7E-4507-89B5-F3EBBB112422}"/>
+                <a16:creationId xmlns:a16="http://schemas.microsoft.com/office/drawing/2014/main" id="{9120C90D-B62B-4E42-A762-6CBE66CA0829}"/>
               </a:ext>
             </a:extLst>
           </p:cNvPr>
@@ -11406,7 +11686,7 @@
           <p:cNvPr id="14" name="bullet-dot-回收站-工作区">
             <a:extLst xmlns:a="http://schemas.openxmlformats.org/drawingml/2006/main">
               <a:ext uri="{FF2B5EF4-FFF2-40B4-BE49-F238E27FC236}">
-                <a16:creationId xmlns:a16="http://schemas.microsoft.com/office/drawing/2014/main" id="{08E48567-B0D4-418C-A5B1-95594ABE3A08}"/>
+                <a16:creationId xmlns:a16="http://schemas.microsoft.com/office/drawing/2014/main" id="{37DD8A34-1186-46BB-9C5B-71202005E1D6}"/>
               </a:ext>
             </a:extLst>
           </p:cNvPr>
@@ -11437,7 +11717,7 @@
           <p:cNvPr id="15" name="bullet-title-回收站-工作区">
             <a:extLst xmlns:a="http://schemas.openxmlformats.org/drawingml/2006/main">
               <a:ext uri="{FF2B5EF4-FFF2-40B4-BE49-F238E27FC236}">
-                <a16:creationId xmlns:a16="http://schemas.microsoft.com/office/drawing/2014/main" id="{FD96DB20-4791-4D26-A581-526FA19980B3}"/>
+                <a16:creationId xmlns:a16="http://schemas.microsoft.com/office/drawing/2014/main" id="{A030D75A-DDE6-4B95-A976-DA14F7936B26}"/>
               </a:ext>
             </a:extLst>
           </p:cNvPr>
@@ -11488,7 +11768,7 @@
           <p:cNvPr id="16" name="bullet-detail-回收站-工作区">
             <a:extLst xmlns:a="http://schemas.openxmlformats.org/drawingml/2006/main">
               <a:ext uri="{FF2B5EF4-FFF2-40B4-BE49-F238E27FC236}">
-                <a16:creationId xmlns:a16="http://schemas.microsoft.com/office/drawing/2014/main" id="{3D8FDB97-18C2-4188-A8F1-EA7C9193E3D9}"/>
+                <a16:creationId xmlns:a16="http://schemas.microsoft.com/office/drawing/2014/main" id="{C3845020-EF48-4701-BB12-19551E12A658}"/>
               </a:ext>
             </a:extLst>
           </p:cNvPr>
@@ -11539,7 +11819,7 @@
           <p:cNvPr id="17" name="stage-num-02">
             <a:extLst xmlns:a="http://schemas.openxmlformats.org/drawingml/2006/main">
               <a:ext uri="{FF2B5EF4-FFF2-40B4-BE49-F238E27FC236}">
-                <a16:creationId xmlns:a16="http://schemas.microsoft.com/office/drawing/2014/main" id="{BB8B5380-E1C1-4DC8-AB3F-0A9675420F30}"/>
+                <a16:creationId xmlns:a16="http://schemas.microsoft.com/office/drawing/2014/main" id="{C013D1E5-BB0B-4764-8A6B-BE423C67E1C6}"/>
               </a:ext>
             </a:extLst>
           </p:cNvPr>
@@ -11590,7 +11870,7 @@
           <p:cNvPr id="18" name="stage-title-审计能力">
             <a:extLst xmlns:a="http://schemas.openxmlformats.org/drawingml/2006/main">
               <a:ext uri="{FF2B5EF4-FFF2-40B4-BE49-F238E27FC236}">
-                <a16:creationId xmlns:a16="http://schemas.microsoft.com/office/drawing/2014/main" id="{893445A9-D8AD-479E-9785-BE9823C77AA9}"/>
+                <a16:creationId xmlns:a16="http://schemas.microsoft.com/office/drawing/2014/main" id="{C0A74BD1-B7D5-404F-8934-53B56E90CA94}"/>
               </a:ext>
             </a:extLst>
           </p:cNvPr>
@@ -11602,7 +11882,7 @@
         <p:spPr>
           <a:xfrm xmlns:a="http://schemas.openxmlformats.org/drawingml/2006/main">
             <a:off x="3200400" y="2461260"/>
-            <a:ext cx="990600" cy="297180"/>
+            <a:ext cx="1011555" cy="297180"/>
           </a:xfrm>
           <a:prstGeom xmlns:a="http://schemas.openxmlformats.org/drawingml/2006/main" prst="rect">
             <a:avLst/>
@@ -11641,7 +11921,7 @@
           <p:cNvPr id="19" name="stage-rule-审计能力">
             <a:extLst xmlns:a="http://schemas.openxmlformats.org/drawingml/2006/main">
               <a:ext uri="{FF2B5EF4-FFF2-40B4-BE49-F238E27FC236}">
-                <a16:creationId xmlns:a16="http://schemas.microsoft.com/office/drawing/2014/main" id="{A19C569C-7248-4A89-8F03-0FA679A93922}"/>
+                <a16:creationId xmlns:a16="http://schemas.microsoft.com/office/drawing/2014/main" id="{D1836C2C-A65D-475F-AD7B-69FDEA363D30}"/>
               </a:ext>
             </a:extLst>
           </p:cNvPr>
@@ -11678,7 +11958,7 @@
           <p:cNvPr id="20" name="bullet-dot-传统扫描">
             <a:extLst xmlns:a="http://schemas.openxmlformats.org/drawingml/2006/main">
               <a:ext uri="{FF2B5EF4-FFF2-40B4-BE49-F238E27FC236}">
-                <a16:creationId xmlns:a16="http://schemas.microsoft.com/office/drawing/2014/main" id="{AB9A1B86-979B-43C6-B6C6-0441812CEBEC}"/>
+                <a16:creationId xmlns:a16="http://schemas.microsoft.com/office/drawing/2014/main" id="{BD98F69E-E5FB-4C10-913A-4189C3F2E245}"/>
               </a:ext>
             </a:extLst>
           </p:cNvPr>
@@ -11709,7 +11989,7 @@
           <p:cNvPr id="21" name="bullet-title-传统扫描">
             <a:extLst xmlns:a="http://schemas.openxmlformats.org/drawingml/2006/main">
               <a:ext uri="{FF2B5EF4-FFF2-40B4-BE49-F238E27FC236}">
-                <a16:creationId xmlns:a16="http://schemas.microsoft.com/office/drawing/2014/main" id="{4C5862C7-43A7-402D-8C85-319871840BA6}"/>
+                <a16:creationId xmlns:a16="http://schemas.microsoft.com/office/drawing/2014/main" id="{584497DD-EC0B-4FD7-9CCE-450641D7E884}"/>
               </a:ext>
             </a:extLst>
           </p:cNvPr>
@@ -11760,7 +12040,7 @@
           <p:cNvPr id="22" name="bullet-detail-传统扫描">
             <a:extLst xmlns:a="http://schemas.openxmlformats.org/drawingml/2006/main">
               <a:ext uri="{FF2B5EF4-FFF2-40B4-BE49-F238E27FC236}">
-                <a16:creationId xmlns:a16="http://schemas.microsoft.com/office/drawing/2014/main" id="{9758338C-D2DE-4A1B-9370-A917634ABE7D}"/>
+                <a16:creationId xmlns:a16="http://schemas.microsoft.com/office/drawing/2014/main" id="{4D92196A-90A6-4B73-B98D-939BB9DACAF2}"/>
               </a:ext>
             </a:extLst>
           </p:cNvPr>
@@ -11811,7 +12091,7 @@
           <p:cNvPr id="23" name="bullet-dot-agent-审计">
             <a:extLst xmlns:a="http://schemas.openxmlformats.org/drawingml/2006/main">
               <a:ext uri="{FF2B5EF4-FFF2-40B4-BE49-F238E27FC236}">
-                <a16:creationId xmlns:a16="http://schemas.microsoft.com/office/drawing/2014/main" id="{E10C65ED-127C-4B8D-9E4A-B041FA69C8A5}"/>
+                <a16:creationId xmlns:a16="http://schemas.microsoft.com/office/drawing/2014/main" id="{61313D26-2EC9-4926-959A-89F06BC6FB6C}"/>
               </a:ext>
             </a:extLst>
           </p:cNvPr>
@@ -11842,7 +12122,7 @@
           <p:cNvPr id="24" name="bullet-title-agent-审计">
             <a:extLst xmlns:a="http://schemas.openxmlformats.org/drawingml/2006/main">
               <a:ext uri="{FF2B5EF4-FFF2-40B4-BE49-F238E27FC236}">
-                <a16:creationId xmlns:a16="http://schemas.microsoft.com/office/drawing/2014/main" id="{D897FA37-6949-4C04-8061-16084F384AE7}"/>
+                <a16:creationId xmlns:a16="http://schemas.microsoft.com/office/drawing/2014/main" id="{B50CDDBA-FF46-4958-BCB1-F3F10080D2AA}"/>
               </a:ext>
             </a:extLst>
           </p:cNvPr>
@@ -11893,7 +12173,7 @@
           <p:cNvPr id="25" name="bullet-detail-agent-审计">
             <a:extLst xmlns:a="http://schemas.openxmlformats.org/drawingml/2006/main">
               <a:ext uri="{FF2B5EF4-FFF2-40B4-BE49-F238E27FC236}">
-                <a16:creationId xmlns:a16="http://schemas.microsoft.com/office/drawing/2014/main" id="{F907D049-7A19-492D-867F-72D1B985EC4D}"/>
+                <a16:creationId xmlns:a16="http://schemas.microsoft.com/office/drawing/2014/main" id="{82FF6AB1-8CE6-4D92-9FC1-FE4F279B7287}"/>
               </a:ext>
             </a:extLst>
           </p:cNvPr>
@@ -11944,7 +12224,7 @@
           <p:cNvPr id="26" name="bullet-dot-结果聚合">
             <a:extLst xmlns:a="http://schemas.openxmlformats.org/drawingml/2006/main">
               <a:ext uri="{FF2B5EF4-FFF2-40B4-BE49-F238E27FC236}">
-                <a16:creationId xmlns:a16="http://schemas.microsoft.com/office/drawing/2014/main" id="{0D819D58-2304-4B43-AA1F-657A230C5B58}"/>
+                <a16:creationId xmlns:a16="http://schemas.microsoft.com/office/drawing/2014/main" id="{031BAAEF-0352-4713-8514-B2CE67D93F4A}"/>
               </a:ext>
             </a:extLst>
           </p:cNvPr>
@@ -11975,7 +12255,7 @@
           <p:cNvPr id="27" name="bullet-title-结果聚合">
             <a:extLst xmlns:a="http://schemas.openxmlformats.org/drawingml/2006/main">
               <a:ext uri="{FF2B5EF4-FFF2-40B4-BE49-F238E27FC236}">
-                <a16:creationId xmlns:a16="http://schemas.microsoft.com/office/drawing/2014/main" id="{B029A2D6-86B2-4E59-B6A9-85BA2A758021}"/>
+                <a16:creationId xmlns:a16="http://schemas.microsoft.com/office/drawing/2014/main" id="{88F811CA-3097-47B3-A5E3-4A8094C121BD}"/>
               </a:ext>
             </a:extLst>
           </p:cNvPr>
@@ -12026,7 +12306,7 @@
           <p:cNvPr id="28" name="bullet-detail-结果聚合">
             <a:extLst xmlns:a="http://schemas.openxmlformats.org/drawingml/2006/main">
               <a:ext uri="{FF2B5EF4-FFF2-40B4-BE49-F238E27FC236}">
-                <a16:creationId xmlns:a16="http://schemas.microsoft.com/office/drawing/2014/main" id="{2DC9F8F0-2934-4045-A999-CA3773A02604}"/>
+                <a16:creationId xmlns:a16="http://schemas.microsoft.com/office/drawing/2014/main" id="{0A15528B-B965-4C5A-8701-DAF159F7356C}"/>
               </a:ext>
             </a:extLst>
           </p:cNvPr>
@@ -12077,7 +12357,7 @@
           <p:cNvPr id="29" name="stage-num-03">
             <a:extLst xmlns:a="http://schemas.openxmlformats.org/drawingml/2006/main">
               <a:ext uri="{FF2B5EF4-FFF2-40B4-BE49-F238E27FC236}">
-                <a16:creationId xmlns:a16="http://schemas.microsoft.com/office/drawing/2014/main" id="{0D4A2EFE-6F05-4CCF-A8D9-61C5104F2397}"/>
+                <a16:creationId xmlns:a16="http://schemas.microsoft.com/office/drawing/2014/main" id="{93639849-F3EB-4437-BD17-D6D0B5604375}"/>
               </a:ext>
             </a:extLst>
           </p:cNvPr>
@@ -12128,7 +12408,7 @@
           <p:cNvPr id="30" name="stage-title-策略治理">
             <a:extLst xmlns:a="http://schemas.openxmlformats.org/drawingml/2006/main">
               <a:ext uri="{FF2B5EF4-FFF2-40B4-BE49-F238E27FC236}">
-                <a16:creationId xmlns:a16="http://schemas.microsoft.com/office/drawing/2014/main" id="{8FBA0304-6020-4BA5-89F5-5C3B731C3BA8}"/>
+                <a16:creationId xmlns:a16="http://schemas.microsoft.com/office/drawing/2014/main" id="{151ADA9C-CA5C-41E9-A47A-CAEF38C3533F}"/>
               </a:ext>
             </a:extLst>
           </p:cNvPr>
@@ -12140,7 +12420,7 @@
         <p:spPr>
           <a:xfrm xmlns:a="http://schemas.openxmlformats.org/drawingml/2006/main">
             <a:off x="5867400" y="2461260"/>
-            <a:ext cx="990600" cy="297180"/>
+            <a:ext cx="1011555" cy="297180"/>
           </a:xfrm>
           <a:prstGeom xmlns:a="http://schemas.openxmlformats.org/drawingml/2006/main" prst="rect">
             <a:avLst/>
@@ -12179,7 +12459,7 @@
           <p:cNvPr id="31" name="stage-rule-策略治理">
             <a:extLst xmlns:a="http://schemas.openxmlformats.org/drawingml/2006/main">
               <a:ext uri="{FF2B5EF4-FFF2-40B4-BE49-F238E27FC236}">
-                <a16:creationId xmlns:a16="http://schemas.microsoft.com/office/drawing/2014/main" id="{9CA264D2-B89E-4AE0-83D2-761CCE3C38FE}"/>
+                <a16:creationId xmlns:a16="http://schemas.microsoft.com/office/drawing/2014/main" id="{C6938590-A6CD-4839-B22F-1885C35C4F46}"/>
               </a:ext>
             </a:extLst>
           </p:cNvPr>
@@ -12216,7 +12496,7 @@
           <p:cNvPr id="32" name="bullet-dot-规则集-规则">
             <a:extLst xmlns:a="http://schemas.openxmlformats.org/drawingml/2006/main">
               <a:ext uri="{FF2B5EF4-FFF2-40B4-BE49-F238E27FC236}">
-                <a16:creationId xmlns:a16="http://schemas.microsoft.com/office/drawing/2014/main" id="{A77FDFFA-054A-4227-9175-E1654FDA72FD}"/>
+                <a16:creationId xmlns:a16="http://schemas.microsoft.com/office/drawing/2014/main" id="{18389CFC-F7F0-48E6-B536-4ED2984927DC}"/>
               </a:ext>
             </a:extLst>
           </p:cNvPr>
@@ -12247,7 +12527,7 @@
           <p:cNvPr id="33" name="bullet-title-规则集-规则">
             <a:extLst xmlns:a="http://schemas.openxmlformats.org/drawingml/2006/main">
               <a:ext uri="{FF2B5EF4-FFF2-40B4-BE49-F238E27FC236}">
-                <a16:creationId xmlns:a16="http://schemas.microsoft.com/office/drawing/2014/main" id="{621FF25E-C2C2-4272-87D8-F5D00DF82F32}"/>
+                <a16:creationId xmlns:a16="http://schemas.microsoft.com/office/drawing/2014/main" id="{75167A95-FA41-40AD-852D-2110D6F78380}"/>
               </a:ext>
             </a:extLst>
           </p:cNvPr>
@@ -12298,7 +12578,7 @@
           <p:cNvPr id="34" name="bullet-detail-规则集-规则">
             <a:extLst xmlns:a="http://schemas.openxmlformats.org/drawingml/2006/main">
               <a:ext uri="{FF2B5EF4-FFF2-40B4-BE49-F238E27FC236}">
-                <a16:creationId xmlns:a16="http://schemas.microsoft.com/office/drawing/2014/main" id="{C540E324-ABFF-4F41-8795-B18F23480CF5}"/>
+                <a16:creationId xmlns:a16="http://schemas.microsoft.com/office/drawing/2014/main" id="{DB28D490-5463-4040-B897-23AD2FF2E37D}"/>
               </a:ext>
             </a:extLst>
           </p:cNvPr>
@@ -12349,7 +12629,7 @@
           <p:cNvPr id="35" name="bullet-dot-提示词模板">
             <a:extLst xmlns:a="http://schemas.openxmlformats.org/drawingml/2006/main">
               <a:ext uri="{FF2B5EF4-FFF2-40B4-BE49-F238E27FC236}">
-                <a16:creationId xmlns:a16="http://schemas.microsoft.com/office/drawing/2014/main" id="{276B7516-92C4-4CC9-AFC2-D02ACC5BD2DB}"/>
+                <a16:creationId xmlns:a16="http://schemas.microsoft.com/office/drawing/2014/main" id="{EBB893EE-4DB5-4634-836F-D880DC0D2500}"/>
               </a:ext>
             </a:extLst>
           </p:cNvPr>
@@ -12380,7 +12660,7 @@
           <p:cNvPr id="36" name="bullet-title-提示词模板">
             <a:extLst xmlns:a="http://schemas.openxmlformats.org/drawingml/2006/main">
               <a:ext uri="{FF2B5EF4-FFF2-40B4-BE49-F238E27FC236}">
-                <a16:creationId xmlns:a16="http://schemas.microsoft.com/office/drawing/2014/main" id="{636F1567-30B9-45F9-A4D3-87905F15753E}"/>
+                <a16:creationId xmlns:a16="http://schemas.microsoft.com/office/drawing/2014/main" id="{A862559C-1252-4A26-83DD-72FB0581CF6C}"/>
               </a:ext>
             </a:extLst>
           </p:cNvPr>
@@ -12431,7 +12711,7 @@
           <p:cNvPr id="37" name="bullet-detail-提示词模板">
             <a:extLst xmlns:a="http://schemas.openxmlformats.org/drawingml/2006/main">
               <a:ext uri="{FF2B5EF4-FFF2-40B4-BE49-F238E27FC236}">
-                <a16:creationId xmlns:a16="http://schemas.microsoft.com/office/drawing/2014/main" id="{2C71EEB4-9F34-4115-8AF5-FD04DD75F4CB}"/>
+                <a16:creationId xmlns:a16="http://schemas.microsoft.com/office/drawing/2014/main" id="{F0322EA9-05B8-4AB4-8C81-79D3B81E8EAD}"/>
               </a:ext>
             </a:extLst>
           </p:cNvPr>
@@ -12443,7 +12723,7 @@
         <p:spPr>
           <a:xfrm xmlns:a="http://schemas.openxmlformats.org/drawingml/2006/main">
             <a:off x="6057900" y="3870960"/>
-            <a:ext cx="2305050" cy="171450"/>
+            <a:ext cx="2305050" cy="342900"/>
           </a:xfrm>
           <a:prstGeom xmlns:a="http://schemas.openxmlformats.org/drawingml/2006/main" prst="rect">
             <a:avLst/>
@@ -12482,18 +12762,18 @@
           <p:cNvPr id="38" name="bullet-dot-rag-系统配置">
             <a:extLst xmlns:a="http://schemas.openxmlformats.org/drawingml/2006/main">
               <a:ext uri="{FF2B5EF4-FFF2-40B4-BE49-F238E27FC236}">
-                <a16:creationId xmlns:a16="http://schemas.microsoft.com/office/drawing/2014/main" id="{C44B5D49-FF20-4C1C-8CEB-EE7676538646}"/>
-              </a:ext>
-            </a:extLst>
-          </p:cNvPr>
-          <p:cNvSpPr>
-            <a:spLocks xmlns:a="http://schemas.openxmlformats.org/drawingml/2006/main" noGrp="1"/>
-          </p:cNvSpPr>
-          <p:nvPr/>
-        </p:nvSpPr>
-        <p:spPr>
-          <a:xfrm xmlns:a="http://schemas.openxmlformats.org/drawingml/2006/main">
-            <a:off x="5867400" y="4137660"/>
+                <a16:creationId xmlns:a16="http://schemas.microsoft.com/office/drawing/2014/main" id="{543FEA14-1DA2-4BC0-9784-E92035E43FE6}"/>
+              </a:ext>
+            </a:extLst>
+          </p:cNvPr>
+          <p:cNvSpPr>
+            <a:spLocks xmlns:a="http://schemas.openxmlformats.org/drawingml/2006/main" noGrp="1"/>
+          </p:cNvSpPr>
+          <p:nvPr/>
+        </p:nvSpPr>
+        <p:spPr>
+          <a:xfrm xmlns:a="http://schemas.openxmlformats.org/drawingml/2006/main">
+            <a:off x="5867400" y="4309110"/>
             <a:ext cx="76200" cy="76200"/>
           </a:xfrm>
           <a:prstGeom xmlns:a="http://schemas.openxmlformats.org/drawingml/2006/main" prst="ellipse">
@@ -12513,18 +12793,18 @@
           <p:cNvPr id="39" name="bullet-title-rag-系统配置">
             <a:extLst xmlns:a="http://schemas.openxmlformats.org/drawingml/2006/main">
               <a:ext uri="{FF2B5EF4-FFF2-40B4-BE49-F238E27FC236}">
-                <a16:creationId xmlns:a16="http://schemas.microsoft.com/office/drawing/2014/main" id="{6AF7D13A-DAB8-432E-B287-109FEA0EFE93}"/>
-              </a:ext>
-            </a:extLst>
-          </p:cNvPr>
-          <p:cNvSpPr>
-            <a:spLocks xmlns:a="http://schemas.openxmlformats.org/drawingml/2006/main" noGrp="1"/>
-          </p:cNvSpPr>
-          <p:nvPr/>
-        </p:nvSpPr>
-        <p:spPr>
-          <a:xfrm xmlns:a="http://schemas.openxmlformats.org/drawingml/2006/main">
-            <a:off x="6057900" y="4137660"/>
+                <a16:creationId xmlns:a16="http://schemas.microsoft.com/office/drawing/2014/main" id="{CCB95AE8-195A-46F4-B8C8-AB1EFA62A616}"/>
+              </a:ext>
+            </a:extLst>
+          </p:cNvPr>
+          <p:cNvSpPr>
+            <a:spLocks xmlns:a="http://schemas.openxmlformats.org/drawingml/2006/main" noGrp="1"/>
+          </p:cNvSpPr>
+          <p:nvPr/>
+        </p:nvSpPr>
+        <p:spPr>
+          <a:xfrm xmlns:a="http://schemas.openxmlformats.org/drawingml/2006/main">
+            <a:off x="6057900" y="4309110"/>
             <a:ext cx="2305050" cy="194310"/>
           </a:xfrm>
           <a:prstGeom xmlns:a="http://schemas.openxmlformats.org/drawingml/2006/main" prst="rect">
@@ -12564,18 +12844,18 @@
           <p:cNvPr id="40" name="bullet-detail-rag-系统配置">
             <a:extLst xmlns:a="http://schemas.openxmlformats.org/drawingml/2006/main">
               <a:ext uri="{FF2B5EF4-FFF2-40B4-BE49-F238E27FC236}">
-                <a16:creationId xmlns:a16="http://schemas.microsoft.com/office/drawing/2014/main" id="{9699234C-478E-47E1-A73B-CD5E3DA9F9B8}"/>
-              </a:ext>
-            </a:extLst>
-          </p:cNvPr>
-          <p:cNvSpPr>
-            <a:spLocks xmlns:a="http://schemas.openxmlformats.org/drawingml/2006/main" noGrp="1"/>
-          </p:cNvSpPr>
-          <p:nvPr/>
-        </p:nvSpPr>
-        <p:spPr>
-          <a:xfrm xmlns:a="http://schemas.openxmlformats.org/drawingml/2006/main">
-            <a:off x="6057900" y="4370070"/>
+                <a16:creationId xmlns:a16="http://schemas.microsoft.com/office/drawing/2014/main" id="{DBE354C6-DC5B-4673-8E52-CB567B89CB9B}"/>
+              </a:ext>
+            </a:extLst>
+          </p:cNvPr>
+          <p:cNvSpPr>
+            <a:spLocks xmlns:a="http://schemas.openxmlformats.org/drawingml/2006/main" noGrp="1"/>
+          </p:cNvSpPr>
+          <p:nvPr/>
+        </p:nvSpPr>
+        <p:spPr>
+          <a:xfrm xmlns:a="http://schemas.openxmlformats.org/drawingml/2006/main">
+            <a:off x="6057900" y="4541520"/>
             <a:ext cx="2305050" cy="342900"/>
           </a:xfrm>
           <a:prstGeom xmlns:a="http://schemas.openxmlformats.org/drawingml/2006/main" prst="rect">
@@ -12615,7 +12895,7 @@
           <p:cNvPr id="41" name="stage-num-04">
             <a:extLst xmlns:a="http://schemas.openxmlformats.org/drawingml/2006/main">
               <a:ext uri="{FF2B5EF4-FFF2-40B4-BE49-F238E27FC236}">
-                <a16:creationId xmlns:a16="http://schemas.microsoft.com/office/drawing/2014/main" id="{C5D73958-22A5-47EF-9B7F-AE1ED39B5141}"/>
+                <a16:creationId xmlns:a16="http://schemas.microsoft.com/office/drawing/2014/main" id="{EACC1D79-5DF7-4594-9691-AC68BAFA0A42}"/>
               </a:ext>
             </a:extLst>
           </p:cNvPr>
@@ -12666,7 +12946,7 @@
           <p:cNvPr id="42" name="stage-title-结果交付">
             <a:extLst xmlns:a="http://schemas.openxmlformats.org/drawingml/2006/main">
               <a:ext uri="{FF2B5EF4-FFF2-40B4-BE49-F238E27FC236}">
-                <a16:creationId xmlns:a16="http://schemas.microsoft.com/office/drawing/2014/main" id="{8F1E2A8D-C627-4786-B7E6-A6753C68F143}"/>
+                <a16:creationId xmlns:a16="http://schemas.microsoft.com/office/drawing/2014/main" id="{DF9EF2DD-6149-4CB8-81D7-6137410E8980}"/>
               </a:ext>
             </a:extLst>
           </p:cNvPr>
@@ -12678,7 +12958,7 @@
         <p:spPr>
           <a:xfrm xmlns:a="http://schemas.openxmlformats.org/drawingml/2006/main">
             <a:off x="8534400" y="2461260"/>
-            <a:ext cx="990600" cy="297180"/>
+            <a:ext cx="1011555" cy="297180"/>
           </a:xfrm>
           <a:prstGeom xmlns:a="http://schemas.openxmlformats.org/drawingml/2006/main" prst="rect">
             <a:avLst/>
@@ -12717,7 +12997,7 @@
           <p:cNvPr id="43" name="stage-rule-结果交付">
             <a:extLst xmlns:a="http://schemas.openxmlformats.org/drawingml/2006/main">
               <a:ext uri="{FF2B5EF4-FFF2-40B4-BE49-F238E27FC236}">
-                <a16:creationId xmlns:a16="http://schemas.microsoft.com/office/drawing/2014/main" id="{62CDE9AC-CC31-4D2C-A75D-3DE2A50AB65B}"/>
+                <a16:creationId xmlns:a16="http://schemas.microsoft.com/office/drawing/2014/main" id="{2568149E-E171-490E-AB43-80312AC51AD2}"/>
               </a:ext>
             </a:extLst>
           </p:cNvPr>
@@ -12754,7 +13034,7 @@
           <p:cNvPr id="44" name="bullet-dot-dashboard">
             <a:extLst xmlns:a="http://schemas.openxmlformats.org/drawingml/2006/main">
               <a:ext uri="{FF2B5EF4-FFF2-40B4-BE49-F238E27FC236}">
-                <a16:creationId xmlns:a16="http://schemas.microsoft.com/office/drawing/2014/main" id="{A7C974C7-C414-4505-8D35-E5CC8A5E8E93}"/>
+                <a16:creationId xmlns:a16="http://schemas.microsoft.com/office/drawing/2014/main" id="{B1642902-248B-4DFF-8330-74D160E34D2D}"/>
               </a:ext>
             </a:extLst>
           </p:cNvPr>
@@ -12785,7 +13065,7 @@
           <p:cNvPr id="45" name="bullet-title-dashboard">
             <a:extLst xmlns:a="http://schemas.openxmlformats.org/drawingml/2006/main">
               <a:ext uri="{FF2B5EF4-FFF2-40B4-BE49-F238E27FC236}">
-                <a16:creationId xmlns:a16="http://schemas.microsoft.com/office/drawing/2014/main" id="{5FEE1AE1-EB0B-4406-BF3D-56E1D9CEBAE2}"/>
+                <a16:creationId xmlns:a16="http://schemas.microsoft.com/office/drawing/2014/main" id="{B8A03D3A-A1ED-4487-B8F3-54264311E54D}"/>
               </a:ext>
             </a:extLst>
           </p:cNvPr>
@@ -12836,7 +13116,7 @@
           <p:cNvPr id="46" name="bullet-detail-dashboard">
             <a:extLst xmlns:a="http://schemas.openxmlformats.org/drawingml/2006/main">
               <a:ext uri="{FF2B5EF4-FFF2-40B4-BE49-F238E27FC236}">
-                <a16:creationId xmlns:a16="http://schemas.microsoft.com/office/drawing/2014/main" id="{F20044D2-8449-43A6-AE76-B5977596AC54}"/>
+                <a16:creationId xmlns:a16="http://schemas.microsoft.com/office/drawing/2014/main" id="{6EE463AD-536E-49B9-A251-91F94FD3D43A}"/>
               </a:ext>
             </a:extLst>
           </p:cNvPr>
@@ -12887,7 +13167,7 @@
           <p:cNvPr id="47" name="bullet-dot-任务详情">
             <a:extLst xmlns:a="http://schemas.openxmlformats.org/drawingml/2006/main">
               <a:ext uri="{FF2B5EF4-FFF2-40B4-BE49-F238E27FC236}">
-                <a16:creationId xmlns:a16="http://schemas.microsoft.com/office/drawing/2014/main" id="{CDB32C17-5265-4A2A-A54A-268C3D2ACE5F}"/>
+                <a16:creationId xmlns:a16="http://schemas.microsoft.com/office/drawing/2014/main" id="{1179CAAC-A328-43DB-89FF-13CB244B0361}"/>
               </a:ext>
             </a:extLst>
           </p:cNvPr>
@@ -12918,7 +13198,7 @@
           <p:cNvPr id="48" name="bullet-title-任务详情">
             <a:extLst xmlns:a="http://schemas.openxmlformats.org/drawingml/2006/main">
               <a:ext uri="{FF2B5EF4-FFF2-40B4-BE49-F238E27FC236}">
-                <a16:creationId xmlns:a16="http://schemas.microsoft.com/office/drawing/2014/main" id="{B496FC1F-A59D-4307-92D6-AA895AAF83A1}"/>
+                <a16:creationId xmlns:a16="http://schemas.microsoft.com/office/drawing/2014/main" id="{C7737E74-AA2A-46FD-BABB-FAE6A4B0320E}"/>
               </a:ext>
             </a:extLst>
           </p:cNvPr>
@@ -12969,7 +13249,7 @@
           <p:cNvPr id="49" name="bullet-detail-任务详情">
             <a:extLst xmlns:a="http://schemas.openxmlformats.org/drawingml/2006/main">
               <a:ext uri="{FF2B5EF4-FFF2-40B4-BE49-F238E27FC236}">
-                <a16:creationId xmlns:a16="http://schemas.microsoft.com/office/drawing/2014/main" id="{786EE692-C572-46DE-A960-2494E2DDBD41}"/>
+                <a16:creationId xmlns:a16="http://schemas.microsoft.com/office/drawing/2014/main" id="{3B5D930A-9353-44E9-B5CE-6516C672A00B}"/>
               </a:ext>
             </a:extLst>
           </p:cNvPr>
@@ -13020,7 +13300,7 @@
           <p:cNvPr id="50" name="bullet-dot-pdf-json">
             <a:extLst xmlns:a="http://schemas.openxmlformats.org/drawingml/2006/main">
               <a:ext uri="{FF2B5EF4-FFF2-40B4-BE49-F238E27FC236}">
-                <a16:creationId xmlns:a16="http://schemas.microsoft.com/office/drawing/2014/main" id="{B522A1EA-66EC-4A1E-BD50-B7D2E53255DD}"/>
+                <a16:creationId xmlns:a16="http://schemas.microsoft.com/office/drawing/2014/main" id="{AA003C41-AFBB-4901-ACEA-0556D8AC38DE}"/>
               </a:ext>
             </a:extLst>
           </p:cNvPr>
@@ -13051,7 +13331,7 @@
           <p:cNvPr id="51" name="bullet-title-pdf-json">
             <a:extLst xmlns:a="http://schemas.openxmlformats.org/drawingml/2006/main">
               <a:ext uri="{FF2B5EF4-FFF2-40B4-BE49-F238E27FC236}">
-                <a16:creationId xmlns:a16="http://schemas.microsoft.com/office/drawing/2014/main" id="{6B200F6A-12D7-498A-B991-3BBD05EDF67B}"/>
+                <a16:creationId xmlns:a16="http://schemas.microsoft.com/office/drawing/2014/main" id="{B996255B-7828-4E7A-BE63-75D592DD5D6D}"/>
               </a:ext>
             </a:extLst>
           </p:cNvPr>
@@ -13102,7 +13382,7 @@
           <p:cNvPr id="52" name="bullet-detail-pdf-json">
             <a:extLst xmlns:a="http://schemas.openxmlformats.org/drawingml/2006/main">
               <a:ext uri="{FF2B5EF4-FFF2-40B4-BE49-F238E27FC236}">
-                <a16:creationId xmlns:a16="http://schemas.microsoft.com/office/drawing/2014/main" id="{0F390B5D-ECC1-4BD4-B5FA-035553FE7FAE}"/>
+                <a16:creationId xmlns:a16="http://schemas.microsoft.com/office/drawing/2014/main" id="{5D2C2F95-B78A-4669-96C9-EE7F5766E44A}"/>
               </a:ext>
             </a:extLst>
           </p:cNvPr>
@@ -13153,7 +13433,7 @@
           <p:cNvPr id="53" name="panorama-model-kicker">
             <a:extLst xmlns:a="http://schemas.openxmlformats.org/drawingml/2006/main">
               <a:ext uri="{FF2B5EF4-FFF2-40B4-BE49-F238E27FC236}">
-                <a16:creationId xmlns:a16="http://schemas.microsoft.com/office/drawing/2014/main" id="{5863E0E9-A87E-47E8-B427-E22DC4E458C4}"/>
+                <a16:creationId xmlns:a16="http://schemas.microsoft.com/office/drawing/2014/main" id="{75B3AFC5-EE37-4908-AFC0-DD5D5648218E}"/>
               </a:ext>
             </a:extLst>
           </p:cNvPr>
@@ -13165,7 +13445,7 @@
         <p:spPr>
           <a:xfrm xmlns:a="http://schemas.openxmlformats.org/drawingml/2006/main">
             <a:off x="533400" y="5055870"/>
-            <a:ext cx="933450" cy="160020"/>
+            <a:ext cx="953357" cy="160020"/>
           </a:xfrm>
           <a:prstGeom xmlns:a="http://schemas.openxmlformats.org/drawingml/2006/main" prst="rect">
             <a:avLst/>
@@ -13204,7 +13484,7 @@
           <p:cNvPr id="54" name="chip-auditproject">
             <a:extLst xmlns:a="http://schemas.openxmlformats.org/drawingml/2006/main">
               <a:ext uri="{FF2B5EF4-FFF2-40B4-BE49-F238E27FC236}">
-                <a16:creationId xmlns:a16="http://schemas.microsoft.com/office/drawing/2014/main" id="{2DD447E2-1EEB-4FF8-8EC8-2927334CB8C4}"/>
+                <a16:creationId xmlns:a16="http://schemas.microsoft.com/office/drawing/2014/main" id="{69CBDA30-CC94-484B-AA51-B761C6FB42BD}"/>
               </a:ext>
             </a:extLst>
           </p:cNvPr>
@@ -13241,7 +13521,7 @@
           <p:cNvPr id="55" name="chip-text-auditproject">
             <a:extLst xmlns:a="http://schemas.openxmlformats.org/drawingml/2006/main">
               <a:ext uri="{FF2B5EF4-FFF2-40B4-BE49-F238E27FC236}">
-                <a16:creationId xmlns:a16="http://schemas.microsoft.com/office/drawing/2014/main" id="{419248D1-7244-4D79-8509-E72CFC12E92A}"/>
+                <a16:creationId xmlns:a16="http://schemas.microsoft.com/office/drawing/2014/main" id="{5EA26767-5D4A-48E3-BCD6-B433B45D98A4}"/>
               </a:ext>
             </a:extLst>
           </p:cNvPr>
@@ -13292,7 +13572,7 @@
           <p:cNvPr id="56" name="panorama-arrow-1">
             <a:extLst xmlns:a="http://schemas.openxmlformats.org/drawingml/2006/main">
               <a:ext uri="{FF2B5EF4-FFF2-40B4-BE49-F238E27FC236}">
-                <a16:creationId xmlns:a16="http://schemas.microsoft.com/office/drawing/2014/main" id="{77CAE3D1-B04F-4191-89E5-2D0201506ABB}"/>
+                <a16:creationId xmlns:a16="http://schemas.microsoft.com/office/drawing/2014/main" id="{B607B37C-BCC7-486B-BD33-CAEC3B8BA9AF}"/>
               </a:ext>
             </a:extLst>
           </p:cNvPr>
@@ -13343,7 +13623,7 @@
           <p:cNvPr id="57" name="chip-audittask-agenttask">
             <a:extLst xmlns:a="http://schemas.openxmlformats.org/drawingml/2006/main">
               <a:ext uri="{FF2B5EF4-FFF2-40B4-BE49-F238E27FC236}">
-                <a16:creationId xmlns:a16="http://schemas.microsoft.com/office/drawing/2014/main" id="{EFD43A7A-F5AC-4AD1-8AEF-1FF808B15EB2}"/>
+                <a16:creationId xmlns:a16="http://schemas.microsoft.com/office/drawing/2014/main" id="{2CA688A0-925A-4EE8-9840-03A08E0909EC}"/>
               </a:ext>
             </a:extLst>
           </p:cNvPr>
@@ -13380,7 +13660,7 @@
           <p:cNvPr id="58" name="chip-text-audittask-agenttask">
             <a:extLst xmlns:a="http://schemas.openxmlformats.org/drawingml/2006/main">
               <a:ext uri="{FF2B5EF4-FFF2-40B4-BE49-F238E27FC236}">
-                <a16:creationId xmlns:a16="http://schemas.microsoft.com/office/drawing/2014/main" id="{FA0BD185-A03A-4F62-BDEA-7738C230F68A}"/>
+                <a16:creationId xmlns:a16="http://schemas.microsoft.com/office/drawing/2014/main" id="{606C8EF3-CF4F-41D0-BDEB-03F020690320}"/>
               </a:ext>
             </a:extLst>
           </p:cNvPr>
@@ -13431,7 +13711,7 @@
           <p:cNvPr id="59" name="panorama-arrow-2">
             <a:extLst xmlns:a="http://schemas.openxmlformats.org/drawingml/2006/main">
               <a:ext uri="{FF2B5EF4-FFF2-40B4-BE49-F238E27FC236}">
-                <a16:creationId xmlns:a16="http://schemas.microsoft.com/office/drawing/2014/main" id="{558C4E94-8479-4F4D-AF04-F176635F681E}"/>
+                <a16:creationId xmlns:a16="http://schemas.microsoft.com/office/drawing/2014/main" id="{613A6F79-6B4E-4BEB-B963-F7CC604FC93F}"/>
               </a:ext>
             </a:extLst>
           </p:cNvPr>
@@ -13482,7 +13762,7 @@
           <p:cNvPr id="60" name="chip-auditissue-agentfinding">
             <a:extLst xmlns:a="http://schemas.openxmlformats.org/drawingml/2006/main">
               <a:ext uri="{FF2B5EF4-FFF2-40B4-BE49-F238E27FC236}">
-                <a16:creationId xmlns:a16="http://schemas.microsoft.com/office/drawing/2014/main" id="{51111241-C5A3-4DF9-9AAF-CC2AD32B111D}"/>
+                <a16:creationId xmlns:a16="http://schemas.microsoft.com/office/drawing/2014/main" id="{15F4F3CE-1126-4224-91C1-72290ED4BD94}"/>
               </a:ext>
             </a:extLst>
           </p:cNvPr>
@@ -13519,7 +13799,7 @@
           <p:cNvPr id="61" name="chip-text-auditissue-agentfinding">
             <a:extLst xmlns:a="http://schemas.openxmlformats.org/drawingml/2006/main">
               <a:ext uri="{FF2B5EF4-FFF2-40B4-BE49-F238E27FC236}">
-                <a16:creationId xmlns:a16="http://schemas.microsoft.com/office/drawing/2014/main" id="{33779F5B-7DB6-4E03-BE30-B3B955E42CCC}"/>
+                <a16:creationId xmlns:a16="http://schemas.microsoft.com/office/drawing/2014/main" id="{9984C328-EF97-4FE5-87CA-3D2B63C82475}"/>
               </a:ext>
             </a:extLst>
           </p:cNvPr>
@@ -13570,7 +13850,7 @@
           <p:cNvPr id="62" name="panorama-arrow-3">
             <a:extLst xmlns:a="http://schemas.openxmlformats.org/drawingml/2006/main">
               <a:ext uri="{FF2B5EF4-FFF2-40B4-BE49-F238E27FC236}">
-                <a16:creationId xmlns:a16="http://schemas.microsoft.com/office/drawing/2014/main" id="{14194E07-1D00-477B-B3EE-532DEB818758}"/>
+                <a16:creationId xmlns:a16="http://schemas.microsoft.com/office/drawing/2014/main" id="{3466ACA7-B12D-469D-B968-34CFB0FD253D}"/>
               </a:ext>
             </a:extLst>
           </p:cNvPr>
@@ -13621,7 +13901,7 @@
           <p:cNvPr id="63" name="chip-auditartifact-report">
             <a:extLst xmlns:a="http://schemas.openxmlformats.org/drawingml/2006/main">
               <a:ext uri="{FF2B5EF4-FFF2-40B4-BE49-F238E27FC236}">
-                <a16:creationId xmlns:a16="http://schemas.microsoft.com/office/drawing/2014/main" id="{1BF34765-E81C-4D3E-84C3-CF6A6C9A5BB8}"/>
+                <a16:creationId xmlns:a16="http://schemas.microsoft.com/office/drawing/2014/main" id="{E79416F5-37AC-46AE-AC88-5E0405B1B2E6}"/>
               </a:ext>
             </a:extLst>
           </p:cNvPr>
@@ -13658,7 +13938,7 @@
           <p:cNvPr id="64" name="chip-text-auditartifact-report">
             <a:extLst xmlns:a="http://schemas.openxmlformats.org/drawingml/2006/main">
               <a:ext uri="{FF2B5EF4-FFF2-40B4-BE49-F238E27FC236}">
-                <a16:creationId xmlns:a16="http://schemas.microsoft.com/office/drawing/2014/main" id="{D29DA312-A2F4-4D6C-8BA4-869AF21C4D92}"/>
+                <a16:creationId xmlns:a16="http://schemas.microsoft.com/office/drawing/2014/main" id="{2BBBD1FE-F301-4A35-A062-F39C201D3FAD}"/>
               </a:ext>
             </a:extLst>
           </p:cNvPr>
@@ -13709,7 +13989,7 @@
           <p:cNvPr id="65" name="chip-auditruleset">
             <a:extLst xmlns:a="http://schemas.openxmlformats.org/drawingml/2006/main">
               <a:ext uri="{FF2B5EF4-FFF2-40B4-BE49-F238E27FC236}">
-                <a16:creationId xmlns:a16="http://schemas.microsoft.com/office/drawing/2014/main" id="{86AF2E4D-AE07-4125-962E-DFF871E46A58}"/>
+                <a16:creationId xmlns:a16="http://schemas.microsoft.com/office/drawing/2014/main" id="{6C26F530-1CE4-471F-A9A2-8D38CDCD4FF8}"/>
               </a:ext>
             </a:extLst>
           </p:cNvPr>
@@ -13746,7 +14026,7 @@
           <p:cNvPr id="66" name="chip-text-auditruleset">
             <a:extLst xmlns:a="http://schemas.openxmlformats.org/drawingml/2006/main">
               <a:ext uri="{FF2B5EF4-FFF2-40B4-BE49-F238E27FC236}">
-                <a16:creationId xmlns:a16="http://schemas.microsoft.com/office/drawing/2014/main" id="{E8F0CC32-8B9A-4FF1-A372-3C2DE21B13AA}"/>
+                <a16:creationId xmlns:a16="http://schemas.microsoft.com/office/drawing/2014/main" id="{244A9AC1-253A-4288-8633-9E43255B0561}"/>
               </a:ext>
             </a:extLst>
           </p:cNvPr>
@@ -13797,7 +14077,7 @@
           <p:cNvPr id="67" name="chip-prompttemplate">
             <a:extLst xmlns:a="http://schemas.openxmlformats.org/drawingml/2006/main">
               <a:ext uri="{FF2B5EF4-FFF2-40B4-BE49-F238E27FC236}">
-                <a16:creationId xmlns:a16="http://schemas.microsoft.com/office/drawing/2014/main" id="{B713B0AA-EC13-43E5-9ED9-5E4D22A1BAE0}"/>
+                <a16:creationId xmlns:a16="http://schemas.microsoft.com/office/drawing/2014/main" id="{22F1ACBE-186F-4677-9718-AB95DA66FE4C}"/>
               </a:ext>
             </a:extLst>
           </p:cNvPr>
@@ -13834,7 +14114,7 @@
           <p:cNvPr id="68" name="chip-text-prompttemplate">
             <a:extLst xmlns:a="http://schemas.openxmlformats.org/drawingml/2006/main">
               <a:ext uri="{FF2B5EF4-FFF2-40B4-BE49-F238E27FC236}">
-                <a16:creationId xmlns:a16="http://schemas.microsoft.com/office/drawing/2014/main" id="{BD309240-6728-4BBC-B7E7-EEBB823B3C62}"/>
+                <a16:creationId xmlns:a16="http://schemas.microsoft.com/office/drawing/2014/main" id="{33B7763F-C15B-49A7-8288-5BEA29D09A91}"/>
               </a:ext>
             </a:extLst>
           </p:cNvPr>
@@ -13885,7 +14165,7 @@
           <p:cNvPr id="69" name="chip-rag-knowledge">
             <a:extLst xmlns:a="http://schemas.openxmlformats.org/drawingml/2006/main">
               <a:ext uri="{FF2B5EF4-FFF2-40B4-BE49-F238E27FC236}">
-                <a16:creationId xmlns:a16="http://schemas.microsoft.com/office/drawing/2014/main" id="{B97A3383-B772-4361-B76D-201A9371582E}"/>
+                <a16:creationId xmlns:a16="http://schemas.microsoft.com/office/drawing/2014/main" id="{C8A368D3-D46B-458F-AA8B-379F8689F07A}"/>
               </a:ext>
             </a:extLst>
           </p:cNvPr>
@@ -13922,7 +14202,7 @@
           <p:cNvPr id="70" name="chip-text-rag-knowledge">
             <a:extLst xmlns:a="http://schemas.openxmlformats.org/drawingml/2006/main">
               <a:ext uri="{FF2B5EF4-FFF2-40B4-BE49-F238E27FC236}">
-                <a16:creationId xmlns:a16="http://schemas.microsoft.com/office/drawing/2014/main" id="{D7969763-33DC-46FB-A144-4459E481285F}"/>
+                <a16:creationId xmlns:a16="http://schemas.microsoft.com/office/drawing/2014/main" id="{2AAECCAA-3E8E-40D2-9602-18E7C34B4098}"/>
               </a:ext>
             </a:extLst>
           </p:cNvPr>
@@ -13973,7 +14253,7 @@
           <p:cNvPr id="71" name="chip-audituserconfig">
             <a:extLst xmlns:a="http://schemas.openxmlformats.org/drawingml/2006/main">
               <a:ext uri="{FF2B5EF4-FFF2-40B4-BE49-F238E27FC236}">
-                <a16:creationId xmlns:a16="http://schemas.microsoft.com/office/drawing/2014/main" id="{70EFAAD7-63F9-446E-8145-EC584F031BCD}"/>
+                <a16:creationId xmlns:a16="http://schemas.microsoft.com/office/drawing/2014/main" id="{F10B8165-3F7E-4558-887C-9785D2C43CB2}"/>
               </a:ext>
             </a:extLst>
           </p:cNvPr>
@@ -14010,7 +14290,7 @@
           <p:cNvPr id="72" name="chip-text-audituserconfig">
             <a:extLst xmlns:a="http://schemas.openxmlformats.org/drawingml/2006/main">
               <a:ext uri="{FF2B5EF4-FFF2-40B4-BE49-F238E27FC236}">
-                <a16:creationId xmlns:a16="http://schemas.microsoft.com/office/drawing/2014/main" id="{B21F355B-1CCF-460E-B875-DD4E24013404}"/>
+                <a16:creationId xmlns:a16="http://schemas.microsoft.com/office/drawing/2014/main" id="{8384668F-B813-44E1-AEA6-75ED161FD469}"/>
               </a:ext>
             </a:extLst>
           </p:cNvPr>
@@ -14061,7 +14341,7 @@
           <p:cNvPr id="73" name="chip-auditsshcredential">
             <a:extLst xmlns:a="http://schemas.openxmlformats.org/drawingml/2006/main">
               <a:ext uri="{FF2B5EF4-FFF2-40B4-BE49-F238E27FC236}">
-                <a16:creationId xmlns:a16="http://schemas.microsoft.com/office/drawing/2014/main" id="{24357EC8-5B67-4B67-974B-462F71F518AE}"/>
+                <a16:creationId xmlns:a16="http://schemas.microsoft.com/office/drawing/2014/main" id="{B3AD632E-7E5E-44C2-A767-727802F78BC5}"/>
               </a:ext>
             </a:extLst>
           </p:cNvPr>
@@ -14098,7 +14378,7 @@
           <p:cNvPr id="74" name="chip-text-auditsshcredential">
             <a:extLst xmlns:a="http://schemas.openxmlformats.org/drawingml/2006/main">
               <a:ext uri="{FF2B5EF4-FFF2-40B4-BE49-F238E27FC236}">
-                <a16:creationId xmlns:a16="http://schemas.microsoft.com/office/drawing/2014/main" id="{317A72D5-87EB-4F42-BD86-D12FD49F8FF3}"/>
+                <a16:creationId xmlns:a16="http://schemas.microsoft.com/office/drawing/2014/main" id="{DF49CB3F-C041-4920-ADE0-C8B5E930AB01}"/>
               </a:ext>
             </a:extLst>
           </p:cNvPr>
@@ -14149,7 +14429,7 @@
           <p:cNvPr id="75" name="panorama-note">
             <a:extLst xmlns:a="http://schemas.openxmlformats.org/drawingml/2006/main">
               <a:ext uri="{FF2B5EF4-FFF2-40B4-BE49-F238E27FC236}">
-                <a16:creationId xmlns:a16="http://schemas.microsoft.com/office/drawing/2014/main" id="{4CDD2DF0-C9B5-44E8-A3FF-0F914B626FE6}"/>
+                <a16:creationId xmlns:a16="http://schemas.microsoft.com/office/drawing/2014/main" id="{7A9101AC-B2FC-4437-9892-C6E1BC5E9D3C}"/>
               </a:ext>
             </a:extLst>
           </p:cNvPr>
@@ -14198,7 +14478,7 @@
     </p:spTree>
     <p:extLst>
       <p:ext uri="{BB962C8B-B14F-4D97-AF65-F5344CB8AC3E}">
-        <p14:creationId xmlns:p14="http://schemas.microsoft.com/office/powerpoint/2010/main" val="606996783"/>
+        <p14:creationId xmlns:p14="http://schemas.microsoft.com/office/powerpoint/2010/main" val="393552145"/>
       </p:ext>
     </p:extLst>
   </p:cSld>
@@ -14229,7 +14509,7 @@
           <p:cNvPr id="1" name="header-kicker-架构设计">
             <a:extLst xmlns:a="http://schemas.openxmlformats.org/drawingml/2006/main">
               <a:ext uri="{FF2B5EF4-FFF2-40B4-BE49-F238E27FC236}">
-                <a16:creationId xmlns:a16="http://schemas.microsoft.com/office/drawing/2014/main" id="{36BF7511-EFF7-47B7-890A-2B4F088D03E4}"/>
+                <a16:creationId xmlns:a16="http://schemas.microsoft.com/office/drawing/2014/main" id="{98D5E2F0-CDFB-4F50-9381-378626529C91}"/>
               </a:ext>
             </a:extLst>
           </p:cNvPr>
@@ -14280,7 +14560,7 @@
           <p:cNvPr id="2" name="header-title-架构设计">
             <a:extLst xmlns:a="http://schemas.openxmlformats.org/drawingml/2006/main">
               <a:ext uri="{FF2B5EF4-FFF2-40B4-BE49-F238E27FC236}">
-                <a16:creationId xmlns:a16="http://schemas.microsoft.com/office/drawing/2014/main" id="{A4841286-51D2-412A-A719-16770D9AC523}"/>
+                <a16:creationId xmlns:a16="http://schemas.microsoft.com/office/drawing/2014/main" id="{C7E40C01-A92D-45F5-8A61-3049EA1B7170}"/>
               </a:ext>
             </a:extLst>
           </p:cNvPr>
@@ -14331,7 +14611,7 @@
           <p:cNvPr id="3" name="header-subtitle-架构设计">
             <a:extLst xmlns:a="http://schemas.openxmlformats.org/drawingml/2006/main">
               <a:ext uri="{FF2B5EF4-FFF2-40B4-BE49-F238E27FC236}">
-                <a16:creationId xmlns:a16="http://schemas.microsoft.com/office/drawing/2014/main" id="{FBD40541-CD7A-4D90-9FB0-5A2A1DB983B4}"/>
+                <a16:creationId xmlns:a16="http://schemas.microsoft.com/office/drawing/2014/main" id="{4EE2DEAC-F481-4FD3-A3A9-FD1DA055962B}"/>
               </a:ext>
             </a:extLst>
           </p:cNvPr>
@@ -14382,7 +14662,7 @@
           <p:cNvPr id="4" name="heading-underline">
             <a:extLst xmlns:a="http://schemas.openxmlformats.org/drawingml/2006/main">
               <a:ext uri="{FF2B5EF4-FFF2-40B4-BE49-F238E27FC236}">
-                <a16:creationId xmlns:a16="http://schemas.microsoft.com/office/drawing/2014/main" id="{F83772C0-E8A8-4108-B057-8C2503E35906}"/>
+                <a16:creationId xmlns:a16="http://schemas.microsoft.com/office/drawing/2014/main" id="{33199C20-9F7A-4EED-B2DB-37B15CD8C61D}"/>
               </a:ext>
             </a:extLst>
           </p:cNvPr>
@@ -14419,7 +14699,7 @@
           <p:cNvPr id="5" name="flow-node-用户-领导">
             <a:extLst xmlns:a="http://schemas.openxmlformats.org/drawingml/2006/main">
               <a:ext uri="{FF2B5EF4-FFF2-40B4-BE49-F238E27FC236}">
-                <a16:creationId xmlns:a16="http://schemas.microsoft.com/office/drawing/2014/main" id="{14B99473-531C-4FC3-93F2-E9AC69F615E8}"/>
+                <a16:creationId xmlns:a16="http://schemas.microsoft.com/office/drawing/2014/main" id="{03F47BA0-FB4A-4368-AB54-9F8CF7A40E0D}"/>
               </a:ext>
             </a:extLst>
           </p:cNvPr>
@@ -14431,7 +14711,7 @@
         <p:spPr>
           <a:xfrm xmlns:a="http://schemas.openxmlformats.org/drawingml/2006/main">
             <a:off x="533400" y="2000250"/>
-            <a:ext cx="1676400" cy="1108710"/>
+            <a:ext cx="1676400" cy="685800"/>
           </a:xfrm>
           <a:prstGeom xmlns:a="http://schemas.openxmlformats.org/drawingml/2006/main" prst="rect">
             <a:avLst/>
@@ -14456,7 +14736,7 @@
           <p:cNvPr id="6" name="flow-node-label-用户-领导">
             <a:extLst xmlns:a="http://schemas.openxmlformats.org/drawingml/2006/main">
               <a:ext uri="{FF2B5EF4-FFF2-40B4-BE49-F238E27FC236}">
-                <a16:creationId xmlns:a16="http://schemas.microsoft.com/office/drawing/2014/main" id="{D222C6B6-F576-4CAB-A124-D55DC9C74DAA}"/>
+                <a16:creationId xmlns:a16="http://schemas.microsoft.com/office/drawing/2014/main" id="{14DCDFE4-005F-47BA-ACEB-A3B51E985F22}"/>
               </a:ext>
             </a:extLst>
           </p:cNvPr>
@@ -14507,7 +14787,7 @@
           <p:cNvPr id="7" name="flow-node-title-用户-领导">
             <a:extLst xmlns:a="http://schemas.openxmlformats.org/drawingml/2006/main">
               <a:ext uri="{FF2B5EF4-FFF2-40B4-BE49-F238E27FC236}">
-                <a16:creationId xmlns:a16="http://schemas.microsoft.com/office/drawing/2014/main" id="{B6C561A1-2477-40BB-9E17-04DAA8FBF285}"/>
+                <a16:creationId xmlns:a16="http://schemas.microsoft.com/office/drawing/2014/main" id="{01873D88-B2D6-4506-8360-2A47A9F741A1}"/>
               </a:ext>
             </a:extLst>
           </p:cNvPr>
@@ -14519,7 +14799,7 @@
         <p:spPr>
           <a:xfrm xmlns:a="http://schemas.openxmlformats.org/drawingml/2006/main">
             <a:off x="533400" y="2205990"/>
-            <a:ext cx="1131760" cy="525780"/>
+            <a:ext cx="1165765" cy="262890"/>
           </a:xfrm>
           <a:prstGeom xmlns:a="http://schemas.openxmlformats.org/drawingml/2006/main" prst="rect">
             <a:avLst/>
@@ -14558,19 +14838,19 @@
           <p:cNvPr id="8" name="flow-node-subtitle-用户-领导">
             <a:extLst xmlns:a="http://schemas.openxmlformats.org/drawingml/2006/main">
               <a:ext uri="{FF2B5EF4-FFF2-40B4-BE49-F238E27FC236}">
-                <a16:creationId xmlns:a16="http://schemas.microsoft.com/office/drawing/2014/main" id="{4A7D73C9-9E69-47A5-B381-D9EFAE5996D1}"/>
-              </a:ext>
-            </a:extLst>
-          </p:cNvPr>
-          <p:cNvSpPr>
-            <a:spLocks xmlns:a="http://schemas.openxmlformats.org/drawingml/2006/main" noGrp="1"/>
-          </p:cNvSpPr>
-          <p:nvPr/>
-        </p:nvSpPr>
-        <p:spPr>
-          <a:xfrm xmlns:a="http://schemas.openxmlformats.org/drawingml/2006/main">
-            <a:off x="533400" y="2788920"/>
-            <a:ext cx="2445734" cy="320040"/>
+                <a16:creationId xmlns:a16="http://schemas.microsoft.com/office/drawing/2014/main" id="{B14E81D7-6AA2-4B9C-81B9-08E983B0CF4F}"/>
+              </a:ext>
+            </a:extLst>
+          </p:cNvPr>
+          <p:cNvSpPr>
+            <a:spLocks xmlns:a="http://schemas.openxmlformats.org/drawingml/2006/main" noGrp="1"/>
+          </p:cNvSpPr>
+          <p:nvPr/>
+        </p:nvSpPr>
+        <p:spPr>
+          <a:xfrm xmlns:a="http://schemas.openxmlformats.org/drawingml/2006/main">
+            <a:off x="533400" y="2526030"/>
+            <a:ext cx="2511457" cy="160020"/>
           </a:xfrm>
           <a:prstGeom xmlns:a="http://schemas.openxmlformats.org/drawingml/2006/main" prst="rect">
             <a:avLst/>
@@ -14609,7 +14889,7 @@
           <p:cNvPr id="9" name="arch-arrow-1">
             <a:extLst xmlns:a="http://schemas.openxmlformats.org/drawingml/2006/main">
               <a:ext uri="{FF2B5EF4-FFF2-40B4-BE49-F238E27FC236}">
-                <a16:creationId xmlns:a16="http://schemas.microsoft.com/office/drawing/2014/main" id="{E41CD2EB-CC26-4B01-B4C9-A26580E55E2C}"/>
+                <a16:creationId xmlns:a16="http://schemas.microsoft.com/office/drawing/2014/main" id="{3CCC52E7-02E2-4D5D-8595-F5AA3357A738}"/>
               </a:ext>
             </a:extLst>
           </p:cNvPr>
@@ -14660,7 +14940,7 @@
           <p:cNvPr id="10" name="flow-node-独立前端">
             <a:extLst xmlns:a="http://schemas.openxmlformats.org/drawingml/2006/main">
               <a:ext uri="{FF2B5EF4-FFF2-40B4-BE49-F238E27FC236}">
-                <a16:creationId xmlns:a16="http://schemas.microsoft.com/office/drawing/2014/main" id="{F92A6764-9593-4E77-8ABF-A42B916585FA}"/>
+                <a16:creationId xmlns:a16="http://schemas.microsoft.com/office/drawing/2014/main" id="{D3759933-8945-4E73-9579-BCC3255E5D24}"/>
               </a:ext>
             </a:extLst>
           </p:cNvPr>
@@ -14672,7 +14952,7 @@
         <p:spPr>
           <a:xfrm xmlns:a="http://schemas.openxmlformats.org/drawingml/2006/main">
             <a:off x="2667000" y="2000250"/>
-            <a:ext cx="1676400" cy="845820"/>
+            <a:ext cx="1676400" cy="685800"/>
           </a:xfrm>
           <a:prstGeom xmlns:a="http://schemas.openxmlformats.org/drawingml/2006/main" prst="rect">
             <a:avLst/>
@@ -14697,7 +14977,7 @@
           <p:cNvPr id="11" name="flow-node-label-独立前端">
             <a:extLst xmlns:a="http://schemas.openxmlformats.org/drawingml/2006/main">
               <a:ext uri="{FF2B5EF4-FFF2-40B4-BE49-F238E27FC236}">
-                <a16:creationId xmlns:a16="http://schemas.microsoft.com/office/drawing/2014/main" id="{1E68C08D-6CD5-4641-B141-AD93371C103C}"/>
+                <a16:creationId xmlns:a16="http://schemas.microsoft.com/office/drawing/2014/main" id="{080E32F6-23B7-4E5F-A026-394231BD8A09}"/>
               </a:ext>
             </a:extLst>
           </p:cNvPr>
@@ -14748,7 +15028,7 @@
           <p:cNvPr id="12" name="flow-node-title-独立前端">
             <a:extLst xmlns:a="http://schemas.openxmlformats.org/drawingml/2006/main">
               <a:ext uri="{FF2B5EF4-FFF2-40B4-BE49-F238E27FC236}">
-                <a16:creationId xmlns:a16="http://schemas.microsoft.com/office/drawing/2014/main" id="{8FA3005A-8DD5-455F-9CAC-5371471804B7}"/>
+                <a16:creationId xmlns:a16="http://schemas.microsoft.com/office/drawing/2014/main" id="{B44547FD-4139-4CE0-BE93-B80553A9F2C5}"/>
               </a:ext>
             </a:extLst>
           </p:cNvPr>
@@ -14760,7 +15040,7 @@
         <p:spPr>
           <a:xfrm xmlns:a="http://schemas.openxmlformats.org/drawingml/2006/main">
             <a:off x="2667000" y="2205990"/>
-            <a:ext cx="876300" cy="262890"/>
+            <a:ext cx="894874" cy="262890"/>
           </a:xfrm>
           <a:prstGeom xmlns:a="http://schemas.openxmlformats.org/drawingml/2006/main" prst="rect">
             <a:avLst/>
@@ -14799,7 +15079,7 @@
           <p:cNvPr id="13" name="flow-node-subtitle-独立前端">
             <a:extLst xmlns:a="http://schemas.openxmlformats.org/drawingml/2006/main">
               <a:ext uri="{FF2B5EF4-FFF2-40B4-BE49-F238E27FC236}">
-                <a16:creationId xmlns:a16="http://schemas.microsoft.com/office/drawing/2014/main" id="{D1EA5328-C577-4B60-B121-57D203A2A1D7}"/>
+                <a16:creationId xmlns:a16="http://schemas.microsoft.com/office/drawing/2014/main" id="{66D025D4-0B1F-4F18-ABA0-33450A82F60E}"/>
               </a:ext>
             </a:extLst>
           </p:cNvPr>
@@ -14811,7 +15091,7 @@
         <p:spPr>
           <a:xfrm xmlns:a="http://schemas.openxmlformats.org/drawingml/2006/main">
             <a:off x="2667000" y="2526030"/>
-            <a:ext cx="2258187" cy="320040"/>
+            <a:ext cx="2321624" cy="160020"/>
           </a:xfrm>
           <a:prstGeom xmlns:a="http://schemas.openxmlformats.org/drawingml/2006/main" prst="rect">
             <a:avLst/>
@@ -14850,7 +15130,7 @@
           <p:cNvPr id="14" name="arch-arrow-2">
             <a:extLst xmlns:a="http://schemas.openxmlformats.org/drawingml/2006/main">
               <a:ext uri="{FF2B5EF4-FFF2-40B4-BE49-F238E27FC236}">
-                <a16:creationId xmlns:a16="http://schemas.microsoft.com/office/drawing/2014/main" id="{5681E0B1-145D-478A-8308-77D5FFBDF1F6}"/>
+                <a16:creationId xmlns:a16="http://schemas.microsoft.com/office/drawing/2014/main" id="{54630A2D-F835-4798-998A-6FA562D4E143}"/>
               </a:ext>
             </a:extLst>
           </p:cNvPr>
@@ -14901,7 +15181,7 @@
           <p:cNvPr id="15" name="flow-node-api-聚合">
             <a:extLst xmlns:a="http://schemas.openxmlformats.org/drawingml/2006/main">
               <a:ext uri="{FF2B5EF4-FFF2-40B4-BE49-F238E27FC236}">
-                <a16:creationId xmlns:a16="http://schemas.microsoft.com/office/drawing/2014/main" id="{C75E8131-7662-4145-8AB1-9719C507F311}"/>
+                <a16:creationId xmlns:a16="http://schemas.microsoft.com/office/drawing/2014/main" id="{C6775FD2-30BC-405F-A732-514817F1C10A}"/>
               </a:ext>
             </a:extLst>
           </p:cNvPr>
@@ -14913,7 +15193,7 @@
         <p:spPr>
           <a:xfrm xmlns:a="http://schemas.openxmlformats.org/drawingml/2006/main">
             <a:off x="4800600" y="2000250"/>
-            <a:ext cx="1676400" cy="948690"/>
+            <a:ext cx="1676400" cy="1108710"/>
           </a:xfrm>
           <a:prstGeom xmlns:a="http://schemas.openxmlformats.org/drawingml/2006/main" prst="rect">
             <a:avLst/>
@@ -14938,7 +15218,7 @@
           <p:cNvPr id="16" name="flow-node-label-api-聚合">
             <a:extLst xmlns:a="http://schemas.openxmlformats.org/drawingml/2006/main">
               <a:ext uri="{FF2B5EF4-FFF2-40B4-BE49-F238E27FC236}">
-                <a16:creationId xmlns:a16="http://schemas.microsoft.com/office/drawing/2014/main" id="{B626720D-4FA1-43E0-8EB4-CA4958C04BE2}"/>
+                <a16:creationId xmlns:a16="http://schemas.microsoft.com/office/drawing/2014/main" id="{8ADF6D83-D466-462A-A0B5-4D3CF009DC94}"/>
               </a:ext>
             </a:extLst>
           </p:cNvPr>
@@ -14989,7 +15269,7 @@
           <p:cNvPr id="17" name="flow-node-title-api-聚合">
             <a:extLst xmlns:a="http://schemas.openxmlformats.org/drawingml/2006/main">
               <a:ext uri="{FF2B5EF4-FFF2-40B4-BE49-F238E27FC236}">
-                <a16:creationId xmlns:a16="http://schemas.microsoft.com/office/drawing/2014/main" id="{1B2A80CA-16D3-4871-BF08-47D2DD3FB5EC}"/>
+                <a16:creationId xmlns:a16="http://schemas.microsoft.com/office/drawing/2014/main" id="{AA5DA637-58B1-42E9-8AE6-2539106FB43E}"/>
               </a:ext>
             </a:extLst>
           </p:cNvPr>
@@ -15001,7 +15281,7 @@
         <p:spPr>
           <a:xfrm xmlns:a="http://schemas.openxmlformats.org/drawingml/2006/main">
             <a:off x="4800600" y="2205990"/>
-            <a:ext cx="859726" cy="525780"/>
+            <a:ext cx="895921" cy="525780"/>
           </a:xfrm>
           <a:prstGeom xmlns:a="http://schemas.openxmlformats.org/drawingml/2006/main" prst="rect">
             <a:avLst/>
@@ -15040,7 +15320,7 @@
           <p:cNvPr id="18" name="flow-node-subtitle-api-聚合">
             <a:extLst xmlns:a="http://schemas.openxmlformats.org/drawingml/2006/main">
               <a:ext uri="{FF2B5EF4-FFF2-40B4-BE49-F238E27FC236}">
-                <a16:creationId xmlns:a16="http://schemas.microsoft.com/office/drawing/2014/main" id="{6E4421A0-1BCF-4E48-8F3F-E1BC0790DA0C}"/>
+                <a16:creationId xmlns:a16="http://schemas.microsoft.com/office/drawing/2014/main" id="{394C55A8-0AB8-4ABE-BFFE-EDC57ABA80FE}"/>
               </a:ext>
             </a:extLst>
           </p:cNvPr>
@@ -15052,7 +15332,7 @@
         <p:spPr>
           <a:xfrm xmlns:a="http://schemas.openxmlformats.org/drawingml/2006/main">
             <a:off x="4800600" y="2788920"/>
-            <a:ext cx="2134267" cy="160020"/>
+            <a:ext cx="2193988" cy="320040"/>
           </a:xfrm>
           <a:prstGeom xmlns:a="http://schemas.openxmlformats.org/drawingml/2006/main" prst="rect">
             <a:avLst/>
@@ -15091,7 +15371,7 @@
           <p:cNvPr id="19" name="arch-arrow-3">
             <a:extLst xmlns:a="http://schemas.openxmlformats.org/drawingml/2006/main">
               <a:ext uri="{FF2B5EF4-FFF2-40B4-BE49-F238E27FC236}">
-                <a16:creationId xmlns:a16="http://schemas.microsoft.com/office/drawing/2014/main" id="{C56E6F7E-CA9D-4C95-AB5C-9FF093957F8A}"/>
+                <a16:creationId xmlns:a16="http://schemas.microsoft.com/office/drawing/2014/main" id="{1513C6D2-2416-4CDA-BD36-BF71648DCA2C}"/>
               </a:ext>
             </a:extLst>
           </p:cNvPr>
@@ -15142,7 +15422,7 @@
           <p:cNvPr id="20" name="flow-node-worker">
             <a:extLst xmlns:a="http://schemas.openxmlformats.org/drawingml/2006/main">
               <a:ext uri="{FF2B5EF4-FFF2-40B4-BE49-F238E27FC236}">
-                <a16:creationId xmlns:a16="http://schemas.microsoft.com/office/drawing/2014/main" id="{FA9970AF-3998-41EB-A746-66F79553371B}"/>
+                <a16:creationId xmlns:a16="http://schemas.microsoft.com/office/drawing/2014/main" id="{4E1CFF2F-19C6-4883-8A8D-437961004113}"/>
               </a:ext>
             </a:extLst>
           </p:cNvPr>
@@ -15154,7 +15434,7 @@
         <p:spPr>
           <a:xfrm xmlns:a="http://schemas.openxmlformats.org/drawingml/2006/main">
             <a:off x="6934200" y="2000250"/>
-            <a:ext cx="1676400" cy="948690"/>
+            <a:ext cx="1676400" cy="845820"/>
           </a:xfrm>
           <a:prstGeom xmlns:a="http://schemas.openxmlformats.org/drawingml/2006/main" prst="rect">
             <a:avLst/>
@@ -15179,7 +15459,7 @@
           <p:cNvPr id="21" name="flow-node-label-worker">
             <a:extLst xmlns:a="http://schemas.openxmlformats.org/drawingml/2006/main">
               <a:ext uri="{FF2B5EF4-FFF2-40B4-BE49-F238E27FC236}">
-                <a16:creationId xmlns:a16="http://schemas.microsoft.com/office/drawing/2014/main" id="{B101D351-44EA-4D82-A35E-3EEA76D465EB}"/>
+                <a16:creationId xmlns:a16="http://schemas.microsoft.com/office/drawing/2014/main" id="{1135F14D-9E68-4A65-9C33-7F602F66A8F6}"/>
               </a:ext>
             </a:extLst>
           </p:cNvPr>
@@ -15230,7 +15510,7 @@
           <p:cNvPr id="22" name="flow-node-title-worker">
             <a:extLst xmlns:a="http://schemas.openxmlformats.org/drawingml/2006/main">
               <a:ext uri="{FF2B5EF4-FFF2-40B4-BE49-F238E27FC236}">
-                <a16:creationId xmlns:a16="http://schemas.microsoft.com/office/drawing/2014/main" id="{A8A1203E-500D-46FA-B2DD-E9F5598535DA}"/>
+                <a16:creationId xmlns:a16="http://schemas.microsoft.com/office/drawing/2014/main" id="{A6F98ECC-6B76-4DE8-9327-0604558ED70F}"/>
               </a:ext>
             </a:extLst>
           </p:cNvPr>
@@ -15242,7 +15522,7 @@
         <p:spPr>
           <a:xfrm xmlns:a="http://schemas.openxmlformats.org/drawingml/2006/main">
             <a:off x="6934200" y="2205990"/>
-            <a:ext cx="749427" cy="525780"/>
+            <a:ext cx="792861" cy="262890"/>
           </a:xfrm>
           <a:prstGeom xmlns:a="http://schemas.openxmlformats.org/drawingml/2006/main" prst="rect">
             <a:avLst/>
@@ -15281,19 +15561,19 @@
           <p:cNvPr id="23" name="flow-node-subtitle-worker">
             <a:extLst xmlns:a="http://schemas.openxmlformats.org/drawingml/2006/main">
               <a:ext uri="{FF2B5EF4-FFF2-40B4-BE49-F238E27FC236}">
-                <a16:creationId xmlns:a16="http://schemas.microsoft.com/office/drawing/2014/main" id="{DC03176B-7458-45FE-95AC-6FA81C7F7BE3}"/>
-              </a:ext>
-            </a:extLst>
-          </p:cNvPr>
-          <p:cNvSpPr>
-            <a:spLocks xmlns:a="http://schemas.openxmlformats.org/drawingml/2006/main" noGrp="1"/>
-          </p:cNvSpPr>
-          <p:nvPr/>
-        </p:nvSpPr>
-        <p:spPr>
-          <a:xfrm xmlns:a="http://schemas.openxmlformats.org/drawingml/2006/main">
-            <a:off x="6934200" y="2788920"/>
-            <a:ext cx="2203990" cy="160020"/>
+                <a16:creationId xmlns:a16="http://schemas.microsoft.com/office/drawing/2014/main" id="{E32E9AD6-752E-42A5-A119-883837518BF8}"/>
+              </a:ext>
+            </a:extLst>
+          </p:cNvPr>
+          <p:cNvSpPr>
+            <a:spLocks xmlns:a="http://schemas.openxmlformats.org/drawingml/2006/main" noGrp="1"/>
+          </p:cNvSpPr>
+          <p:nvPr/>
+        </p:nvSpPr>
+        <p:spPr>
+          <a:xfrm xmlns:a="http://schemas.openxmlformats.org/drawingml/2006/main">
+            <a:off x="6934200" y="2526030"/>
+            <a:ext cx="2279904" cy="320040"/>
           </a:xfrm>
           <a:prstGeom xmlns:a="http://schemas.openxmlformats.org/drawingml/2006/main" prst="rect">
             <a:avLst/>
@@ -15332,7 +15612,7 @@
           <p:cNvPr id="24" name="arch-arrow-4">
             <a:extLst xmlns:a="http://schemas.openxmlformats.org/drawingml/2006/main">
               <a:ext uri="{FF2B5EF4-FFF2-40B4-BE49-F238E27FC236}">
-                <a16:creationId xmlns:a16="http://schemas.microsoft.com/office/drawing/2014/main" id="{B9413FBB-A6A0-4593-8800-E25623B2B069}"/>
+                <a16:creationId xmlns:a16="http://schemas.microsoft.com/office/drawing/2014/main" id="{8AB2963F-B0D2-4FA8-8635-BDCD99DA58E2}"/>
               </a:ext>
             </a:extLst>
           </p:cNvPr>
@@ -15383,7 +15663,7 @@
           <p:cNvPr id="25" name="flow-node-sse-ws">
             <a:extLst xmlns:a="http://schemas.openxmlformats.org/drawingml/2006/main">
               <a:ext uri="{FF2B5EF4-FFF2-40B4-BE49-F238E27FC236}">
-                <a16:creationId xmlns:a16="http://schemas.microsoft.com/office/drawing/2014/main" id="{C063B892-5E6B-4633-8675-619463484127}"/>
+                <a16:creationId xmlns:a16="http://schemas.microsoft.com/office/drawing/2014/main" id="{14D359A9-54CA-4171-941E-DDFC75F7E70A}"/>
               </a:ext>
             </a:extLst>
           </p:cNvPr>
@@ -15395,7 +15675,7 @@
         <p:spPr>
           <a:xfrm xmlns:a="http://schemas.openxmlformats.org/drawingml/2006/main">
             <a:off x="9067800" y="2000250"/>
-            <a:ext cx="1676400" cy="685800"/>
+            <a:ext cx="1676400" cy="845820"/>
           </a:xfrm>
           <a:prstGeom xmlns:a="http://schemas.openxmlformats.org/drawingml/2006/main" prst="rect">
             <a:avLst/>
@@ -15420,7 +15700,7 @@
           <p:cNvPr id="26" name="flow-node-label-sse-ws">
             <a:extLst xmlns:a="http://schemas.openxmlformats.org/drawingml/2006/main">
               <a:ext uri="{FF2B5EF4-FFF2-40B4-BE49-F238E27FC236}">
-                <a16:creationId xmlns:a16="http://schemas.microsoft.com/office/drawing/2014/main" id="{89DAC4F3-54AD-44BB-B43F-6DD903BB98C7}"/>
+                <a16:creationId xmlns:a16="http://schemas.microsoft.com/office/drawing/2014/main" id="{BF1D7A97-5E55-4462-82A5-7349723D8844}"/>
               </a:ext>
             </a:extLst>
           </p:cNvPr>
@@ -15471,7 +15751,7 @@
           <p:cNvPr id="27" name="flow-node-title-sse-ws">
             <a:extLst xmlns:a="http://schemas.openxmlformats.org/drawingml/2006/main">
               <a:ext uri="{FF2B5EF4-FFF2-40B4-BE49-F238E27FC236}">
-                <a16:creationId xmlns:a16="http://schemas.microsoft.com/office/drawing/2014/main" id="{982FF822-4492-4284-B18A-BB88F940A411}"/>
+                <a16:creationId xmlns:a16="http://schemas.microsoft.com/office/drawing/2014/main" id="{829A5C36-842E-40FD-A6BB-488B43DC9BB1}"/>
               </a:ext>
             </a:extLst>
           </p:cNvPr>
@@ -15483,7 +15763,7 @@
         <p:spPr>
           <a:xfrm xmlns:a="http://schemas.openxmlformats.org/drawingml/2006/main">
             <a:off x="9067800" y="2205990"/>
-            <a:ext cx="1032796" cy="262890"/>
+            <a:ext cx="1081088" cy="262890"/>
           </a:xfrm>
           <a:prstGeom xmlns:a="http://schemas.openxmlformats.org/drawingml/2006/main" prst="rect">
             <a:avLst/>
@@ -15522,7 +15802,7 @@
           <p:cNvPr id="28" name="flow-node-subtitle-sse-ws">
             <a:extLst xmlns:a="http://schemas.openxmlformats.org/drawingml/2006/main">
               <a:ext uri="{FF2B5EF4-FFF2-40B4-BE49-F238E27FC236}">
-                <a16:creationId xmlns:a16="http://schemas.microsoft.com/office/drawing/2014/main" id="{692F1C3A-6E8A-4E56-B100-CF2FAC34F8BF}"/>
+                <a16:creationId xmlns:a16="http://schemas.microsoft.com/office/drawing/2014/main" id="{10CC9ACD-638F-412C-85A9-25419A4C3A5A}"/>
               </a:ext>
             </a:extLst>
           </p:cNvPr>
@@ -15534,7 +15814,7 @@
         <p:spPr>
           <a:xfrm xmlns:a="http://schemas.openxmlformats.org/drawingml/2006/main">
             <a:off x="9067800" y="2526030"/>
-            <a:ext cx="1733550" cy="160020"/>
+            <a:ext cx="1770602" cy="320040"/>
           </a:xfrm>
           <a:prstGeom xmlns:a="http://schemas.openxmlformats.org/drawingml/2006/main" prst="rect">
             <a:avLst/>
@@ -15573,7 +15853,7 @@
           <p:cNvPr id="29" name="arch-support-kicker">
             <a:extLst xmlns:a="http://schemas.openxmlformats.org/drawingml/2006/main">
               <a:ext uri="{FF2B5EF4-FFF2-40B4-BE49-F238E27FC236}">
-                <a16:creationId xmlns:a16="http://schemas.microsoft.com/office/drawing/2014/main" id="{300B58D3-5890-4081-8CEB-B5F33EEEECB1}"/>
+                <a16:creationId xmlns:a16="http://schemas.microsoft.com/office/drawing/2014/main" id="{5411F195-3052-424D-B7BE-FF0A0E80240A}"/>
               </a:ext>
             </a:extLst>
           </p:cNvPr>
@@ -15585,7 +15865,7 @@
         <p:spPr>
           <a:xfrm xmlns:a="http://schemas.openxmlformats.org/drawingml/2006/main">
             <a:off x="533400" y="3280410"/>
-            <a:ext cx="666750" cy="160020"/>
+            <a:ext cx="680942" cy="160020"/>
           </a:xfrm>
           <a:prstGeom xmlns:a="http://schemas.openxmlformats.org/drawingml/2006/main" prst="rect">
             <a:avLst/>
@@ -15624,7 +15904,7 @@
           <p:cNvPr id="30" name="chip-asgi">
             <a:extLst xmlns:a="http://schemas.openxmlformats.org/drawingml/2006/main">
               <a:ext uri="{FF2B5EF4-FFF2-40B4-BE49-F238E27FC236}">
-                <a16:creationId xmlns:a16="http://schemas.microsoft.com/office/drawing/2014/main" id="{324910B6-2865-4C26-9796-8AED90140BC8}"/>
+                <a16:creationId xmlns:a16="http://schemas.microsoft.com/office/drawing/2014/main" id="{3DE3B1B6-3EE6-4E24-B12E-DB117DFEE853}"/>
               </a:ext>
             </a:extLst>
           </p:cNvPr>
@@ -15661,7 +15941,7 @@
           <p:cNvPr id="31" name="chip-text-asgi">
             <a:extLst xmlns:a="http://schemas.openxmlformats.org/drawingml/2006/main">
               <a:ext uri="{FF2B5EF4-FFF2-40B4-BE49-F238E27FC236}">
-                <a16:creationId xmlns:a16="http://schemas.microsoft.com/office/drawing/2014/main" id="{660A845B-4570-4DD3-8CC5-1973C9C5BDAB}"/>
+                <a16:creationId xmlns:a16="http://schemas.microsoft.com/office/drawing/2014/main" id="{EE5F3AFF-DF37-4A83-975E-DC7BCA2A5F38}"/>
               </a:ext>
             </a:extLst>
           </p:cNvPr>
@@ -15712,7 +15992,7 @@
           <p:cNvPr id="32" name="chip-celery">
             <a:extLst xmlns:a="http://schemas.openxmlformats.org/drawingml/2006/main">
               <a:ext uri="{FF2B5EF4-FFF2-40B4-BE49-F238E27FC236}">
-                <a16:creationId xmlns:a16="http://schemas.microsoft.com/office/drawing/2014/main" id="{FFC55CE2-E9A0-487C-BF9C-7AA99628EAD1}"/>
+                <a16:creationId xmlns:a16="http://schemas.microsoft.com/office/drawing/2014/main" id="{46CC0561-41E2-45FF-BA32-659934044AFF}"/>
               </a:ext>
             </a:extLst>
           </p:cNvPr>
@@ -15749,7 +16029,7 @@
           <p:cNvPr id="33" name="chip-text-celery">
             <a:extLst xmlns:a="http://schemas.openxmlformats.org/drawingml/2006/main">
               <a:ext uri="{FF2B5EF4-FFF2-40B4-BE49-F238E27FC236}">
-                <a16:creationId xmlns:a16="http://schemas.microsoft.com/office/drawing/2014/main" id="{78A07E67-F3CF-4746-A241-F7D890134B07}"/>
+                <a16:creationId xmlns:a16="http://schemas.microsoft.com/office/drawing/2014/main" id="{98B35CB6-F9F2-419A-8849-EA11FE3CCC0F}"/>
               </a:ext>
             </a:extLst>
           </p:cNvPr>
@@ -15800,7 +16080,7 @@
           <p:cNvPr id="34" name="chip-redis">
             <a:extLst xmlns:a="http://schemas.openxmlformats.org/drawingml/2006/main">
               <a:ext uri="{FF2B5EF4-FFF2-40B4-BE49-F238E27FC236}">
-                <a16:creationId xmlns:a16="http://schemas.microsoft.com/office/drawing/2014/main" id="{02FD7F9D-041E-433B-B7B7-D61450E841AA}"/>
+                <a16:creationId xmlns:a16="http://schemas.microsoft.com/office/drawing/2014/main" id="{BED873FC-2763-412C-931C-C437169AF4FB}"/>
               </a:ext>
             </a:extLst>
           </p:cNvPr>
@@ -15837,7 +16117,7 @@
           <p:cNvPr id="35" name="chip-text-redis">
             <a:extLst xmlns:a="http://schemas.openxmlformats.org/drawingml/2006/main">
               <a:ext uri="{FF2B5EF4-FFF2-40B4-BE49-F238E27FC236}">
-                <a16:creationId xmlns:a16="http://schemas.microsoft.com/office/drawing/2014/main" id="{CBB3C2AF-3D65-47EC-B8FB-F762363CDA98}"/>
+                <a16:creationId xmlns:a16="http://schemas.microsoft.com/office/drawing/2014/main" id="{9D4CF9A4-89FC-48C9-B5F7-A5633AB8405F}"/>
               </a:ext>
             </a:extLst>
           </p:cNvPr>
@@ -15888,7 +16168,7 @@
           <p:cNvPr id="36" name="chip-channels">
             <a:extLst xmlns:a="http://schemas.openxmlformats.org/drawingml/2006/main">
               <a:ext uri="{FF2B5EF4-FFF2-40B4-BE49-F238E27FC236}">
-                <a16:creationId xmlns:a16="http://schemas.microsoft.com/office/drawing/2014/main" id="{FE2A93CE-9127-4C07-A1DE-F5C81A73DB9D}"/>
+                <a16:creationId xmlns:a16="http://schemas.microsoft.com/office/drawing/2014/main" id="{DF84F583-D4C5-409B-BAC0-7EE99386FCED}"/>
               </a:ext>
             </a:extLst>
           </p:cNvPr>
@@ -15925,7 +16205,7 @@
           <p:cNvPr id="37" name="chip-text-channels">
             <a:extLst xmlns:a="http://schemas.openxmlformats.org/drawingml/2006/main">
               <a:ext uri="{FF2B5EF4-FFF2-40B4-BE49-F238E27FC236}">
-                <a16:creationId xmlns:a16="http://schemas.microsoft.com/office/drawing/2014/main" id="{205909A3-89F7-4933-ACB7-284CA4DD90C1}"/>
+                <a16:creationId xmlns:a16="http://schemas.microsoft.com/office/drawing/2014/main" id="{1E373CFE-6394-4467-98E3-E27FE0B12681}"/>
               </a:ext>
             </a:extLst>
           </p:cNvPr>
@@ -15976,7 +16256,7 @@
           <p:cNvPr id="38" name="chip-nginx">
             <a:extLst xmlns:a="http://schemas.openxmlformats.org/drawingml/2006/main">
               <a:ext uri="{FF2B5EF4-FFF2-40B4-BE49-F238E27FC236}">
-                <a16:creationId xmlns:a16="http://schemas.microsoft.com/office/drawing/2014/main" id="{CBCDAF2F-48EB-4F55-9DD4-4B99BB4F40CD}"/>
+                <a16:creationId xmlns:a16="http://schemas.microsoft.com/office/drawing/2014/main" id="{3CFE0F34-811A-406B-A008-F83F265A891A}"/>
               </a:ext>
             </a:extLst>
           </p:cNvPr>
@@ -16013,7 +16293,7 @@
           <p:cNvPr id="39" name="chip-text-nginx">
             <a:extLst xmlns:a="http://schemas.openxmlformats.org/drawingml/2006/main">
               <a:ext uri="{FF2B5EF4-FFF2-40B4-BE49-F238E27FC236}">
-                <a16:creationId xmlns:a16="http://schemas.microsoft.com/office/drawing/2014/main" id="{3E946FF2-3E78-4E4C-AD41-B1CE615E83E5}"/>
+                <a16:creationId xmlns:a16="http://schemas.microsoft.com/office/drawing/2014/main" id="{88212138-8CF5-4EB5-852A-15E27BCB74D3}"/>
               </a:ext>
             </a:extLst>
           </p:cNvPr>
@@ -16064,7 +16344,7 @@
           <p:cNvPr id="40" name="chip-workspace">
             <a:extLst xmlns:a="http://schemas.openxmlformats.org/drawingml/2006/main">
               <a:ext uri="{FF2B5EF4-FFF2-40B4-BE49-F238E27FC236}">
-                <a16:creationId xmlns:a16="http://schemas.microsoft.com/office/drawing/2014/main" id="{328534FA-05ED-472D-B0B9-4E9C8D019B98}"/>
+                <a16:creationId xmlns:a16="http://schemas.microsoft.com/office/drawing/2014/main" id="{530F106F-E0C7-4ACA-B625-2FB149D045CB}"/>
               </a:ext>
             </a:extLst>
           </p:cNvPr>
@@ -16101,7 +16381,7 @@
           <p:cNvPr id="41" name="chip-text-workspace">
             <a:extLst xmlns:a="http://schemas.openxmlformats.org/drawingml/2006/main">
               <a:ext uri="{FF2B5EF4-FFF2-40B4-BE49-F238E27FC236}">
-                <a16:creationId xmlns:a16="http://schemas.microsoft.com/office/drawing/2014/main" id="{E03544B0-5D8C-41B6-8906-EF80C5B578ED}"/>
+                <a16:creationId xmlns:a16="http://schemas.microsoft.com/office/drawing/2014/main" id="{DC5DA772-DFD9-4F79-8371-EF5527B6B184}"/>
               </a:ext>
             </a:extLst>
           </p:cNvPr>
@@ -16152,7 +16432,7 @@
           <p:cNvPr id="42" name="chip-rag">
             <a:extLst xmlns:a="http://schemas.openxmlformats.org/drawingml/2006/main">
               <a:ext uri="{FF2B5EF4-FFF2-40B4-BE49-F238E27FC236}">
-                <a16:creationId xmlns:a16="http://schemas.microsoft.com/office/drawing/2014/main" id="{E14303BD-E7B9-4D83-ADF0-52CB75E52362}"/>
+                <a16:creationId xmlns:a16="http://schemas.microsoft.com/office/drawing/2014/main" id="{AA095C61-6A76-4E7E-96D3-05B050C73AE6}"/>
               </a:ext>
             </a:extLst>
           </p:cNvPr>
@@ -16189,7 +16469,7 @@
           <p:cNvPr id="43" name="chip-text-rag">
             <a:extLst xmlns:a="http://schemas.openxmlformats.org/drawingml/2006/main">
               <a:ext uri="{FF2B5EF4-FFF2-40B4-BE49-F238E27FC236}">
-                <a16:creationId xmlns:a16="http://schemas.microsoft.com/office/drawing/2014/main" id="{7E0230C6-7EEE-4F9C-9AE3-0F1C4B438C35}"/>
+                <a16:creationId xmlns:a16="http://schemas.microsoft.com/office/drawing/2014/main" id="{8CAFF547-5170-4D07-9EF6-FF430373A5DF}"/>
               </a:ext>
             </a:extLst>
           </p:cNvPr>
@@ -16240,7 +16520,7 @@
           <p:cNvPr id="44" name="chip-reports">
             <a:extLst xmlns:a="http://schemas.openxmlformats.org/drawingml/2006/main">
               <a:ext uri="{FF2B5EF4-FFF2-40B4-BE49-F238E27FC236}">
-                <a16:creationId xmlns:a16="http://schemas.microsoft.com/office/drawing/2014/main" id="{1FF94541-E596-4DA0-BC7A-A28E4492016D}"/>
+                <a16:creationId xmlns:a16="http://schemas.microsoft.com/office/drawing/2014/main" id="{1A9F2999-DB1B-4457-B719-72210C28EAE1}"/>
               </a:ext>
             </a:extLst>
           </p:cNvPr>
@@ -16277,7 +16557,7 @@
           <p:cNvPr id="45" name="chip-text-reports">
             <a:extLst xmlns:a="http://schemas.openxmlformats.org/drawingml/2006/main">
               <a:ext uri="{FF2B5EF4-FFF2-40B4-BE49-F238E27FC236}">
-                <a16:creationId xmlns:a16="http://schemas.microsoft.com/office/drawing/2014/main" id="{47382AED-3B21-4E26-94A5-B97213331349}"/>
+                <a16:creationId xmlns:a16="http://schemas.microsoft.com/office/drawing/2014/main" id="{A63A8122-023D-4B22-8923-804EFCD37A77}"/>
               </a:ext>
             </a:extLst>
           </p:cNvPr>
@@ -16328,7 +16608,7 @@
           <p:cNvPr id="46" name="arch-summary">
             <a:extLst xmlns:a="http://schemas.openxmlformats.org/drawingml/2006/main">
               <a:ext uri="{FF2B5EF4-FFF2-40B4-BE49-F238E27FC236}">
-                <a16:creationId xmlns:a16="http://schemas.microsoft.com/office/drawing/2014/main" id="{54F21F91-FDC4-48CC-B4DD-1FAD9F6EFE44}"/>
+                <a16:creationId xmlns:a16="http://schemas.microsoft.com/office/drawing/2014/main" id="{AD0CEDAE-FEA5-4123-9AB8-5051AE82959A}"/>
               </a:ext>
             </a:extLst>
           </p:cNvPr>
@@ -16379,7 +16659,7 @@
           <p:cNvPr id="47" name="arch-domain-kicker">
             <a:extLst xmlns:a="http://schemas.openxmlformats.org/drawingml/2006/main">
               <a:ext uri="{FF2B5EF4-FFF2-40B4-BE49-F238E27FC236}">
-                <a16:creationId xmlns:a16="http://schemas.microsoft.com/office/drawing/2014/main" id="{8C5EE3FE-BA1B-4083-BBE4-F39C7611A9AA}"/>
+                <a16:creationId xmlns:a16="http://schemas.microsoft.com/office/drawing/2014/main" id="{982B3E60-8B1E-4901-B943-36342183FCF0}"/>
               </a:ext>
             </a:extLst>
           </p:cNvPr>
@@ -16391,7 +16671,7 @@
         <p:spPr>
           <a:xfrm xmlns:a="http://schemas.openxmlformats.org/drawingml/2006/main">
             <a:off x="5715000" y="3280410"/>
-            <a:ext cx="533400" cy="160020"/>
+            <a:ext cx="544735" cy="160020"/>
           </a:xfrm>
           <a:prstGeom xmlns:a="http://schemas.openxmlformats.org/drawingml/2006/main" prst="rect">
             <a:avLst/>
@@ -16430,7 +16710,7 @@
           <p:cNvPr id="48" name="chip-project">
             <a:extLst xmlns:a="http://schemas.openxmlformats.org/drawingml/2006/main">
               <a:ext uri="{FF2B5EF4-FFF2-40B4-BE49-F238E27FC236}">
-                <a16:creationId xmlns:a16="http://schemas.microsoft.com/office/drawing/2014/main" id="{AE375210-B861-4B78-85D0-EFEDD1DB3E86}"/>
+                <a16:creationId xmlns:a16="http://schemas.microsoft.com/office/drawing/2014/main" id="{5FE60D14-9562-4CFC-BAF6-D86C2D1285B3}"/>
               </a:ext>
             </a:extLst>
           </p:cNvPr>
@@ -16467,7 +16747,7 @@
           <p:cNvPr id="49" name="chip-text-project">
             <a:extLst xmlns:a="http://schemas.openxmlformats.org/drawingml/2006/main">
               <a:ext uri="{FF2B5EF4-FFF2-40B4-BE49-F238E27FC236}">
-                <a16:creationId xmlns:a16="http://schemas.microsoft.com/office/drawing/2014/main" id="{1F6B81CC-A00A-4564-865E-EFDC8CAEE02F}"/>
+                <a16:creationId xmlns:a16="http://schemas.microsoft.com/office/drawing/2014/main" id="{6FACA97A-7CBA-49C6-810B-063363308A03}"/>
               </a:ext>
             </a:extLst>
           </p:cNvPr>
@@ -16518,7 +16798,7 @@
           <p:cNvPr id="50" name="chip-scan-task">
             <a:extLst xmlns:a="http://schemas.openxmlformats.org/drawingml/2006/main">
               <a:ext uri="{FF2B5EF4-FFF2-40B4-BE49-F238E27FC236}">
-                <a16:creationId xmlns:a16="http://schemas.microsoft.com/office/drawing/2014/main" id="{C6CC112A-F040-4F4B-8E0A-64AFC680D9A3}"/>
+                <a16:creationId xmlns:a16="http://schemas.microsoft.com/office/drawing/2014/main" id="{AD881F06-CF11-4585-8246-545E619CE2E9}"/>
               </a:ext>
             </a:extLst>
           </p:cNvPr>
@@ -16555,7 +16835,7 @@
           <p:cNvPr id="51" name="chip-text-scan-task">
             <a:extLst xmlns:a="http://schemas.openxmlformats.org/drawingml/2006/main">
               <a:ext uri="{FF2B5EF4-FFF2-40B4-BE49-F238E27FC236}">
-                <a16:creationId xmlns:a16="http://schemas.microsoft.com/office/drawing/2014/main" id="{7717A6BF-32CF-467F-90B8-EA2624A9F02D}"/>
+                <a16:creationId xmlns:a16="http://schemas.microsoft.com/office/drawing/2014/main" id="{5BF7FAE2-996F-45E9-B2F0-F4E7D6BDD9FB}"/>
               </a:ext>
             </a:extLst>
           </p:cNvPr>
@@ -16606,7 +16886,7 @@
           <p:cNvPr id="52" name="chip-agent-task">
             <a:extLst xmlns:a="http://schemas.openxmlformats.org/drawingml/2006/main">
               <a:ext uri="{FF2B5EF4-FFF2-40B4-BE49-F238E27FC236}">
-                <a16:creationId xmlns:a16="http://schemas.microsoft.com/office/drawing/2014/main" id="{EC4FEBF8-E806-4247-A41B-15B1BBFF7CB9}"/>
+                <a16:creationId xmlns:a16="http://schemas.microsoft.com/office/drawing/2014/main" id="{B3386A77-DD74-4CA4-A985-0832BC37FF87}"/>
               </a:ext>
             </a:extLst>
           </p:cNvPr>
@@ -16643,7 +16923,7 @@
           <p:cNvPr id="53" name="chip-text-agent-task">
             <a:extLst xmlns:a="http://schemas.openxmlformats.org/drawingml/2006/main">
               <a:ext uri="{FF2B5EF4-FFF2-40B4-BE49-F238E27FC236}">
-                <a16:creationId xmlns:a16="http://schemas.microsoft.com/office/drawing/2014/main" id="{6AF241D4-BF03-4CF6-A2A7-96D3F2EFAE7B}"/>
+                <a16:creationId xmlns:a16="http://schemas.microsoft.com/office/drawing/2014/main" id="{29751E56-AADC-41D4-B962-58E2422CC187}"/>
               </a:ext>
             </a:extLst>
           </p:cNvPr>
@@ -16694,7 +16974,7 @@
           <p:cNvPr id="54" name="chip-rag">
             <a:extLst xmlns:a="http://schemas.openxmlformats.org/drawingml/2006/main">
               <a:ext uri="{FF2B5EF4-FFF2-40B4-BE49-F238E27FC236}">
-                <a16:creationId xmlns:a16="http://schemas.microsoft.com/office/drawing/2014/main" id="{75A5BD3E-EC6C-444A-97AF-864E2C3A8D42}"/>
+                <a16:creationId xmlns:a16="http://schemas.microsoft.com/office/drawing/2014/main" id="{080EC8CE-D371-4813-B308-F4A277A7A5FE}"/>
               </a:ext>
             </a:extLst>
           </p:cNvPr>
@@ -16731,7 +17011,7 @@
           <p:cNvPr id="55" name="chip-text-rag">
             <a:extLst xmlns:a="http://schemas.openxmlformats.org/drawingml/2006/main">
               <a:ext uri="{FF2B5EF4-FFF2-40B4-BE49-F238E27FC236}">
-                <a16:creationId xmlns:a16="http://schemas.microsoft.com/office/drawing/2014/main" id="{3F6AA22F-0CE2-43AF-8B75-3F3AE267CE61}"/>
+                <a16:creationId xmlns:a16="http://schemas.microsoft.com/office/drawing/2014/main" id="{D201B1BC-3C9A-42EE-B305-56FDED34EFB4}"/>
               </a:ext>
             </a:extLst>
           </p:cNvPr>
@@ -16782,7 +17062,7 @@
           <p:cNvPr id="56" name="chip-audit-rule">
             <a:extLst xmlns:a="http://schemas.openxmlformats.org/drawingml/2006/main">
               <a:ext uri="{FF2B5EF4-FFF2-40B4-BE49-F238E27FC236}">
-                <a16:creationId xmlns:a16="http://schemas.microsoft.com/office/drawing/2014/main" id="{B6340329-0C88-4878-B663-DCA6EB610388}"/>
+                <a16:creationId xmlns:a16="http://schemas.microsoft.com/office/drawing/2014/main" id="{A121AF42-ABAF-460C-A882-697B995FC0A2}"/>
               </a:ext>
             </a:extLst>
           </p:cNvPr>
@@ -16819,7 +17099,7 @@
           <p:cNvPr id="57" name="chip-text-audit-rule">
             <a:extLst xmlns:a="http://schemas.openxmlformats.org/drawingml/2006/main">
               <a:ext uri="{FF2B5EF4-FFF2-40B4-BE49-F238E27FC236}">
-                <a16:creationId xmlns:a16="http://schemas.microsoft.com/office/drawing/2014/main" id="{6DB198E3-064C-4400-84B5-B23DEE6E187B}"/>
+                <a16:creationId xmlns:a16="http://schemas.microsoft.com/office/drawing/2014/main" id="{AB7E055B-3546-463D-93FC-3A1EB51B1770}"/>
               </a:ext>
             </a:extLst>
           </p:cNvPr>
@@ -16870,7 +17150,7 @@
           <p:cNvPr id="58" name="chip-prompt-template">
             <a:extLst xmlns:a="http://schemas.openxmlformats.org/drawingml/2006/main">
               <a:ext uri="{FF2B5EF4-FFF2-40B4-BE49-F238E27FC236}">
-                <a16:creationId xmlns:a16="http://schemas.microsoft.com/office/drawing/2014/main" id="{823168BD-4414-4B0F-A9D1-17A3FECEB8EC}"/>
+                <a16:creationId xmlns:a16="http://schemas.microsoft.com/office/drawing/2014/main" id="{49666A94-10F9-489C-A99E-7701EEDCAAF4}"/>
               </a:ext>
             </a:extLst>
           </p:cNvPr>
@@ -16907,7 +17187,7 @@
           <p:cNvPr id="59" name="chip-text-prompt-template">
             <a:extLst xmlns:a="http://schemas.openxmlformats.org/drawingml/2006/main">
               <a:ext uri="{FF2B5EF4-FFF2-40B4-BE49-F238E27FC236}">
-                <a16:creationId xmlns:a16="http://schemas.microsoft.com/office/drawing/2014/main" id="{2BAC2BCE-984A-48C2-9E9D-39B850635394}"/>
+                <a16:creationId xmlns:a16="http://schemas.microsoft.com/office/drawing/2014/main" id="{1645463A-89BB-4EF3-879C-16F6F101C6F1}"/>
               </a:ext>
             </a:extLst>
           </p:cNvPr>
@@ -16958,7 +17238,7 @@
           <p:cNvPr id="60" name="chip-user-config">
             <a:extLst xmlns:a="http://schemas.openxmlformats.org/drawingml/2006/main">
               <a:ext uri="{FF2B5EF4-FFF2-40B4-BE49-F238E27FC236}">
-                <a16:creationId xmlns:a16="http://schemas.microsoft.com/office/drawing/2014/main" id="{911C207F-5078-40E5-A4D6-9AFCA59A0004}"/>
+                <a16:creationId xmlns:a16="http://schemas.microsoft.com/office/drawing/2014/main" id="{B13F2F92-9A99-4864-B480-C99BD997A9AC}"/>
               </a:ext>
             </a:extLst>
           </p:cNvPr>
@@ -16995,7 +17275,7 @@
           <p:cNvPr id="61" name="chip-text-user-config">
             <a:extLst xmlns:a="http://schemas.openxmlformats.org/drawingml/2006/main">
               <a:ext uri="{FF2B5EF4-FFF2-40B4-BE49-F238E27FC236}">
-                <a16:creationId xmlns:a16="http://schemas.microsoft.com/office/drawing/2014/main" id="{B3B8B414-1A65-4EA2-8955-1ACE2AB722B1}"/>
+                <a16:creationId xmlns:a16="http://schemas.microsoft.com/office/drawing/2014/main" id="{C900041F-187E-4101-99F7-06E9ACA4E938}"/>
               </a:ext>
             </a:extLst>
           </p:cNvPr>
@@ -17046,7 +17326,7 @@
           <p:cNvPr id="62" name="chip-dashboard">
             <a:extLst xmlns:a="http://schemas.openxmlformats.org/drawingml/2006/main">
               <a:ext uri="{FF2B5EF4-FFF2-40B4-BE49-F238E27FC236}">
-                <a16:creationId xmlns:a16="http://schemas.microsoft.com/office/drawing/2014/main" id="{07B2D9DD-8B59-4F97-BB2B-57990C6E807E}"/>
+                <a16:creationId xmlns:a16="http://schemas.microsoft.com/office/drawing/2014/main" id="{0CAD05CE-5C62-4970-9D82-A902955672D3}"/>
               </a:ext>
             </a:extLst>
           </p:cNvPr>
@@ -17083,7 +17363,7 @@
           <p:cNvPr id="63" name="chip-text-dashboard">
             <a:extLst xmlns:a="http://schemas.openxmlformats.org/drawingml/2006/main">
               <a:ext uri="{FF2B5EF4-FFF2-40B4-BE49-F238E27FC236}">
-                <a16:creationId xmlns:a16="http://schemas.microsoft.com/office/drawing/2014/main" id="{959ECD61-EC78-41E1-9C09-AACB01AE689C}"/>
+                <a16:creationId xmlns:a16="http://schemas.microsoft.com/office/drawing/2014/main" id="{47B37DF0-7026-47B2-858A-6337A5AE4789}"/>
               </a:ext>
             </a:extLst>
           </p:cNvPr>
@@ -17134,7 +17414,7 @@
           <p:cNvPr id="64" name="arch-domain-note">
             <a:extLst xmlns:a="http://schemas.openxmlformats.org/drawingml/2006/main">
               <a:ext uri="{FF2B5EF4-FFF2-40B4-BE49-F238E27FC236}">
-                <a16:creationId xmlns:a16="http://schemas.microsoft.com/office/drawing/2014/main" id="{25A7D97A-58F1-4A4F-8960-7D1DF86F0E9A}"/>
+                <a16:creationId xmlns:a16="http://schemas.microsoft.com/office/drawing/2014/main" id="{6DB6F232-68ED-4E2E-A61F-EC356DEF6402}"/>
               </a:ext>
             </a:extLst>
           </p:cNvPr>
@@ -17185,7 +17465,7 @@
           <p:cNvPr id="65" name="arch-entity-kicker">
             <a:extLst xmlns:a="http://schemas.openxmlformats.org/drawingml/2006/main">
               <a:ext uri="{FF2B5EF4-FFF2-40B4-BE49-F238E27FC236}">
-                <a16:creationId xmlns:a16="http://schemas.microsoft.com/office/drawing/2014/main" id="{C9593DCB-9189-460C-B641-0249BD791BEB}"/>
+                <a16:creationId xmlns:a16="http://schemas.microsoft.com/office/drawing/2014/main" id="{575C38A7-52FF-4750-9D1D-D3C6AA5C405E}"/>
               </a:ext>
             </a:extLst>
           </p:cNvPr>
@@ -17197,7 +17477,7 @@
         <p:spPr>
           <a:xfrm xmlns:a="http://schemas.openxmlformats.org/drawingml/2006/main">
             <a:off x="5715000" y="4351020"/>
-            <a:ext cx="533400" cy="160020"/>
+            <a:ext cx="544735" cy="160020"/>
           </a:xfrm>
           <a:prstGeom xmlns:a="http://schemas.openxmlformats.org/drawingml/2006/main" prst="rect">
             <a:avLst/>
@@ -17236,7 +17516,7 @@
           <p:cNvPr id="66" name="chip-auditproject">
             <a:extLst xmlns:a="http://schemas.openxmlformats.org/drawingml/2006/main">
               <a:ext uri="{FF2B5EF4-FFF2-40B4-BE49-F238E27FC236}">
-                <a16:creationId xmlns:a16="http://schemas.microsoft.com/office/drawing/2014/main" id="{506DE667-65E5-4E23-9A4A-2ACF0E77EB44}"/>
+                <a16:creationId xmlns:a16="http://schemas.microsoft.com/office/drawing/2014/main" id="{9D766955-A39C-4D86-843E-D8FFEE1AD149}"/>
               </a:ext>
             </a:extLst>
           </p:cNvPr>
@@ -17273,7 +17553,7 @@
           <p:cNvPr id="67" name="chip-text-auditproject">
             <a:extLst xmlns:a="http://schemas.openxmlformats.org/drawingml/2006/main">
               <a:ext uri="{FF2B5EF4-FFF2-40B4-BE49-F238E27FC236}">
-                <a16:creationId xmlns:a16="http://schemas.microsoft.com/office/drawing/2014/main" id="{96A86953-D841-4E18-A8F2-089CFDF92D2E}"/>
+                <a16:creationId xmlns:a16="http://schemas.microsoft.com/office/drawing/2014/main" id="{ACA01F0A-A565-44BE-8EA8-C2E97CDCC172}"/>
               </a:ext>
             </a:extLst>
           </p:cNvPr>
@@ -17324,7 +17604,7 @@
           <p:cNvPr id="68" name="chip-audittask">
             <a:extLst xmlns:a="http://schemas.openxmlformats.org/drawingml/2006/main">
               <a:ext uri="{FF2B5EF4-FFF2-40B4-BE49-F238E27FC236}">
-                <a16:creationId xmlns:a16="http://schemas.microsoft.com/office/drawing/2014/main" id="{F39FC589-4C79-4258-AED3-F579AB60652F}"/>
+                <a16:creationId xmlns:a16="http://schemas.microsoft.com/office/drawing/2014/main" id="{FD3AB1ED-09F7-4AB2-9644-45699015F4C7}"/>
               </a:ext>
             </a:extLst>
           </p:cNvPr>
@@ -17361,7 +17641,7 @@
           <p:cNvPr id="69" name="chip-text-audittask">
             <a:extLst xmlns:a="http://schemas.openxmlformats.org/drawingml/2006/main">
               <a:ext uri="{FF2B5EF4-FFF2-40B4-BE49-F238E27FC236}">
-                <a16:creationId xmlns:a16="http://schemas.microsoft.com/office/drawing/2014/main" id="{CA6C6BAC-F644-43AB-A6D1-6C80D4E11EA8}"/>
+                <a16:creationId xmlns:a16="http://schemas.microsoft.com/office/drawing/2014/main" id="{8B143DD1-76CB-4D44-BD57-0E45AEE18315}"/>
               </a:ext>
             </a:extLst>
           </p:cNvPr>
@@ -17412,7 +17692,7 @@
           <p:cNvPr id="70" name="chip-agenttask">
             <a:extLst xmlns:a="http://schemas.openxmlformats.org/drawingml/2006/main">
               <a:ext uri="{FF2B5EF4-FFF2-40B4-BE49-F238E27FC236}">
-                <a16:creationId xmlns:a16="http://schemas.microsoft.com/office/drawing/2014/main" id="{74722E6B-15A7-403B-8190-76AD625BB378}"/>
+                <a16:creationId xmlns:a16="http://schemas.microsoft.com/office/drawing/2014/main" id="{2B19C66A-3097-4E89-827F-86E93FF078D0}"/>
               </a:ext>
             </a:extLst>
           </p:cNvPr>
@@ -17449,7 +17729,7 @@
           <p:cNvPr id="71" name="chip-text-agenttask">
             <a:extLst xmlns:a="http://schemas.openxmlformats.org/drawingml/2006/main">
               <a:ext uri="{FF2B5EF4-FFF2-40B4-BE49-F238E27FC236}">
-                <a16:creationId xmlns:a16="http://schemas.microsoft.com/office/drawing/2014/main" id="{2DC8096D-BEA8-4A8E-978B-8F5CA3C62350}"/>
+                <a16:creationId xmlns:a16="http://schemas.microsoft.com/office/drawing/2014/main" id="{07553746-CA7F-4F49-8A6F-7C3D75C5AED4}"/>
               </a:ext>
             </a:extLst>
           </p:cNvPr>
@@ -17500,7 +17780,7 @@
           <p:cNvPr id="72" name="chip-agentcheckpoint">
             <a:extLst xmlns:a="http://schemas.openxmlformats.org/drawingml/2006/main">
               <a:ext uri="{FF2B5EF4-FFF2-40B4-BE49-F238E27FC236}">
-                <a16:creationId xmlns:a16="http://schemas.microsoft.com/office/drawing/2014/main" id="{51354486-ED60-4630-9AB5-08591817BDCA}"/>
+                <a16:creationId xmlns:a16="http://schemas.microsoft.com/office/drawing/2014/main" id="{68E45238-42AA-4655-B555-3F1487537FE8}"/>
               </a:ext>
             </a:extLst>
           </p:cNvPr>
@@ -17537,7 +17817,7 @@
           <p:cNvPr id="73" name="chip-text-agentcheckpoint">
             <a:extLst xmlns:a="http://schemas.openxmlformats.org/drawingml/2006/main">
               <a:ext uri="{FF2B5EF4-FFF2-40B4-BE49-F238E27FC236}">
-                <a16:creationId xmlns:a16="http://schemas.microsoft.com/office/drawing/2014/main" id="{504CD8DE-32B0-4EB9-A5DB-878A655F9ED2}"/>
+                <a16:creationId xmlns:a16="http://schemas.microsoft.com/office/drawing/2014/main" id="{4F389CAA-1C07-49AF-8702-80E4495FBBA2}"/>
               </a:ext>
             </a:extLst>
           </p:cNvPr>
@@ -17588,7 +17868,7 @@
           <p:cNvPr id="74" name="chip-agentevent">
             <a:extLst xmlns:a="http://schemas.openxmlformats.org/drawingml/2006/main">
               <a:ext uri="{FF2B5EF4-FFF2-40B4-BE49-F238E27FC236}">
-                <a16:creationId xmlns:a16="http://schemas.microsoft.com/office/drawing/2014/main" id="{4DD60272-2A6E-468E-9C4B-F32C5336FAD5}"/>
+                <a16:creationId xmlns:a16="http://schemas.microsoft.com/office/drawing/2014/main" id="{CC32D52A-C7EC-40F4-8EAC-051D0D30FCE9}"/>
               </a:ext>
             </a:extLst>
           </p:cNvPr>
@@ -17625,7 +17905,7 @@
           <p:cNvPr id="75" name="chip-text-agentevent">
             <a:extLst xmlns:a="http://schemas.openxmlformats.org/drawingml/2006/main">
               <a:ext uri="{FF2B5EF4-FFF2-40B4-BE49-F238E27FC236}">
-                <a16:creationId xmlns:a16="http://schemas.microsoft.com/office/drawing/2014/main" id="{3925A46D-78C6-44B9-AFEC-4841A805D792}"/>
+                <a16:creationId xmlns:a16="http://schemas.microsoft.com/office/drawing/2014/main" id="{6BB3DD21-71DD-4624-8F49-FFC59D5FB8CC}"/>
               </a:ext>
             </a:extLst>
           </p:cNvPr>
@@ -17676,7 +17956,7 @@
           <p:cNvPr id="76" name="chip-agentfinding">
             <a:extLst xmlns:a="http://schemas.openxmlformats.org/drawingml/2006/main">
               <a:ext uri="{FF2B5EF4-FFF2-40B4-BE49-F238E27FC236}">
-                <a16:creationId xmlns:a16="http://schemas.microsoft.com/office/drawing/2014/main" id="{F78FF4E5-F952-40B8-833F-0A629422E003}"/>
+                <a16:creationId xmlns:a16="http://schemas.microsoft.com/office/drawing/2014/main" id="{59B532D2-A83A-48F2-8C47-A625729EACEC}"/>
               </a:ext>
             </a:extLst>
           </p:cNvPr>
@@ -17713,7 +17993,7 @@
           <p:cNvPr id="77" name="chip-text-agentfinding">
             <a:extLst xmlns:a="http://schemas.openxmlformats.org/drawingml/2006/main">
               <a:ext uri="{FF2B5EF4-FFF2-40B4-BE49-F238E27FC236}">
-                <a16:creationId xmlns:a16="http://schemas.microsoft.com/office/drawing/2014/main" id="{00B9023B-1992-4F0F-92F1-3CAAD0CE6FB2}"/>
+                <a16:creationId xmlns:a16="http://schemas.microsoft.com/office/drawing/2014/main" id="{86E2F771-05D1-4B57-800D-88F7F2C90405}"/>
               </a:ext>
             </a:extLst>
           </p:cNvPr>
@@ -17764,7 +18044,7 @@
           <p:cNvPr id="78" name="chip-auditruleset">
             <a:extLst xmlns:a="http://schemas.openxmlformats.org/drawingml/2006/main">
               <a:ext uri="{FF2B5EF4-FFF2-40B4-BE49-F238E27FC236}">
-                <a16:creationId xmlns:a16="http://schemas.microsoft.com/office/drawing/2014/main" id="{0ED0E2CB-7E9F-4DCD-9723-3E7A76C84173}"/>
+                <a16:creationId xmlns:a16="http://schemas.microsoft.com/office/drawing/2014/main" id="{0C2ADFE4-9038-4109-8609-78CB8D9F2CB8}"/>
               </a:ext>
             </a:extLst>
           </p:cNvPr>
@@ -17801,7 +18081,7 @@
           <p:cNvPr id="79" name="chip-text-auditruleset">
             <a:extLst xmlns:a="http://schemas.openxmlformats.org/drawingml/2006/main">
               <a:ext uri="{FF2B5EF4-FFF2-40B4-BE49-F238E27FC236}">
-                <a16:creationId xmlns:a16="http://schemas.microsoft.com/office/drawing/2014/main" id="{AC71B78B-747F-4803-A951-7F15C1BC0B1D}"/>
+                <a16:creationId xmlns:a16="http://schemas.microsoft.com/office/drawing/2014/main" id="{98D94E96-9EBF-427F-AE12-4AEF88EDA250}"/>
               </a:ext>
             </a:extLst>
           </p:cNvPr>
@@ -17852,7 +18132,7 @@
           <p:cNvPr id="80" name="chip-prompttemplate">
             <a:extLst xmlns:a="http://schemas.openxmlformats.org/drawingml/2006/main">
               <a:ext uri="{FF2B5EF4-FFF2-40B4-BE49-F238E27FC236}">
-                <a16:creationId xmlns:a16="http://schemas.microsoft.com/office/drawing/2014/main" id="{576091A0-F4AA-4F43-A4B7-E4764C3AC738}"/>
+                <a16:creationId xmlns:a16="http://schemas.microsoft.com/office/drawing/2014/main" id="{DFB970F0-EA27-45A4-B5BE-9A336F3514B0}"/>
               </a:ext>
             </a:extLst>
           </p:cNvPr>
@@ -17889,7 +18169,7 @@
           <p:cNvPr id="81" name="chip-text-prompttemplate">
             <a:extLst xmlns:a="http://schemas.openxmlformats.org/drawingml/2006/main">
               <a:ext uri="{FF2B5EF4-FFF2-40B4-BE49-F238E27FC236}">
-                <a16:creationId xmlns:a16="http://schemas.microsoft.com/office/drawing/2014/main" id="{8DD3946F-C7B8-49F6-A9E8-4E02845E92A1}"/>
+                <a16:creationId xmlns:a16="http://schemas.microsoft.com/office/drawing/2014/main" id="{D4B7CB2C-E710-48D8-B139-DC1ADA1143ED}"/>
               </a:ext>
             </a:extLst>
           </p:cNvPr>
@@ -17940,7 +18220,7 @@
           <p:cNvPr id="82" name="arch-note">
             <a:extLst xmlns:a="http://schemas.openxmlformats.org/drawingml/2006/main">
               <a:ext uri="{FF2B5EF4-FFF2-40B4-BE49-F238E27FC236}">
-                <a16:creationId xmlns:a16="http://schemas.microsoft.com/office/drawing/2014/main" id="{AAE7A4D1-40B0-4F0D-9785-468F0466F1B3}"/>
+                <a16:creationId xmlns:a16="http://schemas.microsoft.com/office/drawing/2014/main" id="{9C1F500A-5B20-40E8-8F01-459ED7ACCEFE}"/>
               </a:ext>
             </a:extLst>
           </p:cNvPr>
@@ -17989,7 +18269,7 @@
     </p:spTree>
     <p:extLst>
       <p:ext uri="{BB962C8B-B14F-4D97-AF65-F5344CB8AC3E}">
-        <p14:creationId xmlns:p14="http://schemas.microsoft.com/office/powerpoint/2010/main" val="258491997"/>
+        <p14:creationId xmlns:p14="http://schemas.microsoft.com/office/powerpoint/2010/main" val="493536120"/>
       </p:ext>
     </p:extLst>
   </p:cSld>
@@ -18020,7 +18300,7 @@
           <p:cNvPr id="1" name="header-kicker-多智能体编排架构">
             <a:extLst xmlns:a="http://schemas.openxmlformats.org/drawingml/2006/main">
               <a:ext uri="{FF2B5EF4-FFF2-40B4-BE49-F238E27FC236}">
-                <a16:creationId xmlns:a16="http://schemas.microsoft.com/office/drawing/2014/main" id="{30297F8C-DAD4-4505-A22F-0556963A37F8}"/>
+                <a16:creationId xmlns:a16="http://schemas.microsoft.com/office/drawing/2014/main" id="{80202240-386E-41F8-8975-EC945053A7A0}"/>
               </a:ext>
             </a:extLst>
           </p:cNvPr>
@@ -18071,7 +18351,7 @@
           <p:cNvPr id="2" name="header-title-多智能体编排架构">
             <a:extLst xmlns:a="http://schemas.openxmlformats.org/drawingml/2006/main">
               <a:ext uri="{FF2B5EF4-FFF2-40B4-BE49-F238E27FC236}">
-                <a16:creationId xmlns:a16="http://schemas.microsoft.com/office/drawing/2014/main" id="{0BE52CE4-11EB-4370-BB82-7C1998D5D4D8}"/>
+                <a16:creationId xmlns:a16="http://schemas.microsoft.com/office/drawing/2014/main" id="{AB2E9D53-4D10-4160-A498-50EEDF1015E8}"/>
               </a:ext>
             </a:extLst>
           </p:cNvPr>
@@ -18122,7 +18402,7 @@
           <p:cNvPr id="3" name="header-subtitle-多智能体编排架构">
             <a:extLst xmlns:a="http://schemas.openxmlformats.org/drawingml/2006/main">
               <a:ext uri="{FF2B5EF4-FFF2-40B4-BE49-F238E27FC236}">
-                <a16:creationId xmlns:a16="http://schemas.microsoft.com/office/drawing/2014/main" id="{BFC14894-09A7-478D-99F6-91E3C925F2D1}"/>
+                <a16:creationId xmlns:a16="http://schemas.microsoft.com/office/drawing/2014/main" id="{8753FBD8-717D-4FB2-A8A2-AF30D4DFAEF1}"/>
               </a:ext>
             </a:extLst>
           </p:cNvPr>
@@ -18173,7 +18453,7 @@
           <p:cNvPr id="4" name="heading-underline">
             <a:extLst xmlns:a="http://schemas.openxmlformats.org/drawingml/2006/main">
               <a:ext uri="{FF2B5EF4-FFF2-40B4-BE49-F238E27FC236}">
-                <a16:creationId xmlns:a16="http://schemas.microsoft.com/office/drawing/2014/main" id="{68483E43-1E30-412A-A217-0A07237F9744}"/>
+                <a16:creationId xmlns:a16="http://schemas.microsoft.com/office/drawing/2014/main" id="{F860FD6D-4384-42FD-A0CF-2D3DBF92ECF3}"/>
               </a:ext>
             </a:extLst>
           </p:cNvPr>
@@ -18210,7 +18490,7 @@
           <p:cNvPr id="5" name="">
             <a:extLst xmlns:a="http://schemas.openxmlformats.org/drawingml/2006/main">
               <a:ext uri="{FF2B5EF4-FFF2-40B4-BE49-F238E27FC236}">
-                <a16:creationId xmlns:a16="http://schemas.microsoft.com/office/drawing/2014/main" id="{60B082EC-FC02-4F65-8BDC-1860277AA6F9}"/>
+                <a16:creationId xmlns:a16="http://schemas.microsoft.com/office/drawing/2014/main" id="{F6DB5A17-E5EE-4719-90E9-1B151AA714D4}"/>
               </a:ext>
             </a:extLst>
           </p:cNvPr>
@@ -18222,7 +18502,7 @@
         <p:spPr>
           <a:xfrm xmlns:a="http://schemas.openxmlformats.org/drawingml/2006/main">
             <a:off x="533400" y="2000250"/>
-            <a:ext cx="533400" cy="160020"/>
+            <a:ext cx="544735" cy="160020"/>
           </a:xfrm>
           <a:prstGeom xmlns:a="http://schemas.openxmlformats.org/drawingml/2006/main" prst="rect">
             <a:avLst/>
@@ -18261,7 +18541,7 @@
           <p:cNvPr id="6" name="">
             <a:extLst xmlns:a="http://schemas.openxmlformats.org/drawingml/2006/main">
               <a:ext uri="{FF2B5EF4-FFF2-40B4-BE49-F238E27FC236}">
-                <a16:creationId xmlns:a16="http://schemas.microsoft.com/office/drawing/2014/main" id="{FBCCA0E8-9890-47A6-BC9E-BE1A4D0FE281}"/>
+                <a16:creationId xmlns:a16="http://schemas.microsoft.com/office/drawing/2014/main" id="{28FBA06B-2E8B-421B-AA00-6EB2E215F26D}"/>
               </a:ext>
             </a:extLst>
           </p:cNvPr>
@@ -18273,7 +18553,7 @@
         <p:spPr>
           <a:xfrm xmlns:a="http://schemas.openxmlformats.org/drawingml/2006/main">
             <a:off x="533400" y="2274570"/>
-            <a:ext cx="3386518" cy="868680"/>
+            <a:ext cx="3560445" cy="434340"/>
           </a:xfrm>
           <a:prstGeom xmlns:a="http://schemas.openxmlformats.org/drawingml/2006/main" prst="rect">
             <a:avLst/>
@@ -18312,18 +18592,18 @@
           <p:cNvPr id="7" name="bullet-dot-自主决策">
             <a:extLst xmlns:a="http://schemas.openxmlformats.org/drawingml/2006/main">
               <a:ext uri="{FF2B5EF4-FFF2-40B4-BE49-F238E27FC236}">
-                <a16:creationId xmlns:a16="http://schemas.microsoft.com/office/drawing/2014/main" id="{A1D15817-C166-4D60-B87A-465726465F90}"/>
-              </a:ext>
-            </a:extLst>
-          </p:cNvPr>
-          <p:cNvSpPr>
-            <a:spLocks xmlns:a="http://schemas.openxmlformats.org/drawingml/2006/main" noGrp="1"/>
-          </p:cNvSpPr>
-          <p:nvPr/>
-        </p:nvSpPr>
-        <p:spPr>
-          <a:xfrm xmlns:a="http://schemas.openxmlformats.org/drawingml/2006/main">
-            <a:off x="533400" y="3257550"/>
+                <a16:creationId xmlns:a16="http://schemas.microsoft.com/office/drawing/2014/main" id="{6811941A-A218-443D-89DB-6D712F66E0BA}"/>
+              </a:ext>
+            </a:extLst>
+          </p:cNvPr>
+          <p:cNvSpPr>
+            <a:spLocks xmlns:a="http://schemas.openxmlformats.org/drawingml/2006/main" noGrp="1"/>
+          </p:cNvSpPr>
+          <p:nvPr/>
+        </p:nvSpPr>
+        <p:spPr>
+          <a:xfrm xmlns:a="http://schemas.openxmlformats.org/drawingml/2006/main">
+            <a:off x="533400" y="2823210"/>
             <a:ext cx="76200" cy="76200"/>
           </a:xfrm>
           <a:prstGeom xmlns:a="http://schemas.openxmlformats.org/drawingml/2006/main" prst="ellipse">
@@ -18343,18 +18623,18 @@
           <p:cNvPr id="8" name="bullet-title-自主决策">
             <a:extLst xmlns:a="http://schemas.openxmlformats.org/drawingml/2006/main">
               <a:ext uri="{FF2B5EF4-FFF2-40B4-BE49-F238E27FC236}">
-                <a16:creationId xmlns:a16="http://schemas.microsoft.com/office/drawing/2014/main" id="{845FFF74-B6BD-4621-BED8-0E6F3C607B82}"/>
-              </a:ext>
-            </a:extLst>
-          </p:cNvPr>
-          <p:cNvSpPr>
-            <a:spLocks xmlns:a="http://schemas.openxmlformats.org/drawingml/2006/main" noGrp="1"/>
-          </p:cNvSpPr>
-          <p:nvPr/>
-        </p:nvSpPr>
-        <p:spPr>
-          <a:xfrm xmlns:a="http://schemas.openxmlformats.org/drawingml/2006/main">
-            <a:off x="723900" y="3257550"/>
+                <a16:creationId xmlns:a16="http://schemas.microsoft.com/office/drawing/2014/main" id="{E5FD028F-EADF-4A74-BCB3-7A5F82BD09DD}"/>
+              </a:ext>
+            </a:extLst>
+          </p:cNvPr>
+          <p:cNvSpPr>
+            <a:spLocks xmlns:a="http://schemas.openxmlformats.org/drawingml/2006/main" noGrp="1"/>
+          </p:cNvSpPr>
+          <p:nvPr/>
+        </p:nvSpPr>
+        <p:spPr>
+          <a:xfrm xmlns:a="http://schemas.openxmlformats.org/drawingml/2006/main">
+            <a:off x="723900" y="2823210"/>
             <a:ext cx="3143250" cy="194310"/>
           </a:xfrm>
           <a:prstGeom xmlns:a="http://schemas.openxmlformats.org/drawingml/2006/main" prst="rect">
@@ -18394,18 +18674,18 @@
           <p:cNvPr id="9" name="bullet-detail-自主决策">
             <a:extLst xmlns:a="http://schemas.openxmlformats.org/drawingml/2006/main">
               <a:ext uri="{FF2B5EF4-FFF2-40B4-BE49-F238E27FC236}">
-                <a16:creationId xmlns:a16="http://schemas.microsoft.com/office/drawing/2014/main" id="{D32B231F-622A-45E3-8984-405512DEA671}"/>
-              </a:ext>
-            </a:extLst>
-          </p:cNvPr>
-          <p:cNvSpPr>
-            <a:spLocks xmlns:a="http://schemas.openxmlformats.org/drawingml/2006/main" noGrp="1"/>
-          </p:cNvSpPr>
-          <p:nvPr/>
-        </p:nvSpPr>
-        <p:spPr>
-          <a:xfrm xmlns:a="http://schemas.openxmlformats.org/drawingml/2006/main">
-            <a:off x="723900" y="3489960"/>
+                <a16:creationId xmlns:a16="http://schemas.microsoft.com/office/drawing/2014/main" id="{F9DDD92A-3EBB-4D67-B350-40DE92320BB6}"/>
+              </a:ext>
+            </a:extLst>
+          </p:cNvPr>
+          <p:cNvSpPr>
+            <a:spLocks xmlns:a="http://schemas.openxmlformats.org/drawingml/2006/main" noGrp="1"/>
+          </p:cNvSpPr>
+          <p:nvPr/>
+        </p:nvSpPr>
+        <p:spPr>
+          <a:xfrm xmlns:a="http://schemas.openxmlformats.org/drawingml/2006/main">
+            <a:off x="723900" y="3055620"/>
             <a:ext cx="3143250" cy="514350"/>
           </a:xfrm>
           <a:prstGeom xmlns:a="http://schemas.openxmlformats.org/drawingml/2006/main" prst="rect">
@@ -18445,18 +18725,18 @@
           <p:cNvPr id="10" name="bullet-dot-react-循环">
             <a:extLst xmlns:a="http://schemas.openxmlformats.org/drawingml/2006/main">
               <a:ext uri="{FF2B5EF4-FFF2-40B4-BE49-F238E27FC236}">
-                <a16:creationId xmlns:a16="http://schemas.microsoft.com/office/drawing/2014/main" id="{2544B61B-603D-4EA3-9E18-86A5697D0F09}"/>
-              </a:ext>
-            </a:extLst>
-          </p:cNvPr>
-          <p:cNvSpPr>
-            <a:spLocks xmlns:a="http://schemas.openxmlformats.org/drawingml/2006/main" noGrp="1"/>
-          </p:cNvSpPr>
-          <p:nvPr/>
-        </p:nvSpPr>
-        <p:spPr>
-          <a:xfrm xmlns:a="http://schemas.openxmlformats.org/drawingml/2006/main">
-            <a:off x="533400" y="4118610"/>
+                <a16:creationId xmlns:a16="http://schemas.microsoft.com/office/drawing/2014/main" id="{0F7CA02E-8987-4A01-A7F7-0E37901CC7B6}"/>
+              </a:ext>
+            </a:extLst>
+          </p:cNvPr>
+          <p:cNvSpPr>
+            <a:spLocks xmlns:a="http://schemas.openxmlformats.org/drawingml/2006/main" noGrp="1"/>
+          </p:cNvSpPr>
+          <p:nvPr/>
+        </p:nvSpPr>
+        <p:spPr>
+          <a:xfrm xmlns:a="http://schemas.openxmlformats.org/drawingml/2006/main">
+            <a:off x="533400" y="3684270"/>
             <a:ext cx="76200" cy="76200"/>
           </a:xfrm>
           <a:prstGeom xmlns:a="http://schemas.openxmlformats.org/drawingml/2006/main" prst="ellipse">
@@ -18476,18 +18756,18 @@
           <p:cNvPr id="11" name="bullet-title-react-循环">
             <a:extLst xmlns:a="http://schemas.openxmlformats.org/drawingml/2006/main">
               <a:ext uri="{FF2B5EF4-FFF2-40B4-BE49-F238E27FC236}">
-                <a16:creationId xmlns:a16="http://schemas.microsoft.com/office/drawing/2014/main" id="{1DFE634A-AB6F-4C7F-9406-5BF1CA87C866}"/>
-              </a:ext>
-            </a:extLst>
-          </p:cNvPr>
-          <p:cNvSpPr>
-            <a:spLocks xmlns:a="http://schemas.openxmlformats.org/drawingml/2006/main" noGrp="1"/>
-          </p:cNvSpPr>
-          <p:nvPr/>
-        </p:nvSpPr>
-        <p:spPr>
-          <a:xfrm xmlns:a="http://schemas.openxmlformats.org/drawingml/2006/main">
-            <a:off x="723900" y="4118610"/>
+                <a16:creationId xmlns:a16="http://schemas.microsoft.com/office/drawing/2014/main" id="{664800EA-D1BD-4147-9B51-BA81D895E4AE}"/>
+              </a:ext>
+            </a:extLst>
+          </p:cNvPr>
+          <p:cNvSpPr>
+            <a:spLocks xmlns:a="http://schemas.openxmlformats.org/drawingml/2006/main" noGrp="1"/>
+          </p:cNvSpPr>
+          <p:nvPr/>
+        </p:nvSpPr>
+        <p:spPr>
+          <a:xfrm xmlns:a="http://schemas.openxmlformats.org/drawingml/2006/main">
+            <a:off x="723900" y="3684270"/>
             <a:ext cx="3143250" cy="194310"/>
           </a:xfrm>
           <a:prstGeom xmlns:a="http://schemas.openxmlformats.org/drawingml/2006/main" prst="rect">
@@ -18527,18 +18807,18 @@
           <p:cNvPr id="12" name="bullet-detail-react-循环">
             <a:extLst xmlns:a="http://schemas.openxmlformats.org/drawingml/2006/main">
               <a:ext uri="{FF2B5EF4-FFF2-40B4-BE49-F238E27FC236}">
-                <a16:creationId xmlns:a16="http://schemas.microsoft.com/office/drawing/2014/main" id="{4BB3DCC4-5517-44F9-9C1B-2D37A9C2C305}"/>
-              </a:ext>
-            </a:extLst>
-          </p:cNvPr>
-          <p:cNvSpPr>
-            <a:spLocks xmlns:a="http://schemas.openxmlformats.org/drawingml/2006/main" noGrp="1"/>
-          </p:cNvSpPr>
-          <p:nvPr/>
-        </p:nvSpPr>
-        <p:spPr>
-          <a:xfrm xmlns:a="http://schemas.openxmlformats.org/drawingml/2006/main">
-            <a:off x="723900" y="4351020"/>
+                <a16:creationId xmlns:a16="http://schemas.microsoft.com/office/drawing/2014/main" id="{A95A858C-C5D3-4F88-A6F4-510B270BEB2F}"/>
+              </a:ext>
+            </a:extLst>
+          </p:cNvPr>
+          <p:cNvSpPr>
+            <a:spLocks xmlns:a="http://schemas.openxmlformats.org/drawingml/2006/main" noGrp="1"/>
+          </p:cNvSpPr>
+          <p:nvPr/>
+        </p:nvSpPr>
+        <p:spPr>
+          <a:xfrm xmlns:a="http://schemas.openxmlformats.org/drawingml/2006/main">
+            <a:off x="723900" y="3916680"/>
             <a:ext cx="3143250" cy="342900"/>
           </a:xfrm>
           <a:prstGeom xmlns:a="http://schemas.openxmlformats.org/drawingml/2006/main" prst="rect">
@@ -18578,18 +18858,18 @@
           <p:cNvPr id="13" name="bullet-dot-任务交接">
             <a:extLst xmlns:a="http://schemas.openxmlformats.org/drawingml/2006/main">
               <a:ext uri="{FF2B5EF4-FFF2-40B4-BE49-F238E27FC236}">
-                <a16:creationId xmlns:a16="http://schemas.microsoft.com/office/drawing/2014/main" id="{8D27376F-ADC0-4107-AA75-188EDEBD7DEE}"/>
-              </a:ext>
-            </a:extLst>
-          </p:cNvPr>
-          <p:cNvSpPr>
-            <a:spLocks xmlns:a="http://schemas.openxmlformats.org/drawingml/2006/main" noGrp="1"/>
-          </p:cNvSpPr>
-          <p:nvPr/>
-        </p:nvSpPr>
-        <p:spPr>
-          <a:xfrm xmlns:a="http://schemas.openxmlformats.org/drawingml/2006/main">
-            <a:off x="533400" y="4808220"/>
+                <a16:creationId xmlns:a16="http://schemas.microsoft.com/office/drawing/2014/main" id="{8978C9AC-C873-4762-8309-F8BA78243A12}"/>
+              </a:ext>
+            </a:extLst>
+          </p:cNvPr>
+          <p:cNvSpPr>
+            <a:spLocks xmlns:a="http://schemas.openxmlformats.org/drawingml/2006/main" noGrp="1"/>
+          </p:cNvSpPr>
+          <p:nvPr/>
+        </p:nvSpPr>
+        <p:spPr>
+          <a:xfrm xmlns:a="http://schemas.openxmlformats.org/drawingml/2006/main">
+            <a:off x="533400" y="4373880"/>
             <a:ext cx="76200" cy="76200"/>
           </a:xfrm>
           <a:prstGeom xmlns:a="http://schemas.openxmlformats.org/drawingml/2006/main" prst="ellipse">
@@ -18609,18 +18889,18 @@
           <p:cNvPr id="14" name="bullet-title-任务交接">
             <a:extLst xmlns:a="http://schemas.openxmlformats.org/drawingml/2006/main">
               <a:ext uri="{FF2B5EF4-FFF2-40B4-BE49-F238E27FC236}">
-                <a16:creationId xmlns:a16="http://schemas.microsoft.com/office/drawing/2014/main" id="{FF51BBAC-BFD0-4EBD-BD92-FD1B8B9730C9}"/>
-              </a:ext>
-            </a:extLst>
-          </p:cNvPr>
-          <p:cNvSpPr>
-            <a:spLocks xmlns:a="http://schemas.openxmlformats.org/drawingml/2006/main" noGrp="1"/>
-          </p:cNvSpPr>
-          <p:nvPr/>
-        </p:nvSpPr>
-        <p:spPr>
-          <a:xfrm xmlns:a="http://schemas.openxmlformats.org/drawingml/2006/main">
-            <a:off x="723900" y="4808220"/>
+                <a16:creationId xmlns:a16="http://schemas.microsoft.com/office/drawing/2014/main" id="{F3290976-91F3-4C7D-9C8A-2F5521176958}"/>
+              </a:ext>
+            </a:extLst>
+          </p:cNvPr>
+          <p:cNvSpPr>
+            <a:spLocks xmlns:a="http://schemas.openxmlformats.org/drawingml/2006/main" noGrp="1"/>
+          </p:cNvSpPr>
+          <p:nvPr/>
+        </p:nvSpPr>
+        <p:spPr>
+          <a:xfrm xmlns:a="http://schemas.openxmlformats.org/drawingml/2006/main">
+            <a:off x="723900" y="4373880"/>
             <a:ext cx="3143250" cy="194310"/>
           </a:xfrm>
           <a:prstGeom xmlns:a="http://schemas.openxmlformats.org/drawingml/2006/main" prst="rect">
@@ -18660,18 +18940,18 @@
           <p:cNvPr id="15" name="bullet-detail-任务交接">
             <a:extLst xmlns:a="http://schemas.openxmlformats.org/drawingml/2006/main">
               <a:ext uri="{FF2B5EF4-FFF2-40B4-BE49-F238E27FC236}">
-                <a16:creationId xmlns:a16="http://schemas.microsoft.com/office/drawing/2014/main" id="{EB1AD4DD-B60A-4364-8D4A-CE9C9AA55D21}"/>
-              </a:ext>
-            </a:extLst>
-          </p:cNvPr>
-          <p:cNvSpPr>
-            <a:spLocks xmlns:a="http://schemas.openxmlformats.org/drawingml/2006/main" noGrp="1"/>
-          </p:cNvSpPr>
-          <p:nvPr/>
-        </p:nvSpPr>
-        <p:spPr>
-          <a:xfrm xmlns:a="http://schemas.openxmlformats.org/drawingml/2006/main">
-            <a:off x="723900" y="5040630"/>
+                <a16:creationId xmlns:a16="http://schemas.microsoft.com/office/drawing/2014/main" id="{96361210-9990-4569-81F1-718B90445626}"/>
+              </a:ext>
+            </a:extLst>
+          </p:cNvPr>
+          <p:cNvSpPr>
+            <a:spLocks xmlns:a="http://schemas.openxmlformats.org/drawingml/2006/main" noGrp="1"/>
+          </p:cNvSpPr>
+          <p:nvPr/>
+        </p:nvSpPr>
+        <p:spPr>
+          <a:xfrm xmlns:a="http://schemas.openxmlformats.org/drawingml/2006/main">
+            <a:off x="723900" y="4606290"/>
             <a:ext cx="3143250" cy="342900"/>
           </a:xfrm>
           <a:prstGeom xmlns:a="http://schemas.openxmlformats.org/drawingml/2006/main" prst="rect">
@@ -18711,7 +18991,7 @@
           <p:cNvPr id="16" name="">
             <a:extLst xmlns:a="http://schemas.openxmlformats.org/drawingml/2006/main">
               <a:ext uri="{FF2B5EF4-FFF2-40B4-BE49-F238E27FC236}">
-                <a16:creationId xmlns:a16="http://schemas.microsoft.com/office/drawing/2014/main" id="{37220F34-AB2E-41B0-80F9-687DC65E9EB2}"/>
+                <a16:creationId xmlns:a16="http://schemas.microsoft.com/office/drawing/2014/main" id="{CEA5B23A-DFD1-41DF-BE2B-1C31BB922F52}"/>
               </a:ext>
             </a:extLst>
           </p:cNvPr>
@@ -18723,7 +19003,7 @@
         <p:spPr>
           <a:xfrm xmlns:a="http://schemas.openxmlformats.org/drawingml/2006/main">
             <a:off x="4095750" y="2000250"/>
-            <a:ext cx="881825" cy="160020"/>
+            <a:ext cx="890302" cy="160020"/>
           </a:xfrm>
           <a:prstGeom xmlns:a="http://schemas.openxmlformats.org/drawingml/2006/main" prst="rect">
             <a:avLst/>
@@ -18762,7 +19042,7 @@
           <p:cNvPr id="17" name="">
             <a:extLst xmlns:a="http://schemas.openxmlformats.org/drawingml/2006/main">
               <a:ext uri="{FF2B5EF4-FFF2-40B4-BE49-F238E27FC236}">
-                <a16:creationId xmlns:a16="http://schemas.microsoft.com/office/drawing/2014/main" id="{4E735432-0C82-4901-9951-347A7C366C1D}"/>
+                <a16:creationId xmlns:a16="http://schemas.microsoft.com/office/drawing/2014/main" id="{B28CB56F-B021-4E9D-9922-888DF694B3CA}"/>
               </a:ext>
             </a:extLst>
           </p:cNvPr>
@@ -18774,7 +19054,7 @@
         <p:spPr>
           <a:xfrm xmlns:a="http://schemas.openxmlformats.org/drawingml/2006/main">
             <a:off x="4095750" y="2274570"/>
-            <a:ext cx="2171700" cy="434340"/>
+            <a:ext cx="2217420" cy="434340"/>
           </a:xfrm>
           <a:prstGeom xmlns:a="http://schemas.openxmlformats.org/drawingml/2006/main" prst="rect">
             <a:avLst/>
@@ -18813,7 +19093,7 @@
           <p:cNvPr id="18" name="bullet-dot-recon-agent-侦察">
             <a:extLst xmlns:a="http://schemas.openxmlformats.org/drawingml/2006/main">
               <a:ext uri="{FF2B5EF4-FFF2-40B4-BE49-F238E27FC236}">
-                <a16:creationId xmlns:a16="http://schemas.microsoft.com/office/drawing/2014/main" id="{C3C32BBF-CDA6-451F-9416-CAF28E53ED52}"/>
+                <a16:creationId xmlns:a16="http://schemas.microsoft.com/office/drawing/2014/main" id="{87DB7409-4A79-486C-A910-1331AF2040F8}"/>
               </a:ext>
             </a:extLst>
           </p:cNvPr>
@@ -18844,7 +19124,7 @@
           <p:cNvPr id="19" name="bullet-title-recon-agent-侦察">
             <a:extLst xmlns:a="http://schemas.openxmlformats.org/drawingml/2006/main">
               <a:ext uri="{FF2B5EF4-FFF2-40B4-BE49-F238E27FC236}">
-                <a16:creationId xmlns:a16="http://schemas.microsoft.com/office/drawing/2014/main" id="{6463513D-81B3-42B1-A0A1-50C22554D901}"/>
+                <a16:creationId xmlns:a16="http://schemas.microsoft.com/office/drawing/2014/main" id="{293BDD4F-4B49-472E-A365-CC5350278ED0}"/>
               </a:ext>
             </a:extLst>
           </p:cNvPr>
@@ -18895,7 +19175,7 @@
           <p:cNvPr id="20" name="bullet-detail-recon-agent-侦察">
             <a:extLst xmlns:a="http://schemas.openxmlformats.org/drawingml/2006/main">
               <a:ext uri="{FF2B5EF4-FFF2-40B4-BE49-F238E27FC236}">
-                <a16:creationId xmlns:a16="http://schemas.microsoft.com/office/drawing/2014/main" id="{A0E5A310-0BB0-468C-A79A-C82D52834A27}"/>
+                <a16:creationId xmlns:a16="http://schemas.microsoft.com/office/drawing/2014/main" id="{47C7DA7D-B395-49BB-9BAA-E952540AC002}"/>
               </a:ext>
             </a:extLst>
           </p:cNvPr>
@@ -18946,7 +19226,7 @@
           <p:cNvPr id="21" name="bullet-dot-analysis-agent-分析">
             <a:extLst xmlns:a="http://schemas.openxmlformats.org/drawingml/2006/main">
               <a:ext uri="{FF2B5EF4-FFF2-40B4-BE49-F238E27FC236}">
-                <a16:creationId xmlns:a16="http://schemas.microsoft.com/office/drawing/2014/main" id="{705E26E4-E9A2-4EF1-8117-44F0874C8094}"/>
+                <a16:creationId xmlns:a16="http://schemas.microsoft.com/office/drawing/2014/main" id="{ACD93A52-8103-43F4-A1A3-0E06C33F2555}"/>
               </a:ext>
             </a:extLst>
           </p:cNvPr>
@@ -18977,7 +19257,7 @@
           <p:cNvPr id="22" name="bullet-title-analysis-agent-分析">
             <a:extLst xmlns:a="http://schemas.openxmlformats.org/drawingml/2006/main">
               <a:ext uri="{FF2B5EF4-FFF2-40B4-BE49-F238E27FC236}">
-                <a16:creationId xmlns:a16="http://schemas.microsoft.com/office/drawing/2014/main" id="{FE78A595-1DDA-4809-885E-286016BB53B0}"/>
+                <a16:creationId xmlns:a16="http://schemas.microsoft.com/office/drawing/2014/main" id="{BC438801-E6B0-4BB3-ABDA-716C63DFFC7C}"/>
               </a:ext>
             </a:extLst>
           </p:cNvPr>
@@ -19028,7 +19308,7 @@
           <p:cNvPr id="23" name="bullet-detail-analysis-agent-分析">
             <a:extLst xmlns:a="http://schemas.openxmlformats.org/drawingml/2006/main">
               <a:ext uri="{FF2B5EF4-FFF2-40B4-BE49-F238E27FC236}">
-                <a16:creationId xmlns:a16="http://schemas.microsoft.com/office/drawing/2014/main" id="{A8ED44A6-F526-4233-A398-A7C69F69358A}"/>
+                <a16:creationId xmlns:a16="http://schemas.microsoft.com/office/drawing/2014/main" id="{90E3980A-9545-4B44-8B4B-2BBB3E70FC2E}"/>
               </a:ext>
             </a:extLst>
           </p:cNvPr>
@@ -19079,7 +19359,7 @@
           <p:cNvPr id="24" name="bullet-dot-verification-agent-验证">
             <a:extLst xmlns:a="http://schemas.openxmlformats.org/drawingml/2006/main">
               <a:ext uri="{FF2B5EF4-FFF2-40B4-BE49-F238E27FC236}">
-                <a16:creationId xmlns:a16="http://schemas.microsoft.com/office/drawing/2014/main" id="{7535105C-E6A2-4152-B5CB-1DCEC6DE43C3}"/>
+                <a16:creationId xmlns:a16="http://schemas.microsoft.com/office/drawing/2014/main" id="{9526F971-1748-443F-A8BC-D1E0BC2E4498}"/>
               </a:ext>
             </a:extLst>
           </p:cNvPr>
@@ -19110,7 +19390,7 @@
           <p:cNvPr id="25" name="bullet-title-verification-agent-验证">
             <a:extLst xmlns:a="http://schemas.openxmlformats.org/drawingml/2006/main">
               <a:ext uri="{FF2B5EF4-FFF2-40B4-BE49-F238E27FC236}">
-                <a16:creationId xmlns:a16="http://schemas.microsoft.com/office/drawing/2014/main" id="{094E74AA-7F9F-4070-99CC-CD3D2DBD4B01}"/>
+                <a16:creationId xmlns:a16="http://schemas.microsoft.com/office/drawing/2014/main" id="{049952C2-C093-4003-9017-F53A40800A15}"/>
               </a:ext>
             </a:extLst>
           </p:cNvPr>
@@ -19161,7 +19441,7 @@
           <p:cNvPr id="26" name="bullet-detail-verification-agent-验证">
             <a:extLst xmlns:a="http://schemas.openxmlformats.org/drawingml/2006/main">
               <a:ext uri="{FF2B5EF4-FFF2-40B4-BE49-F238E27FC236}">
-                <a16:creationId xmlns:a16="http://schemas.microsoft.com/office/drawing/2014/main" id="{201B84AE-A335-4B51-9379-66189DFC8938}"/>
+                <a16:creationId xmlns:a16="http://schemas.microsoft.com/office/drawing/2014/main" id="{72BE1948-6E38-4538-A24B-470B5BFA591B}"/>
               </a:ext>
             </a:extLst>
           </p:cNvPr>
@@ -19212,7 +19492,7 @@
           <p:cNvPr id="27" name="">
             <a:extLst xmlns:a="http://schemas.openxmlformats.org/drawingml/2006/main">
               <a:ext uri="{FF2B5EF4-FFF2-40B4-BE49-F238E27FC236}">
-                <a16:creationId xmlns:a16="http://schemas.microsoft.com/office/drawing/2014/main" id="{1F06BB67-81D4-4F6F-9ECB-57E9CB02A69F}"/>
+                <a16:creationId xmlns:a16="http://schemas.microsoft.com/office/drawing/2014/main" id="{E4A4EBF3-7C50-4CB6-83C8-97E5790DE021}"/>
               </a:ext>
             </a:extLst>
           </p:cNvPr>
@@ -19224,7 +19504,7 @@
         <p:spPr>
           <a:xfrm xmlns:a="http://schemas.openxmlformats.org/drawingml/2006/main">
             <a:off x="7943850" y="2000250"/>
-            <a:ext cx="666750" cy="160020"/>
+            <a:ext cx="680942" cy="160020"/>
           </a:xfrm>
           <a:prstGeom xmlns:a="http://schemas.openxmlformats.org/drawingml/2006/main" prst="rect">
             <a:avLst/>
@@ -19263,7 +19543,7 @@
           <p:cNvPr id="28" name="">
             <a:extLst xmlns:a="http://schemas.openxmlformats.org/drawingml/2006/main">
               <a:ext uri="{FF2B5EF4-FFF2-40B4-BE49-F238E27FC236}">
-                <a16:creationId xmlns:a16="http://schemas.microsoft.com/office/drawing/2014/main" id="{89C47EFB-FC54-4661-A3B8-497D6EB07E96}"/>
+                <a16:creationId xmlns:a16="http://schemas.microsoft.com/office/drawing/2014/main" id="{93C56CFF-996E-4744-9AA3-6D927E01DA3C}"/>
               </a:ext>
             </a:extLst>
           </p:cNvPr>
@@ -19275,7 +19555,7 @@
         <p:spPr>
           <a:xfrm xmlns:a="http://schemas.openxmlformats.org/drawingml/2006/main">
             <a:off x="7943850" y="2274570"/>
-            <a:ext cx="3714750" cy="1619250"/>
+            <a:ext cx="3714750" cy="1447800"/>
           </a:xfrm>
           <a:prstGeom xmlns:a="http://schemas.openxmlformats.org/drawingml/2006/main" prst="rect">
             <a:avLst/>
@@ -19300,7 +19580,7 @@
           <p:cNvPr id="29" name="">
             <a:extLst xmlns:a="http://schemas.openxmlformats.org/drawingml/2006/main">
               <a:ext uri="{FF2B5EF4-FFF2-40B4-BE49-F238E27FC236}">
-                <a16:creationId xmlns:a16="http://schemas.microsoft.com/office/drawing/2014/main" id="{3F442A40-80AF-4548-94A7-F681B299C670}"/>
+                <a16:creationId xmlns:a16="http://schemas.microsoft.com/office/drawing/2014/main" id="{50EC094B-FFF6-49CA-AFE9-EAEA19740B0F}"/>
               </a:ext>
             </a:extLst>
           </p:cNvPr>
@@ -19312,7 +19592,7 @@
         <p:spPr>
           <a:xfrm xmlns:a="http://schemas.openxmlformats.org/drawingml/2006/main">
             <a:off x="8096250" y="2426970"/>
-            <a:ext cx="1231868" cy="171450"/>
+            <a:ext cx="1237869" cy="171450"/>
           </a:xfrm>
           <a:prstGeom xmlns:a="http://schemas.openxmlformats.org/drawingml/2006/main" prst="rect">
             <a:avLst/>
@@ -19351,7 +19631,7 @@
           <p:cNvPr id="30" name="">
             <a:extLst xmlns:a="http://schemas.openxmlformats.org/drawingml/2006/main">
               <a:ext uri="{FF2B5EF4-FFF2-40B4-BE49-F238E27FC236}">
-                <a16:creationId xmlns:a16="http://schemas.microsoft.com/office/drawing/2014/main" id="{F9924CDF-ED7C-43B3-BC47-BECAFCEBCA43}"/>
+                <a16:creationId xmlns:a16="http://schemas.microsoft.com/office/drawing/2014/main" id="{1F86189D-F99A-4EAD-9EB2-6905C74ED46F}"/>
               </a:ext>
             </a:extLst>
           </p:cNvPr>
@@ -19363,7 +19643,7 @@
         <p:spPr>
           <a:xfrm xmlns:a="http://schemas.openxmlformats.org/drawingml/2006/main">
             <a:off x="8096250" y="2693670"/>
-            <a:ext cx="3658743" cy="342900"/>
+            <a:ext cx="3771138" cy="171450"/>
           </a:xfrm>
           <a:prstGeom xmlns:a="http://schemas.openxmlformats.org/drawingml/2006/main" prst="rect">
             <a:avLst/>
@@ -19402,18 +19682,18 @@
           <p:cNvPr id="31" name="">
             <a:extLst xmlns:a="http://schemas.openxmlformats.org/drawingml/2006/main">
               <a:ext uri="{FF2B5EF4-FFF2-40B4-BE49-F238E27FC236}">
-                <a16:creationId xmlns:a16="http://schemas.microsoft.com/office/drawing/2014/main" id="{D54CB3CF-A6F2-49FF-A151-6E8472B2E583}"/>
-              </a:ext>
-            </a:extLst>
-          </p:cNvPr>
-          <p:cNvSpPr>
-            <a:spLocks xmlns:a="http://schemas.openxmlformats.org/drawingml/2006/main" noGrp="1"/>
-          </p:cNvSpPr>
-          <p:nvPr/>
-        </p:nvSpPr>
-        <p:spPr>
-          <a:xfrm xmlns:a="http://schemas.openxmlformats.org/drawingml/2006/main">
-            <a:off x="8096250" y="3131820"/>
+                <a16:creationId xmlns:a16="http://schemas.microsoft.com/office/drawing/2014/main" id="{DFBBA1D5-9A71-45CD-BD5C-A37A177D5F10}"/>
+              </a:ext>
+            </a:extLst>
+          </p:cNvPr>
+          <p:cNvSpPr>
+            <a:spLocks xmlns:a="http://schemas.openxmlformats.org/drawingml/2006/main" noGrp="1"/>
+          </p:cNvSpPr>
+          <p:nvPr/>
+        </p:nvSpPr>
+        <p:spPr>
+          <a:xfrm xmlns:a="http://schemas.openxmlformats.org/drawingml/2006/main">
+            <a:off x="8096250" y="2960370"/>
             <a:ext cx="1892236" cy="171450"/>
           </a:xfrm>
           <a:prstGeom xmlns:a="http://schemas.openxmlformats.org/drawingml/2006/main" prst="rect">
@@ -19453,19 +19733,19 @@
           <p:cNvPr id="32" name="">
             <a:extLst xmlns:a="http://schemas.openxmlformats.org/drawingml/2006/main">
               <a:ext uri="{FF2B5EF4-FFF2-40B4-BE49-F238E27FC236}">
-                <a16:creationId xmlns:a16="http://schemas.microsoft.com/office/drawing/2014/main" id="{C5C9B1CC-CA85-47D4-8135-CC03C4DFC6B8}"/>
-              </a:ext>
-            </a:extLst>
-          </p:cNvPr>
-          <p:cNvSpPr>
-            <a:spLocks xmlns:a="http://schemas.openxmlformats.org/drawingml/2006/main" noGrp="1"/>
-          </p:cNvSpPr>
-          <p:nvPr/>
-        </p:nvSpPr>
-        <p:spPr>
-          <a:xfrm xmlns:a="http://schemas.openxmlformats.org/drawingml/2006/main">
-            <a:off x="8096250" y="3398520"/>
-            <a:ext cx="2054923" cy="342900"/>
+                <a16:creationId xmlns:a16="http://schemas.microsoft.com/office/drawing/2014/main" id="{D7E61A1C-5B7B-4CAE-B3FB-C5D0DE34B565}"/>
+              </a:ext>
+            </a:extLst>
+          </p:cNvPr>
+          <p:cNvSpPr>
+            <a:spLocks xmlns:a="http://schemas.openxmlformats.org/drawingml/2006/main" noGrp="1"/>
+          </p:cNvSpPr>
+          <p:nvPr/>
+        </p:nvSpPr>
+        <p:spPr>
+          <a:xfrm xmlns:a="http://schemas.openxmlformats.org/drawingml/2006/main">
+            <a:off x="8096250" y="3227070"/>
+            <a:ext cx="2153888" cy="342900"/>
           </a:xfrm>
           <a:prstGeom xmlns:a="http://schemas.openxmlformats.org/drawingml/2006/main" prst="rect">
             <a:avLst/>
@@ -19504,18 +19784,18 @@
           <p:cNvPr id="33" name="">
             <a:extLst xmlns:a="http://schemas.openxmlformats.org/drawingml/2006/main">
               <a:ext uri="{FF2B5EF4-FFF2-40B4-BE49-F238E27FC236}">
-                <a16:creationId xmlns:a16="http://schemas.microsoft.com/office/drawing/2014/main" id="{2CACCB37-4C51-43A9-BA00-A401857FBB65}"/>
-              </a:ext>
-            </a:extLst>
-          </p:cNvPr>
-          <p:cNvSpPr>
-            <a:spLocks xmlns:a="http://schemas.openxmlformats.org/drawingml/2006/main" noGrp="1"/>
-          </p:cNvSpPr>
-          <p:nvPr/>
-        </p:nvSpPr>
-        <p:spPr>
-          <a:xfrm xmlns:a="http://schemas.openxmlformats.org/drawingml/2006/main">
-            <a:off x="7943850" y="4008120"/>
+                <a16:creationId xmlns:a16="http://schemas.microsoft.com/office/drawing/2014/main" id="{8D74B528-B33D-4F34-BC88-6C3DDB3ED4C0}"/>
+              </a:ext>
+            </a:extLst>
+          </p:cNvPr>
+          <p:cNvSpPr>
+            <a:spLocks xmlns:a="http://schemas.openxmlformats.org/drawingml/2006/main" noGrp="1"/>
+          </p:cNvSpPr>
+          <p:nvPr/>
+        </p:nvSpPr>
+        <p:spPr>
+          <a:xfrm xmlns:a="http://schemas.openxmlformats.org/drawingml/2006/main">
+            <a:off x="7943850" y="3836670"/>
             <a:ext cx="2857500" cy="582930"/>
           </a:xfrm>
           <a:prstGeom xmlns:a="http://schemas.openxmlformats.org/drawingml/2006/main" prst="rect">
@@ -19553,7 +19833,7 @@
     </p:spTree>
     <p:extLst>
       <p:ext uri="{BB962C8B-B14F-4D97-AF65-F5344CB8AC3E}">
-        <p14:creationId xmlns:p14="http://schemas.microsoft.com/office/powerpoint/2010/main" val="2020606373"/>
+        <p14:creationId xmlns:p14="http://schemas.microsoft.com/office/powerpoint/2010/main" val="1593886889"/>
       </p:ext>
     </p:extLst>
   </p:cSld>
@@ -19584,7 +19864,7 @@
           <p:cNvPr id="1" name="header-kicker-实现方法与关键技术">
             <a:extLst xmlns:a="http://schemas.openxmlformats.org/drawingml/2006/main">
               <a:ext uri="{FF2B5EF4-FFF2-40B4-BE49-F238E27FC236}">
-                <a16:creationId xmlns:a16="http://schemas.microsoft.com/office/drawing/2014/main" id="{9BF3A2FA-E72C-4A0B-8582-D7AEDE707BD5}"/>
+                <a16:creationId xmlns:a16="http://schemas.microsoft.com/office/drawing/2014/main" id="{D6224F36-CA43-46F6-8F9E-0EFF365DDCA8}"/>
               </a:ext>
             </a:extLst>
           </p:cNvPr>
@@ -19635,7 +19915,7 @@
           <p:cNvPr id="2" name="header-title-实现方法与关键技术">
             <a:extLst xmlns:a="http://schemas.openxmlformats.org/drawingml/2006/main">
               <a:ext uri="{FF2B5EF4-FFF2-40B4-BE49-F238E27FC236}">
-                <a16:creationId xmlns:a16="http://schemas.microsoft.com/office/drawing/2014/main" id="{2202A3B9-FEF6-4B94-AA2F-BD4FA56CD410}"/>
+                <a16:creationId xmlns:a16="http://schemas.microsoft.com/office/drawing/2014/main" id="{C69DE276-5669-4253-96D7-F902BA895E6B}"/>
               </a:ext>
             </a:extLst>
           </p:cNvPr>
@@ -19686,7 +19966,7 @@
           <p:cNvPr id="3" name="header-subtitle-实现方法与关键技术">
             <a:extLst xmlns:a="http://schemas.openxmlformats.org/drawingml/2006/main">
               <a:ext uri="{FF2B5EF4-FFF2-40B4-BE49-F238E27FC236}">
-                <a16:creationId xmlns:a16="http://schemas.microsoft.com/office/drawing/2014/main" id="{883AE0E5-A442-43BC-B0ED-ED81D9DB0F46}"/>
+                <a16:creationId xmlns:a16="http://schemas.microsoft.com/office/drawing/2014/main" id="{F5E1CB99-C951-4B8B-BA3E-AAC4230610DD}"/>
               </a:ext>
             </a:extLst>
           </p:cNvPr>
@@ -19737,7 +20017,7 @@
           <p:cNvPr id="4" name="heading-underline">
             <a:extLst xmlns:a="http://schemas.openxmlformats.org/drawingml/2006/main">
               <a:ext uri="{FF2B5EF4-FFF2-40B4-BE49-F238E27FC236}">
-                <a16:creationId xmlns:a16="http://schemas.microsoft.com/office/drawing/2014/main" id="{544D358B-9D22-455B-B0AC-780F7CB0301F}"/>
+                <a16:creationId xmlns:a16="http://schemas.microsoft.com/office/drawing/2014/main" id="{CA8FD493-E06E-41C6-A352-58DE8433F922}"/>
               </a:ext>
             </a:extLst>
           </p:cNvPr>
@@ -19774,7 +20054,7 @@
           <p:cNvPr id="5" name="impl-exec-kicker">
             <a:extLst xmlns:a="http://schemas.openxmlformats.org/drawingml/2006/main">
               <a:ext uri="{FF2B5EF4-FFF2-40B4-BE49-F238E27FC236}">
-                <a16:creationId xmlns:a16="http://schemas.microsoft.com/office/drawing/2014/main" id="{FC82126F-4E07-45EA-9992-6EC18F814737}"/>
+                <a16:creationId xmlns:a16="http://schemas.microsoft.com/office/drawing/2014/main" id="{45554835-C9CC-438F-A6CF-9F68C81FD059}"/>
               </a:ext>
             </a:extLst>
           </p:cNvPr>
@@ -19786,7 +20066,7 @@
         <p:spPr>
           <a:xfrm xmlns:a="http://schemas.openxmlformats.org/drawingml/2006/main">
             <a:off x="533400" y="2000250"/>
-            <a:ext cx="400050" cy="160020"/>
+            <a:ext cx="408527" cy="160020"/>
           </a:xfrm>
           <a:prstGeom xmlns:a="http://schemas.openxmlformats.org/drawingml/2006/main" prst="rect">
             <a:avLst/>
@@ -19825,7 +20105,7 @@
           <p:cNvPr id="6" name="impl-exec-title">
             <a:extLst xmlns:a="http://schemas.openxmlformats.org/drawingml/2006/main">
               <a:ext uri="{FF2B5EF4-FFF2-40B4-BE49-F238E27FC236}">
-                <a16:creationId xmlns:a16="http://schemas.microsoft.com/office/drawing/2014/main" id="{8535F50C-5DAE-4633-9437-8215BC41F708}"/>
+                <a16:creationId xmlns:a16="http://schemas.microsoft.com/office/drawing/2014/main" id="{12A983CB-4C63-4C6D-BE66-26A34AB04F1B}"/>
               </a:ext>
             </a:extLst>
           </p:cNvPr>
@@ -19837,7 +20117,7 @@
         <p:spPr>
           <a:xfrm xmlns:a="http://schemas.openxmlformats.org/drawingml/2006/main">
             <a:off x="533400" y="2274570"/>
-            <a:ext cx="2895600" cy="434340"/>
+            <a:ext cx="2956560" cy="434340"/>
           </a:xfrm>
           <a:prstGeom xmlns:a="http://schemas.openxmlformats.org/drawingml/2006/main" prst="rect">
             <a:avLst/>
@@ -19876,7 +20156,7 @@
           <p:cNvPr id="7" name="bullet-dot-任务入口分域">
             <a:extLst xmlns:a="http://schemas.openxmlformats.org/drawingml/2006/main">
               <a:ext uri="{FF2B5EF4-FFF2-40B4-BE49-F238E27FC236}">
-                <a16:creationId xmlns:a16="http://schemas.microsoft.com/office/drawing/2014/main" id="{EC806DD8-AD1A-4D4B-9CD2-60C61846B805}"/>
+                <a16:creationId xmlns:a16="http://schemas.microsoft.com/office/drawing/2014/main" id="{34BFA58D-0061-4AAF-BF96-CFBF52263BBC}"/>
               </a:ext>
             </a:extLst>
           </p:cNvPr>
@@ -19907,7 +20187,7 @@
           <p:cNvPr id="8" name="bullet-title-任务入口分域">
             <a:extLst xmlns:a="http://schemas.openxmlformats.org/drawingml/2006/main">
               <a:ext uri="{FF2B5EF4-FFF2-40B4-BE49-F238E27FC236}">
-                <a16:creationId xmlns:a16="http://schemas.microsoft.com/office/drawing/2014/main" id="{FB7C20BD-92A8-4B4B-9B8D-828AA678EBA9}"/>
+                <a16:creationId xmlns:a16="http://schemas.microsoft.com/office/drawing/2014/main" id="{EF308FC8-8A6D-465F-8625-3D0F91C82B5F}"/>
               </a:ext>
             </a:extLst>
           </p:cNvPr>
@@ -19958,7 +20238,7 @@
           <p:cNvPr id="9" name="bullet-detail-任务入口分域">
             <a:extLst xmlns:a="http://schemas.openxmlformats.org/drawingml/2006/main">
               <a:ext uri="{FF2B5EF4-FFF2-40B4-BE49-F238E27FC236}">
-                <a16:creationId xmlns:a16="http://schemas.microsoft.com/office/drawing/2014/main" id="{3B28D814-FEEC-4FD3-A3F6-74C00818577A}"/>
+                <a16:creationId xmlns:a16="http://schemas.microsoft.com/office/drawing/2014/main" id="{0BF77138-B7F0-4A29-86AE-62ABA0FD29B1}"/>
               </a:ext>
             </a:extLst>
           </p:cNvPr>
@@ -20009,7 +20289,7 @@
           <p:cNvPr id="10" name="bullet-dot-工作区准备">
             <a:extLst xmlns:a="http://schemas.openxmlformats.org/drawingml/2006/main">
               <a:ext uri="{FF2B5EF4-FFF2-40B4-BE49-F238E27FC236}">
-                <a16:creationId xmlns:a16="http://schemas.microsoft.com/office/drawing/2014/main" id="{4BFD2902-C6E5-4866-94BB-BDA56D518DDF}"/>
+                <a16:creationId xmlns:a16="http://schemas.microsoft.com/office/drawing/2014/main" id="{AD2B8284-D2C9-41C5-A5B6-CF9BA523D9CB}"/>
               </a:ext>
             </a:extLst>
           </p:cNvPr>
@@ -20040,7 +20320,7 @@
           <p:cNvPr id="11" name="bullet-title-工作区准备">
             <a:extLst xmlns:a="http://schemas.openxmlformats.org/drawingml/2006/main">
               <a:ext uri="{FF2B5EF4-FFF2-40B4-BE49-F238E27FC236}">
-                <a16:creationId xmlns:a16="http://schemas.microsoft.com/office/drawing/2014/main" id="{E321D821-3BB6-4C1C-9BC7-13E90BFBA31A}"/>
+                <a16:creationId xmlns:a16="http://schemas.microsoft.com/office/drawing/2014/main" id="{62C5BADB-D5F8-460F-A70B-D945F5AD05CC}"/>
               </a:ext>
             </a:extLst>
           </p:cNvPr>
@@ -20091,7 +20371,7 @@
           <p:cNvPr id="12" name="bullet-detail-工作区准备">
             <a:extLst xmlns:a="http://schemas.openxmlformats.org/drawingml/2006/main">
               <a:ext uri="{FF2B5EF4-FFF2-40B4-BE49-F238E27FC236}">
-                <a16:creationId xmlns:a16="http://schemas.microsoft.com/office/drawing/2014/main" id="{F288CE96-CD1A-4297-BE69-60B01F285526}"/>
+                <a16:creationId xmlns:a16="http://schemas.microsoft.com/office/drawing/2014/main" id="{55D1D22C-071F-4BC8-AB6A-B64AEE506BEA}"/>
               </a:ext>
             </a:extLst>
           </p:cNvPr>
@@ -20142,7 +20422,7 @@
           <p:cNvPr id="13" name="bullet-dot-结果输出">
             <a:extLst xmlns:a="http://schemas.openxmlformats.org/drawingml/2006/main">
               <a:ext uri="{FF2B5EF4-FFF2-40B4-BE49-F238E27FC236}">
-                <a16:creationId xmlns:a16="http://schemas.microsoft.com/office/drawing/2014/main" id="{6C4899E6-BEDE-4521-B742-34943DDD5A2F}"/>
+                <a16:creationId xmlns:a16="http://schemas.microsoft.com/office/drawing/2014/main" id="{47ECF9DE-4442-406F-A054-428BB641402B}"/>
               </a:ext>
             </a:extLst>
           </p:cNvPr>
@@ -20173,7 +20453,7 @@
           <p:cNvPr id="14" name="bullet-title-结果输出">
             <a:extLst xmlns:a="http://schemas.openxmlformats.org/drawingml/2006/main">
               <a:ext uri="{FF2B5EF4-FFF2-40B4-BE49-F238E27FC236}">
-                <a16:creationId xmlns:a16="http://schemas.microsoft.com/office/drawing/2014/main" id="{1D345FF8-BB26-42F5-8023-0567702262AA}"/>
+                <a16:creationId xmlns:a16="http://schemas.microsoft.com/office/drawing/2014/main" id="{6C9B56B2-BF32-4550-81DF-F044B9504FBA}"/>
               </a:ext>
             </a:extLst>
           </p:cNvPr>
@@ -20224,7 +20504,7 @@
           <p:cNvPr id="15" name="bullet-detail-结果输出">
             <a:extLst xmlns:a="http://schemas.openxmlformats.org/drawingml/2006/main">
               <a:ext uri="{FF2B5EF4-FFF2-40B4-BE49-F238E27FC236}">
-                <a16:creationId xmlns:a16="http://schemas.microsoft.com/office/drawing/2014/main" id="{158FC93F-A5EA-44FA-901F-0E8C0901CA14}"/>
+                <a16:creationId xmlns:a16="http://schemas.microsoft.com/office/drawing/2014/main" id="{DE2381B8-1B10-4739-8462-39B792196391}"/>
               </a:ext>
             </a:extLst>
           </p:cNvPr>
@@ -20275,7 +20555,7 @@
           <p:cNvPr id="16" name="impl-orch-kicker">
             <a:extLst xmlns:a="http://schemas.openxmlformats.org/drawingml/2006/main">
               <a:ext uri="{FF2B5EF4-FFF2-40B4-BE49-F238E27FC236}">
-                <a16:creationId xmlns:a16="http://schemas.microsoft.com/office/drawing/2014/main" id="{690BDC0D-F93E-405E-B491-D8B487737385}"/>
+                <a16:creationId xmlns:a16="http://schemas.microsoft.com/office/drawing/2014/main" id="{DC210709-F7F0-4E3D-A4F3-7B76F5447189}"/>
               </a:ext>
             </a:extLst>
           </p:cNvPr>
@@ -20287,7 +20567,7 @@
         <p:spPr>
           <a:xfrm xmlns:a="http://schemas.openxmlformats.org/drawingml/2006/main">
             <a:off x="3905250" y="2000250"/>
-            <a:ext cx="800100" cy="160020"/>
+            <a:ext cx="817150" cy="160020"/>
           </a:xfrm>
           <a:prstGeom xmlns:a="http://schemas.openxmlformats.org/drawingml/2006/main" prst="rect">
             <a:avLst/>
@@ -20326,7 +20606,7 @@
           <p:cNvPr id="17" name="impl-orch-title">
             <a:extLst xmlns:a="http://schemas.openxmlformats.org/drawingml/2006/main">
               <a:ext uri="{FF2B5EF4-FFF2-40B4-BE49-F238E27FC236}">
-                <a16:creationId xmlns:a16="http://schemas.microsoft.com/office/drawing/2014/main" id="{A6E813B9-6195-4921-AC45-775B0BB192D3}"/>
+                <a16:creationId xmlns:a16="http://schemas.microsoft.com/office/drawing/2014/main" id="{A3DEC4D1-98C8-440C-A183-868B09D67994}"/>
               </a:ext>
             </a:extLst>
           </p:cNvPr>
@@ -20338,7 +20618,7 @@
         <p:spPr>
           <a:xfrm xmlns:a="http://schemas.openxmlformats.org/drawingml/2006/main">
             <a:off x="3905250" y="2274570"/>
-            <a:ext cx="2895600" cy="434340"/>
+            <a:ext cx="2956560" cy="434340"/>
           </a:xfrm>
           <a:prstGeom xmlns:a="http://schemas.openxmlformats.org/drawingml/2006/main" prst="rect">
             <a:avLst/>
@@ -20377,7 +20657,7 @@
           <p:cNvPr id="18" name="bullet-dot-event-manager">
             <a:extLst xmlns:a="http://schemas.openxmlformats.org/drawingml/2006/main">
               <a:ext uri="{FF2B5EF4-FFF2-40B4-BE49-F238E27FC236}">
-                <a16:creationId xmlns:a16="http://schemas.microsoft.com/office/drawing/2014/main" id="{6D827B7D-0359-444D-8AC1-C370320F83A8}"/>
+                <a16:creationId xmlns:a16="http://schemas.microsoft.com/office/drawing/2014/main" id="{5BABC1AC-EE59-41BF-9F71-9F289B5099BE}"/>
               </a:ext>
             </a:extLst>
           </p:cNvPr>
@@ -20408,7 +20688,7 @@
           <p:cNvPr id="19" name="bullet-title-event-manager">
             <a:extLst xmlns:a="http://schemas.openxmlformats.org/drawingml/2006/main">
               <a:ext uri="{FF2B5EF4-FFF2-40B4-BE49-F238E27FC236}">
-                <a16:creationId xmlns:a16="http://schemas.microsoft.com/office/drawing/2014/main" id="{F49EB707-C5AD-4C69-855F-5498BA30CE6D}"/>
+                <a16:creationId xmlns:a16="http://schemas.microsoft.com/office/drawing/2014/main" id="{92CA76FD-9F0C-4A77-A703-D5B9FE5CBEC0}"/>
               </a:ext>
             </a:extLst>
           </p:cNvPr>
@@ -20459,7 +20739,7 @@
           <p:cNvPr id="20" name="bullet-detail-event-manager">
             <a:extLst xmlns:a="http://schemas.openxmlformats.org/drawingml/2006/main">
               <a:ext uri="{FF2B5EF4-FFF2-40B4-BE49-F238E27FC236}">
-                <a16:creationId xmlns:a16="http://schemas.microsoft.com/office/drawing/2014/main" id="{460FB049-8DB8-4FCD-8F4A-E2E1FDACEC71}"/>
+                <a16:creationId xmlns:a16="http://schemas.microsoft.com/office/drawing/2014/main" id="{8E1AD776-F90E-48D4-99EC-B9F5582E07DC}"/>
               </a:ext>
             </a:extLst>
           </p:cNvPr>
@@ -20510,7 +20790,7 @@
           <p:cNvPr id="21" name="impl-orch-panel">
             <a:extLst xmlns:a="http://schemas.openxmlformats.org/drawingml/2006/main">
               <a:ext uri="{FF2B5EF4-FFF2-40B4-BE49-F238E27FC236}">
-                <a16:creationId xmlns:a16="http://schemas.microsoft.com/office/drawing/2014/main" id="{070BA190-1513-4A41-A983-90592B3D3230}"/>
+                <a16:creationId xmlns:a16="http://schemas.microsoft.com/office/drawing/2014/main" id="{660B5DF5-4351-4CAD-A0E6-22CC90459554}"/>
               </a:ext>
             </a:extLst>
           </p:cNvPr>
@@ -20522,7 +20802,7 @@
         <p:spPr>
           <a:xfrm xmlns:a="http://schemas.openxmlformats.org/drawingml/2006/main">
             <a:off x="3905250" y="3512820"/>
-            <a:ext cx="3429000" cy="666750"/>
+            <a:ext cx="3429000" cy="838200"/>
           </a:xfrm>
           <a:prstGeom xmlns:a="http://schemas.openxmlformats.org/drawingml/2006/main" prst="rect">
             <a:avLst/>
@@ -20547,7 +20827,7 @@
           <p:cNvPr id="22" name="impl-orch-tree-title">
             <a:extLst xmlns:a="http://schemas.openxmlformats.org/drawingml/2006/main">
               <a:ext uri="{FF2B5EF4-FFF2-40B4-BE49-F238E27FC236}">
-                <a16:creationId xmlns:a16="http://schemas.microsoft.com/office/drawing/2014/main" id="{CB9F7FC6-2F7E-4FCD-9784-3CC1B5B1979C}"/>
+                <a16:creationId xmlns:a16="http://schemas.microsoft.com/office/drawing/2014/main" id="{13BC62A9-23B1-4997-8216-58004465E7C5}"/>
               </a:ext>
             </a:extLst>
           </p:cNvPr>
@@ -20559,7 +20839,7 @@
         <p:spPr>
           <a:xfrm xmlns:a="http://schemas.openxmlformats.org/drawingml/2006/main">
             <a:off x="3905250" y="3512820"/>
-            <a:ext cx="2109407" cy="182880"/>
+            <a:ext cx="2118931" cy="182880"/>
           </a:xfrm>
           <a:prstGeom xmlns:a="http://schemas.openxmlformats.org/drawingml/2006/main" prst="rect">
             <a:avLst/>
@@ -20598,7 +20878,7 @@
           <p:cNvPr id="23" name="impl-orch-tree-body">
             <a:extLst xmlns:a="http://schemas.openxmlformats.org/drawingml/2006/main">
               <a:ext uri="{FF2B5EF4-FFF2-40B4-BE49-F238E27FC236}">
-                <a16:creationId xmlns:a16="http://schemas.microsoft.com/office/drawing/2014/main" id="{D4766080-69B5-48D6-9F88-C2F9DABB20C4}"/>
+                <a16:creationId xmlns:a16="http://schemas.microsoft.com/office/drawing/2014/main" id="{DEDFD295-AC1F-4E52-AF2E-9255861A8033}"/>
               </a:ext>
             </a:extLst>
           </p:cNvPr>
@@ -20649,7 +20929,7 @@
           <p:cNvPr id="24" name="impl-orch-tree-note">
             <a:extLst xmlns:a="http://schemas.openxmlformats.org/drawingml/2006/main">
               <a:ext uri="{FF2B5EF4-FFF2-40B4-BE49-F238E27FC236}">
-                <a16:creationId xmlns:a16="http://schemas.microsoft.com/office/drawing/2014/main" id="{1F336DD6-AA83-43C6-B73E-3F4747FA05E7}"/>
+                <a16:creationId xmlns:a16="http://schemas.microsoft.com/office/drawing/2014/main" id="{F3BA36F0-A5B8-41D7-A606-E8B9FC7369DF}"/>
               </a:ext>
             </a:extLst>
           </p:cNvPr>
@@ -20661,7 +20941,7 @@
         <p:spPr>
           <a:xfrm xmlns:a="http://schemas.openxmlformats.org/drawingml/2006/main">
             <a:off x="3905250" y="4008120"/>
-            <a:ext cx="3043619" cy="171450"/>
+            <a:ext cx="3114008" cy="342900"/>
           </a:xfrm>
           <a:prstGeom xmlns:a="http://schemas.openxmlformats.org/drawingml/2006/main" prst="rect">
             <a:avLst/>
@@ -20700,18 +20980,18 @@
           <p:cNvPr id="25" name="bullet-dot-分布式追踪-tracer">
             <a:extLst xmlns:a="http://schemas.openxmlformats.org/drawingml/2006/main">
               <a:ext uri="{FF2B5EF4-FFF2-40B4-BE49-F238E27FC236}">
-                <a16:creationId xmlns:a16="http://schemas.microsoft.com/office/drawing/2014/main" id="{35037B26-2E35-4FA4-8DB6-006C8F485AF1}"/>
-              </a:ext>
-            </a:extLst>
-          </p:cNvPr>
-          <p:cNvSpPr>
-            <a:spLocks xmlns:a="http://schemas.openxmlformats.org/drawingml/2006/main" noGrp="1"/>
-          </p:cNvSpPr>
-          <p:nvPr/>
-        </p:nvSpPr>
-        <p:spPr>
-          <a:xfrm xmlns:a="http://schemas.openxmlformats.org/drawingml/2006/main">
-            <a:off x="3905250" y="4293870"/>
+                <a16:creationId xmlns:a16="http://schemas.microsoft.com/office/drawing/2014/main" id="{ADDE5820-7282-41D6-BB29-0D21ED73F47E}"/>
+              </a:ext>
+            </a:extLst>
+          </p:cNvPr>
+          <p:cNvSpPr>
+            <a:spLocks xmlns:a="http://schemas.openxmlformats.org/drawingml/2006/main" noGrp="1"/>
+          </p:cNvSpPr>
+          <p:nvPr/>
+        </p:nvSpPr>
+        <p:spPr>
+          <a:xfrm xmlns:a="http://schemas.openxmlformats.org/drawingml/2006/main">
+            <a:off x="3905250" y="4465320"/>
             <a:ext cx="76200" cy="76200"/>
           </a:xfrm>
           <a:prstGeom xmlns:a="http://schemas.openxmlformats.org/drawingml/2006/main" prst="ellipse">
@@ -20731,18 +21011,18 @@
           <p:cNvPr id="26" name="bullet-title-分布式追踪-tracer">
             <a:extLst xmlns:a="http://schemas.openxmlformats.org/drawingml/2006/main">
               <a:ext uri="{FF2B5EF4-FFF2-40B4-BE49-F238E27FC236}">
-                <a16:creationId xmlns:a16="http://schemas.microsoft.com/office/drawing/2014/main" id="{1125B09C-FAE9-4967-861D-78FD88907215}"/>
-              </a:ext>
-            </a:extLst>
-          </p:cNvPr>
-          <p:cNvSpPr>
-            <a:spLocks xmlns:a="http://schemas.openxmlformats.org/drawingml/2006/main" noGrp="1"/>
-          </p:cNvSpPr>
-          <p:nvPr/>
-        </p:nvSpPr>
-        <p:spPr>
-          <a:xfrm xmlns:a="http://schemas.openxmlformats.org/drawingml/2006/main">
-            <a:off x="4095750" y="4293870"/>
+                <a16:creationId xmlns:a16="http://schemas.microsoft.com/office/drawing/2014/main" id="{D657C54D-A02A-4E0A-8674-2765B647BF55}"/>
+              </a:ext>
+            </a:extLst>
+          </p:cNvPr>
+          <p:cNvSpPr>
+            <a:spLocks xmlns:a="http://schemas.openxmlformats.org/drawingml/2006/main" noGrp="1"/>
+          </p:cNvSpPr>
+          <p:nvPr/>
+        </p:nvSpPr>
+        <p:spPr>
+          <a:xfrm xmlns:a="http://schemas.openxmlformats.org/drawingml/2006/main">
+            <a:off x="4095750" y="4465320"/>
             <a:ext cx="3238500" cy="194310"/>
           </a:xfrm>
           <a:prstGeom xmlns:a="http://schemas.openxmlformats.org/drawingml/2006/main" prst="rect">
@@ -20782,18 +21062,18 @@
           <p:cNvPr id="27" name="bullet-detail-分布式追踪-tracer">
             <a:extLst xmlns:a="http://schemas.openxmlformats.org/drawingml/2006/main">
               <a:ext uri="{FF2B5EF4-FFF2-40B4-BE49-F238E27FC236}">
-                <a16:creationId xmlns:a16="http://schemas.microsoft.com/office/drawing/2014/main" id="{F77CC236-60FF-4029-95CD-5F4C0C36EA1E}"/>
-              </a:ext>
-            </a:extLst>
-          </p:cNvPr>
-          <p:cNvSpPr>
-            <a:spLocks xmlns:a="http://schemas.openxmlformats.org/drawingml/2006/main" noGrp="1"/>
-          </p:cNvSpPr>
-          <p:nvPr/>
-        </p:nvSpPr>
-        <p:spPr>
-          <a:xfrm xmlns:a="http://schemas.openxmlformats.org/drawingml/2006/main">
-            <a:off x="4095750" y="4526280"/>
+                <a16:creationId xmlns:a16="http://schemas.microsoft.com/office/drawing/2014/main" id="{7C74C3EA-0600-4F26-BA49-1A0C1D6BFA46}"/>
+              </a:ext>
+            </a:extLst>
+          </p:cNvPr>
+          <p:cNvSpPr>
+            <a:spLocks xmlns:a="http://schemas.openxmlformats.org/drawingml/2006/main" noGrp="1"/>
+          </p:cNvSpPr>
+          <p:nvPr/>
+        </p:nvSpPr>
+        <p:spPr>
+          <a:xfrm xmlns:a="http://schemas.openxmlformats.org/drawingml/2006/main">
+            <a:off x="4095750" y="4697730"/>
             <a:ext cx="3238500" cy="342900"/>
           </a:xfrm>
           <a:prstGeom xmlns:a="http://schemas.openxmlformats.org/drawingml/2006/main" prst="rect">
@@ -20833,18 +21113,18 @@
           <p:cNvPr id="28" name="bullet-dot-速率限制-rate-limiter">
             <a:extLst xmlns:a="http://schemas.openxmlformats.org/drawingml/2006/main">
               <a:ext uri="{FF2B5EF4-FFF2-40B4-BE49-F238E27FC236}">
-                <a16:creationId xmlns:a16="http://schemas.microsoft.com/office/drawing/2014/main" id="{DFE78F8D-A7D7-4DB2-90D7-A0F42A76174F}"/>
-              </a:ext>
-            </a:extLst>
-          </p:cNvPr>
-          <p:cNvSpPr>
-            <a:spLocks xmlns:a="http://schemas.openxmlformats.org/drawingml/2006/main" noGrp="1"/>
-          </p:cNvSpPr>
-          <p:nvPr/>
-        </p:nvSpPr>
-        <p:spPr>
-          <a:xfrm xmlns:a="http://schemas.openxmlformats.org/drawingml/2006/main">
-            <a:off x="3905250" y="4983480"/>
+                <a16:creationId xmlns:a16="http://schemas.microsoft.com/office/drawing/2014/main" id="{5229DCB6-C993-4645-BCEF-FCB539A76ED5}"/>
+              </a:ext>
+            </a:extLst>
+          </p:cNvPr>
+          <p:cNvSpPr>
+            <a:spLocks xmlns:a="http://schemas.openxmlformats.org/drawingml/2006/main" noGrp="1"/>
+          </p:cNvSpPr>
+          <p:nvPr/>
+        </p:nvSpPr>
+        <p:spPr>
+          <a:xfrm xmlns:a="http://schemas.openxmlformats.org/drawingml/2006/main">
+            <a:off x="3905250" y="5154930"/>
             <a:ext cx="76200" cy="76200"/>
           </a:xfrm>
           <a:prstGeom xmlns:a="http://schemas.openxmlformats.org/drawingml/2006/main" prst="ellipse">
@@ -20864,18 +21144,18 @@
           <p:cNvPr id="29" name="bullet-title-速率限制-rate-limiter">
             <a:extLst xmlns:a="http://schemas.openxmlformats.org/drawingml/2006/main">
               <a:ext uri="{FF2B5EF4-FFF2-40B4-BE49-F238E27FC236}">
-                <a16:creationId xmlns:a16="http://schemas.microsoft.com/office/drawing/2014/main" id="{90758A7D-F464-4FD8-8C2E-FA0EA8017C8B}"/>
-              </a:ext>
-            </a:extLst>
-          </p:cNvPr>
-          <p:cNvSpPr>
-            <a:spLocks xmlns:a="http://schemas.openxmlformats.org/drawingml/2006/main" noGrp="1"/>
-          </p:cNvSpPr>
-          <p:nvPr/>
-        </p:nvSpPr>
-        <p:spPr>
-          <a:xfrm xmlns:a="http://schemas.openxmlformats.org/drawingml/2006/main">
-            <a:off x="4095750" y="4983480"/>
+                <a16:creationId xmlns:a16="http://schemas.microsoft.com/office/drawing/2014/main" id="{17250A43-4093-41EC-B7F5-B077B136EA43}"/>
+              </a:ext>
+            </a:extLst>
+          </p:cNvPr>
+          <p:cNvSpPr>
+            <a:spLocks xmlns:a="http://schemas.openxmlformats.org/drawingml/2006/main" noGrp="1"/>
+          </p:cNvSpPr>
+          <p:nvPr/>
+        </p:nvSpPr>
+        <p:spPr>
+          <a:xfrm xmlns:a="http://schemas.openxmlformats.org/drawingml/2006/main">
+            <a:off x="4095750" y="5154930"/>
             <a:ext cx="3238500" cy="194310"/>
           </a:xfrm>
           <a:prstGeom xmlns:a="http://schemas.openxmlformats.org/drawingml/2006/main" prst="rect">
@@ -20915,18 +21195,18 @@
           <p:cNvPr id="30" name="bullet-detail-速率限制-rate-limiter">
             <a:extLst xmlns:a="http://schemas.openxmlformats.org/drawingml/2006/main">
               <a:ext uri="{FF2B5EF4-FFF2-40B4-BE49-F238E27FC236}">
-                <a16:creationId xmlns:a16="http://schemas.microsoft.com/office/drawing/2014/main" id="{742A1AEA-E39C-47A6-AEAA-4A1346215D05}"/>
-              </a:ext>
-            </a:extLst>
-          </p:cNvPr>
-          <p:cNvSpPr>
-            <a:spLocks xmlns:a="http://schemas.openxmlformats.org/drawingml/2006/main" noGrp="1"/>
-          </p:cNvSpPr>
-          <p:nvPr/>
-        </p:nvSpPr>
-        <p:spPr>
-          <a:xfrm xmlns:a="http://schemas.openxmlformats.org/drawingml/2006/main">
-            <a:off x="4095750" y="5215890"/>
+                <a16:creationId xmlns:a16="http://schemas.microsoft.com/office/drawing/2014/main" id="{1BD160B5-9D27-4C9E-BBA9-88CB8643E890}"/>
+              </a:ext>
+            </a:extLst>
+          </p:cNvPr>
+          <p:cNvSpPr>
+            <a:spLocks xmlns:a="http://schemas.openxmlformats.org/drawingml/2006/main" noGrp="1"/>
+          </p:cNvSpPr>
+          <p:nvPr/>
+        </p:nvSpPr>
+        <p:spPr>
+          <a:xfrm xmlns:a="http://schemas.openxmlformats.org/drawingml/2006/main">
+            <a:off x="4095750" y="5387340"/>
             <a:ext cx="3238500" cy="342900"/>
           </a:xfrm>
           <a:prstGeom xmlns:a="http://schemas.openxmlformats.org/drawingml/2006/main" prst="rect">
@@ -20966,7 +21246,7 @@
           <p:cNvPr id="31" name="impl-realtime-kicker">
             <a:extLst xmlns:a="http://schemas.openxmlformats.org/drawingml/2006/main">
               <a:ext uri="{FF2B5EF4-FFF2-40B4-BE49-F238E27FC236}">
-                <a16:creationId xmlns:a16="http://schemas.microsoft.com/office/drawing/2014/main" id="{0833CB97-A54E-4396-982F-13B1EB59FC90}"/>
+                <a16:creationId xmlns:a16="http://schemas.microsoft.com/office/drawing/2014/main" id="{18489032-A2BC-4A50-ADFB-54875535B96C}"/>
               </a:ext>
             </a:extLst>
           </p:cNvPr>
@@ -20978,7 +21258,7 @@
         <p:spPr>
           <a:xfrm xmlns:a="http://schemas.openxmlformats.org/drawingml/2006/main">
             <a:off x="7562850" y="2000250"/>
-            <a:ext cx="400050" cy="160020"/>
+            <a:ext cx="408527" cy="160020"/>
           </a:xfrm>
           <a:prstGeom xmlns:a="http://schemas.openxmlformats.org/drawingml/2006/main" prst="rect">
             <a:avLst/>
@@ -21017,7 +21297,7 @@
           <p:cNvPr id="32" name="impl-realtime-title">
             <a:extLst xmlns:a="http://schemas.openxmlformats.org/drawingml/2006/main">
               <a:ext uri="{FF2B5EF4-FFF2-40B4-BE49-F238E27FC236}">
-                <a16:creationId xmlns:a16="http://schemas.microsoft.com/office/drawing/2014/main" id="{A1866F21-91F4-4776-ACB5-7C293AA4BDF7}"/>
+                <a16:creationId xmlns:a16="http://schemas.microsoft.com/office/drawing/2014/main" id="{3B0C92B3-AB76-4FDF-9F40-23DC3AF7D3CB}"/>
               </a:ext>
             </a:extLst>
           </p:cNvPr>
@@ -21029,7 +21309,7 @@
         <p:spPr>
           <a:xfrm xmlns:a="http://schemas.openxmlformats.org/drawingml/2006/main">
             <a:off x="7562850" y="2274570"/>
-            <a:ext cx="2631662" cy="868680"/>
+            <a:ext cx="2707576" cy="868680"/>
           </a:xfrm>
           <a:prstGeom xmlns:a="http://schemas.openxmlformats.org/drawingml/2006/main" prst="rect">
             <a:avLst/>
@@ -21068,7 +21348,7 @@
           <p:cNvPr id="33" name="bullet-dot-流式事件">
             <a:extLst xmlns:a="http://schemas.openxmlformats.org/drawingml/2006/main">
               <a:ext uri="{FF2B5EF4-FFF2-40B4-BE49-F238E27FC236}">
-                <a16:creationId xmlns:a16="http://schemas.microsoft.com/office/drawing/2014/main" id="{007BDA69-6C41-41E6-B7B2-CF76E3F5FE9C}"/>
+                <a16:creationId xmlns:a16="http://schemas.microsoft.com/office/drawing/2014/main" id="{42BC065E-AE83-477D-88B9-792B312E19FB}"/>
               </a:ext>
             </a:extLst>
           </p:cNvPr>
@@ -21099,7 +21379,7 @@
           <p:cNvPr id="34" name="bullet-title-流式事件">
             <a:extLst xmlns:a="http://schemas.openxmlformats.org/drawingml/2006/main">
               <a:ext uri="{FF2B5EF4-FFF2-40B4-BE49-F238E27FC236}">
-                <a16:creationId xmlns:a16="http://schemas.microsoft.com/office/drawing/2014/main" id="{BE7A2A10-84C6-40AB-9DB3-3EAEC23100B5}"/>
+                <a16:creationId xmlns:a16="http://schemas.microsoft.com/office/drawing/2014/main" id="{C0CB77AD-7D81-479E-B8FF-64330DD5C5E5}"/>
               </a:ext>
             </a:extLst>
           </p:cNvPr>
@@ -21150,7 +21430,7 @@
           <p:cNvPr id="35" name="bullet-detail-流式事件">
             <a:extLst xmlns:a="http://schemas.openxmlformats.org/drawingml/2006/main">
               <a:ext uri="{FF2B5EF4-FFF2-40B4-BE49-F238E27FC236}">
-                <a16:creationId xmlns:a16="http://schemas.microsoft.com/office/drawing/2014/main" id="{2687EA5B-622E-4AD1-A0DA-26D2C380AEBE}"/>
+                <a16:creationId xmlns:a16="http://schemas.microsoft.com/office/drawing/2014/main" id="{6CCF60C7-0571-4939-AC4D-A16831A9C48A}"/>
               </a:ext>
             </a:extLst>
           </p:cNvPr>
@@ -21201,7 +21481,7 @@
           <p:cNvPr id="36" name="bullet-dot-前端重连">
             <a:extLst xmlns:a="http://schemas.openxmlformats.org/drawingml/2006/main">
               <a:ext uri="{FF2B5EF4-FFF2-40B4-BE49-F238E27FC236}">
-                <a16:creationId xmlns:a16="http://schemas.microsoft.com/office/drawing/2014/main" id="{0A3D4219-9ACD-495C-8AC6-6986AAAD8C53}"/>
+                <a16:creationId xmlns:a16="http://schemas.microsoft.com/office/drawing/2014/main" id="{ADD82D29-20E0-4CE6-BB1B-72A89E0FD021}"/>
               </a:ext>
             </a:extLst>
           </p:cNvPr>
@@ -21232,7 +21512,7 @@
           <p:cNvPr id="37" name="bullet-title-前端重连">
             <a:extLst xmlns:a="http://schemas.openxmlformats.org/drawingml/2006/main">
               <a:ext uri="{FF2B5EF4-FFF2-40B4-BE49-F238E27FC236}">
-                <a16:creationId xmlns:a16="http://schemas.microsoft.com/office/drawing/2014/main" id="{5D70AD4E-3CE7-48B1-AB89-25F750DE86C1}"/>
+                <a16:creationId xmlns:a16="http://schemas.microsoft.com/office/drawing/2014/main" id="{0C76CE73-2360-4F78-9C89-8732BDE0D59F}"/>
               </a:ext>
             </a:extLst>
           </p:cNvPr>
@@ -21283,7 +21563,7 @@
           <p:cNvPr id="38" name="bullet-detail-前端重连">
             <a:extLst xmlns:a="http://schemas.openxmlformats.org/drawingml/2006/main">
               <a:ext uri="{FF2B5EF4-FFF2-40B4-BE49-F238E27FC236}">
-                <a16:creationId xmlns:a16="http://schemas.microsoft.com/office/drawing/2014/main" id="{758C823C-A927-40EF-8CF4-E4B86494850C}"/>
+                <a16:creationId xmlns:a16="http://schemas.microsoft.com/office/drawing/2014/main" id="{166E4F45-5864-4E49-98AC-7B0029911587}"/>
               </a:ext>
             </a:extLst>
           </p:cNvPr>
@@ -21334,7 +21614,7 @@
           <p:cNvPr id="39" name="bullet-dot-任务恢复">
             <a:extLst xmlns:a="http://schemas.openxmlformats.org/drawingml/2006/main">
               <a:ext uri="{FF2B5EF4-FFF2-40B4-BE49-F238E27FC236}">
-                <a16:creationId xmlns:a16="http://schemas.microsoft.com/office/drawing/2014/main" id="{EACDC78E-C3FF-44F1-B48E-46029F1180AB}"/>
+                <a16:creationId xmlns:a16="http://schemas.microsoft.com/office/drawing/2014/main" id="{65ED33EF-0D8D-4D10-8FA8-28A6986424C3}"/>
               </a:ext>
             </a:extLst>
           </p:cNvPr>
@@ -21365,7 +21645,7 @@
           <p:cNvPr id="40" name="bullet-title-任务恢复">
             <a:extLst xmlns:a="http://schemas.openxmlformats.org/drawingml/2006/main">
               <a:ext uri="{FF2B5EF4-FFF2-40B4-BE49-F238E27FC236}">
-                <a16:creationId xmlns:a16="http://schemas.microsoft.com/office/drawing/2014/main" id="{95FB5C7E-2477-42F1-B23D-AE0BFE32CFAA}"/>
+                <a16:creationId xmlns:a16="http://schemas.microsoft.com/office/drawing/2014/main" id="{1B352CC5-664D-4ADE-85B8-F068B85DC2E9}"/>
               </a:ext>
             </a:extLst>
           </p:cNvPr>
@@ -21416,7 +21696,7 @@
           <p:cNvPr id="41" name="bullet-detail-任务恢复">
             <a:extLst xmlns:a="http://schemas.openxmlformats.org/drawingml/2006/main">
               <a:ext uri="{FF2B5EF4-FFF2-40B4-BE49-F238E27FC236}">
-                <a16:creationId xmlns:a16="http://schemas.microsoft.com/office/drawing/2014/main" id="{8EB7E6EE-C1B3-404B-9ACD-92F970ED6E9E}"/>
+                <a16:creationId xmlns:a16="http://schemas.microsoft.com/office/drawing/2014/main" id="{7A03C4CC-1183-4E5D-B480-7941D2FDD630}"/>
               </a:ext>
             </a:extLst>
           </p:cNvPr>
@@ -21467,7 +21747,7 @@
           <p:cNvPr id="42" name="impl-realtime-note">
             <a:extLst xmlns:a="http://schemas.openxmlformats.org/drawingml/2006/main">
               <a:ext uri="{FF2B5EF4-FFF2-40B4-BE49-F238E27FC236}">
-                <a16:creationId xmlns:a16="http://schemas.microsoft.com/office/drawing/2014/main" id="{07296E33-F93F-4991-A3CF-5BE7CEBB0A3F}"/>
+                <a16:creationId xmlns:a16="http://schemas.microsoft.com/office/drawing/2014/main" id="{412C63F0-43DB-4312-9C20-76F12E76C22F}"/>
               </a:ext>
             </a:extLst>
           </p:cNvPr>
@@ -21518,18 +21798,18 @@
           <p:cNvPr id="43" name="impl-note">
             <a:extLst xmlns:a="http://schemas.openxmlformats.org/drawingml/2006/main">
               <a:ext uri="{FF2B5EF4-FFF2-40B4-BE49-F238E27FC236}">
-                <a16:creationId xmlns:a16="http://schemas.microsoft.com/office/drawing/2014/main" id="{687866FF-6737-4A13-B52D-11934E758C7A}"/>
-              </a:ext>
-            </a:extLst>
-          </p:cNvPr>
-          <p:cNvSpPr>
-            <a:spLocks xmlns:a="http://schemas.openxmlformats.org/drawingml/2006/main" noGrp="1"/>
-          </p:cNvSpPr>
-          <p:nvPr/>
-        </p:nvSpPr>
-        <p:spPr>
-          <a:xfrm xmlns:a="http://schemas.openxmlformats.org/drawingml/2006/main">
-            <a:off x="533400" y="5840730"/>
+                <a16:creationId xmlns:a16="http://schemas.microsoft.com/office/drawing/2014/main" id="{6E6D63AB-215F-4F3C-87B9-B32765E892CB}"/>
+              </a:ext>
+            </a:extLst>
+          </p:cNvPr>
+          <p:cNvSpPr>
+            <a:spLocks xmlns:a="http://schemas.openxmlformats.org/drawingml/2006/main" noGrp="1"/>
+          </p:cNvSpPr>
+          <p:nvPr/>
+        </p:nvSpPr>
+        <p:spPr>
+          <a:xfrm xmlns:a="http://schemas.openxmlformats.org/drawingml/2006/main">
+            <a:off x="533400" y="5901690"/>
             <a:ext cx="10287000" cy="171450"/>
           </a:xfrm>
           <a:prstGeom xmlns:a="http://schemas.openxmlformats.org/drawingml/2006/main" prst="rect">
@@ -21567,7 +21847,7 @@
     </p:spTree>
     <p:extLst>
       <p:ext uri="{BB962C8B-B14F-4D97-AF65-F5344CB8AC3E}">
-        <p14:creationId xmlns:p14="http://schemas.microsoft.com/office/powerpoint/2010/main" val="699540925"/>
+        <p14:creationId xmlns:p14="http://schemas.microsoft.com/office/powerpoint/2010/main" val="281897637"/>
       </p:ext>
     </p:extLst>
   </p:cSld>
@@ -21598,7 +21878,7 @@
           <p:cNvPr id="1" name="header-kicker-安全工具生态与沙箱验证">
             <a:extLst xmlns:a="http://schemas.openxmlformats.org/drawingml/2006/main">
               <a:ext uri="{FF2B5EF4-FFF2-40B4-BE49-F238E27FC236}">
-                <a16:creationId xmlns:a16="http://schemas.microsoft.com/office/drawing/2014/main" id="{1D558146-7424-470C-AF14-DD9D8266FB3B}"/>
+                <a16:creationId xmlns:a16="http://schemas.microsoft.com/office/drawing/2014/main" id="{56C7781C-135F-4427-B754-E7C75A493B06}"/>
               </a:ext>
             </a:extLst>
           </p:cNvPr>
@@ -21649,7 +21929,7 @@
           <p:cNvPr id="2" name="header-title-安全工具生态与沙箱验证">
             <a:extLst xmlns:a="http://schemas.openxmlformats.org/drawingml/2006/main">
               <a:ext uri="{FF2B5EF4-FFF2-40B4-BE49-F238E27FC236}">
-                <a16:creationId xmlns:a16="http://schemas.microsoft.com/office/drawing/2014/main" id="{7F4777EF-0552-480B-89ED-18F4DD7E0E1E}"/>
+                <a16:creationId xmlns:a16="http://schemas.microsoft.com/office/drawing/2014/main" id="{C05D6F01-D9CA-45BC-AFF1-5E4D0C0E88DC}"/>
               </a:ext>
             </a:extLst>
           </p:cNvPr>
@@ -21700,7 +21980,7 @@
           <p:cNvPr id="3" name="header-subtitle-安全工具生态与沙箱验证">
             <a:extLst xmlns:a="http://schemas.openxmlformats.org/drawingml/2006/main">
               <a:ext uri="{FF2B5EF4-FFF2-40B4-BE49-F238E27FC236}">
-                <a16:creationId xmlns:a16="http://schemas.microsoft.com/office/drawing/2014/main" id="{DFE50C34-3535-4CFD-804A-ACD5D5A7166C}"/>
+                <a16:creationId xmlns:a16="http://schemas.microsoft.com/office/drawing/2014/main" id="{943C4AA0-C08B-4505-ADB2-5F37C9A9DEB1}"/>
               </a:ext>
             </a:extLst>
           </p:cNvPr>
@@ -21751,7 +22031,7 @@
           <p:cNvPr id="4" name="heading-underline">
             <a:extLst xmlns:a="http://schemas.openxmlformats.org/drawingml/2006/main">
               <a:ext uri="{FF2B5EF4-FFF2-40B4-BE49-F238E27FC236}">
-                <a16:creationId xmlns:a16="http://schemas.microsoft.com/office/drawing/2014/main" id="{5909270C-79C6-4439-9FE4-D3B0AEA4C94C}"/>
+                <a16:creationId xmlns:a16="http://schemas.microsoft.com/office/drawing/2014/main" id="{04C7DAEC-C854-4385-8547-5BCDB73CEF52}"/>
               </a:ext>
             </a:extLst>
           </p:cNvPr>
@@ -21788,7 +22068,7 @@
           <p:cNvPr id="5" name="">
             <a:extLst xmlns:a="http://schemas.openxmlformats.org/drawingml/2006/main">
               <a:ext uri="{FF2B5EF4-FFF2-40B4-BE49-F238E27FC236}">
-                <a16:creationId xmlns:a16="http://schemas.microsoft.com/office/drawing/2014/main" id="{D4906E51-74B4-495F-AB26-EDC8FD0F83A4}"/>
+                <a16:creationId xmlns:a16="http://schemas.microsoft.com/office/drawing/2014/main" id="{EC4A5D16-FCF5-4038-8148-61711D71EDD9}"/>
               </a:ext>
             </a:extLst>
           </p:cNvPr>
@@ -21800,7 +22080,7 @@
         <p:spPr>
           <a:xfrm xmlns:a="http://schemas.openxmlformats.org/drawingml/2006/main">
             <a:off x="533400" y="2000250"/>
-            <a:ext cx="800100" cy="160020"/>
+            <a:ext cx="817150" cy="160020"/>
           </a:xfrm>
           <a:prstGeom xmlns:a="http://schemas.openxmlformats.org/drawingml/2006/main" prst="rect">
             <a:avLst/>
@@ -21839,7 +22119,7 @@
           <p:cNvPr id="6" name="">
             <a:extLst xmlns:a="http://schemas.openxmlformats.org/drawingml/2006/main">
               <a:ext uri="{FF2B5EF4-FFF2-40B4-BE49-F238E27FC236}">
-                <a16:creationId xmlns:a16="http://schemas.microsoft.com/office/drawing/2014/main" id="{B7E060B2-0F9D-4FE9-8CC6-2A5F5D4873D8}"/>
+                <a16:creationId xmlns:a16="http://schemas.microsoft.com/office/drawing/2014/main" id="{CB726649-BFCB-4064-A09B-BEAA07EC5CAE}"/>
               </a:ext>
             </a:extLst>
           </p:cNvPr>
@@ -21851,7 +22131,7 @@
         <p:spPr>
           <a:xfrm xmlns:a="http://schemas.openxmlformats.org/drawingml/2006/main">
             <a:off x="533400" y="2274570"/>
-            <a:ext cx="2895600" cy="434340"/>
+            <a:ext cx="2956560" cy="434340"/>
           </a:xfrm>
           <a:prstGeom xmlns:a="http://schemas.openxmlformats.org/drawingml/2006/main" prst="rect">
             <a:avLst/>
@@ -21890,7 +22170,7 @@
           <p:cNvPr id="7" name="bullet-dot-智能分析工具">
             <a:extLst xmlns:a="http://schemas.openxmlformats.org/drawingml/2006/main">
               <a:ext uri="{FF2B5EF4-FFF2-40B4-BE49-F238E27FC236}">
-                <a16:creationId xmlns:a16="http://schemas.microsoft.com/office/drawing/2014/main" id="{F3918A0C-4B3C-427F-B7BE-3864E258E702}"/>
+                <a16:creationId xmlns:a16="http://schemas.microsoft.com/office/drawing/2014/main" id="{01FC48C5-C8A9-4E27-B760-E1C250D84F34}"/>
               </a:ext>
             </a:extLst>
           </p:cNvPr>
@@ -21921,7 +22201,7 @@
           <p:cNvPr id="8" name="bullet-title-智能分析工具">
             <a:extLst xmlns:a="http://schemas.openxmlformats.org/drawingml/2006/main">
               <a:ext uri="{FF2B5EF4-FFF2-40B4-BE49-F238E27FC236}">
-                <a16:creationId xmlns:a16="http://schemas.microsoft.com/office/drawing/2014/main" id="{7BD9397C-F5B0-4E9A-B659-248F28A6E323}"/>
+                <a16:creationId xmlns:a16="http://schemas.microsoft.com/office/drawing/2014/main" id="{F06F7F8E-D0FB-4AFA-A98A-3CF5B610C08F}"/>
               </a:ext>
             </a:extLst>
           </p:cNvPr>
@@ -21972,7 +22252,7 @@
           <p:cNvPr id="9" name="bullet-detail-智能分析工具">
             <a:extLst xmlns:a="http://schemas.openxmlformats.org/drawingml/2006/main">
               <a:ext uri="{FF2B5EF4-FFF2-40B4-BE49-F238E27FC236}">
-                <a16:creationId xmlns:a16="http://schemas.microsoft.com/office/drawing/2014/main" id="{FEDFE933-DF8F-41AD-BE9A-35C2E44414C5}"/>
+                <a16:creationId xmlns:a16="http://schemas.microsoft.com/office/drawing/2014/main" id="{F9119867-4205-4418-9D8A-530DD56BFEE3}"/>
               </a:ext>
             </a:extLst>
           </p:cNvPr>
@@ -22023,7 +22303,7 @@
           <p:cNvPr id="10" name="bullet-dot-外部扫描器">
             <a:extLst xmlns:a="http://schemas.openxmlformats.org/drawingml/2006/main">
               <a:ext uri="{FF2B5EF4-FFF2-40B4-BE49-F238E27FC236}">
-                <a16:creationId xmlns:a16="http://schemas.microsoft.com/office/drawing/2014/main" id="{5882B133-4F10-4C5C-B58C-4947D6D78F17}"/>
+                <a16:creationId xmlns:a16="http://schemas.microsoft.com/office/drawing/2014/main" id="{C3BBB5A7-8A73-4E08-ADAA-BF718AA44243}"/>
               </a:ext>
             </a:extLst>
           </p:cNvPr>
@@ -22054,7 +22334,7 @@
           <p:cNvPr id="11" name="bullet-title-外部扫描器">
             <a:extLst xmlns:a="http://schemas.openxmlformats.org/drawingml/2006/main">
               <a:ext uri="{FF2B5EF4-FFF2-40B4-BE49-F238E27FC236}">
-                <a16:creationId xmlns:a16="http://schemas.microsoft.com/office/drawing/2014/main" id="{B5F678C2-6052-4CF3-B8CF-40F386D31BD3}"/>
+                <a16:creationId xmlns:a16="http://schemas.microsoft.com/office/drawing/2014/main" id="{27D6B805-E1A0-4498-8630-0434BFA7E0D1}"/>
               </a:ext>
             </a:extLst>
           </p:cNvPr>
@@ -22105,7 +22385,7 @@
           <p:cNvPr id="12" name="bullet-detail-外部扫描器">
             <a:extLst xmlns:a="http://schemas.openxmlformats.org/drawingml/2006/main">
               <a:ext uri="{FF2B5EF4-FFF2-40B4-BE49-F238E27FC236}">
-                <a16:creationId xmlns:a16="http://schemas.microsoft.com/office/drawing/2014/main" id="{1C5E9B3C-DE3F-4BCD-8935-1D450CC7A7D9}"/>
+                <a16:creationId xmlns:a16="http://schemas.microsoft.com/office/drawing/2014/main" id="{1042C1C4-A9D6-4E08-A316-0610DE5A7736}"/>
               </a:ext>
             </a:extLst>
           </p:cNvPr>
@@ -22156,7 +22436,7 @@
           <p:cNvPr id="13" name="bullet-dot-后备方案">
             <a:extLst xmlns:a="http://schemas.openxmlformats.org/drawingml/2006/main">
               <a:ext uri="{FF2B5EF4-FFF2-40B4-BE49-F238E27FC236}">
-                <a16:creationId xmlns:a16="http://schemas.microsoft.com/office/drawing/2014/main" id="{43B45155-0DA4-42D8-803A-4BC0D96BA78C}"/>
+                <a16:creationId xmlns:a16="http://schemas.microsoft.com/office/drawing/2014/main" id="{B4E2BE89-25DA-4C76-9E90-5DE684BD3757}"/>
               </a:ext>
             </a:extLst>
           </p:cNvPr>
@@ -22187,7 +22467,7 @@
           <p:cNvPr id="14" name="bullet-title-后备方案">
             <a:extLst xmlns:a="http://schemas.openxmlformats.org/drawingml/2006/main">
               <a:ext uri="{FF2B5EF4-FFF2-40B4-BE49-F238E27FC236}">
-                <a16:creationId xmlns:a16="http://schemas.microsoft.com/office/drawing/2014/main" id="{70DE5A63-C854-405D-9F28-653C158EEF50}"/>
+                <a16:creationId xmlns:a16="http://schemas.microsoft.com/office/drawing/2014/main" id="{5E5C2AED-B5FA-448F-9AC8-833D7FD30D90}"/>
               </a:ext>
             </a:extLst>
           </p:cNvPr>
@@ -22238,7 +22518,7 @@
           <p:cNvPr id="15" name="bullet-detail-后备方案">
             <a:extLst xmlns:a="http://schemas.openxmlformats.org/drawingml/2006/main">
               <a:ext uri="{FF2B5EF4-FFF2-40B4-BE49-F238E27FC236}">
-                <a16:creationId xmlns:a16="http://schemas.microsoft.com/office/drawing/2014/main" id="{6D5C5D24-92C3-4B88-8C16-0FE9A8C49EC1}"/>
+                <a16:creationId xmlns:a16="http://schemas.microsoft.com/office/drawing/2014/main" id="{69C2F43E-A7C7-445D-953B-FCEA97575A5E}"/>
               </a:ext>
             </a:extLst>
           </p:cNvPr>
@@ -22289,7 +22569,7 @@
           <p:cNvPr id="16" name="bullet-dot-ast-语义解析">
             <a:extLst xmlns:a="http://schemas.openxmlformats.org/drawingml/2006/main">
               <a:ext uri="{FF2B5EF4-FFF2-40B4-BE49-F238E27FC236}">
-                <a16:creationId xmlns:a16="http://schemas.microsoft.com/office/drawing/2014/main" id="{2442074E-7701-4319-A172-383D91CB1918}"/>
+                <a16:creationId xmlns:a16="http://schemas.microsoft.com/office/drawing/2014/main" id="{60F79CC5-0196-41E0-B53A-59EAC4E23F4D}"/>
               </a:ext>
             </a:extLst>
           </p:cNvPr>
@@ -22320,7 +22600,7 @@
           <p:cNvPr id="17" name="bullet-title-ast-语义解析">
             <a:extLst xmlns:a="http://schemas.openxmlformats.org/drawingml/2006/main">
               <a:ext uri="{FF2B5EF4-FFF2-40B4-BE49-F238E27FC236}">
-                <a16:creationId xmlns:a16="http://schemas.microsoft.com/office/drawing/2014/main" id="{28CBB23F-1D2F-4B0A-A377-A20A545E9FE5}"/>
+                <a16:creationId xmlns:a16="http://schemas.microsoft.com/office/drawing/2014/main" id="{4722FAB2-E37B-4D87-ADC2-B7455412F361}"/>
               </a:ext>
             </a:extLst>
           </p:cNvPr>
@@ -22371,7 +22651,7 @@
           <p:cNvPr id="18" name="bullet-detail-ast-语义解析">
             <a:extLst xmlns:a="http://schemas.openxmlformats.org/drawingml/2006/main">
               <a:ext uri="{FF2B5EF4-FFF2-40B4-BE49-F238E27FC236}">
-                <a16:creationId xmlns:a16="http://schemas.microsoft.com/office/drawing/2014/main" id="{65B99C3D-16CD-40AA-8462-8A94A82AFF54}"/>
+                <a16:creationId xmlns:a16="http://schemas.microsoft.com/office/drawing/2014/main" id="{CC9DE2B4-4290-4468-BCFF-7B221588F759}"/>
               </a:ext>
             </a:extLst>
           </p:cNvPr>
@@ -22422,7 +22702,7 @@
           <p:cNvPr id="19" name="">
             <a:extLst xmlns:a="http://schemas.openxmlformats.org/drawingml/2006/main">
               <a:ext uri="{FF2B5EF4-FFF2-40B4-BE49-F238E27FC236}">
-                <a16:creationId xmlns:a16="http://schemas.microsoft.com/office/drawing/2014/main" id="{341A8F29-5EB9-4A4E-B809-B3AA686B61AF}"/>
+                <a16:creationId xmlns:a16="http://schemas.microsoft.com/office/drawing/2014/main" id="{0DC99E7F-1429-4132-A6F0-6A12227F73DE}"/>
               </a:ext>
             </a:extLst>
           </p:cNvPr>
@@ -22434,7 +22714,7 @@
         <p:spPr>
           <a:xfrm xmlns:a="http://schemas.openxmlformats.org/drawingml/2006/main">
             <a:off x="5048250" y="2000250"/>
-            <a:ext cx="666750" cy="160020"/>
+            <a:ext cx="680942" cy="160020"/>
           </a:xfrm>
           <a:prstGeom xmlns:a="http://schemas.openxmlformats.org/drawingml/2006/main" prst="rect">
             <a:avLst/>
@@ -22473,7 +22753,7 @@
           <p:cNvPr id="20" name="">
             <a:extLst xmlns:a="http://schemas.openxmlformats.org/drawingml/2006/main">
               <a:ext uri="{FF2B5EF4-FFF2-40B4-BE49-F238E27FC236}">
-                <a16:creationId xmlns:a16="http://schemas.microsoft.com/office/drawing/2014/main" id="{5580D596-55B2-4302-937E-1B0824280948}"/>
+                <a16:creationId xmlns:a16="http://schemas.microsoft.com/office/drawing/2014/main" id="{A9E74D34-DA3F-4E9E-A4F2-6177C69F2C6F}"/>
               </a:ext>
             </a:extLst>
           </p:cNvPr>
@@ -22485,7 +22765,7 @@
         <p:spPr>
           <a:xfrm xmlns:a="http://schemas.openxmlformats.org/drawingml/2006/main">
             <a:off x="5048250" y="2274570"/>
-            <a:ext cx="3060573" cy="868680"/>
+            <a:ext cx="2217420" cy="434340"/>
           </a:xfrm>
           <a:prstGeom xmlns:a="http://schemas.openxmlformats.org/drawingml/2006/main" prst="rect">
             <a:avLst/>
@@ -22514,7 +22794,7 @@
                 <a:ea typeface="PingFang SC"/>
                 <a:cs typeface="PingFang SC"/>
               </a:rPr>
-              <a:t>从“发现”到“确认”</a:t>
+              <a:t>从发现到确认</a:t>
             </a:r>
           </a:p>
         </p:txBody>
@@ -22524,18 +22804,18 @@
           <p:cNvPr id="21" name="bullet-dot-poc-自动生成">
             <a:extLst xmlns:a="http://schemas.openxmlformats.org/drawingml/2006/main">
               <a:ext uri="{FF2B5EF4-FFF2-40B4-BE49-F238E27FC236}">
-                <a16:creationId xmlns:a16="http://schemas.microsoft.com/office/drawing/2014/main" id="{05FB34A4-145B-4016-97C5-F58BFBB56F89}"/>
-              </a:ext>
-            </a:extLst>
-          </p:cNvPr>
-          <p:cNvSpPr>
-            <a:spLocks xmlns:a="http://schemas.openxmlformats.org/drawingml/2006/main" noGrp="1"/>
-          </p:cNvSpPr>
-          <p:nvPr/>
-        </p:nvSpPr>
-        <p:spPr>
-          <a:xfrm xmlns:a="http://schemas.openxmlformats.org/drawingml/2006/main">
-            <a:off x="5048250" y="3257550"/>
+                <a16:creationId xmlns:a16="http://schemas.microsoft.com/office/drawing/2014/main" id="{219B48E9-10DF-4E5E-B0AA-D50D5F19A199}"/>
+              </a:ext>
+            </a:extLst>
+          </p:cNvPr>
+          <p:cNvSpPr>
+            <a:spLocks xmlns:a="http://schemas.openxmlformats.org/drawingml/2006/main" noGrp="1"/>
+          </p:cNvSpPr>
+          <p:nvPr/>
+        </p:nvSpPr>
+        <p:spPr>
+          <a:xfrm xmlns:a="http://schemas.openxmlformats.org/drawingml/2006/main">
+            <a:off x="5048250" y="2823210"/>
             <a:ext cx="76200" cy="76200"/>
           </a:xfrm>
           <a:prstGeom xmlns:a="http://schemas.openxmlformats.org/drawingml/2006/main" prst="ellipse">
@@ -22555,18 +22835,18 @@
           <p:cNvPr id="22" name="bullet-title-poc-自动生成">
             <a:extLst xmlns:a="http://schemas.openxmlformats.org/drawingml/2006/main">
               <a:ext uri="{FF2B5EF4-FFF2-40B4-BE49-F238E27FC236}">
-                <a16:creationId xmlns:a16="http://schemas.microsoft.com/office/drawing/2014/main" id="{7175F158-B170-4CD1-AD56-85ECC59F5DD6}"/>
-              </a:ext>
-            </a:extLst>
-          </p:cNvPr>
-          <p:cNvSpPr>
-            <a:spLocks xmlns:a="http://schemas.openxmlformats.org/drawingml/2006/main" noGrp="1"/>
-          </p:cNvSpPr>
-          <p:nvPr/>
-        </p:nvSpPr>
-        <p:spPr>
-          <a:xfrm xmlns:a="http://schemas.openxmlformats.org/drawingml/2006/main">
-            <a:off x="5238750" y="3257550"/>
+                <a16:creationId xmlns:a16="http://schemas.microsoft.com/office/drawing/2014/main" id="{6E25D733-340F-4063-ACDB-B119AA59D33E}"/>
+              </a:ext>
+            </a:extLst>
+          </p:cNvPr>
+          <p:cNvSpPr>
+            <a:spLocks xmlns:a="http://schemas.openxmlformats.org/drawingml/2006/main" noGrp="1"/>
+          </p:cNvSpPr>
+          <p:nvPr/>
+        </p:nvSpPr>
+        <p:spPr>
+          <a:xfrm xmlns:a="http://schemas.openxmlformats.org/drawingml/2006/main">
+            <a:off x="5238750" y="2823210"/>
             <a:ext cx="6419850" cy="194310"/>
           </a:xfrm>
           <a:prstGeom xmlns:a="http://schemas.openxmlformats.org/drawingml/2006/main" prst="rect">
@@ -22606,18 +22886,18 @@
           <p:cNvPr id="23" name="bullet-detail-poc-自动生成">
             <a:extLst xmlns:a="http://schemas.openxmlformats.org/drawingml/2006/main">
               <a:ext uri="{FF2B5EF4-FFF2-40B4-BE49-F238E27FC236}">
-                <a16:creationId xmlns:a16="http://schemas.microsoft.com/office/drawing/2014/main" id="{AA6BEEFC-778A-4E8A-9AA8-1253A25A751D}"/>
-              </a:ext>
-            </a:extLst>
-          </p:cNvPr>
-          <p:cNvSpPr>
-            <a:spLocks xmlns:a="http://schemas.openxmlformats.org/drawingml/2006/main" noGrp="1"/>
-          </p:cNvSpPr>
-          <p:nvPr/>
-        </p:nvSpPr>
-        <p:spPr>
-          <a:xfrm xmlns:a="http://schemas.openxmlformats.org/drawingml/2006/main">
-            <a:off x="5238750" y="3489960"/>
+                <a16:creationId xmlns:a16="http://schemas.microsoft.com/office/drawing/2014/main" id="{E88C448B-D4B4-4BAC-B836-28BED049BD1D}"/>
+              </a:ext>
+            </a:extLst>
+          </p:cNvPr>
+          <p:cNvSpPr>
+            <a:spLocks xmlns:a="http://schemas.openxmlformats.org/drawingml/2006/main" noGrp="1"/>
+          </p:cNvSpPr>
+          <p:nvPr/>
+        </p:nvSpPr>
+        <p:spPr>
+          <a:xfrm xmlns:a="http://schemas.openxmlformats.org/drawingml/2006/main">
+            <a:off x="5238750" y="3055620"/>
             <a:ext cx="6419850" cy="171450"/>
           </a:xfrm>
           <a:prstGeom xmlns:a="http://schemas.openxmlformats.org/drawingml/2006/main" prst="rect">
@@ -22657,18 +22937,18 @@
           <p:cNvPr id="24" name="bullet-dot-docker-隔离执行">
             <a:extLst xmlns:a="http://schemas.openxmlformats.org/drawingml/2006/main">
               <a:ext uri="{FF2B5EF4-FFF2-40B4-BE49-F238E27FC236}">
-                <a16:creationId xmlns:a16="http://schemas.microsoft.com/office/drawing/2014/main" id="{9F2EFA40-2E0D-45B6-AFF3-F7EA2FDE8A3A}"/>
-              </a:ext>
-            </a:extLst>
-          </p:cNvPr>
-          <p:cNvSpPr>
-            <a:spLocks xmlns:a="http://schemas.openxmlformats.org/drawingml/2006/main" noGrp="1"/>
-          </p:cNvSpPr>
-          <p:nvPr/>
-        </p:nvSpPr>
-        <p:spPr>
-          <a:xfrm xmlns:a="http://schemas.openxmlformats.org/drawingml/2006/main">
-            <a:off x="5048250" y="3775710"/>
+                <a16:creationId xmlns:a16="http://schemas.microsoft.com/office/drawing/2014/main" id="{B5028F1B-E88A-4CEC-83F6-79A4077412FB}"/>
+              </a:ext>
+            </a:extLst>
+          </p:cNvPr>
+          <p:cNvSpPr>
+            <a:spLocks xmlns:a="http://schemas.openxmlformats.org/drawingml/2006/main" noGrp="1"/>
+          </p:cNvSpPr>
+          <p:nvPr/>
+        </p:nvSpPr>
+        <p:spPr>
+          <a:xfrm xmlns:a="http://schemas.openxmlformats.org/drawingml/2006/main">
+            <a:off x="5048250" y="3341370"/>
             <a:ext cx="76200" cy="76200"/>
           </a:xfrm>
           <a:prstGeom xmlns:a="http://schemas.openxmlformats.org/drawingml/2006/main" prst="ellipse">
@@ -22688,18 +22968,18 @@
           <p:cNvPr id="25" name="bullet-title-docker-隔离执行">
             <a:extLst xmlns:a="http://schemas.openxmlformats.org/drawingml/2006/main">
               <a:ext uri="{FF2B5EF4-FFF2-40B4-BE49-F238E27FC236}">
-                <a16:creationId xmlns:a16="http://schemas.microsoft.com/office/drawing/2014/main" id="{343C749B-6DB0-4AF2-8DF2-45B9400665F7}"/>
-              </a:ext>
-            </a:extLst>
-          </p:cNvPr>
-          <p:cNvSpPr>
-            <a:spLocks xmlns:a="http://schemas.openxmlformats.org/drawingml/2006/main" noGrp="1"/>
-          </p:cNvSpPr>
-          <p:nvPr/>
-        </p:nvSpPr>
-        <p:spPr>
-          <a:xfrm xmlns:a="http://schemas.openxmlformats.org/drawingml/2006/main">
-            <a:off x="5238750" y="3775710"/>
+                <a16:creationId xmlns:a16="http://schemas.microsoft.com/office/drawing/2014/main" id="{4A9D0F4B-32D4-42FC-8245-FEBD8A51D197}"/>
+              </a:ext>
+            </a:extLst>
+          </p:cNvPr>
+          <p:cNvSpPr>
+            <a:spLocks xmlns:a="http://schemas.openxmlformats.org/drawingml/2006/main" noGrp="1"/>
+          </p:cNvSpPr>
+          <p:nvPr/>
+        </p:nvSpPr>
+        <p:spPr>
+          <a:xfrm xmlns:a="http://schemas.openxmlformats.org/drawingml/2006/main">
+            <a:off x="5238750" y="3341370"/>
             <a:ext cx="6419850" cy="194310"/>
           </a:xfrm>
           <a:prstGeom xmlns:a="http://schemas.openxmlformats.org/drawingml/2006/main" prst="rect">
@@ -22739,18 +23019,18 @@
           <p:cNvPr id="26" name="bullet-detail-docker-隔离执行">
             <a:extLst xmlns:a="http://schemas.openxmlformats.org/drawingml/2006/main">
               <a:ext uri="{FF2B5EF4-FFF2-40B4-BE49-F238E27FC236}">
-                <a16:creationId xmlns:a16="http://schemas.microsoft.com/office/drawing/2014/main" id="{E127162D-8990-424D-B127-612C562F5B2C}"/>
-              </a:ext>
-            </a:extLst>
-          </p:cNvPr>
-          <p:cNvSpPr>
-            <a:spLocks xmlns:a="http://schemas.openxmlformats.org/drawingml/2006/main" noGrp="1"/>
-          </p:cNvSpPr>
-          <p:nvPr/>
-        </p:nvSpPr>
-        <p:spPr>
-          <a:xfrm xmlns:a="http://schemas.openxmlformats.org/drawingml/2006/main">
-            <a:off x="5238750" y="4008120"/>
+                <a16:creationId xmlns:a16="http://schemas.microsoft.com/office/drawing/2014/main" id="{A53553E1-659D-4493-8534-40E8ED3C352F}"/>
+              </a:ext>
+            </a:extLst>
+          </p:cNvPr>
+          <p:cNvSpPr>
+            <a:spLocks xmlns:a="http://schemas.openxmlformats.org/drawingml/2006/main" noGrp="1"/>
+          </p:cNvSpPr>
+          <p:nvPr/>
+        </p:nvSpPr>
+        <p:spPr>
+          <a:xfrm xmlns:a="http://schemas.openxmlformats.org/drawingml/2006/main">
+            <a:off x="5238750" y="3573780"/>
             <a:ext cx="6419850" cy="171450"/>
           </a:xfrm>
           <a:prstGeom xmlns:a="http://schemas.openxmlformats.org/drawingml/2006/main" prst="rect">
@@ -22790,18 +23070,18 @@
           <p:cNvPr id="27" name="bullet-dot-置信度打分">
             <a:extLst xmlns:a="http://schemas.openxmlformats.org/drawingml/2006/main">
               <a:ext uri="{FF2B5EF4-FFF2-40B4-BE49-F238E27FC236}">
-                <a16:creationId xmlns:a16="http://schemas.microsoft.com/office/drawing/2014/main" id="{2546E84D-E83E-47FB-B5D7-487A770DEB1C}"/>
-              </a:ext>
-            </a:extLst>
-          </p:cNvPr>
-          <p:cNvSpPr>
-            <a:spLocks xmlns:a="http://schemas.openxmlformats.org/drawingml/2006/main" noGrp="1"/>
-          </p:cNvSpPr>
-          <p:nvPr/>
-        </p:nvSpPr>
-        <p:spPr>
-          <a:xfrm xmlns:a="http://schemas.openxmlformats.org/drawingml/2006/main">
-            <a:off x="5048250" y="4293870"/>
+                <a16:creationId xmlns:a16="http://schemas.microsoft.com/office/drawing/2014/main" id="{FA4CAC00-2872-4A8F-A855-D49992DA2208}"/>
+              </a:ext>
+            </a:extLst>
+          </p:cNvPr>
+          <p:cNvSpPr>
+            <a:spLocks xmlns:a="http://schemas.openxmlformats.org/drawingml/2006/main" noGrp="1"/>
+          </p:cNvSpPr>
+          <p:nvPr/>
+        </p:nvSpPr>
+        <p:spPr>
+          <a:xfrm xmlns:a="http://schemas.openxmlformats.org/drawingml/2006/main">
+            <a:off x="5048250" y="3859530"/>
             <a:ext cx="76200" cy="76200"/>
           </a:xfrm>
           <a:prstGeom xmlns:a="http://schemas.openxmlformats.org/drawingml/2006/main" prst="ellipse">
@@ -22821,18 +23101,18 @@
           <p:cNvPr id="28" name="bullet-title-置信度打分">
             <a:extLst xmlns:a="http://schemas.openxmlformats.org/drawingml/2006/main">
               <a:ext uri="{FF2B5EF4-FFF2-40B4-BE49-F238E27FC236}">
-                <a16:creationId xmlns:a16="http://schemas.microsoft.com/office/drawing/2014/main" id="{C171F126-8322-46AE-8D1F-014F3AB3F619}"/>
-              </a:ext>
-            </a:extLst>
-          </p:cNvPr>
-          <p:cNvSpPr>
-            <a:spLocks xmlns:a="http://schemas.openxmlformats.org/drawingml/2006/main" noGrp="1"/>
-          </p:cNvSpPr>
-          <p:nvPr/>
-        </p:nvSpPr>
-        <p:spPr>
-          <a:xfrm xmlns:a="http://schemas.openxmlformats.org/drawingml/2006/main">
-            <a:off x="5238750" y="4293870"/>
+                <a16:creationId xmlns:a16="http://schemas.microsoft.com/office/drawing/2014/main" id="{498DDFA5-5DBA-44D0-90F9-FB30B29CFABB}"/>
+              </a:ext>
+            </a:extLst>
+          </p:cNvPr>
+          <p:cNvSpPr>
+            <a:spLocks xmlns:a="http://schemas.openxmlformats.org/drawingml/2006/main" noGrp="1"/>
+          </p:cNvSpPr>
+          <p:nvPr/>
+        </p:nvSpPr>
+        <p:spPr>
+          <a:xfrm xmlns:a="http://schemas.openxmlformats.org/drawingml/2006/main">
+            <a:off x="5238750" y="3859530"/>
             <a:ext cx="6419850" cy="194310"/>
           </a:xfrm>
           <a:prstGeom xmlns:a="http://schemas.openxmlformats.org/drawingml/2006/main" prst="rect">
@@ -22872,18 +23152,18 @@
           <p:cNvPr id="29" name="bullet-detail-置信度打分">
             <a:extLst xmlns:a="http://schemas.openxmlformats.org/drawingml/2006/main">
               <a:ext uri="{FF2B5EF4-FFF2-40B4-BE49-F238E27FC236}">
-                <a16:creationId xmlns:a16="http://schemas.microsoft.com/office/drawing/2014/main" id="{8A6FE178-2A8A-4A49-8749-9AD762A8B606}"/>
-              </a:ext>
-            </a:extLst>
-          </p:cNvPr>
-          <p:cNvSpPr>
-            <a:spLocks xmlns:a="http://schemas.openxmlformats.org/drawingml/2006/main" noGrp="1"/>
-          </p:cNvSpPr>
-          <p:nvPr/>
-        </p:nvSpPr>
-        <p:spPr>
-          <a:xfrm xmlns:a="http://schemas.openxmlformats.org/drawingml/2006/main">
-            <a:off x="5238750" y="4526280"/>
+                <a16:creationId xmlns:a16="http://schemas.microsoft.com/office/drawing/2014/main" id="{D6F6AD96-6F59-49BF-AA2C-62709336E09B}"/>
+              </a:ext>
+            </a:extLst>
+          </p:cNvPr>
+          <p:cNvSpPr>
+            <a:spLocks xmlns:a="http://schemas.openxmlformats.org/drawingml/2006/main" noGrp="1"/>
+          </p:cNvSpPr>
+          <p:nvPr/>
+        </p:nvSpPr>
+        <p:spPr>
+          <a:xfrm xmlns:a="http://schemas.openxmlformats.org/drawingml/2006/main">
+            <a:off x="5238750" y="4091940"/>
             <a:ext cx="6419850" cy="171450"/>
           </a:xfrm>
           <a:prstGeom xmlns:a="http://schemas.openxmlformats.org/drawingml/2006/main" prst="rect">
@@ -22923,18 +23203,18 @@
           <p:cNvPr id="30" name="">
             <a:extLst xmlns:a="http://schemas.openxmlformats.org/drawingml/2006/main">
               <a:ext uri="{FF2B5EF4-FFF2-40B4-BE49-F238E27FC236}">
-                <a16:creationId xmlns:a16="http://schemas.microsoft.com/office/drawing/2014/main" id="{5BFF5495-C8C1-4E2E-AC45-EEE8D62824D7}"/>
-              </a:ext>
-            </a:extLst>
-          </p:cNvPr>
-          <p:cNvSpPr>
-            <a:spLocks xmlns:a="http://schemas.openxmlformats.org/drawingml/2006/main" noGrp="1"/>
-          </p:cNvSpPr>
-          <p:nvPr/>
-        </p:nvSpPr>
-        <p:spPr>
-          <a:xfrm xmlns:a="http://schemas.openxmlformats.org/drawingml/2006/main">
-            <a:off x="5048250" y="4812030"/>
+                <a16:creationId xmlns:a16="http://schemas.microsoft.com/office/drawing/2014/main" id="{91CAD1BE-F0AA-4215-8EB4-F97D4CC5E8AB}"/>
+              </a:ext>
+            </a:extLst>
+          </p:cNvPr>
+          <p:cNvSpPr>
+            <a:spLocks xmlns:a="http://schemas.openxmlformats.org/drawingml/2006/main" noGrp="1"/>
+          </p:cNvSpPr>
+          <p:nvPr/>
+        </p:nvSpPr>
+        <p:spPr>
+          <a:xfrm xmlns:a="http://schemas.openxmlformats.org/drawingml/2006/main">
+            <a:off x="5048250" y="4377690"/>
             <a:ext cx="6610350" cy="670560"/>
           </a:xfrm>
           <a:prstGeom xmlns:a="http://schemas.openxmlformats.org/drawingml/2006/main" prst="rect">
@@ -22960,19 +23240,19 @@
           <p:cNvPr id="31" name="">
             <a:extLst xmlns:a="http://schemas.openxmlformats.org/drawingml/2006/main">
               <a:ext uri="{FF2B5EF4-FFF2-40B4-BE49-F238E27FC236}">
-                <a16:creationId xmlns:a16="http://schemas.microsoft.com/office/drawing/2014/main" id="{5E7DB306-F33E-4E53-976C-64787D073158}"/>
-              </a:ext>
-            </a:extLst>
-          </p:cNvPr>
-          <p:cNvSpPr>
-            <a:spLocks xmlns:a="http://schemas.openxmlformats.org/drawingml/2006/main" noGrp="1"/>
-          </p:cNvSpPr>
-          <p:nvPr/>
-        </p:nvSpPr>
-        <p:spPr>
-          <a:xfrm xmlns:a="http://schemas.openxmlformats.org/drawingml/2006/main">
-            <a:off x="5200650" y="4964430"/>
-            <a:ext cx="4888039" cy="365760"/>
+                <a16:creationId xmlns:a16="http://schemas.microsoft.com/office/drawing/2014/main" id="{ECCC648D-1117-4C28-BD4F-52AB0A0F6EA7}"/>
+              </a:ext>
+            </a:extLst>
+          </p:cNvPr>
+          <p:cNvSpPr>
+            <a:spLocks xmlns:a="http://schemas.openxmlformats.org/drawingml/2006/main" noGrp="1"/>
+          </p:cNvSpPr>
+          <p:nvPr/>
+        </p:nvSpPr>
+        <p:spPr>
+          <a:xfrm xmlns:a="http://schemas.openxmlformats.org/drawingml/2006/main">
+            <a:off x="5200650" y="4530090"/>
+            <a:ext cx="4992052" cy="365760"/>
           </a:xfrm>
           <a:prstGeom xmlns:a="http://schemas.openxmlformats.org/drawingml/2006/main" prst="rect">
             <a:avLst/>
@@ -23009,7 +23289,7 @@
     </p:spTree>
     <p:extLst>
       <p:ext uri="{BB962C8B-B14F-4D97-AF65-F5344CB8AC3E}">
-        <p14:creationId xmlns:p14="http://schemas.microsoft.com/office/powerpoint/2010/main" val="672028403"/>
+        <p14:creationId xmlns:p14="http://schemas.microsoft.com/office/powerpoint/2010/main" val="1813339206"/>
       </p:ext>
     </p:extLst>
   </p:cSld>
@@ -23040,7 +23320,7 @@
           <p:cNvPr id="1" name="header-kicker-知识库与模型配置">
             <a:extLst xmlns:a="http://schemas.openxmlformats.org/drawingml/2006/main">
               <a:ext uri="{FF2B5EF4-FFF2-40B4-BE49-F238E27FC236}">
-                <a16:creationId xmlns:a16="http://schemas.microsoft.com/office/drawing/2014/main" id="{D649068A-9963-45E1-85BC-9594F4A84E33}"/>
+                <a16:creationId xmlns:a16="http://schemas.microsoft.com/office/drawing/2014/main" id="{75315A46-0A49-4AB2-8090-2DC29C2A1610}"/>
               </a:ext>
             </a:extLst>
           </p:cNvPr>
@@ -23091,7 +23371,7 @@
           <p:cNvPr id="2" name="header-title-知识库与模型配置">
             <a:extLst xmlns:a="http://schemas.openxmlformats.org/drawingml/2006/main">
               <a:ext uri="{FF2B5EF4-FFF2-40B4-BE49-F238E27FC236}">
-                <a16:creationId xmlns:a16="http://schemas.microsoft.com/office/drawing/2014/main" id="{A846808D-E9AF-4D58-AAC6-3542B2A67663}"/>
+                <a16:creationId xmlns:a16="http://schemas.microsoft.com/office/drawing/2014/main" id="{46E4DD10-F28F-4E0F-84B5-8C7E482FD84D}"/>
               </a:ext>
             </a:extLst>
           </p:cNvPr>
@@ -23142,7 +23422,7 @@
           <p:cNvPr id="3" name="header-subtitle-知识库与模型配置">
             <a:extLst xmlns:a="http://schemas.openxmlformats.org/drawingml/2006/main">
               <a:ext uri="{FF2B5EF4-FFF2-40B4-BE49-F238E27FC236}">
-                <a16:creationId xmlns:a16="http://schemas.microsoft.com/office/drawing/2014/main" id="{F223A172-7C41-45C8-91FF-626810DF0CAB}"/>
+                <a16:creationId xmlns:a16="http://schemas.microsoft.com/office/drawing/2014/main" id="{DFA11042-4D10-43E2-9F57-918332A96109}"/>
               </a:ext>
             </a:extLst>
           </p:cNvPr>
@@ -23193,7 +23473,7 @@
           <p:cNvPr id="4" name="heading-underline">
             <a:extLst xmlns:a="http://schemas.openxmlformats.org/drawingml/2006/main">
               <a:ext uri="{FF2B5EF4-FFF2-40B4-BE49-F238E27FC236}">
-                <a16:creationId xmlns:a16="http://schemas.microsoft.com/office/drawing/2014/main" id="{663F3795-3090-4441-8DE4-7D5D9D7B8E25}"/>
+                <a16:creationId xmlns:a16="http://schemas.microsoft.com/office/drawing/2014/main" id="{3D62750E-A0D7-4CC4-B4D6-5B7B1AC9EB10}"/>
               </a:ext>
             </a:extLst>
           </p:cNvPr>
@@ -23230,7 +23510,7 @@
           <p:cNvPr id="5" name="knowledge-layer-kicker">
             <a:extLst xmlns:a="http://schemas.openxmlformats.org/drawingml/2006/main">
               <a:ext uri="{FF2B5EF4-FFF2-40B4-BE49-F238E27FC236}">
-                <a16:creationId xmlns:a16="http://schemas.microsoft.com/office/drawing/2014/main" id="{94CD0B40-5C70-478A-AFE4-47B91419F079}"/>
+                <a16:creationId xmlns:a16="http://schemas.microsoft.com/office/drawing/2014/main" id="{BC7B28C2-5AD8-48EF-9FC4-44478A699F44}"/>
               </a:ext>
             </a:extLst>
           </p:cNvPr>
@@ -23242,7 +23522,7 @@
         <p:spPr>
           <a:xfrm xmlns:a="http://schemas.openxmlformats.org/drawingml/2006/main">
             <a:off x="533400" y="1962150"/>
-            <a:ext cx="533400" cy="160020"/>
+            <a:ext cx="544735" cy="160020"/>
           </a:xfrm>
           <a:prstGeom xmlns:a="http://schemas.openxmlformats.org/drawingml/2006/main" prst="rect">
             <a:avLst/>
@@ -23281,7 +23561,7 @@
           <p:cNvPr id="6" name="knowledge-layer-title">
             <a:extLst xmlns:a="http://schemas.openxmlformats.org/drawingml/2006/main">
               <a:ext uri="{FF2B5EF4-FFF2-40B4-BE49-F238E27FC236}">
-                <a16:creationId xmlns:a16="http://schemas.microsoft.com/office/drawing/2014/main" id="{60F1F59C-B030-4161-ACE3-98E6597ED8FF}"/>
+                <a16:creationId xmlns:a16="http://schemas.microsoft.com/office/drawing/2014/main" id="{DA75A516-6DFD-450D-ADFA-72FA08B4820D}"/>
               </a:ext>
             </a:extLst>
           </p:cNvPr>
@@ -23293,7 +23573,7 @@
         <p:spPr>
           <a:xfrm xmlns:a="http://schemas.openxmlformats.org/drawingml/2006/main">
             <a:off x="533400" y="2236470"/>
-            <a:ext cx="3355562" cy="868680"/>
+            <a:ext cx="3446716" cy="868680"/>
           </a:xfrm>
           <a:prstGeom xmlns:a="http://schemas.openxmlformats.org/drawingml/2006/main" prst="rect">
             <a:avLst/>
@@ -23332,7 +23612,7 @@
           <p:cNvPr id="7" name="bullet-dot-共享基线知识">
             <a:extLst xmlns:a="http://schemas.openxmlformats.org/drawingml/2006/main">
               <a:ext uri="{FF2B5EF4-FFF2-40B4-BE49-F238E27FC236}">
-                <a16:creationId xmlns:a16="http://schemas.microsoft.com/office/drawing/2014/main" id="{4FAF710C-C67D-4282-834E-367BA75B0B9F}"/>
+                <a16:creationId xmlns:a16="http://schemas.microsoft.com/office/drawing/2014/main" id="{3F882C48-E802-4875-90F5-BF8F95F7F63F}"/>
               </a:ext>
             </a:extLst>
           </p:cNvPr>
@@ -23363,7 +23643,7 @@
           <p:cNvPr id="8" name="bullet-title-共享基线知识">
             <a:extLst xmlns:a="http://schemas.openxmlformats.org/drawingml/2006/main">
               <a:ext uri="{FF2B5EF4-FFF2-40B4-BE49-F238E27FC236}">
-                <a16:creationId xmlns:a16="http://schemas.microsoft.com/office/drawing/2014/main" id="{4FF72B81-3604-42BA-985B-915872B89149}"/>
+                <a16:creationId xmlns:a16="http://schemas.microsoft.com/office/drawing/2014/main" id="{DD6FE652-745B-44FB-8C87-6217C205DAF7}"/>
               </a:ext>
             </a:extLst>
           </p:cNvPr>
@@ -23414,7 +23694,7 @@
           <p:cNvPr id="9" name="bullet-detail-共享基线知识">
             <a:extLst xmlns:a="http://schemas.openxmlformats.org/drawingml/2006/main">
               <a:ext uri="{FF2B5EF4-FFF2-40B4-BE49-F238E27FC236}">
-                <a16:creationId xmlns:a16="http://schemas.microsoft.com/office/drawing/2014/main" id="{E3C82015-4316-4F0C-A2CB-AD7837878C81}"/>
+                <a16:creationId xmlns:a16="http://schemas.microsoft.com/office/drawing/2014/main" id="{38E39F79-5D43-41B1-9570-4CFEDB9FC692}"/>
               </a:ext>
             </a:extLst>
           </p:cNvPr>
@@ -23465,7 +23745,7 @@
           <p:cNvPr id="10" name="bullet-dot-项目-团队知识">
             <a:extLst xmlns:a="http://schemas.openxmlformats.org/drawingml/2006/main">
               <a:ext uri="{FF2B5EF4-FFF2-40B4-BE49-F238E27FC236}">
-                <a16:creationId xmlns:a16="http://schemas.microsoft.com/office/drawing/2014/main" id="{178BC5D5-7F66-4D20-B40D-3DD95FF904F3}"/>
+                <a16:creationId xmlns:a16="http://schemas.microsoft.com/office/drawing/2014/main" id="{9973B80C-2491-4B4D-9452-BF798DD766C1}"/>
               </a:ext>
             </a:extLst>
           </p:cNvPr>
@@ -23496,7 +23776,7 @@
           <p:cNvPr id="11" name="bullet-title-项目-团队知识">
             <a:extLst xmlns:a="http://schemas.openxmlformats.org/drawingml/2006/main">
               <a:ext uri="{FF2B5EF4-FFF2-40B4-BE49-F238E27FC236}">
-                <a16:creationId xmlns:a16="http://schemas.microsoft.com/office/drawing/2014/main" id="{CB37962C-DD64-4DB8-B659-10F949B1EE4A}"/>
+                <a16:creationId xmlns:a16="http://schemas.microsoft.com/office/drawing/2014/main" id="{4DADCCD9-0C38-4F95-BA1E-5BEED4C2617C}"/>
               </a:ext>
             </a:extLst>
           </p:cNvPr>
@@ -23547,7 +23827,7 @@
           <p:cNvPr id="12" name="bullet-detail-项目-团队知识">
             <a:extLst xmlns:a="http://schemas.openxmlformats.org/drawingml/2006/main">
               <a:ext uri="{FF2B5EF4-FFF2-40B4-BE49-F238E27FC236}">
-                <a16:creationId xmlns:a16="http://schemas.microsoft.com/office/drawing/2014/main" id="{68F7C8D2-3C5F-4721-B2A9-0BDD9DC65955}"/>
+                <a16:creationId xmlns:a16="http://schemas.microsoft.com/office/drawing/2014/main" id="{6B839B2F-AD50-421F-84D7-35D1757532F0}"/>
               </a:ext>
             </a:extLst>
           </p:cNvPr>
@@ -23598,7 +23878,7 @@
           <p:cNvPr id="13" name="bullet-dot-项目-rag">
             <a:extLst xmlns:a="http://schemas.openxmlformats.org/drawingml/2006/main">
               <a:ext uri="{FF2B5EF4-FFF2-40B4-BE49-F238E27FC236}">
-                <a16:creationId xmlns:a16="http://schemas.microsoft.com/office/drawing/2014/main" id="{9D34AD6C-BE3D-4503-A67A-68AB7B1C0CAA}"/>
+                <a16:creationId xmlns:a16="http://schemas.microsoft.com/office/drawing/2014/main" id="{25750B24-8406-4C92-9FFC-D790104A8544}"/>
               </a:ext>
             </a:extLst>
           </p:cNvPr>
@@ -23629,7 +23909,7 @@
           <p:cNvPr id="14" name="bullet-title-项目-rag">
             <a:extLst xmlns:a="http://schemas.openxmlformats.org/drawingml/2006/main">
               <a:ext uri="{FF2B5EF4-FFF2-40B4-BE49-F238E27FC236}">
-                <a16:creationId xmlns:a16="http://schemas.microsoft.com/office/drawing/2014/main" id="{F8ECCB05-9153-44BB-8B37-4E577129D557}"/>
+                <a16:creationId xmlns:a16="http://schemas.microsoft.com/office/drawing/2014/main" id="{75075ACF-9AB4-4E86-8174-E4FFCD73DA14}"/>
               </a:ext>
             </a:extLst>
           </p:cNvPr>
@@ -23680,7 +23960,7 @@
           <p:cNvPr id="15" name="bullet-detail-项目-rag">
             <a:extLst xmlns:a="http://schemas.openxmlformats.org/drawingml/2006/main">
               <a:ext uri="{FF2B5EF4-FFF2-40B4-BE49-F238E27FC236}">
-                <a16:creationId xmlns:a16="http://schemas.microsoft.com/office/drawing/2014/main" id="{24466429-C592-457C-BE01-6410D9A6E046}"/>
+                <a16:creationId xmlns:a16="http://schemas.microsoft.com/office/drawing/2014/main" id="{9B2636A7-B365-424B-A713-00A025F4C739}"/>
               </a:ext>
             </a:extLst>
           </p:cNvPr>
@@ -23731,7 +24011,7 @@
           <p:cNvPr id="16" name="knowledge-schema-kicker">
             <a:extLst xmlns:a="http://schemas.openxmlformats.org/drawingml/2006/main">
               <a:ext uri="{FF2B5EF4-FFF2-40B4-BE49-F238E27FC236}">
-                <a16:creationId xmlns:a16="http://schemas.microsoft.com/office/drawing/2014/main" id="{0C1DBBFB-1C18-4FFA-9FA7-5AB66DD5AFAD}"/>
+                <a16:creationId xmlns:a16="http://schemas.microsoft.com/office/drawing/2014/main" id="{AFB36731-D39A-4063-84AB-627F113824C2}"/>
               </a:ext>
             </a:extLst>
           </p:cNvPr>
@@ -23743,7 +24023,7 @@
         <p:spPr>
           <a:xfrm xmlns:a="http://schemas.openxmlformats.org/drawingml/2006/main">
             <a:off x="3905250" y="1962150"/>
-            <a:ext cx="533400" cy="160020"/>
+            <a:ext cx="544735" cy="160020"/>
           </a:xfrm>
           <a:prstGeom xmlns:a="http://schemas.openxmlformats.org/drawingml/2006/main" prst="rect">
             <a:avLst/>
@@ -23782,7 +24062,7 @@
           <p:cNvPr id="17" name="knowledge-schema-title">
             <a:extLst xmlns:a="http://schemas.openxmlformats.org/drawingml/2006/main">
               <a:ext uri="{FF2B5EF4-FFF2-40B4-BE49-F238E27FC236}">
-                <a16:creationId xmlns:a16="http://schemas.microsoft.com/office/drawing/2014/main" id="{11E38276-EDA8-4D8D-BB85-6C2B8DAFA904}"/>
+                <a16:creationId xmlns:a16="http://schemas.microsoft.com/office/drawing/2014/main" id="{9198614B-9B01-4F8E-8126-B2B0775E5148}"/>
               </a:ext>
             </a:extLst>
           </p:cNvPr>
@@ -23794,7 +24074,7 @@
         <p:spPr>
           <a:xfrm xmlns:a="http://schemas.openxmlformats.org/drawingml/2006/main">
             <a:off x="3905250" y="2236470"/>
-            <a:ext cx="2971609" cy="868680"/>
+            <a:ext cx="3055334" cy="868680"/>
           </a:xfrm>
           <a:prstGeom xmlns:a="http://schemas.openxmlformats.org/drawingml/2006/main" prst="rect">
             <a:avLst/>
@@ -23833,7 +24113,7 @@
           <p:cNvPr id="18" name="bullet-dot-命名规则">
             <a:extLst xmlns:a="http://schemas.openxmlformats.org/drawingml/2006/main">
               <a:ext uri="{FF2B5EF4-FFF2-40B4-BE49-F238E27FC236}">
-                <a16:creationId xmlns:a16="http://schemas.microsoft.com/office/drawing/2014/main" id="{52C91748-4D1F-493E-8025-926C34A8F31C}"/>
+                <a16:creationId xmlns:a16="http://schemas.microsoft.com/office/drawing/2014/main" id="{15CBCF18-C384-4A3D-B030-74844B73AB69}"/>
               </a:ext>
             </a:extLst>
           </p:cNvPr>
@@ -23864,7 +24144,7 @@
           <p:cNvPr id="19" name="bullet-title-命名规则">
             <a:extLst xmlns:a="http://schemas.openxmlformats.org/drawingml/2006/main">
               <a:ext uri="{FF2B5EF4-FFF2-40B4-BE49-F238E27FC236}">
-                <a16:creationId xmlns:a16="http://schemas.microsoft.com/office/drawing/2014/main" id="{9249770A-350B-4DF9-BEC0-2F7BEF21D7D0}"/>
+                <a16:creationId xmlns:a16="http://schemas.microsoft.com/office/drawing/2014/main" id="{95BEB1F0-5716-4243-AB77-525F9B16546B}"/>
               </a:ext>
             </a:extLst>
           </p:cNvPr>
@@ -23915,7 +24195,7 @@
           <p:cNvPr id="20" name="bullet-detail-命名规则">
             <a:extLst xmlns:a="http://schemas.openxmlformats.org/drawingml/2006/main">
               <a:ext uri="{FF2B5EF4-FFF2-40B4-BE49-F238E27FC236}">
-                <a16:creationId xmlns:a16="http://schemas.microsoft.com/office/drawing/2014/main" id="{259BF9D3-49F4-4DD1-9855-DB490EDE460A}"/>
+                <a16:creationId xmlns:a16="http://schemas.microsoft.com/office/drawing/2014/main" id="{D33B8686-CE66-4E3B-B02C-8DED5F335F4B}"/>
               </a:ext>
             </a:extLst>
           </p:cNvPr>
@@ -23966,7 +24246,7 @@
           <p:cNvPr id="21" name="bullet-dot-字段结构">
             <a:extLst xmlns:a="http://schemas.openxmlformats.org/drawingml/2006/main">
               <a:ext uri="{FF2B5EF4-FFF2-40B4-BE49-F238E27FC236}">
-                <a16:creationId xmlns:a16="http://schemas.microsoft.com/office/drawing/2014/main" id="{F4D34A13-BC5F-403D-9A8D-71253009C72C}"/>
+                <a16:creationId xmlns:a16="http://schemas.microsoft.com/office/drawing/2014/main" id="{C29A57B7-A965-4510-ABA4-8F1FA2BE81F8}"/>
               </a:ext>
             </a:extLst>
           </p:cNvPr>
@@ -23997,7 +24277,7 @@
           <p:cNvPr id="22" name="bullet-title-字段结构">
             <a:extLst xmlns:a="http://schemas.openxmlformats.org/drawingml/2006/main">
               <a:ext uri="{FF2B5EF4-FFF2-40B4-BE49-F238E27FC236}">
-                <a16:creationId xmlns:a16="http://schemas.microsoft.com/office/drawing/2014/main" id="{50460D81-2EB2-4C79-9658-C04AF277A18C}"/>
+                <a16:creationId xmlns:a16="http://schemas.microsoft.com/office/drawing/2014/main" id="{380B3D27-7CDD-4EB2-8020-25AF56B7939B}"/>
               </a:ext>
             </a:extLst>
           </p:cNvPr>
@@ -24048,7 +24328,7 @@
           <p:cNvPr id="23" name="bullet-detail-字段结构">
             <a:extLst xmlns:a="http://schemas.openxmlformats.org/drawingml/2006/main">
               <a:ext uri="{FF2B5EF4-FFF2-40B4-BE49-F238E27FC236}">
-                <a16:creationId xmlns:a16="http://schemas.microsoft.com/office/drawing/2014/main" id="{1F4546BE-58E1-47FF-BE0B-1A44BBE93247}"/>
+                <a16:creationId xmlns:a16="http://schemas.microsoft.com/office/drawing/2014/main" id="{1301D3E7-EB27-421E-8AC5-F9846774976B}"/>
               </a:ext>
             </a:extLst>
           </p:cNvPr>
@@ -24099,7 +24379,7 @@
           <p:cNvPr id="24" name="bullet-dot-内容模板">
             <a:extLst xmlns:a="http://schemas.openxmlformats.org/drawingml/2006/main">
               <a:ext uri="{FF2B5EF4-FFF2-40B4-BE49-F238E27FC236}">
-                <a16:creationId xmlns:a16="http://schemas.microsoft.com/office/drawing/2014/main" id="{A5F2F641-13B8-45CB-BFB8-6AB6C63C4FA7}"/>
+                <a16:creationId xmlns:a16="http://schemas.microsoft.com/office/drawing/2014/main" id="{B34F3BD6-F436-4AA9-B7DF-4D79399D13A4}"/>
               </a:ext>
             </a:extLst>
           </p:cNvPr>
@@ -24130,7 +24410,7 @@
           <p:cNvPr id="25" name="bullet-title-内容模板">
             <a:extLst xmlns:a="http://schemas.openxmlformats.org/drawingml/2006/main">
               <a:ext uri="{FF2B5EF4-FFF2-40B4-BE49-F238E27FC236}">
-                <a16:creationId xmlns:a16="http://schemas.microsoft.com/office/drawing/2014/main" id="{F0D5CFDE-043E-4E23-89A1-F96B34675CF2}"/>
+                <a16:creationId xmlns:a16="http://schemas.microsoft.com/office/drawing/2014/main" id="{31A4FD98-4BF9-401C-BE1B-70691417E535}"/>
               </a:ext>
             </a:extLst>
           </p:cNvPr>
@@ -24181,7 +24461,7 @@
           <p:cNvPr id="26" name="bullet-detail-内容模板">
             <a:extLst xmlns:a="http://schemas.openxmlformats.org/drawingml/2006/main">
               <a:ext uri="{FF2B5EF4-FFF2-40B4-BE49-F238E27FC236}">
-                <a16:creationId xmlns:a16="http://schemas.microsoft.com/office/drawing/2014/main" id="{501BC6B8-67AC-4223-93F5-01F705B38E08}"/>
+                <a16:creationId xmlns:a16="http://schemas.microsoft.com/office/drawing/2014/main" id="{C640A429-0DB1-4683-8CC8-AB8BDF9A2C91}"/>
               </a:ext>
             </a:extLst>
           </p:cNvPr>
@@ -24232,7 +24512,7 @@
           <p:cNvPr id="27" name="knowledge-llm-kicker">
             <a:extLst xmlns:a="http://schemas.openxmlformats.org/drawingml/2006/main">
               <a:ext uri="{FF2B5EF4-FFF2-40B4-BE49-F238E27FC236}">
-                <a16:creationId xmlns:a16="http://schemas.microsoft.com/office/drawing/2014/main" id="{B257CBB9-E208-4761-B700-A50CC5DD32D0}"/>
+                <a16:creationId xmlns:a16="http://schemas.microsoft.com/office/drawing/2014/main" id="{AD8A59F5-C2A1-4DC0-AA31-7B9B3E1C06DA}"/>
               </a:ext>
             </a:extLst>
           </p:cNvPr>
@@ -24244,7 +24524,7 @@
         <p:spPr>
           <a:xfrm xmlns:a="http://schemas.openxmlformats.org/drawingml/2006/main">
             <a:off x="7562850" y="1962150"/>
-            <a:ext cx="1200150" cy="160020"/>
+            <a:ext cx="1225772" cy="160020"/>
           </a:xfrm>
           <a:prstGeom xmlns:a="http://schemas.openxmlformats.org/drawingml/2006/main" prst="rect">
             <a:avLst/>
@@ -24283,7 +24563,7 @@
           <p:cNvPr id="28" name="knowledge-llm-title">
             <a:extLst xmlns:a="http://schemas.openxmlformats.org/drawingml/2006/main">
               <a:ext uri="{FF2B5EF4-FFF2-40B4-BE49-F238E27FC236}">
-                <a16:creationId xmlns:a16="http://schemas.microsoft.com/office/drawing/2014/main" id="{0973B06A-CC72-43C0-86EA-431AA626C3B3}"/>
+                <a16:creationId xmlns:a16="http://schemas.microsoft.com/office/drawing/2014/main" id="{37BC059F-F20D-4B51-94CB-F19F4C98B77E}"/>
               </a:ext>
             </a:extLst>
           </p:cNvPr>
@@ -24295,7 +24575,7 @@
         <p:spPr>
           <a:xfrm xmlns:a="http://schemas.openxmlformats.org/drawingml/2006/main">
             <a:off x="7562850" y="2236470"/>
-            <a:ext cx="4262247" cy="434340"/>
+            <a:ext cx="4468082" cy="868680"/>
           </a:xfrm>
           <a:prstGeom xmlns:a="http://schemas.openxmlformats.org/drawingml/2006/main" prst="rect">
             <a:avLst/>
@@ -24334,18 +24614,18 @@
           <p:cNvPr id="29" name="bullet-dot-内网网关">
             <a:extLst xmlns:a="http://schemas.openxmlformats.org/drawingml/2006/main">
               <a:ext uri="{FF2B5EF4-FFF2-40B4-BE49-F238E27FC236}">
-                <a16:creationId xmlns:a16="http://schemas.microsoft.com/office/drawing/2014/main" id="{758E4740-31BB-4702-A76F-EF7A0BAFFD10}"/>
-              </a:ext>
-            </a:extLst>
-          </p:cNvPr>
-          <p:cNvSpPr>
-            <a:spLocks xmlns:a="http://schemas.openxmlformats.org/drawingml/2006/main" noGrp="1"/>
-          </p:cNvSpPr>
-          <p:nvPr/>
-        </p:nvSpPr>
-        <p:spPr>
-          <a:xfrm xmlns:a="http://schemas.openxmlformats.org/drawingml/2006/main">
-            <a:off x="7562850" y="2785110"/>
+                <a16:creationId xmlns:a16="http://schemas.microsoft.com/office/drawing/2014/main" id="{7272AFD7-1B86-4081-B3D2-D02CF6C38544}"/>
+              </a:ext>
+            </a:extLst>
+          </p:cNvPr>
+          <p:cNvSpPr>
+            <a:spLocks xmlns:a="http://schemas.openxmlformats.org/drawingml/2006/main" noGrp="1"/>
+          </p:cNvSpPr>
+          <p:nvPr/>
+        </p:nvSpPr>
+        <p:spPr>
+          <a:xfrm xmlns:a="http://schemas.openxmlformats.org/drawingml/2006/main">
+            <a:off x="7562850" y="3219450"/>
             <a:ext cx="76200" cy="76200"/>
           </a:xfrm>
           <a:prstGeom xmlns:a="http://schemas.openxmlformats.org/drawingml/2006/main" prst="ellipse">
@@ -24365,18 +24645,18 @@
           <p:cNvPr id="30" name="bullet-title-内网网关">
             <a:extLst xmlns:a="http://schemas.openxmlformats.org/drawingml/2006/main">
               <a:ext uri="{FF2B5EF4-FFF2-40B4-BE49-F238E27FC236}">
-                <a16:creationId xmlns:a16="http://schemas.microsoft.com/office/drawing/2014/main" id="{6BF6A16B-4F30-401C-AF02-B7418633D4AC}"/>
-              </a:ext>
-            </a:extLst>
-          </p:cNvPr>
-          <p:cNvSpPr>
-            <a:spLocks xmlns:a="http://schemas.openxmlformats.org/drawingml/2006/main" noGrp="1"/>
-          </p:cNvSpPr>
-          <p:nvPr/>
-        </p:nvSpPr>
-        <p:spPr>
-          <a:xfrm xmlns:a="http://schemas.openxmlformats.org/drawingml/2006/main">
-            <a:off x="7753350" y="2785110"/>
+                <a16:creationId xmlns:a16="http://schemas.microsoft.com/office/drawing/2014/main" id="{06BC8674-0131-4539-AD54-BDFDA6CCE89D}"/>
+              </a:ext>
+            </a:extLst>
+          </p:cNvPr>
+          <p:cNvSpPr>
+            <a:spLocks xmlns:a="http://schemas.openxmlformats.org/drawingml/2006/main" noGrp="1"/>
+          </p:cNvSpPr>
+          <p:nvPr/>
+        </p:nvSpPr>
+        <p:spPr>
+          <a:xfrm xmlns:a="http://schemas.openxmlformats.org/drawingml/2006/main">
+            <a:off x="7753350" y="3219450"/>
             <a:ext cx="3905250" cy="194310"/>
           </a:xfrm>
           <a:prstGeom xmlns:a="http://schemas.openxmlformats.org/drawingml/2006/main" prst="rect">
@@ -24416,18 +24696,18 @@
           <p:cNvPr id="31" name="bullet-detail-内网网关">
             <a:extLst xmlns:a="http://schemas.openxmlformats.org/drawingml/2006/main">
               <a:ext uri="{FF2B5EF4-FFF2-40B4-BE49-F238E27FC236}">
-                <a16:creationId xmlns:a16="http://schemas.microsoft.com/office/drawing/2014/main" id="{76BD2300-1C59-45C8-A205-E8474DA09778}"/>
-              </a:ext>
-            </a:extLst>
-          </p:cNvPr>
-          <p:cNvSpPr>
-            <a:spLocks xmlns:a="http://schemas.openxmlformats.org/drawingml/2006/main" noGrp="1"/>
-          </p:cNvSpPr>
-          <p:nvPr/>
-        </p:nvSpPr>
-        <p:spPr>
-          <a:xfrm xmlns:a="http://schemas.openxmlformats.org/drawingml/2006/main">
-            <a:off x="7753350" y="3017520"/>
+                <a16:creationId xmlns:a16="http://schemas.microsoft.com/office/drawing/2014/main" id="{76F1A030-7042-429E-8243-EE8BC5A3C255}"/>
+              </a:ext>
+            </a:extLst>
+          </p:cNvPr>
+          <p:cNvSpPr>
+            <a:spLocks xmlns:a="http://schemas.openxmlformats.org/drawingml/2006/main" noGrp="1"/>
+          </p:cNvSpPr>
+          <p:nvPr/>
+        </p:nvSpPr>
+        <p:spPr>
+          <a:xfrm xmlns:a="http://schemas.openxmlformats.org/drawingml/2006/main">
+            <a:off x="7753350" y="3451860"/>
             <a:ext cx="3905250" cy="342900"/>
           </a:xfrm>
           <a:prstGeom xmlns:a="http://schemas.openxmlformats.org/drawingml/2006/main" prst="rect">
@@ -24467,18 +24747,18 @@
           <p:cNvPr id="32" name="bullet-dot-超时控制">
             <a:extLst xmlns:a="http://schemas.openxmlformats.org/drawingml/2006/main">
               <a:ext uri="{FF2B5EF4-FFF2-40B4-BE49-F238E27FC236}">
-                <a16:creationId xmlns:a16="http://schemas.microsoft.com/office/drawing/2014/main" id="{090EF198-BF46-4628-A11D-1DEB6BDD5A8E}"/>
-              </a:ext>
-            </a:extLst>
-          </p:cNvPr>
-          <p:cNvSpPr>
-            <a:spLocks xmlns:a="http://schemas.openxmlformats.org/drawingml/2006/main" noGrp="1"/>
-          </p:cNvSpPr>
-          <p:nvPr/>
-        </p:nvSpPr>
-        <p:spPr>
-          <a:xfrm xmlns:a="http://schemas.openxmlformats.org/drawingml/2006/main">
-            <a:off x="7562850" y="3474720"/>
+                <a16:creationId xmlns:a16="http://schemas.microsoft.com/office/drawing/2014/main" id="{0028ED38-3F14-4854-B76E-6CE623EE3A05}"/>
+              </a:ext>
+            </a:extLst>
+          </p:cNvPr>
+          <p:cNvSpPr>
+            <a:spLocks xmlns:a="http://schemas.openxmlformats.org/drawingml/2006/main" noGrp="1"/>
+          </p:cNvSpPr>
+          <p:nvPr/>
+        </p:nvSpPr>
+        <p:spPr>
+          <a:xfrm xmlns:a="http://schemas.openxmlformats.org/drawingml/2006/main">
+            <a:off x="7562850" y="3909060"/>
             <a:ext cx="76200" cy="76200"/>
           </a:xfrm>
           <a:prstGeom xmlns:a="http://schemas.openxmlformats.org/drawingml/2006/main" prst="ellipse">
@@ -24498,18 +24778,18 @@
           <p:cNvPr id="33" name="bullet-title-超时控制">
             <a:extLst xmlns:a="http://schemas.openxmlformats.org/drawingml/2006/main">
               <a:ext uri="{FF2B5EF4-FFF2-40B4-BE49-F238E27FC236}">
-                <a16:creationId xmlns:a16="http://schemas.microsoft.com/office/drawing/2014/main" id="{F0FF9BEC-F3CB-43DF-940E-15FB3D0E7643}"/>
-              </a:ext>
-            </a:extLst>
-          </p:cNvPr>
-          <p:cNvSpPr>
-            <a:spLocks xmlns:a="http://schemas.openxmlformats.org/drawingml/2006/main" noGrp="1"/>
-          </p:cNvSpPr>
-          <p:nvPr/>
-        </p:nvSpPr>
-        <p:spPr>
-          <a:xfrm xmlns:a="http://schemas.openxmlformats.org/drawingml/2006/main">
-            <a:off x="7753350" y="3474720"/>
+                <a16:creationId xmlns:a16="http://schemas.microsoft.com/office/drawing/2014/main" id="{49E2C672-B997-48C5-824D-EDB4A68B79B0}"/>
+              </a:ext>
+            </a:extLst>
+          </p:cNvPr>
+          <p:cNvSpPr>
+            <a:spLocks xmlns:a="http://schemas.openxmlformats.org/drawingml/2006/main" noGrp="1"/>
+          </p:cNvSpPr>
+          <p:nvPr/>
+        </p:nvSpPr>
+        <p:spPr>
+          <a:xfrm xmlns:a="http://schemas.openxmlformats.org/drawingml/2006/main">
+            <a:off x="7753350" y="3909060"/>
             <a:ext cx="3905250" cy="194310"/>
           </a:xfrm>
           <a:prstGeom xmlns:a="http://schemas.openxmlformats.org/drawingml/2006/main" prst="rect">
@@ -24549,18 +24829,18 @@
           <p:cNvPr id="34" name="bullet-detail-超时控制">
             <a:extLst xmlns:a="http://schemas.openxmlformats.org/drawingml/2006/main">
               <a:ext uri="{FF2B5EF4-FFF2-40B4-BE49-F238E27FC236}">
-                <a16:creationId xmlns:a16="http://schemas.microsoft.com/office/drawing/2014/main" id="{536AE204-D2CA-47B9-ADA6-5A3DD18E47DA}"/>
-              </a:ext>
-            </a:extLst>
-          </p:cNvPr>
-          <p:cNvSpPr>
-            <a:spLocks xmlns:a="http://schemas.openxmlformats.org/drawingml/2006/main" noGrp="1"/>
-          </p:cNvSpPr>
-          <p:nvPr/>
-        </p:nvSpPr>
-        <p:spPr>
-          <a:xfrm xmlns:a="http://schemas.openxmlformats.org/drawingml/2006/main">
-            <a:off x="7753350" y="3707130"/>
+                <a16:creationId xmlns:a16="http://schemas.microsoft.com/office/drawing/2014/main" id="{6E4212B8-0D62-4EBD-BEC3-D9C0B0457047}"/>
+              </a:ext>
+            </a:extLst>
+          </p:cNvPr>
+          <p:cNvSpPr>
+            <a:spLocks xmlns:a="http://schemas.openxmlformats.org/drawingml/2006/main" noGrp="1"/>
+          </p:cNvSpPr>
+          <p:nvPr/>
+        </p:nvSpPr>
+        <p:spPr>
+          <a:xfrm xmlns:a="http://schemas.openxmlformats.org/drawingml/2006/main">
+            <a:off x="7753350" y="4141470"/>
             <a:ext cx="3905250" cy="342900"/>
           </a:xfrm>
           <a:prstGeom xmlns:a="http://schemas.openxmlformats.org/drawingml/2006/main" prst="rect">
@@ -24600,18 +24880,18 @@
           <p:cNvPr id="35" name="bullet-dot-离线缓存">
             <a:extLst xmlns:a="http://schemas.openxmlformats.org/drawingml/2006/main">
               <a:ext uri="{FF2B5EF4-FFF2-40B4-BE49-F238E27FC236}">
-                <a16:creationId xmlns:a16="http://schemas.microsoft.com/office/drawing/2014/main" id="{00283CF1-57AE-41BD-AC6D-5F0DE433A5CA}"/>
-              </a:ext>
-            </a:extLst>
-          </p:cNvPr>
-          <p:cNvSpPr>
-            <a:spLocks xmlns:a="http://schemas.openxmlformats.org/drawingml/2006/main" noGrp="1"/>
-          </p:cNvSpPr>
-          <p:nvPr/>
-        </p:nvSpPr>
-        <p:spPr>
-          <a:xfrm xmlns:a="http://schemas.openxmlformats.org/drawingml/2006/main">
-            <a:off x="7562850" y="4164330"/>
+                <a16:creationId xmlns:a16="http://schemas.microsoft.com/office/drawing/2014/main" id="{548B7A03-B376-44AB-8408-22A103256444}"/>
+              </a:ext>
+            </a:extLst>
+          </p:cNvPr>
+          <p:cNvSpPr>
+            <a:spLocks xmlns:a="http://schemas.openxmlformats.org/drawingml/2006/main" noGrp="1"/>
+          </p:cNvSpPr>
+          <p:nvPr/>
+        </p:nvSpPr>
+        <p:spPr>
+          <a:xfrm xmlns:a="http://schemas.openxmlformats.org/drawingml/2006/main">
+            <a:off x="7562850" y="4598670"/>
             <a:ext cx="76200" cy="76200"/>
           </a:xfrm>
           <a:prstGeom xmlns:a="http://schemas.openxmlformats.org/drawingml/2006/main" prst="ellipse">
@@ -24631,18 +24911,18 @@
           <p:cNvPr id="36" name="bullet-title-离线缓存">
             <a:extLst xmlns:a="http://schemas.openxmlformats.org/drawingml/2006/main">
               <a:ext uri="{FF2B5EF4-FFF2-40B4-BE49-F238E27FC236}">
-                <a16:creationId xmlns:a16="http://schemas.microsoft.com/office/drawing/2014/main" id="{51A19387-B9FF-49EF-BECA-998E3C821DFA}"/>
-              </a:ext>
-            </a:extLst>
-          </p:cNvPr>
-          <p:cNvSpPr>
-            <a:spLocks xmlns:a="http://schemas.openxmlformats.org/drawingml/2006/main" noGrp="1"/>
-          </p:cNvSpPr>
-          <p:nvPr/>
-        </p:nvSpPr>
-        <p:spPr>
-          <a:xfrm xmlns:a="http://schemas.openxmlformats.org/drawingml/2006/main">
-            <a:off x="7753350" y="4164330"/>
+                <a16:creationId xmlns:a16="http://schemas.microsoft.com/office/drawing/2014/main" id="{74C4B4E6-1224-4B45-B2D0-39B6FC489493}"/>
+              </a:ext>
+            </a:extLst>
+          </p:cNvPr>
+          <p:cNvSpPr>
+            <a:spLocks xmlns:a="http://schemas.openxmlformats.org/drawingml/2006/main" noGrp="1"/>
+          </p:cNvSpPr>
+          <p:nvPr/>
+        </p:nvSpPr>
+        <p:spPr>
+          <a:xfrm xmlns:a="http://schemas.openxmlformats.org/drawingml/2006/main">
+            <a:off x="7753350" y="4598670"/>
             <a:ext cx="3905250" cy="194310"/>
           </a:xfrm>
           <a:prstGeom xmlns:a="http://schemas.openxmlformats.org/drawingml/2006/main" prst="rect">
@@ -24682,18 +24962,18 @@
           <p:cNvPr id="37" name="bullet-detail-离线缓存">
             <a:extLst xmlns:a="http://schemas.openxmlformats.org/drawingml/2006/main">
               <a:ext uri="{FF2B5EF4-FFF2-40B4-BE49-F238E27FC236}">
-                <a16:creationId xmlns:a16="http://schemas.microsoft.com/office/drawing/2014/main" id="{34BB82AA-343C-445E-A12D-323AB9C2440B}"/>
-              </a:ext>
-            </a:extLst>
-          </p:cNvPr>
-          <p:cNvSpPr>
-            <a:spLocks xmlns:a="http://schemas.openxmlformats.org/drawingml/2006/main" noGrp="1"/>
-          </p:cNvSpPr>
-          <p:nvPr/>
-        </p:nvSpPr>
-        <p:spPr>
-          <a:xfrm xmlns:a="http://schemas.openxmlformats.org/drawingml/2006/main">
-            <a:off x="7753350" y="4396740"/>
+                <a16:creationId xmlns:a16="http://schemas.microsoft.com/office/drawing/2014/main" id="{579E2414-E9F7-4E3E-8C8A-B477A9F9A889}"/>
+              </a:ext>
+            </a:extLst>
+          </p:cNvPr>
+          <p:cNvSpPr>
+            <a:spLocks xmlns:a="http://schemas.openxmlformats.org/drawingml/2006/main" noGrp="1"/>
+          </p:cNvSpPr>
+          <p:nvPr/>
+        </p:nvSpPr>
+        <p:spPr>
+          <a:xfrm xmlns:a="http://schemas.openxmlformats.org/drawingml/2006/main">
+            <a:off x="7753350" y="4831080"/>
             <a:ext cx="3905250" cy="342900"/>
           </a:xfrm>
           <a:prstGeom xmlns:a="http://schemas.openxmlformats.org/drawingml/2006/main" prst="rect">
@@ -24733,18 +25013,18 @@
           <p:cNvPr id="38" name="bullet-dot-用户级覆盖">
             <a:extLst xmlns:a="http://schemas.openxmlformats.org/drawingml/2006/main">
               <a:ext uri="{FF2B5EF4-FFF2-40B4-BE49-F238E27FC236}">
-                <a16:creationId xmlns:a16="http://schemas.microsoft.com/office/drawing/2014/main" id="{82DA227D-E6BA-4034-B37F-4528CD4FD086}"/>
-              </a:ext>
-            </a:extLst>
-          </p:cNvPr>
-          <p:cNvSpPr>
-            <a:spLocks xmlns:a="http://schemas.openxmlformats.org/drawingml/2006/main" noGrp="1"/>
-          </p:cNvSpPr>
-          <p:nvPr/>
-        </p:nvSpPr>
-        <p:spPr>
-          <a:xfrm xmlns:a="http://schemas.openxmlformats.org/drawingml/2006/main">
-            <a:off x="7562850" y="4853940"/>
+                <a16:creationId xmlns:a16="http://schemas.microsoft.com/office/drawing/2014/main" id="{EAA4799D-52ED-4B15-A7CF-8F21BF89FD3E}"/>
+              </a:ext>
+            </a:extLst>
+          </p:cNvPr>
+          <p:cNvSpPr>
+            <a:spLocks xmlns:a="http://schemas.openxmlformats.org/drawingml/2006/main" noGrp="1"/>
+          </p:cNvSpPr>
+          <p:nvPr/>
+        </p:nvSpPr>
+        <p:spPr>
+          <a:xfrm xmlns:a="http://schemas.openxmlformats.org/drawingml/2006/main">
+            <a:off x="7562850" y="5288280"/>
             <a:ext cx="76200" cy="76200"/>
           </a:xfrm>
           <a:prstGeom xmlns:a="http://schemas.openxmlformats.org/drawingml/2006/main" prst="ellipse">
@@ -24764,18 +25044,18 @@
           <p:cNvPr id="39" name="bullet-title-用户级覆盖">
             <a:extLst xmlns:a="http://schemas.openxmlformats.org/drawingml/2006/main">
               <a:ext uri="{FF2B5EF4-FFF2-40B4-BE49-F238E27FC236}">
-                <a16:creationId xmlns:a16="http://schemas.microsoft.com/office/drawing/2014/main" id="{95BD9C1D-C80F-4EE9-9A52-0344114BB195}"/>
-              </a:ext>
-            </a:extLst>
-          </p:cNvPr>
-          <p:cNvSpPr>
-            <a:spLocks xmlns:a="http://schemas.openxmlformats.org/drawingml/2006/main" noGrp="1"/>
-          </p:cNvSpPr>
-          <p:nvPr/>
-        </p:nvSpPr>
-        <p:spPr>
-          <a:xfrm xmlns:a="http://schemas.openxmlformats.org/drawingml/2006/main">
-            <a:off x="7753350" y="4853940"/>
+                <a16:creationId xmlns:a16="http://schemas.microsoft.com/office/drawing/2014/main" id="{AD771D18-C550-4CC4-879D-97A22EA95A19}"/>
+              </a:ext>
+            </a:extLst>
+          </p:cNvPr>
+          <p:cNvSpPr>
+            <a:spLocks xmlns:a="http://schemas.openxmlformats.org/drawingml/2006/main" noGrp="1"/>
+          </p:cNvSpPr>
+          <p:nvPr/>
+        </p:nvSpPr>
+        <p:spPr>
+          <a:xfrm xmlns:a="http://schemas.openxmlformats.org/drawingml/2006/main">
+            <a:off x="7753350" y="5288280"/>
             <a:ext cx="3905250" cy="194310"/>
           </a:xfrm>
           <a:prstGeom xmlns:a="http://schemas.openxmlformats.org/drawingml/2006/main" prst="rect">
@@ -24815,18 +25095,18 @@
           <p:cNvPr id="40" name="bullet-detail-用户级覆盖">
             <a:extLst xmlns:a="http://schemas.openxmlformats.org/drawingml/2006/main">
               <a:ext uri="{FF2B5EF4-FFF2-40B4-BE49-F238E27FC236}">
-                <a16:creationId xmlns:a16="http://schemas.microsoft.com/office/drawing/2014/main" id="{DD86573A-F912-46EE-808E-E400FCD7B289}"/>
-              </a:ext>
-            </a:extLst>
-          </p:cNvPr>
-          <p:cNvSpPr>
-            <a:spLocks xmlns:a="http://schemas.openxmlformats.org/drawingml/2006/main" noGrp="1"/>
-          </p:cNvSpPr>
-          <p:nvPr/>
-        </p:nvSpPr>
-        <p:spPr>
-          <a:xfrm xmlns:a="http://schemas.openxmlformats.org/drawingml/2006/main">
-            <a:off x="7753350" y="5086350"/>
+                <a16:creationId xmlns:a16="http://schemas.microsoft.com/office/drawing/2014/main" id="{95909582-D991-47A6-8010-03373B9497B2}"/>
+              </a:ext>
+            </a:extLst>
+          </p:cNvPr>
+          <p:cNvSpPr>
+            <a:spLocks xmlns:a="http://schemas.openxmlformats.org/drawingml/2006/main" noGrp="1"/>
+          </p:cNvSpPr>
+          <p:nvPr/>
+        </p:nvSpPr>
+        <p:spPr>
+          <a:xfrm xmlns:a="http://schemas.openxmlformats.org/drawingml/2006/main">
+            <a:off x="7753350" y="5520690"/>
             <a:ext cx="3905250" cy="342900"/>
           </a:xfrm>
           <a:prstGeom xmlns:a="http://schemas.openxmlformats.org/drawingml/2006/main" prst="rect">
@@ -24866,18 +25146,18 @@
           <p:cNvPr id="41" name="knowledge-callout-lite">
             <a:extLst xmlns:a="http://schemas.openxmlformats.org/drawingml/2006/main">
               <a:ext uri="{FF2B5EF4-FFF2-40B4-BE49-F238E27FC236}">
-                <a16:creationId xmlns:a16="http://schemas.microsoft.com/office/drawing/2014/main" id="{CCD4ABF8-C394-41AA-B4B9-E3C097F09950}"/>
-              </a:ext>
-            </a:extLst>
-          </p:cNvPr>
-          <p:cNvSpPr>
-            <a:spLocks xmlns:a="http://schemas.openxmlformats.org/drawingml/2006/main" noGrp="1"/>
-          </p:cNvSpPr>
-          <p:nvPr/>
-        </p:nvSpPr>
-        <p:spPr>
-          <a:xfrm xmlns:a="http://schemas.openxmlformats.org/drawingml/2006/main">
-            <a:off x="7562850" y="5543550"/>
+                <a16:creationId xmlns:a16="http://schemas.microsoft.com/office/drawing/2014/main" id="{E1A57A3E-1B97-4168-B1F9-EC6855DF40B4}"/>
+              </a:ext>
+            </a:extLst>
+          </p:cNvPr>
+          <p:cNvSpPr>
+            <a:spLocks xmlns:a="http://schemas.openxmlformats.org/drawingml/2006/main" noGrp="1"/>
+          </p:cNvSpPr>
+          <p:nvPr/>
+        </p:nvSpPr>
+        <p:spPr>
+          <a:xfrm xmlns:a="http://schemas.openxmlformats.org/drawingml/2006/main">
+            <a:off x="7562850" y="5977890"/>
             <a:ext cx="3619500" cy="342900"/>
           </a:xfrm>
           <a:prstGeom xmlns:a="http://schemas.openxmlformats.org/drawingml/2006/main" prst="rect">
@@ -24915,7 +25195,7 @@
     </p:spTree>
     <p:extLst>
       <p:ext uri="{BB962C8B-B14F-4D97-AF65-F5344CB8AC3E}">
-        <p14:creationId xmlns:p14="http://schemas.microsoft.com/office/powerpoint/2010/main" val="384474158"/>
+        <p14:creationId xmlns:p14="http://schemas.microsoft.com/office/powerpoint/2010/main" val="841056157"/>
       </p:ext>
     </p:extLst>
   </p:cSld>
@@ -24946,7 +25226,7 @@
           <p:cNvPr id="1" name="header-kicker-项目演示-推荐现场操作顺序">
             <a:extLst xmlns:a="http://schemas.openxmlformats.org/drawingml/2006/main">
               <a:ext uri="{FF2B5EF4-FFF2-40B4-BE49-F238E27FC236}">
-                <a16:creationId xmlns:a16="http://schemas.microsoft.com/office/drawing/2014/main" id="{76E5A43E-0C15-47E9-8486-7AD38AB89330}"/>
+                <a16:creationId xmlns:a16="http://schemas.microsoft.com/office/drawing/2014/main" id="{5B87CE66-D3AE-4367-B540-0F2EF0546D48}"/>
               </a:ext>
             </a:extLst>
           </p:cNvPr>
@@ -24997,7 +25277,7 @@
           <p:cNvPr id="2" name="header-title-项目演示-推荐现场操作顺序">
             <a:extLst xmlns:a="http://schemas.openxmlformats.org/drawingml/2006/main">
               <a:ext uri="{FF2B5EF4-FFF2-40B4-BE49-F238E27FC236}">
-                <a16:creationId xmlns:a16="http://schemas.microsoft.com/office/drawing/2014/main" id="{D420C17D-5E78-4192-8B57-FD6C4A1EFF70}"/>
+                <a16:creationId xmlns:a16="http://schemas.microsoft.com/office/drawing/2014/main" id="{A54A9722-237A-4704-85BF-D7C00E9D557D}"/>
               </a:ext>
             </a:extLst>
           </p:cNvPr>
@@ -25048,7 +25328,7 @@
           <p:cNvPr id="3" name="header-subtitle-项目演示-推荐现场操作顺序">
             <a:extLst xmlns:a="http://schemas.openxmlformats.org/drawingml/2006/main">
               <a:ext uri="{FF2B5EF4-FFF2-40B4-BE49-F238E27FC236}">
-                <a16:creationId xmlns:a16="http://schemas.microsoft.com/office/drawing/2014/main" id="{D13F3CAB-A0B6-4C7F-B034-98B4FA0556F3}"/>
+                <a16:creationId xmlns:a16="http://schemas.microsoft.com/office/drawing/2014/main" id="{F19E93BE-71B7-407B-AB09-E0488F6A65AB}"/>
               </a:ext>
             </a:extLst>
           </p:cNvPr>
@@ -25099,7 +25379,7 @@
           <p:cNvPr id="4" name="heading-underline">
             <a:extLst xmlns:a="http://schemas.openxmlformats.org/drawingml/2006/main">
               <a:ext uri="{FF2B5EF4-FFF2-40B4-BE49-F238E27FC236}">
-                <a16:creationId xmlns:a16="http://schemas.microsoft.com/office/drawing/2014/main" id="{0F81FAD4-9B11-4A7A-B122-56665910216A}"/>
+                <a16:creationId xmlns:a16="http://schemas.microsoft.com/office/drawing/2014/main" id="{B0CABCA6-395A-444B-820C-3F6E0F631789}"/>
               </a:ext>
             </a:extLst>
           </p:cNvPr>
@@ -25136,7 +25416,7 @@
           <p:cNvPr id="5" name="demo-statement">
             <a:extLst xmlns:a="http://schemas.openxmlformats.org/drawingml/2006/main">
               <a:ext uri="{FF2B5EF4-FFF2-40B4-BE49-F238E27FC236}">
-                <a16:creationId xmlns:a16="http://schemas.microsoft.com/office/drawing/2014/main" id="{32477449-235E-41BE-A252-79D890F07B39}"/>
+                <a16:creationId xmlns:a16="http://schemas.microsoft.com/office/drawing/2014/main" id="{7B656020-89C6-4165-AB49-DA268C12CC3E}"/>
               </a:ext>
             </a:extLst>
           </p:cNvPr>
@@ -25187,7 +25467,7 @@
           <p:cNvPr id="6" name="bullet-dot-1-dashboard">
             <a:extLst xmlns:a="http://schemas.openxmlformats.org/drawingml/2006/main">
               <a:ext uri="{FF2B5EF4-FFF2-40B4-BE49-F238E27FC236}">
-                <a16:creationId xmlns:a16="http://schemas.microsoft.com/office/drawing/2014/main" id="{324AFDA1-2BF2-4D2A-BD52-E6BD094B99B0}"/>
+                <a16:creationId xmlns:a16="http://schemas.microsoft.com/office/drawing/2014/main" id="{27E1FF1A-E5D6-4477-9407-D05D69F61493}"/>
               </a:ext>
             </a:extLst>
           </p:cNvPr>
@@ -25218,7 +25498,7 @@
           <p:cNvPr id="7" name="bullet-title-1-dashboard">
             <a:extLst xmlns:a="http://schemas.openxmlformats.org/drawingml/2006/main">
               <a:ext uri="{FF2B5EF4-FFF2-40B4-BE49-F238E27FC236}">
-                <a16:creationId xmlns:a16="http://schemas.microsoft.com/office/drawing/2014/main" id="{FDE0A30B-690D-4D0A-B4C6-911E7A84C9E4}"/>
+                <a16:creationId xmlns:a16="http://schemas.microsoft.com/office/drawing/2014/main" id="{549C5F7D-4B81-4C4E-A562-9A90239CF5D7}"/>
               </a:ext>
             </a:extLst>
           </p:cNvPr>
@@ -25269,7 +25549,7 @@
           <p:cNvPr id="8" name="bullet-detail-1-dashboard">
             <a:extLst xmlns:a="http://schemas.openxmlformats.org/drawingml/2006/main">
               <a:ext uri="{FF2B5EF4-FFF2-40B4-BE49-F238E27FC236}">
-                <a16:creationId xmlns:a16="http://schemas.microsoft.com/office/drawing/2014/main" id="{5F82F188-5DCE-4258-81A7-947196651B61}"/>
+                <a16:creationId xmlns:a16="http://schemas.microsoft.com/office/drawing/2014/main" id="{D40E4394-6E4F-4246-ACC7-B2A2F5CCADA9}"/>
               </a:ext>
             </a:extLst>
           </p:cNvPr>
@@ -25320,7 +25600,7 @@
           <p:cNvPr id="9" name="bullet-dot-2-项目管理">
             <a:extLst xmlns:a="http://schemas.openxmlformats.org/drawingml/2006/main">
               <a:ext uri="{FF2B5EF4-FFF2-40B4-BE49-F238E27FC236}">
-                <a16:creationId xmlns:a16="http://schemas.microsoft.com/office/drawing/2014/main" id="{5134F58C-E087-4538-B0C3-81478C756D45}"/>
+                <a16:creationId xmlns:a16="http://schemas.microsoft.com/office/drawing/2014/main" id="{C6A198D5-8224-4F2C-94DD-3553EC164A24}"/>
               </a:ext>
             </a:extLst>
           </p:cNvPr>
@@ -25351,7 +25631,7 @@
           <p:cNvPr id="10" name="bullet-title-2-项目管理">
             <a:extLst xmlns:a="http://schemas.openxmlformats.org/drawingml/2006/main">
               <a:ext uri="{FF2B5EF4-FFF2-40B4-BE49-F238E27FC236}">
-                <a16:creationId xmlns:a16="http://schemas.microsoft.com/office/drawing/2014/main" id="{3676C32B-6350-4F0E-9FF4-2AACE123ADCA}"/>
+                <a16:creationId xmlns:a16="http://schemas.microsoft.com/office/drawing/2014/main" id="{89D53277-0969-44AD-A3D3-FEC614296B78}"/>
               </a:ext>
             </a:extLst>
           </p:cNvPr>
@@ -25402,7 +25682,7 @@
           <p:cNvPr id="11" name="bullet-detail-2-项目管理">
             <a:extLst xmlns:a="http://schemas.openxmlformats.org/drawingml/2006/main">
               <a:ext uri="{FF2B5EF4-FFF2-40B4-BE49-F238E27FC236}">
-                <a16:creationId xmlns:a16="http://schemas.microsoft.com/office/drawing/2014/main" id="{83644267-495C-478B-9ED5-1F9789C91307}"/>
+                <a16:creationId xmlns:a16="http://schemas.microsoft.com/office/drawing/2014/main" id="{EC712AD4-B5C4-4E53-9209-F2A480820976}"/>
               </a:ext>
             </a:extLst>
           </p:cNvPr>
@@ -25453,7 +25733,7 @@
           <p:cNvPr id="12" name="bullet-dot-3-agent-审计">
             <a:extLst xmlns:a="http://schemas.openxmlformats.org/drawingml/2006/main">
               <a:ext uri="{FF2B5EF4-FFF2-40B4-BE49-F238E27FC236}">
-                <a16:creationId xmlns:a16="http://schemas.microsoft.com/office/drawing/2014/main" id="{C97DC4A8-CCA2-4FBB-AC5E-E4C14FA807BA}"/>
+                <a16:creationId xmlns:a16="http://schemas.microsoft.com/office/drawing/2014/main" id="{553D2CB9-3E62-4045-AEE8-F19D56935049}"/>
               </a:ext>
             </a:extLst>
           </p:cNvPr>
@@ -25484,7 +25764,7 @@
           <p:cNvPr id="13" name="bullet-title-3-agent-审计">
             <a:extLst xmlns:a="http://schemas.openxmlformats.org/drawingml/2006/main">
               <a:ext uri="{FF2B5EF4-FFF2-40B4-BE49-F238E27FC236}">
-                <a16:creationId xmlns:a16="http://schemas.microsoft.com/office/drawing/2014/main" id="{B24AE097-63FE-4D35-84A4-81C50ED0EBFD}"/>
+                <a16:creationId xmlns:a16="http://schemas.microsoft.com/office/drawing/2014/main" id="{DFC6BD9D-9A13-4119-9963-6D8F9E785004}"/>
               </a:ext>
             </a:extLst>
           </p:cNvPr>
@@ -25535,7 +25815,7 @@
           <p:cNvPr id="14" name="bullet-detail-3-agent-审计">
             <a:extLst xmlns:a="http://schemas.openxmlformats.org/drawingml/2006/main">
               <a:ext uri="{FF2B5EF4-FFF2-40B4-BE49-F238E27FC236}">
-                <a16:creationId xmlns:a16="http://schemas.microsoft.com/office/drawing/2014/main" id="{2D37537B-3BFF-4C0A-A727-034E52506070}"/>
+                <a16:creationId xmlns:a16="http://schemas.microsoft.com/office/drawing/2014/main" id="{4803FAAD-A4D5-45B9-B238-D654297F4293}"/>
               </a:ext>
             </a:extLst>
           </p:cNvPr>
@@ -25547,7 +25827,7 @@
         <p:spPr>
           <a:xfrm xmlns:a="http://schemas.openxmlformats.org/drawingml/2006/main">
             <a:off x="723900" y="3790950"/>
-            <a:ext cx="3429000" cy="171450"/>
+            <a:ext cx="3429000" cy="342900"/>
           </a:xfrm>
           <a:prstGeom xmlns:a="http://schemas.openxmlformats.org/drawingml/2006/main" prst="rect">
             <a:avLst/>
@@ -25586,18 +25866,18 @@
           <p:cNvPr id="15" name="bullet-dot-4-报告页">
             <a:extLst xmlns:a="http://schemas.openxmlformats.org/drawingml/2006/main">
               <a:ext uri="{FF2B5EF4-FFF2-40B4-BE49-F238E27FC236}">
-                <a16:creationId xmlns:a16="http://schemas.microsoft.com/office/drawing/2014/main" id="{3DCBF066-1787-46F7-BA7A-125C1BF362E0}"/>
-              </a:ext>
-            </a:extLst>
-          </p:cNvPr>
-          <p:cNvSpPr>
-            <a:spLocks xmlns:a="http://schemas.openxmlformats.org/drawingml/2006/main" noGrp="1"/>
-          </p:cNvSpPr>
-          <p:nvPr/>
-        </p:nvSpPr>
-        <p:spPr>
-          <a:xfrm xmlns:a="http://schemas.openxmlformats.org/drawingml/2006/main">
-            <a:off x="533400" y="4095750"/>
+                <a16:creationId xmlns:a16="http://schemas.microsoft.com/office/drawing/2014/main" id="{0BB5BB79-44FB-4A3A-BF13-743BF4577EE1}"/>
+              </a:ext>
+            </a:extLst>
+          </p:cNvPr>
+          <p:cNvSpPr>
+            <a:spLocks xmlns:a="http://schemas.openxmlformats.org/drawingml/2006/main" noGrp="1"/>
+          </p:cNvSpPr>
+          <p:nvPr/>
+        </p:nvSpPr>
+        <p:spPr>
+          <a:xfrm xmlns:a="http://schemas.openxmlformats.org/drawingml/2006/main">
+            <a:off x="533400" y="4267200"/>
             <a:ext cx="76200" cy="76200"/>
           </a:xfrm>
           <a:prstGeom xmlns:a="http://schemas.openxmlformats.org/drawingml/2006/main" prst="ellipse">
@@ -25617,18 +25897,18 @@
           <p:cNvPr id="16" name="bullet-title-4-报告页">
             <a:extLst xmlns:a="http://schemas.openxmlformats.org/drawingml/2006/main">
               <a:ext uri="{FF2B5EF4-FFF2-40B4-BE49-F238E27FC236}">
-                <a16:creationId xmlns:a16="http://schemas.microsoft.com/office/drawing/2014/main" id="{394D479A-23BF-4EA3-8CF7-3D9E8223ED24}"/>
-              </a:ext>
-            </a:extLst>
-          </p:cNvPr>
-          <p:cNvSpPr>
-            <a:spLocks xmlns:a="http://schemas.openxmlformats.org/drawingml/2006/main" noGrp="1"/>
-          </p:cNvSpPr>
-          <p:nvPr/>
-        </p:nvSpPr>
-        <p:spPr>
-          <a:xfrm xmlns:a="http://schemas.openxmlformats.org/drawingml/2006/main">
-            <a:off x="723900" y="4095750"/>
+                <a16:creationId xmlns:a16="http://schemas.microsoft.com/office/drawing/2014/main" id="{F91E7A27-0799-4997-9A3F-4E87E151A941}"/>
+              </a:ext>
+            </a:extLst>
+          </p:cNvPr>
+          <p:cNvSpPr>
+            <a:spLocks xmlns:a="http://schemas.openxmlformats.org/drawingml/2006/main" noGrp="1"/>
+          </p:cNvSpPr>
+          <p:nvPr/>
+        </p:nvSpPr>
+        <p:spPr>
+          <a:xfrm xmlns:a="http://schemas.openxmlformats.org/drawingml/2006/main">
+            <a:off x="723900" y="4267200"/>
             <a:ext cx="3429000" cy="194310"/>
           </a:xfrm>
           <a:prstGeom xmlns:a="http://schemas.openxmlformats.org/drawingml/2006/main" prst="rect">
@@ -25668,18 +25948,18 @@
           <p:cNvPr id="17" name="bullet-detail-4-报告页">
             <a:extLst xmlns:a="http://schemas.openxmlformats.org/drawingml/2006/main">
               <a:ext uri="{FF2B5EF4-FFF2-40B4-BE49-F238E27FC236}">
-                <a16:creationId xmlns:a16="http://schemas.microsoft.com/office/drawing/2014/main" id="{C6BE118B-2E9D-4798-892F-508E3FD6FFCB}"/>
-              </a:ext>
-            </a:extLst>
-          </p:cNvPr>
-          <p:cNvSpPr>
-            <a:spLocks xmlns:a="http://schemas.openxmlformats.org/drawingml/2006/main" noGrp="1"/>
-          </p:cNvSpPr>
-          <p:nvPr/>
-        </p:nvSpPr>
-        <p:spPr>
-          <a:xfrm xmlns:a="http://schemas.openxmlformats.org/drawingml/2006/main">
-            <a:off x="723900" y="4328160"/>
+                <a16:creationId xmlns:a16="http://schemas.microsoft.com/office/drawing/2014/main" id="{9065ACBD-0252-4176-AB4A-1012EF40652E}"/>
+              </a:ext>
+            </a:extLst>
+          </p:cNvPr>
+          <p:cNvSpPr>
+            <a:spLocks xmlns:a="http://schemas.openxmlformats.org/drawingml/2006/main" noGrp="1"/>
+          </p:cNvSpPr>
+          <p:nvPr/>
+        </p:nvSpPr>
+        <p:spPr>
+          <a:xfrm xmlns:a="http://schemas.openxmlformats.org/drawingml/2006/main">
+            <a:off x="723900" y="4499610"/>
             <a:ext cx="3429000" cy="342900"/>
           </a:xfrm>
           <a:prstGeom xmlns:a="http://schemas.openxmlformats.org/drawingml/2006/main" prst="rect">
@@ -25719,18 +25999,18 @@
           <p:cNvPr id="18" name="bullet-dot-5-截图兜底">
             <a:extLst xmlns:a="http://schemas.openxmlformats.org/drawingml/2006/main">
               <a:ext uri="{FF2B5EF4-FFF2-40B4-BE49-F238E27FC236}">
-                <a16:creationId xmlns:a16="http://schemas.microsoft.com/office/drawing/2014/main" id="{21F01EFE-D425-4F5B-920F-B1097153705A}"/>
-              </a:ext>
-            </a:extLst>
-          </p:cNvPr>
-          <p:cNvSpPr>
-            <a:spLocks xmlns:a="http://schemas.openxmlformats.org/drawingml/2006/main" noGrp="1"/>
-          </p:cNvSpPr>
-          <p:nvPr/>
-        </p:nvSpPr>
-        <p:spPr>
-          <a:xfrm xmlns:a="http://schemas.openxmlformats.org/drawingml/2006/main">
-            <a:off x="533400" y="4804410"/>
+                <a16:creationId xmlns:a16="http://schemas.microsoft.com/office/drawing/2014/main" id="{A3D7CD20-F66C-49C2-8F49-FD035E7C0B71}"/>
+              </a:ext>
+            </a:extLst>
+          </p:cNvPr>
+          <p:cNvSpPr>
+            <a:spLocks xmlns:a="http://schemas.openxmlformats.org/drawingml/2006/main" noGrp="1"/>
+          </p:cNvSpPr>
+          <p:nvPr/>
+        </p:nvSpPr>
+        <p:spPr>
+          <a:xfrm xmlns:a="http://schemas.openxmlformats.org/drawingml/2006/main">
+            <a:off x="533400" y="4975860"/>
             <a:ext cx="76200" cy="76200"/>
           </a:xfrm>
           <a:prstGeom xmlns:a="http://schemas.openxmlformats.org/drawingml/2006/main" prst="ellipse">
@@ -25750,18 +26030,18 @@
           <p:cNvPr id="19" name="bullet-title-5-截图兜底">
             <a:extLst xmlns:a="http://schemas.openxmlformats.org/drawingml/2006/main">
               <a:ext uri="{FF2B5EF4-FFF2-40B4-BE49-F238E27FC236}">
-                <a16:creationId xmlns:a16="http://schemas.microsoft.com/office/drawing/2014/main" id="{B7D9821B-9312-48F4-9136-EEB58DDBBDD7}"/>
-              </a:ext>
-            </a:extLst>
-          </p:cNvPr>
-          <p:cNvSpPr>
-            <a:spLocks xmlns:a="http://schemas.openxmlformats.org/drawingml/2006/main" noGrp="1"/>
-          </p:cNvSpPr>
-          <p:nvPr/>
-        </p:nvSpPr>
-        <p:spPr>
-          <a:xfrm xmlns:a="http://schemas.openxmlformats.org/drawingml/2006/main">
-            <a:off x="723900" y="4804410"/>
+                <a16:creationId xmlns:a16="http://schemas.microsoft.com/office/drawing/2014/main" id="{B0F1AC7E-AE0E-4752-BF97-EBCDDA907D6B}"/>
+              </a:ext>
+            </a:extLst>
+          </p:cNvPr>
+          <p:cNvSpPr>
+            <a:spLocks xmlns:a="http://schemas.openxmlformats.org/drawingml/2006/main" noGrp="1"/>
+          </p:cNvSpPr>
+          <p:nvPr/>
+        </p:nvSpPr>
+        <p:spPr>
+          <a:xfrm xmlns:a="http://schemas.openxmlformats.org/drawingml/2006/main">
+            <a:off x="723900" y="4975860"/>
             <a:ext cx="3429000" cy="194310"/>
           </a:xfrm>
           <a:prstGeom xmlns:a="http://schemas.openxmlformats.org/drawingml/2006/main" prst="rect">
@@ -25801,19 +26081,19 @@
           <p:cNvPr id="20" name="bullet-detail-5-截图兜底">
             <a:extLst xmlns:a="http://schemas.openxmlformats.org/drawingml/2006/main">
               <a:ext uri="{FF2B5EF4-FFF2-40B4-BE49-F238E27FC236}">
-                <a16:creationId xmlns:a16="http://schemas.microsoft.com/office/drawing/2014/main" id="{05530F8C-6F1D-4719-A888-6E52F8204A38}"/>
-              </a:ext>
-            </a:extLst>
-          </p:cNvPr>
-          <p:cNvSpPr>
-            <a:spLocks xmlns:a="http://schemas.openxmlformats.org/drawingml/2006/main" noGrp="1"/>
-          </p:cNvSpPr>
-          <p:nvPr/>
-        </p:nvSpPr>
-        <p:spPr>
-          <a:xfrm xmlns:a="http://schemas.openxmlformats.org/drawingml/2006/main">
-            <a:off x="723900" y="5036820"/>
-            <a:ext cx="3429000" cy="171450"/>
+                <a16:creationId xmlns:a16="http://schemas.microsoft.com/office/drawing/2014/main" id="{0C2E508F-16B1-42B1-AE19-588B9B2A2352}"/>
+              </a:ext>
+            </a:extLst>
+          </p:cNvPr>
+          <p:cNvSpPr>
+            <a:spLocks xmlns:a="http://schemas.openxmlformats.org/drawingml/2006/main" noGrp="1"/>
+          </p:cNvSpPr>
+          <p:nvPr/>
+        </p:nvSpPr>
+        <p:spPr>
+          <a:xfrm xmlns:a="http://schemas.openxmlformats.org/drawingml/2006/main">
+            <a:off x="723900" y="5208270"/>
+            <a:ext cx="3429000" cy="342900"/>
           </a:xfrm>
           <a:prstGeom xmlns:a="http://schemas.openxmlformats.org/drawingml/2006/main" prst="rect">
             <a:avLst/>
@@ -25852,7 +26132,7 @@
           <p:cNvPr id="21" name="demo-image-kicker">
             <a:extLst xmlns:a="http://schemas.openxmlformats.org/drawingml/2006/main">
               <a:ext uri="{FF2B5EF4-FFF2-40B4-BE49-F238E27FC236}">
-                <a16:creationId xmlns:a16="http://schemas.microsoft.com/office/drawing/2014/main" id="{4F24E1D0-068F-40DD-A8B2-EA67B2F78144}"/>
+                <a16:creationId xmlns:a16="http://schemas.microsoft.com/office/drawing/2014/main" id="{363F81DB-5C50-477E-801B-93001927759C}"/>
               </a:ext>
             </a:extLst>
           </p:cNvPr>
@@ -25864,7 +26144,7 @@
         <p:spPr>
           <a:xfrm xmlns:a="http://schemas.openxmlformats.org/drawingml/2006/main">
             <a:off x="4419600" y="1962150"/>
-            <a:ext cx="1174337" cy="160020"/>
+            <a:ext cx="1194149" cy="160020"/>
           </a:xfrm>
           <a:prstGeom xmlns:a="http://schemas.openxmlformats.org/drawingml/2006/main" prst="rect">
             <a:avLst/>
@@ -25903,7 +26183,7 @@
           <p:cNvPr id="22" name="demo-image-panel">
             <a:extLst xmlns:a="http://schemas.openxmlformats.org/drawingml/2006/main">
               <a:ext uri="{FF2B5EF4-FFF2-40B4-BE49-F238E27FC236}">
-                <a16:creationId xmlns:a16="http://schemas.microsoft.com/office/drawing/2014/main" id="{230B5C62-8A46-42CD-86A2-2412142DFB1A}"/>
+                <a16:creationId xmlns:a16="http://schemas.microsoft.com/office/drawing/2014/main" id="{A2B4CADD-CFF1-4715-9DFB-1EEE812231F3}"/>
               </a:ext>
             </a:extLst>
           </p:cNvPr>
@@ -25940,7 +26220,7 @@
           <p:nvPr/>
         </p:nvPicPr>
         <p:blipFill>
-          <a:blip xmlns:r="http://schemas.openxmlformats.org/officeDocument/2006/relationships" xmlns:a="http://schemas.openxmlformats.org/drawingml/2006/main" r:embed="Re868c11103b44e4f"/>
+          <a:blip xmlns:r="http://schemas.openxmlformats.org/officeDocument/2006/relationships" xmlns:a="http://schemas.openxmlformats.org/drawingml/2006/main" r:embed="Rb82052eccdbf404d"/>
           <a:stretch xmlns:a="http://schemas.openxmlformats.org/drawingml/2006/main"/>
         </p:blipFill>
         <p:spPr>
@@ -25956,7 +26236,7 @@
     </p:spTree>
     <p:extLst>
       <p:ext uri="{BB962C8B-B14F-4D97-AF65-F5344CB8AC3E}">
-        <p14:creationId xmlns:p14="http://schemas.microsoft.com/office/powerpoint/2010/main" val="773282081"/>
+        <p14:creationId xmlns:p14="http://schemas.microsoft.com/office/powerpoint/2010/main" val="155131566"/>
       </p:ext>
     </p:extLst>
   </p:cSld>
